--- a/RestoKZ_Presentation.pptx
+++ b/RestoKZ_Presentation.pptx
@@ -17,6 +17,9 @@
     <p:sldId id="265" r:id="rId16"/>
     <p:sldId id="266" r:id="rId17"/>
     <p:sldId id="267" r:id="rId18"/>
+    <p:sldId id="268" r:id="rId19"/>
+    <p:sldId id="269" r:id="rId20"/>
+    <p:sldId id="270" r:id="rId21"/>
   </p:sldIdLst>
   <p:sldSz cx="12191695" cy="6858000" type="screen4x3"/>
   <p:notesSz cx="6858000" cy="9144000"/>
@@ -3224,7 +3227,7 @@
               <a:spcBef>
                 <a:spcPts val="1200"/>
               </a:spcBef>
-              <a:defRPr sz="3000" b="1">
+              <a:defRPr sz="2900" b="1">
                 <a:solidFill>
                   <a:srgbClr val="F4F2EE"/>
                 </a:solidFill>
@@ -3232,7 +3235,7 @@
               </a:defRPr>
             </a:pPr>
             <a:r>
-              <a:t>Цифровая экосистема бронирования и управления посадкой</a:t>
+              <a:t>Цифровая экосистема бронирования и умного управления посадкой</a:t>
             </a:r>
           </a:p>
           <a:p>
@@ -3240,7 +3243,7 @@
               <a:spcBef>
                 <a:spcPts val="1000"/>
               </a:spcBef>
-              <a:defRPr sz="1400">
+              <a:defRPr sz="1350">
                 <a:solidFill>
                   <a:srgbClr val="DFCAAB"/>
                 </a:solidFill>
@@ -3518,7 +3521,7 @@
               </a:defRPr>
             </a:pPr>
             <a:r>
-              <a:t>⚡ Облачная платформа</a:t>
+              <a:t>⚡ Проверено CustDev</a:t>
             </a:r>
           </a:p>
           <a:p>
@@ -3533,7 +3536,7 @@
               </a:defRPr>
             </a:pPr>
             <a:r>
-              <a:t>Мгновенные статусы и пуш-уведомления</a:t>
+              <a:t>20 интервью: рестораторы и гости</a:t>
             </a:r>
           </a:p>
         </p:txBody>
@@ -3768,7 +3771,7 @@
               </a:defRPr>
             </a:pPr>
             <a:r>
-              <a:t>ЦЕННОСТНОЕ ПРЕДЛОЖЕНИЕ</a:t>
+              <a:t>НАСТРОЙКА И КАСТОМИЗАЦИЯ</a:t>
             </a:r>
           </a:p>
         </p:txBody>
@@ -3796,7 +3799,7 @@
           <a:lstStyle/>
           <a:p>
             <a:pPr>
-              <a:defRPr sz="2200" b="1">
+              <a:defRPr sz="2100" b="1">
                 <a:solidFill>
                   <a:srgbClr val="F4F2EE"/>
                 </a:solidFill>
@@ -3804,7 +3807,7 @@
               </a:defRPr>
             </a:pPr>
             <a:r>
-              <a:t>Сравнение: Почему RestoKZ PRO выигрывает рынок?</a:t>
+              <a:t>Конструктор зала и Управление рестораном</a:t>
             </a:r>
           </a:p>
         </p:txBody>
@@ -3817,7 +3820,7 @@
         </p:nvSpPr>
         <p:spPr>
           <a:xfrm>
-            <a:off x="731520" y="1188720"/>
+            <a:off x="731520" y="1170432"/>
             <a:ext cx="10698480" cy="320040"/>
           </a:xfrm>
           <a:prstGeom prst="rect">
@@ -3832,7 +3835,7 @@
           <a:lstStyle/>
           <a:p>
             <a:pPr>
-              <a:defRPr sz="1200">
+              <a:defRPr sz="1150">
                 <a:solidFill>
                   <a:srgbClr val="9CA3AF"/>
                 </a:solidFill>
@@ -3840,7 +3843,596 @@
               </a:defRPr>
             </a:pPr>
             <a:r>
-              <a:t>Сравнение традиционного подхода, сторонних агрегаторов и решения RestoKZ PRO</a:t>
+              <a:t>Полная автономия заведения — добавление точек, настройка столов и блюд за 5 минут</a:t>
+            </a:r>
+          </a:p>
+        </p:txBody>
+      </p:sp>
+      <p:sp>
+        <p:nvSpPr>
+          <p:cNvPr id="6" name="Rounded Rectangle 5"/>
+          <p:cNvSpPr/>
+          <p:nvPr/>
+        </p:nvSpPr>
+        <p:spPr>
+          <a:xfrm>
+            <a:off x="731520" y="1645920"/>
+            <a:ext cx="3474720" cy="4663440"/>
+          </a:xfrm>
+          <a:prstGeom prst="roundRect">
+            <a:avLst/>
+          </a:prstGeom>
+          <a:solidFill>
+            <a:srgbClr val="15171D"/>
+          </a:solidFill>
+          <a:ln w="12700">
+            <a:solidFill>
+              <a:srgbClr val="38BDF8"/>
+            </a:solidFill>
+          </a:ln>
+        </p:spPr>
+        <p:style>
+          <a:lnRef idx="1">
+            <a:schemeClr val="accent1"/>
+          </a:lnRef>
+          <a:fillRef idx="3">
+            <a:schemeClr val="accent1"/>
+          </a:fillRef>
+          <a:effectRef idx="2">
+            <a:schemeClr val="accent1"/>
+          </a:effectRef>
+          <a:fontRef idx="minor">
+            <a:schemeClr val="lt1"/>
+          </a:fontRef>
+        </p:style>
+        <p:txBody>
+          <a:bodyPr rtlCol="0" anchor="ctr"/>
+          <a:lstStyle/>
+          <a:p>
+            <a:pPr algn="ctr"/>
+          </a:p>
+        </p:txBody>
+      </p:sp>
+      <p:sp>
+        <p:nvSpPr>
+          <p:cNvPr id="7" name="TextBox 6"/>
+          <p:cNvSpPr txBox="1"/>
+          <p:nvPr/>
+        </p:nvSpPr>
+        <p:spPr>
+          <a:xfrm>
+            <a:off x="914400" y="1828800"/>
+            <a:ext cx="3108960" cy="4297680"/>
+          </a:xfrm>
+          <a:prstGeom prst="rect">
+            <a:avLst/>
+          </a:prstGeom>
+          <a:noFill/>
+        </p:spPr>
+        <p:txBody>
+          <a:bodyPr wrap="square">
+            <a:spAutoFit/>
+          </a:bodyPr>
+          <a:lstStyle/>
+          <a:p>
+            <a:pPr>
+              <a:defRPr sz="1400" b="1">
+                <a:solidFill>
+                  <a:srgbClr val="38BDF8"/>
+                </a:solidFill>
+              </a:defRPr>
+            </a:pPr>
+            <a:r>
+              <a:t>🏢 Профиль &amp; Соцсети</a:t>
+            </a:r>
+          </a:p>
+          <a:p>
+            <a:pPr>
+              <a:spcBef>
+                <a:spcPts val="800"/>
+              </a:spcBef>
+              <a:defRPr sz="1100">
+                <a:solidFill>
+                  <a:srgbClr val="F4F2EE"/>
+                </a:solidFill>
+              </a:defRPr>
+            </a:pPr>
+            <a:r>
+              <a:t>• Редактирование адреса, телефона и режима</a:t>
+            </a:r>
+          </a:p>
+          <a:p>
+            <a:pPr>
+              <a:spcBef>
+                <a:spcPts val="800"/>
+              </a:spcBef>
+              <a:defRPr sz="1100">
+                <a:solidFill>
+                  <a:srgbClr val="F4F2EE"/>
+                </a:solidFill>
+              </a:defRPr>
+            </a:pPr>
+            <a:r>
+              <a:t>• Прямые ссылки на 2GIS, Instagram, WhatsApp</a:t>
+            </a:r>
+          </a:p>
+          <a:p>
+            <a:pPr>
+              <a:spcBef>
+                <a:spcPts val="800"/>
+              </a:spcBef>
+              <a:defRPr sz="1100">
+                <a:solidFill>
+                  <a:srgbClr val="F4F2EE"/>
+                </a:solidFill>
+              </a:defRPr>
+            </a:pPr>
+            <a:r>
+              <a:t>• Указание среднего чека и концепта кухни</a:t>
+            </a:r>
+          </a:p>
+          <a:p>
+            <a:pPr>
+              <a:spcBef>
+                <a:spcPts val="800"/>
+              </a:spcBef>
+              <a:defRPr sz="1100">
+                <a:solidFill>
+                  <a:srgbClr val="F4F2EE"/>
+                </a:solidFill>
+              </a:defRPr>
+            </a:pPr>
+            <a:r>
+              <a:t>• Регистрация нового филиала в 1 клик</a:t>
+            </a:r>
+          </a:p>
+        </p:txBody>
+      </p:sp>
+      <p:sp>
+        <p:nvSpPr>
+          <p:cNvPr id="8" name="Rounded Rectangle 7"/>
+          <p:cNvSpPr/>
+          <p:nvPr/>
+        </p:nvSpPr>
+        <p:spPr>
+          <a:xfrm>
+            <a:off x="4343400" y="1645920"/>
+            <a:ext cx="3474720" cy="4663440"/>
+          </a:xfrm>
+          <a:prstGeom prst="roundRect">
+            <a:avLst/>
+          </a:prstGeom>
+          <a:solidFill>
+            <a:srgbClr val="15171D"/>
+          </a:solidFill>
+          <a:ln w="12700">
+            <a:solidFill>
+              <a:srgbClr val="C5A880"/>
+            </a:solidFill>
+          </a:ln>
+        </p:spPr>
+        <p:style>
+          <a:lnRef idx="1">
+            <a:schemeClr val="accent1"/>
+          </a:lnRef>
+          <a:fillRef idx="3">
+            <a:schemeClr val="accent1"/>
+          </a:fillRef>
+          <a:effectRef idx="2">
+            <a:schemeClr val="accent1"/>
+          </a:effectRef>
+          <a:fontRef idx="minor">
+            <a:schemeClr val="lt1"/>
+          </a:fontRef>
+        </p:style>
+        <p:txBody>
+          <a:bodyPr rtlCol="0" anchor="ctr"/>
+          <a:lstStyle/>
+          <a:p>
+            <a:pPr algn="ctr"/>
+          </a:p>
+        </p:txBody>
+      </p:sp>
+      <p:sp>
+        <p:nvSpPr>
+          <p:cNvPr id="9" name="TextBox 8"/>
+          <p:cNvSpPr txBox="1"/>
+          <p:nvPr/>
+        </p:nvSpPr>
+        <p:spPr>
+          <a:xfrm>
+            <a:off x="4526280" y="1828800"/>
+            <a:ext cx="3108960" cy="4297680"/>
+          </a:xfrm>
+          <a:prstGeom prst="rect">
+            <a:avLst/>
+          </a:prstGeom>
+          <a:noFill/>
+        </p:spPr>
+        <p:txBody>
+          <a:bodyPr wrap="square">
+            <a:spAutoFit/>
+          </a:bodyPr>
+          <a:lstStyle/>
+          <a:p>
+            <a:pPr>
+              <a:defRPr sz="1400" b="1">
+                <a:solidFill>
+                  <a:srgbClr val="C5A880"/>
+                </a:solidFill>
+              </a:defRPr>
+            </a:pPr>
+            <a:r>
+              <a:t>🍽 Электронное Меню</a:t>
+            </a:r>
+          </a:p>
+          <a:p>
+            <a:pPr>
+              <a:spcBef>
+                <a:spcPts val="800"/>
+              </a:spcBef>
+              <a:defRPr sz="1100">
+                <a:solidFill>
+                  <a:srgbClr val="F4F2EE"/>
+                </a:solidFill>
+              </a:defRPr>
+            </a:pPr>
+            <a:r>
+              <a:t>• Добавление блюд по категориям</a:t>
+            </a:r>
+          </a:p>
+          <a:p>
+            <a:pPr>
+              <a:spcBef>
+                <a:spcPts val="800"/>
+              </a:spcBef>
+              <a:defRPr sz="1100">
+                <a:solidFill>
+                  <a:srgbClr val="F4F2EE"/>
+                </a:solidFill>
+              </a:defRPr>
+            </a:pPr>
+            <a:r>
+              <a:t>• Загрузка фото, граммовки и цен</a:t>
+            </a:r>
+          </a:p>
+          <a:p>
+            <a:pPr>
+              <a:spcBef>
+                <a:spcPts val="800"/>
+              </a:spcBef>
+              <a:defRPr sz="1100">
+                <a:solidFill>
+                  <a:srgbClr val="F4F2EE"/>
+                </a:solidFill>
+              </a:defRPr>
+            </a:pPr>
+            <a:r>
+              <a:t>• Мгновенное скрытие блюд на «стоп-листе»</a:t>
+            </a:r>
+          </a:p>
+          <a:p>
+            <a:pPr>
+              <a:spcBef>
+                <a:spcPts val="800"/>
+              </a:spcBef>
+              <a:defRPr sz="1100">
+                <a:solidFill>
+                  <a:srgbClr val="F4F2EE"/>
+                </a:solidFill>
+              </a:defRPr>
+            </a:pPr>
+            <a:r>
+              <a:t>• Синхронизация меню с витриной гостя</a:t>
+            </a:r>
+          </a:p>
+        </p:txBody>
+      </p:sp>
+      <p:sp>
+        <p:nvSpPr>
+          <p:cNvPr id="10" name="Rounded Rectangle 9"/>
+          <p:cNvSpPr/>
+          <p:nvPr/>
+        </p:nvSpPr>
+        <p:spPr>
+          <a:xfrm>
+            <a:off x="7955280" y="1645920"/>
+            <a:ext cx="3474720" cy="4663440"/>
+          </a:xfrm>
+          <a:prstGeom prst="roundRect">
+            <a:avLst/>
+          </a:prstGeom>
+          <a:solidFill>
+            <a:srgbClr val="15171D"/>
+          </a:solidFill>
+          <a:ln w="12700">
+            <a:solidFill>
+              <a:srgbClr val="34D399"/>
+            </a:solidFill>
+          </a:ln>
+        </p:spPr>
+        <p:style>
+          <a:lnRef idx="1">
+            <a:schemeClr val="accent1"/>
+          </a:lnRef>
+          <a:fillRef idx="3">
+            <a:schemeClr val="accent1"/>
+          </a:fillRef>
+          <a:effectRef idx="2">
+            <a:schemeClr val="accent1"/>
+          </a:effectRef>
+          <a:fontRef idx="minor">
+            <a:schemeClr val="lt1"/>
+          </a:fontRef>
+        </p:style>
+        <p:txBody>
+          <a:bodyPr rtlCol="0" anchor="ctr"/>
+          <a:lstStyle/>
+          <a:p>
+            <a:pPr algn="ctr"/>
+          </a:p>
+        </p:txBody>
+      </p:sp>
+      <p:sp>
+        <p:nvSpPr>
+          <p:cNvPr id="11" name="TextBox 10"/>
+          <p:cNvSpPr txBox="1"/>
+          <p:nvPr/>
+        </p:nvSpPr>
+        <p:spPr>
+          <a:xfrm>
+            <a:off x="8138160" y="1828800"/>
+            <a:ext cx="3108960" cy="4297680"/>
+          </a:xfrm>
+          <a:prstGeom prst="rect">
+            <a:avLst/>
+          </a:prstGeom>
+          <a:noFill/>
+        </p:spPr>
+        <p:txBody>
+          <a:bodyPr wrap="square">
+            <a:spAutoFit/>
+          </a:bodyPr>
+          <a:lstStyle/>
+          <a:p>
+            <a:pPr>
+              <a:defRPr sz="1400" b="1">
+                <a:solidFill>
+                  <a:srgbClr val="34D399"/>
+                </a:solidFill>
+              </a:defRPr>
+            </a:pPr>
+            <a:r>
+              <a:t>🪑 Конструктор Столов</a:t>
+            </a:r>
+          </a:p>
+          <a:p>
+            <a:pPr>
+              <a:spcBef>
+                <a:spcPts val="800"/>
+              </a:spcBef>
+              <a:defRPr sz="1100">
+                <a:solidFill>
+                  <a:srgbClr val="F4F2EE"/>
+                </a:solidFill>
+              </a:defRPr>
+            </a:pPr>
+            <a:r>
+              <a:t>• Добавление столов в зал с номерами</a:t>
+            </a:r>
+          </a:p>
+          <a:p>
+            <a:pPr>
+              <a:spcBef>
+                <a:spcPts val="800"/>
+              </a:spcBef>
+              <a:defRPr sz="1100">
+                <a:solidFill>
+                  <a:srgbClr val="F4F2EE"/>
+                </a:solidFill>
+              </a:defRPr>
+            </a:pPr>
+            <a:r>
+              <a:t>• Вместимость: 2, 4, 6, 8, 10, 12+ персон</a:t>
+            </a:r>
+          </a:p>
+          <a:p>
+            <a:pPr>
+              <a:spcBef>
+                <a:spcPts val="800"/>
+              </a:spcBef>
+              <a:defRPr sz="1100">
+                <a:solidFill>
+                  <a:srgbClr val="F4F2EE"/>
+                </a:solidFill>
+              </a:defRPr>
+            </a:pPr>
+            <a:r>
+              <a:t>• Выбор зоны (У окна, Терраса, VIP, Топчан)</a:t>
+            </a:r>
+          </a:p>
+          <a:p>
+            <a:pPr>
+              <a:spcBef>
+                <a:spcPts val="800"/>
+              </a:spcBef>
+              <a:defRPr sz="1100">
+                <a:solidFill>
+                  <a:srgbClr val="F4F2EE"/>
+                </a:solidFill>
+              </a:defRPr>
+            </a:pPr>
+            <a:r>
+              <a:t>• Описание столика для хостес</a:t>
+            </a:r>
+          </a:p>
+        </p:txBody>
+      </p:sp>
+    </p:spTree>
+  </p:cSld>
+  <p:clrMapOvr>
+    <a:masterClrMapping/>
+  </p:clrMapOvr>
+</p:sld>
+</file>
+
+<file path=ppt/slides/slide11.xml><?xml version="1.0" encoding="utf-8"?>
+<p:sld xmlns:a="http://schemas.openxmlformats.org/drawingml/2006/main" xmlns:p="http://schemas.openxmlformats.org/presentationml/2006/main" xmlns:r="http://schemas.openxmlformats.org/officeDocument/2006/relationships">
+  <p:cSld>
+    <p:spTree>
+      <p:nvGrpSpPr>
+        <p:cNvPr id="1" name=""/>
+        <p:cNvGrpSpPr/>
+        <p:nvPr/>
+      </p:nvGrpSpPr>
+      <p:grpSpPr/>
+      <p:sp>
+        <p:nvSpPr>
+          <p:cNvPr id="2" name="Rectangle 1"/>
+          <p:cNvSpPr/>
+          <p:nvPr/>
+        </p:nvSpPr>
+        <p:spPr>
+          <a:xfrm>
+            <a:off x="0" y="0"/>
+            <a:ext cx="12191695" cy="6858000"/>
+          </a:xfrm>
+          <a:prstGeom prst="rect">
+            <a:avLst/>
+          </a:prstGeom>
+          <a:solidFill>
+            <a:srgbClr val="0E1013"/>
+          </a:solidFill>
+          <a:ln>
+            <a:noFill/>
+          </a:ln>
+        </p:spPr>
+        <p:style>
+          <a:lnRef idx="1">
+            <a:schemeClr val="accent1"/>
+          </a:lnRef>
+          <a:fillRef idx="3">
+            <a:schemeClr val="accent1"/>
+          </a:fillRef>
+          <a:effectRef idx="2">
+            <a:schemeClr val="accent1"/>
+          </a:effectRef>
+          <a:fontRef idx="minor">
+            <a:schemeClr val="lt1"/>
+          </a:fontRef>
+        </p:style>
+        <p:txBody>
+          <a:bodyPr rtlCol="0" anchor="ctr"/>
+          <a:lstStyle/>
+          <a:p>
+            <a:pPr algn="ctr"/>
+          </a:p>
+        </p:txBody>
+      </p:sp>
+      <p:sp>
+        <p:nvSpPr>
+          <p:cNvPr id="3" name="TextBox 2"/>
+          <p:cNvSpPr txBox="1"/>
+          <p:nvPr/>
+        </p:nvSpPr>
+        <p:spPr>
+          <a:xfrm>
+            <a:off x="731520" y="365760"/>
+            <a:ext cx="10698480" cy="320040"/>
+          </a:xfrm>
+          <a:prstGeom prst="rect">
+            <a:avLst/>
+          </a:prstGeom>
+          <a:noFill/>
+        </p:spPr>
+        <p:txBody>
+          <a:bodyPr wrap="square" lIns="0" tIns="0" rIns="0" bIns="0">
+            <a:spAutoFit/>
+          </a:bodyPr>
+          <a:lstStyle/>
+          <a:p>
+            <a:pPr>
+              <a:defRPr sz="1000" b="1">
+                <a:solidFill>
+                  <a:srgbClr val="C5A880"/>
+                </a:solidFill>
+                <a:latin typeface="Segoe UI"/>
+              </a:defRPr>
+            </a:pPr>
+            <a:r>
+              <a:t>КОНКУРЕНТНЫЙ АНАЛИЗ</a:t>
+            </a:r>
+          </a:p>
+        </p:txBody>
+      </p:sp>
+      <p:sp>
+        <p:nvSpPr>
+          <p:cNvPr id="4" name="TextBox 3"/>
+          <p:cNvSpPr txBox="1"/>
+          <p:nvPr/>
+        </p:nvSpPr>
+        <p:spPr>
+          <a:xfrm>
+            <a:off x="731520" y="658368"/>
+            <a:ext cx="10698480" cy="502920"/>
+          </a:xfrm>
+          <a:prstGeom prst="rect">
+            <a:avLst/>
+          </a:prstGeom>
+          <a:noFill/>
+        </p:spPr>
+        <p:txBody>
+          <a:bodyPr wrap="square" lIns="0" tIns="0" rIns="0" bIns="0">
+            <a:spAutoFit/>
+          </a:bodyPr>
+          <a:lstStyle/>
+          <a:p>
+            <a:pPr>
+              <a:defRPr sz="2100" b="1">
+                <a:solidFill>
+                  <a:srgbClr val="F4F2EE"/>
+                </a:solidFill>
+                <a:latin typeface="Georgia"/>
+              </a:defRPr>
+            </a:pPr>
+            <a:r>
+              <a:t>Комплексная матрица: Сравнение 5 ключевых альтернатив</a:t>
+            </a:r>
+          </a:p>
+        </p:txBody>
+      </p:sp>
+      <p:sp>
+        <p:nvSpPr>
+          <p:cNvPr id="5" name="TextBox 4"/>
+          <p:cNvSpPr txBox="1"/>
+          <p:nvPr/>
+        </p:nvSpPr>
+        <p:spPr>
+          <a:xfrm>
+            <a:off x="731520" y="1170432"/>
+            <a:ext cx="10698480" cy="320040"/>
+          </a:xfrm>
+          <a:prstGeom prst="rect">
+            <a:avLst/>
+          </a:prstGeom>
+          <a:noFill/>
+        </p:spPr>
+        <p:txBody>
+          <a:bodyPr wrap="square" lIns="0" tIns="0" rIns="0" bIns="0">
+            <a:spAutoFit/>
+          </a:bodyPr>
+          <a:lstStyle/>
+          <a:p>
+            <a:pPr>
+              <a:defRPr sz="1150">
+                <a:solidFill>
+                  <a:srgbClr val="9CA3AF"/>
+                </a:solidFill>
+                <a:latin typeface="Segoe UI"/>
+              </a:defRPr>
+            </a:pPr>
+            <a:r>
+              <a:t>Прямое сопоставление RestoKZ PRO с существующими решениями на рынке Казахстана по 8 параметрам</a:t>
             </a:r>
           </a:p>
         </p:txBody>
@@ -3855,7 +4447,7 @@
         </p:nvGraphicFramePr>
         <p:xfrm>
           <a:off x="731520" y="1645920"/>
-          <a:ext cx="10725912" cy="4480560"/>
+          <a:ext cx="10725911" cy="4663440"/>
         </p:xfrm>
         <a:graphic>
           <a:graphicData uri="http://schemas.openxmlformats.org/drawingml/2006/table">
@@ -3864,26 +4456,28 @@
                 <a:tableStyleId>{5C22544A-7EE6-4342-B048-85BDC9FD1C3A}</a:tableStyleId>
               </a:tblPr>
               <a:tblGrid>
-                <a:gridCol w="2743200"/>
-                <a:gridCol w="2651760"/>
-                <a:gridCol w="2651760"/>
-                <a:gridCol w="2679192"/>
+                <a:gridCol w="1920240"/>
+                <a:gridCol w="1737360"/>
+                <a:gridCol w="1737360"/>
+                <a:gridCol w="1737360"/>
+                <a:gridCol w="1737360"/>
+                <a:gridCol w="1856231"/>
               </a:tblGrid>
-              <a:tr h="746760">
+              <a:tr h="518160">
                 <a:tc>
                   <a:txBody>
                     <a:bodyPr/>
                     <a:lstStyle/>
                     <a:p>
                       <a:pPr algn="ctr">
-                        <a:defRPr b="1" sz="1200">
+                        <a:defRPr b="1" sz="1050">
                           <a:solidFill>
                             <a:srgbClr val="C5A880"/>
                           </a:solidFill>
                         </a:defRPr>
                       </a:pPr>
                       <a:r>
-                        <a:t>Критерий / Параметр</a:t>
+                        <a:t>Критерий / Решение</a:t>
                       </a:r>
                     </a:p>
                   </a:txBody>
@@ -3899,7 +4493,7 @@
                     <a:lstStyle/>
                     <a:p>
                       <a:pPr algn="ctr">
-                        <a:defRPr b="1" sz="1200">
+                        <a:defRPr b="1" sz="1050">
                           <a:solidFill>
                             <a:srgbClr val="C5A880"/>
                           </a:solidFill>
@@ -3922,14 +4516,14 @@
                     <a:lstStyle/>
                     <a:p>
                       <a:pPr algn="ctr">
-                        <a:defRPr b="1" sz="1200">
+                        <a:defRPr b="1" sz="1050">
                           <a:solidFill>
                             <a:srgbClr val="C5A880"/>
                           </a:solidFill>
                         </a:defRPr>
                       </a:pPr>
                       <a:r>
-                        <a:t>Агрегаторы (2GIS / Restolife)</a:t>
+                        <a:t>2GIS Бронь</a:t>
                       </a:r>
                     </a:p>
                   </a:txBody>
@@ -3945,7 +4539,53 @@
                     <a:lstStyle/>
                     <a:p>
                       <a:pPr algn="ctr">
-                        <a:defRPr b="1" sz="1200">
+                        <a:defRPr b="1" sz="1050">
+                          <a:solidFill>
+                            <a:srgbClr val="C5A880"/>
+                          </a:solidFill>
+                        </a:defRPr>
+                      </a:pPr>
+                      <a:r>
+                        <a:t>Каталоги (Restolife)</a:t>
+                      </a:r>
+                    </a:p>
+                  </a:txBody>
+                  <a:tcPr>
+                    <a:solidFill>
+                      <a:srgbClr val="1C1F26"/>
+                    </a:solidFill>
+                  </a:tcPr>
+                </a:tc>
+                <a:tc>
+                  <a:txBody>
+                    <a:bodyPr/>
+                    <a:lstStyle/>
+                    <a:p>
+                      <a:pPr algn="ctr">
+                        <a:defRPr b="1" sz="1050">
+                          <a:solidFill>
+                            <a:srgbClr val="C5A880"/>
+                          </a:solidFill>
+                        </a:defRPr>
+                      </a:pPr>
+                      <a:r>
+                        <a:t>Тяжелые POS (iiko)</a:t>
+                      </a:r>
+                    </a:p>
+                  </a:txBody>
+                  <a:tcPr>
+                    <a:solidFill>
+                      <a:srgbClr val="1C1F26"/>
+                    </a:solidFill>
+                  </a:tcPr>
+                </a:tc>
+                <a:tc>
+                  <a:txBody>
+                    <a:bodyPr/>
+                    <a:lstStyle/>
+                    <a:p>
+                      <a:pPr algn="ctr">
+                        <a:defRPr b="1" sz="1050">
                           <a:solidFill>
                             <a:srgbClr val="0E1013"/>
                           </a:solidFill>
@@ -3963,21 +4603,21 @@
                   </a:tcPr>
                 </a:tc>
               </a:tr>
-              <a:tr h="746760">
+              <a:tr h="518160">
                 <a:tc>
                   <a:txBody>
                     <a:bodyPr/>
                     <a:lstStyle/>
                     <a:p>
                       <a:pPr>
-                        <a:defRPr sz="1100">
+                        <a:defRPr sz="900" b="1">
                           <a:solidFill>
                             <a:srgbClr val="F4F2EE"/>
                           </a:solidFill>
                         </a:defRPr>
                       </a:pPr>
                       <a:r>
-                        <a:t>Скорость бронирования</a:t>
+                        <a:t>Скорость брони</a:t>
                       </a:r>
                     </a:p>
                   </a:txBody>
@@ -3993,14 +4633,14 @@
                     <a:lstStyle/>
                     <a:p>
                       <a:pPr algn="ctr">
-                        <a:defRPr sz="1100">
+                        <a:defRPr sz="900">
                           <a:solidFill>
                             <a:srgbClr val="F4F2EE"/>
                           </a:solidFill>
                         </a:defRPr>
                       </a:pPr>
                       <a:r>
-                        <a:t>10-25 минут (долгие ответы)</a:t>
+                        <a:t>15–40 мин (ожидание)</a:t>
                       </a:r>
                     </a:p>
                   </a:txBody>
@@ -4016,14 +4656,14 @@
                     <a:lstStyle/>
                     <a:p>
                       <a:pPr algn="ctr">
-                        <a:defRPr sz="1100">
+                        <a:defRPr sz="900">
                           <a:solidFill>
                             <a:srgbClr val="F4F2EE"/>
                           </a:solidFill>
                         </a:defRPr>
                       </a:pPr>
                       <a:r>
-                        <a:t>3-5 минут (сторонний сайт)</a:t>
+                        <a:t>3–5 мин (окно 2GIS)</a:t>
                       </a:r>
                     </a:p>
                   </a:txBody>
@@ -4039,39 +4679,14 @@
                     <a:lstStyle/>
                     <a:p>
                       <a:pPr algn="ctr">
-                        <a:defRPr sz="1100" b="1">
-                          <a:solidFill>
-                            <a:srgbClr val="DFCAAB"/>
-                          </a:solidFill>
-                        </a:defRPr>
-                      </a:pPr>
-                      <a:r>
-                        <a:t>⚡ 30 секунд (внутри Telegram)</a:t>
-                      </a:r>
-                    </a:p>
-                  </a:txBody>
-                  <a:tcPr>
-                    <a:solidFill>
-                      <a:srgbClr val="1C202A"/>
-                    </a:solidFill>
-                  </a:tcPr>
-                </a:tc>
-              </a:tr>
-              <a:tr h="746760">
-                <a:tc>
-                  <a:txBody>
-                    <a:bodyPr/>
-                    <a:lstStyle/>
-                    <a:p>
-                      <a:pPr>
-                        <a:defRPr sz="1100">
+                        <a:defRPr sz="900">
                           <a:solidFill>
                             <a:srgbClr val="F4F2EE"/>
                           </a:solidFill>
                         </a:defRPr>
                       </a:pPr>
                       <a:r>
-                        <a:t>Защита от No-Show (неявки)</a:t>
+                        <a:t>5–10 мин (перезвон)</a:t>
                       </a:r>
                     </a:p>
                   </a:txBody>
@@ -4087,14 +4702,14 @@
                     <a:lstStyle/>
                     <a:p>
                       <a:pPr algn="ctr">
-                        <a:defRPr sz="1100">
+                        <a:defRPr sz="900">
                           <a:solidFill>
                             <a:srgbClr val="F4F2EE"/>
                           </a:solidFill>
                         </a:defRPr>
                       </a:pPr>
                       <a:r>
-                        <a:t>❌ 0% (гости просто не приходят)</a:t>
+                        <a:t>Ручная посадка у стойки</a:t>
                       </a:r>
                     </a:p>
                   </a:txBody>
@@ -4110,14 +4725,39 @@
                     <a:lstStyle/>
                     <a:p>
                       <a:pPr algn="ctr">
-                        <a:defRPr sz="1100">
+                        <a:defRPr sz="900" b="1">
+                          <a:solidFill>
+                            <a:srgbClr val="DFCAAB"/>
+                          </a:solidFill>
+                        </a:defRPr>
+                      </a:pPr>
+                      <a:r>
+                        <a:t>⚡ 30 секунд (в Telegram)</a:t>
+                      </a:r>
+                    </a:p>
+                  </a:txBody>
+                  <a:tcPr>
+                    <a:solidFill>
+                      <a:srgbClr val="1C202A"/>
+                    </a:solidFill>
+                  </a:tcPr>
+                </a:tc>
+              </a:tr>
+              <a:tr h="518160">
+                <a:tc>
+                  <a:txBody>
+                    <a:bodyPr/>
+                    <a:lstStyle/>
+                    <a:p>
+                      <a:pPr>
+                        <a:defRPr sz="900" b="1">
                           <a:solidFill>
                             <a:srgbClr val="F4F2EE"/>
                           </a:solidFill>
                         </a:defRPr>
                       </a:pPr>
                       <a:r>
-                        <a:t>⚠️ Слабая (смс-уведомление)</a:t>
+                        <a:t>Барьер для гостя</a:t>
                       </a:r>
                     </a:p>
                   </a:txBody>
@@ -4133,39 +4773,14 @@
                     <a:lstStyle/>
                     <a:p>
                       <a:pPr algn="ctr">
-                        <a:defRPr sz="1100" b="1">
-                          <a:solidFill>
-                            <a:srgbClr val="DFCAAB"/>
-                          </a:solidFill>
-                        </a:defRPr>
-                      </a:pPr>
-                      <a:r>
-                        <a:t>🛡 Высокая (напоминания + статусы)</a:t>
-                      </a:r>
-                    </a:p>
-                  </a:txBody>
-                  <a:tcPr>
-                    <a:solidFill>
-                      <a:srgbClr val="1C202A"/>
-                    </a:solidFill>
-                  </a:tcPr>
-                </a:tc>
-              </a:tr>
-              <a:tr h="746760">
-                <a:tc>
-                  <a:txBody>
-                    <a:bodyPr/>
-                    <a:lstStyle/>
-                    <a:p>
-                      <a:pPr>
-                        <a:defRPr sz="1100">
+                        <a:defRPr sz="900">
                           <a:solidFill>
                             <a:srgbClr val="F4F2EE"/>
                           </a:solidFill>
                         </a:defRPr>
                       </a:pPr>
                       <a:r>
-                        <a:t>Комиссия за гостей</a:t>
+                        <a:t>Звонок / аудио в чат</a:t>
                       </a:r>
                     </a:p>
                   </a:txBody>
@@ -4181,14 +4796,14 @@
                     <a:lstStyle/>
                     <a:p>
                       <a:pPr algn="ctr">
-                        <a:defRPr sz="1100">
+                        <a:defRPr sz="900">
                           <a:solidFill>
                             <a:srgbClr val="F4F2EE"/>
                           </a:solidFill>
                         </a:defRPr>
                       </a:pPr>
                       <a:r>
-                        <a:t>0 ₸, но скрытые потери от No-Show</a:t>
+                        <a:t>Установка приложения 2GIS</a:t>
                       </a:r>
                     </a:p>
                   </a:txBody>
@@ -4204,14 +4819,14 @@
                     <a:lstStyle/>
                     <a:p>
                       <a:pPr algn="ctr">
-                        <a:defRPr sz="1100">
+                        <a:defRPr sz="900">
                           <a:solidFill>
                             <a:srgbClr val="F4F2EE"/>
                           </a:solidFill>
                         </a:defRPr>
                       </a:pPr>
                       <a:r>
-                        <a:t>💸 10-15% с чека или 500₸/гость</a:t>
+                        <a:t>Переход на сайт, логин</a:t>
                       </a:r>
                     </a:p>
                   </a:txBody>
@@ -4227,39 +4842,14 @@
                     <a:lstStyle/>
                     <a:p>
                       <a:pPr algn="ctr">
-                        <a:defRPr sz="1100" b="1">
-                          <a:solidFill>
-                            <a:srgbClr val="DFCAAB"/>
-                          </a:solidFill>
-                        </a:defRPr>
-                      </a:pPr>
-                      <a:r>
-                        <a:t>✅ 0% (фиксированная подписка)</a:t>
-                      </a:r>
-                    </a:p>
-                  </a:txBody>
-                  <a:tcPr>
-                    <a:solidFill>
-                      <a:srgbClr val="1C202A"/>
-                    </a:solidFill>
-                  </a:tcPr>
-                </a:tc>
-              </a:tr>
-              <a:tr h="746760">
-                <a:tc>
-                  <a:txBody>
-                    <a:bodyPr/>
-                    <a:lstStyle/>
-                    <a:p>
-                      <a:pPr>
-                        <a:defRPr sz="1100">
+                        <a:defRPr sz="900">
                           <a:solidFill>
                             <a:srgbClr val="F4F2EE"/>
                           </a:solidFill>
                         </a:defRPr>
                       </a:pPr>
                       <a:r>
-                        <a:t>Карта зала и шахматка</a:t>
+                        <a:t>Только при личном визите</a:t>
                       </a:r>
                     </a:p>
                   </a:txBody>
@@ -4275,14 +4865,39 @@
                     <a:lstStyle/>
                     <a:p>
                       <a:pPr algn="ctr">
-                        <a:defRPr sz="1100">
+                        <a:defRPr sz="900" b="1">
+                          <a:solidFill>
+                            <a:srgbClr val="DFCAAB"/>
+                          </a:solidFill>
+                        </a:defRPr>
+                      </a:pPr>
+                      <a:r>
+                        <a:t>⚡ 0 (Mini App без смс)</a:t>
+                      </a:r>
+                    </a:p>
+                  </a:txBody>
+                  <a:tcPr>
+                    <a:solidFill>
+                      <a:srgbClr val="1C202A"/>
+                    </a:solidFill>
+                  </a:tcPr>
+                </a:tc>
+              </a:tr>
+              <a:tr h="518160">
+                <a:tc>
+                  <a:txBody>
+                    <a:bodyPr/>
+                    <a:lstStyle/>
+                    <a:p>
+                      <a:pPr>
+                        <a:defRPr sz="900" b="1">
                           <a:solidFill>
                             <a:srgbClr val="F4F2EE"/>
                           </a:solidFill>
                         </a:defRPr>
                       </a:pPr>
                       <a:r>
-                        <a:t>❌ Нет (ручные каракули)</a:t>
+                        <a:t>Защита от No-Show</a:t>
                       </a:r>
                     </a:p>
                   </a:txBody>
@@ -4298,14 +4913,14 @@
                     <a:lstStyle/>
                     <a:p>
                       <a:pPr algn="ctr">
-                        <a:defRPr sz="1100">
+                        <a:defRPr sz="900">
                           <a:solidFill>
                             <a:srgbClr val="F4F2EE"/>
                           </a:solidFill>
                         </a:defRPr>
                       </a:pPr>
                       <a:r>
-                        <a:t>❌ Только список броней</a:t>
+                        <a:t>❌ 0% (нет автоконтроля)</a:t>
                       </a:r>
                     </a:p>
                   </a:txBody>
@@ -4321,39 +4936,14 @@
                     <a:lstStyle/>
                     <a:p>
                       <a:pPr algn="ctr">
-                        <a:defRPr sz="1100" b="1">
-                          <a:solidFill>
-                            <a:srgbClr val="DFCAAB"/>
-                          </a:solidFill>
-                        </a:defRPr>
-                      </a:pPr>
-                      <a:r>
-                        <a:t>🗺 Интерактивная живая карта</a:t>
-                      </a:r>
-                    </a:p>
-                  </a:txBody>
-                  <a:tcPr>
-                    <a:solidFill>
-                      <a:srgbClr val="1C202A"/>
-                    </a:solidFill>
-                  </a:tcPr>
-                </a:tc>
-              </a:tr>
-              <a:tr h="746760">
-                <a:tc>
-                  <a:txBody>
-                    <a:bodyPr/>
-                    <a:lstStyle/>
-                    <a:p>
-                      <a:pPr>
-                        <a:defRPr sz="1100">
+                        <a:defRPr sz="900">
                           <a:solidFill>
                             <a:srgbClr val="F4F2EE"/>
                           </a:solidFill>
                         </a:defRPr>
                       </a:pPr>
                       <a:r>
-                        <a:t>Удобство со смартфона</a:t>
+                        <a:t>⚠️ Слабая (пассивное СМС)</a:t>
                       </a:r>
                     </a:p>
                   </a:txBody>
@@ -4369,14 +4959,14 @@
                     <a:lstStyle/>
                     <a:p>
                       <a:pPr algn="ctr">
-                        <a:defRPr sz="1100">
+                        <a:defRPr sz="900">
                           <a:solidFill>
                             <a:srgbClr val="F4F2EE"/>
                           </a:solidFill>
                         </a:defRPr>
                       </a:pPr>
                       <a:r>
-                        <a:t>❌ Постоянный стресс и переписки</a:t>
+                        <a:t>❌ 0% (нет напоминаний)</a:t>
                       </a:r>
                     </a:p>
                   </a:txBody>
@@ -4392,14 +4982,14 @@
                     <a:lstStyle/>
                     <a:p>
                       <a:pPr algn="ctr">
-                        <a:defRPr sz="1100">
+                        <a:defRPr sz="900">
                           <a:solidFill>
                             <a:srgbClr val="F4F2EE"/>
                           </a:solidFill>
                         </a:defRPr>
                       </a:pPr>
                       <a:r>
-                        <a:t>⚠️ Громоздкий десктопный кабинет</a:t>
+                        <a:t>⚠️ Только статус на кассе</a:t>
                       </a:r>
                     </a:p>
                   </a:txBody>
@@ -4415,14 +5005,714 @@
                     <a:lstStyle/>
                     <a:p>
                       <a:pPr algn="ctr">
-                        <a:defRPr sz="1100" b="1">
+                        <a:defRPr sz="900" b="1">
                           <a:solidFill>
                             <a:srgbClr val="DFCAAB"/>
                           </a:solidFill>
                         </a:defRPr>
                       </a:pPr>
                       <a:r>
-                        <a:t>📱 Легкий мобильный веб-терминал</a:t>
+                        <a:t>🛡 Высокая (пуш + отмена)</a:t>
+                      </a:r>
+                    </a:p>
+                  </a:txBody>
+                  <a:tcPr>
+                    <a:solidFill>
+                      <a:srgbClr val="1C202A"/>
+                    </a:solidFill>
+                  </a:tcPr>
+                </a:tc>
+              </a:tr>
+              <a:tr h="518160">
+                <a:tc>
+                  <a:txBody>
+                    <a:bodyPr/>
+                    <a:lstStyle/>
+                    <a:p>
+                      <a:pPr>
+                        <a:defRPr sz="900" b="1">
+                          <a:solidFill>
+                            <a:srgbClr val="F4F2EE"/>
+                          </a:solidFill>
+                        </a:defRPr>
+                      </a:pPr>
+                      <a:r>
+                        <a:t>Стоимость для точки</a:t>
+                      </a:r>
+                    </a:p>
+                  </a:txBody>
+                  <a:tcPr>
+                    <a:solidFill>
+                      <a:srgbClr val="15171D"/>
+                    </a:solidFill>
+                  </a:tcPr>
+                </a:tc>
+                <a:tc>
+                  <a:txBody>
+                    <a:bodyPr/>
+                    <a:lstStyle/>
+                    <a:p>
+                      <a:pPr algn="ctr">
+                        <a:defRPr sz="900">
+                          <a:solidFill>
+                            <a:srgbClr val="F4F2EE"/>
+                          </a:solidFill>
+                        </a:defRPr>
+                      </a:pPr>
+                      <a:r>
+                        <a:t>0 ₸, но убытки до 450к₸</a:t>
+                      </a:r>
+                    </a:p>
+                  </a:txBody>
+                  <a:tcPr>
+                    <a:solidFill>
+                      <a:srgbClr val="15171D"/>
+                    </a:solidFill>
+                  </a:tcPr>
+                </a:tc>
+                <a:tc>
+                  <a:txBody>
+                    <a:bodyPr/>
+                    <a:lstStyle/>
+                    <a:p>
+                      <a:pPr algn="ctr">
+                        <a:defRPr sz="900">
+                          <a:solidFill>
+                            <a:srgbClr val="F4F2EE"/>
+                          </a:solidFill>
+                        </a:defRPr>
+                      </a:pPr>
+                      <a:r>
+                        <a:t>Пакеты от 80 000 ₸/мес</a:t>
+                      </a:r>
+                    </a:p>
+                  </a:txBody>
+                  <a:tcPr>
+                    <a:solidFill>
+                      <a:srgbClr val="15171D"/>
+                    </a:solidFill>
+                  </a:tcPr>
+                </a:tc>
+                <a:tc>
+                  <a:txBody>
+                    <a:bodyPr/>
+                    <a:lstStyle/>
+                    <a:p>
+                      <a:pPr algn="ctr">
+                        <a:defRPr sz="900">
+                          <a:solidFill>
+                            <a:srgbClr val="F4F2EE"/>
+                          </a:solidFill>
+                        </a:defRPr>
+                      </a:pPr>
+                      <a:r>
+                        <a:t>Комиссия 10-15% с чека</a:t>
+                      </a:r>
+                    </a:p>
+                  </a:txBody>
+                  <a:tcPr>
+                    <a:solidFill>
+                      <a:srgbClr val="15171D"/>
+                    </a:solidFill>
+                  </a:tcPr>
+                </a:tc>
+                <a:tc>
+                  <a:txBody>
+                    <a:bodyPr/>
+                    <a:lstStyle/>
+                    <a:p>
+                      <a:pPr algn="ctr">
+                        <a:defRPr sz="900">
+                          <a:solidFill>
+                            <a:srgbClr val="F4F2EE"/>
+                          </a:solidFill>
+                        </a:defRPr>
+                      </a:pPr>
+                      <a:r>
+                        <a:t>Лицензия от 40к₸ + ПК</a:t>
+                      </a:r>
+                    </a:p>
+                  </a:txBody>
+                  <a:tcPr>
+                    <a:solidFill>
+                      <a:srgbClr val="15171D"/>
+                    </a:solidFill>
+                  </a:tcPr>
+                </a:tc>
+                <a:tc>
+                  <a:txBody>
+                    <a:bodyPr/>
+                    <a:lstStyle/>
+                    <a:p>
+                      <a:pPr algn="ctr">
+                        <a:defRPr sz="900" b="1">
+                          <a:solidFill>
+                            <a:srgbClr val="DFCAAB"/>
+                          </a:solidFill>
+                        </a:defRPr>
+                      </a:pPr>
+                      <a:r>
+                        <a:t>✅ Фиксир. 35–49 тыс ₸</a:t>
+                      </a:r>
+                    </a:p>
+                  </a:txBody>
+                  <a:tcPr>
+                    <a:solidFill>
+                      <a:srgbClr val="1C202A"/>
+                    </a:solidFill>
+                  </a:tcPr>
+                </a:tc>
+              </a:tr>
+              <a:tr h="518160">
+                <a:tc>
+                  <a:txBody>
+                    <a:bodyPr/>
+                    <a:lstStyle/>
+                    <a:p>
+                      <a:pPr>
+                        <a:defRPr sz="900" b="1">
+                          <a:solidFill>
+                            <a:srgbClr val="F4F2EE"/>
+                          </a:solidFill>
+                        </a:defRPr>
+                      </a:pPr>
+                      <a:r>
+                        <a:t>Мобильность хостес</a:t>
+                      </a:r>
+                    </a:p>
+                  </a:txBody>
+                  <a:tcPr>
+                    <a:solidFill>
+                      <a:srgbClr val="15171D"/>
+                    </a:solidFill>
+                  </a:tcPr>
+                </a:tc>
+                <a:tc>
+                  <a:txBody>
+                    <a:bodyPr/>
+                    <a:lstStyle/>
+                    <a:p>
+                      <a:pPr algn="ctr">
+                        <a:defRPr sz="900">
+                          <a:solidFill>
+                            <a:srgbClr val="F4F2EE"/>
+                          </a:solidFill>
+                        </a:defRPr>
+                      </a:pPr>
+                      <a:r>
+                        <a:t>❌ Хаос чатов смартфона</a:t>
+                      </a:r>
+                    </a:p>
+                  </a:txBody>
+                  <a:tcPr>
+                    <a:solidFill>
+                      <a:srgbClr val="15171D"/>
+                    </a:solidFill>
+                  </a:tcPr>
+                </a:tc>
+                <a:tc>
+                  <a:txBody>
+                    <a:bodyPr/>
+                    <a:lstStyle/>
+                    <a:p>
+                      <a:pPr algn="ctr">
+                        <a:defRPr sz="900">
+                          <a:solidFill>
+                            <a:srgbClr val="F4F2EE"/>
+                          </a:solidFill>
+                        </a:defRPr>
+                      </a:pPr>
+                      <a:r>
+                        <a:t>⚠️ Неудобно, десктоп</a:t>
+                      </a:r>
+                    </a:p>
+                  </a:txBody>
+                  <a:tcPr>
+                    <a:solidFill>
+                      <a:srgbClr val="15171D"/>
+                    </a:solidFill>
+                  </a:tcPr>
+                </a:tc>
+                <a:tc>
+                  <a:txBody>
+                    <a:bodyPr/>
+                    <a:lstStyle/>
+                    <a:p>
+                      <a:pPr algn="ctr">
+                        <a:defRPr sz="900">
+                          <a:solidFill>
+                            <a:srgbClr val="F4F2EE"/>
+                          </a:solidFill>
+                        </a:defRPr>
+                      </a:pPr>
+                      <a:r>
+                        <a:t>❌ Нет мобильного софта</a:t>
+                      </a:r>
+                    </a:p>
+                  </a:txBody>
+                  <a:tcPr>
+                    <a:solidFill>
+                      <a:srgbClr val="15171D"/>
+                    </a:solidFill>
+                  </a:tcPr>
+                </a:tc>
+                <a:tc>
+                  <a:txBody>
+                    <a:bodyPr/>
+                    <a:lstStyle/>
+                    <a:p>
+                      <a:pPr algn="ctr">
+                        <a:defRPr sz="900">
+                          <a:solidFill>
+                            <a:srgbClr val="F4F2EE"/>
+                          </a:solidFill>
+                        </a:defRPr>
+                      </a:pPr>
+                      <a:r>
+                        <a:t>❌ Нужен стационарный ПК</a:t>
+                      </a:r>
+                    </a:p>
+                  </a:txBody>
+                  <a:tcPr>
+                    <a:solidFill>
+                      <a:srgbClr val="15171D"/>
+                    </a:solidFill>
+                  </a:tcPr>
+                </a:tc>
+                <a:tc>
+                  <a:txBody>
+                    <a:bodyPr/>
+                    <a:lstStyle/>
+                    <a:p>
+                      <a:pPr algn="ctr">
+                        <a:defRPr sz="900" b="1">
+                          <a:solidFill>
+                            <a:srgbClr val="DFCAAB"/>
+                          </a:solidFill>
+                        </a:defRPr>
+                      </a:pPr>
+                      <a:r>
+                        <a:t>📱 Легкий мобильный PWA</a:t>
+                      </a:r>
+                    </a:p>
+                  </a:txBody>
+                  <a:tcPr>
+                    <a:solidFill>
+                      <a:srgbClr val="1C202A"/>
+                    </a:solidFill>
+                  </a:tcPr>
+                </a:tc>
+              </a:tr>
+              <a:tr h="518160">
+                <a:tc>
+                  <a:txBody>
+                    <a:bodyPr/>
+                    <a:lstStyle/>
+                    <a:p>
+                      <a:pPr>
+                        <a:defRPr sz="900" b="1">
+                          <a:solidFill>
+                            <a:srgbClr val="F4F2EE"/>
+                          </a:solidFill>
+                        </a:defRPr>
+                      </a:pPr>
+                      <a:r>
+                        <a:t>Карта зала / зоны</a:t>
+                      </a:r>
+                    </a:p>
+                  </a:txBody>
+                  <a:tcPr>
+                    <a:solidFill>
+                      <a:srgbClr val="15171D"/>
+                    </a:solidFill>
+                  </a:tcPr>
+                </a:tc>
+                <a:tc>
+                  <a:txBody>
+                    <a:bodyPr/>
+                    <a:lstStyle/>
+                    <a:p>
+                      <a:pPr algn="ctr">
+                        <a:defRPr sz="900">
+                          <a:solidFill>
+                            <a:srgbClr val="F4F2EE"/>
+                          </a:solidFill>
+                        </a:defRPr>
+                      </a:pPr>
+                      <a:r>
+                        <a:t>❌ Каракули в блокноте</a:t>
+                      </a:r>
+                    </a:p>
+                  </a:txBody>
+                  <a:tcPr>
+                    <a:solidFill>
+                      <a:srgbClr val="15171D"/>
+                    </a:solidFill>
+                  </a:tcPr>
+                </a:tc>
+                <a:tc>
+                  <a:txBody>
+                    <a:bodyPr/>
+                    <a:lstStyle/>
+                    <a:p>
+                      <a:pPr algn="ctr">
+                        <a:defRPr sz="900">
+                          <a:solidFill>
+                            <a:srgbClr val="F4F2EE"/>
+                          </a:solidFill>
+                        </a:defRPr>
+                      </a:pPr>
+                      <a:r>
+                        <a:t>❌ Только список текстом</a:t>
+                      </a:r>
+                    </a:p>
+                  </a:txBody>
+                  <a:tcPr>
+                    <a:solidFill>
+                      <a:srgbClr val="15171D"/>
+                    </a:solidFill>
+                  </a:tcPr>
+                </a:tc>
+                <a:tc>
+                  <a:txBody>
+                    <a:bodyPr/>
+                    <a:lstStyle/>
+                    <a:p>
+                      <a:pPr algn="ctr">
+                        <a:defRPr sz="900">
+                          <a:solidFill>
+                            <a:srgbClr val="F4F2EE"/>
+                          </a:solidFill>
+                        </a:defRPr>
+                      </a:pPr>
+                      <a:r>
+                        <a:t>❌ Нет схемы рассадки</a:t>
+                      </a:r>
+                    </a:p>
+                  </a:txBody>
+                  <a:tcPr>
+                    <a:solidFill>
+                      <a:srgbClr val="15171D"/>
+                    </a:solidFill>
+                  </a:tcPr>
+                </a:tc>
+                <a:tc>
+                  <a:txBody>
+                    <a:bodyPr/>
+                    <a:lstStyle/>
+                    <a:p>
+                      <a:pPr algn="ctr">
+                        <a:defRPr sz="900">
+                          <a:solidFill>
+                            <a:srgbClr val="F4F2EE"/>
+                          </a:solidFill>
+                        </a:defRPr>
+                      </a:pPr>
+                      <a:r>
+                        <a:t>✅ Есть, но на ПК кассы</a:t>
+                      </a:r>
+                    </a:p>
+                  </a:txBody>
+                  <a:tcPr>
+                    <a:solidFill>
+                      <a:srgbClr val="15171D"/>
+                    </a:solidFill>
+                  </a:tcPr>
+                </a:tc>
+                <a:tc>
+                  <a:txBody>
+                    <a:bodyPr/>
+                    <a:lstStyle/>
+                    <a:p>
+                      <a:pPr algn="ctr">
+                        <a:defRPr sz="900" b="1">
+                          <a:solidFill>
+                            <a:srgbClr val="DFCAAB"/>
+                          </a:solidFill>
+                        </a:defRPr>
+                      </a:pPr>
+                      <a:r>
+                        <a:t>🗺 Живая шахматка зала</a:t>
+                      </a:r>
+                    </a:p>
+                  </a:txBody>
+                  <a:tcPr>
+                    <a:solidFill>
+                      <a:srgbClr val="1C202A"/>
+                    </a:solidFill>
+                  </a:tcPr>
+                </a:tc>
+              </a:tr>
+              <a:tr h="518160">
+                <a:tc>
+                  <a:txBody>
+                    <a:bodyPr/>
+                    <a:lstStyle/>
+                    <a:p>
+                      <a:pPr>
+                        <a:defRPr sz="900" b="1">
+                          <a:solidFill>
+                            <a:srgbClr val="F4F2EE"/>
+                          </a:solidFill>
+                        </a:defRPr>
+                      </a:pPr>
+                      <a:r>
+                        <a:t>Учет менталитета</a:t>
+                      </a:r>
+                    </a:p>
+                  </a:txBody>
+                  <a:tcPr>
+                    <a:solidFill>
+                      <a:srgbClr val="15171D"/>
+                    </a:solidFill>
+                  </a:tcPr>
+                </a:tc>
+                <a:tc>
+                  <a:txBody>
+                    <a:bodyPr/>
+                    <a:lstStyle/>
+                    <a:p>
+                      <a:pPr algn="ctr">
+                        <a:defRPr sz="900">
+                          <a:solidFill>
+                            <a:srgbClr val="F4F2EE"/>
+                          </a:solidFill>
+                        </a:defRPr>
+                      </a:pPr>
+                      <a:r>
+                        <a:t>Частично (забывают)</a:t>
+                      </a:r>
+                    </a:p>
+                  </a:txBody>
+                  <a:tcPr>
+                    <a:solidFill>
+                      <a:srgbClr val="15171D"/>
+                    </a:solidFill>
+                  </a:tcPr>
+                </a:tc>
+                <a:tc>
+                  <a:txBody>
+                    <a:bodyPr/>
+                    <a:lstStyle/>
+                    <a:p>
+                      <a:pPr algn="ctr">
+                        <a:defRPr sz="900">
+                          <a:solidFill>
+                            <a:srgbClr val="F4F2EE"/>
+                          </a:solidFill>
+                        </a:defRPr>
+                      </a:pPr>
+                      <a:r>
+                        <a:t>❌ Без топчанов и VIP</a:t>
+                      </a:r>
+                    </a:p>
+                  </a:txBody>
+                  <a:tcPr>
+                    <a:solidFill>
+                      <a:srgbClr val="15171D"/>
+                    </a:solidFill>
+                  </a:tcPr>
+                </a:tc>
+                <a:tc>
+                  <a:txBody>
+                    <a:bodyPr/>
+                    <a:lstStyle/>
+                    <a:p>
+                      <a:pPr algn="ctr">
+                        <a:defRPr sz="900">
+                          <a:solidFill>
+                            <a:srgbClr val="F4F2EE"/>
+                          </a:solidFill>
+                        </a:defRPr>
+                      </a:pPr>
+                      <a:r>
+                        <a:t>❌ Шаблоны под РФ</a:t>
+                      </a:r>
+                    </a:p>
+                  </a:txBody>
+                  <a:tcPr>
+                    <a:solidFill>
+                      <a:srgbClr val="15171D"/>
+                    </a:solidFill>
+                  </a:tcPr>
+                </a:tc>
+                <a:tc>
+                  <a:txBody>
+                    <a:bodyPr/>
+                    <a:lstStyle/>
+                    <a:p>
+                      <a:pPr algn="ctr">
+                        <a:defRPr sz="900">
+                          <a:solidFill>
+                            <a:srgbClr val="F4F2EE"/>
+                          </a:solidFill>
+                        </a:defRPr>
+                      </a:pPr>
+                      <a:r>
+                        <a:t>❌ Сложно для персонала</a:t>
+                      </a:r>
+                    </a:p>
+                  </a:txBody>
+                  <a:tcPr>
+                    <a:solidFill>
+                      <a:srgbClr val="15171D"/>
+                    </a:solidFill>
+                  </a:tcPr>
+                </a:tc>
+                <a:tc>
+                  <a:txBody>
+                    <a:bodyPr/>
+                    <a:lstStyle/>
+                    <a:p>
+                      <a:pPr algn="ctr">
+                        <a:defRPr sz="900" b="1">
+                          <a:solidFill>
+                            <a:srgbClr val="DFCAAB"/>
+                          </a:solidFill>
+                        </a:defRPr>
+                      </a:pPr>
+                      <a:r>
+                        <a:t>👑 100% ('По звонку', VIP)</a:t>
+                      </a:r>
+                    </a:p>
+                  </a:txBody>
+                  <a:tcPr>
+                    <a:solidFill>
+                      <a:srgbClr val="1C202A"/>
+                    </a:solidFill>
+                  </a:tcPr>
+                </a:tc>
+              </a:tr>
+              <a:tr h="518160">
+                <a:tc>
+                  <a:txBody>
+                    <a:bodyPr/>
+                    <a:lstStyle/>
+                    <a:p>
+                      <a:pPr>
+                        <a:defRPr sz="900" b="1">
+                          <a:solidFill>
+                            <a:srgbClr val="F4F2EE"/>
+                          </a:solidFill>
+                        </a:defRPr>
+                      </a:pPr>
+                      <a:r>
+                        <a:t>Владение базой гостей</a:t>
+                      </a:r>
+                    </a:p>
+                  </a:txBody>
+                  <a:tcPr>
+                    <a:solidFill>
+                      <a:srgbClr val="15171D"/>
+                    </a:solidFill>
+                  </a:tcPr>
+                </a:tc>
+                <a:tc>
+                  <a:txBody>
+                    <a:bodyPr/>
+                    <a:lstStyle/>
+                    <a:p>
+                      <a:pPr algn="ctr">
+                        <a:defRPr sz="900">
+                          <a:solidFill>
+                            <a:srgbClr val="F4F2EE"/>
+                          </a:solidFill>
+                        </a:defRPr>
+                      </a:pPr>
+                      <a:r>
+                        <a:t>У хостес (теряется)</a:t>
+                      </a:r>
+                    </a:p>
+                  </a:txBody>
+                  <a:tcPr>
+                    <a:solidFill>
+                      <a:srgbClr val="15171D"/>
+                    </a:solidFill>
+                  </a:tcPr>
+                </a:tc>
+                <a:tc>
+                  <a:txBody>
+                    <a:bodyPr/>
+                    <a:lstStyle/>
+                    <a:p>
+                      <a:pPr algn="ctr">
+                        <a:defRPr sz="900">
+                          <a:solidFill>
+                            <a:srgbClr val="F4F2EE"/>
+                          </a:solidFill>
+                        </a:defRPr>
+                      </a:pPr>
+                      <a:r>
+                        <a:t>Принадлежит 2GIS</a:t>
+                      </a:r>
+                    </a:p>
+                  </a:txBody>
+                  <a:tcPr>
+                    <a:solidFill>
+                      <a:srgbClr val="15171D"/>
+                    </a:solidFill>
+                  </a:tcPr>
+                </a:tc>
+                <a:tc>
+                  <a:txBody>
+                    <a:bodyPr/>
+                    <a:lstStyle/>
+                    <a:p>
+                      <a:pPr algn="ctr">
+                        <a:defRPr sz="900">
+                          <a:solidFill>
+                            <a:srgbClr val="F4F2EE"/>
+                          </a:solidFill>
+                        </a:defRPr>
+                      </a:pPr>
+                      <a:r>
+                        <a:t>Принадлежит агрегатору</a:t>
+                      </a:r>
+                    </a:p>
+                  </a:txBody>
+                  <a:tcPr>
+                    <a:solidFill>
+                      <a:srgbClr val="15171D"/>
+                    </a:solidFill>
+                  </a:tcPr>
+                </a:tc>
+                <a:tc>
+                  <a:txBody>
+                    <a:bodyPr/>
+                    <a:lstStyle/>
+                    <a:p>
+                      <a:pPr algn="ctr">
+                        <a:defRPr sz="900">
+                          <a:solidFill>
+                            <a:srgbClr val="F4F2EE"/>
+                          </a:solidFill>
+                        </a:defRPr>
+                      </a:pPr>
+                      <a:r>
+                        <a:t>На локальном ПК кассы</a:t>
+                      </a:r>
+                    </a:p>
+                  </a:txBody>
+                  <a:tcPr>
+                    <a:solidFill>
+                      <a:srgbClr val="15171D"/>
+                    </a:solidFill>
+                  </a:tcPr>
+                </a:tc>
+                <a:tc>
+                  <a:txBody>
+                    <a:bodyPr/>
+                    <a:lstStyle/>
+                    <a:p>
+                      <a:pPr algn="ctr">
+                        <a:defRPr sz="900" b="1">
+                          <a:solidFill>
+                            <a:srgbClr val="DFCAAB"/>
+                          </a:solidFill>
+                        </a:defRPr>
+                      </a:pPr>
+                      <a:r>
+                        <a:t>🔒 Принадлежит заведению</a:t>
                       </a:r>
                     </a:p>
                   </a:txBody>
@@ -4445,745 +5735,6 @@
 </p:sld>
 </file>
 
-<file path=ppt/slides/slide11.xml><?xml version="1.0" encoding="utf-8"?>
-<p:sld xmlns:a="http://schemas.openxmlformats.org/drawingml/2006/main" xmlns:p="http://schemas.openxmlformats.org/presentationml/2006/main" xmlns:r="http://schemas.openxmlformats.org/officeDocument/2006/relationships">
-  <p:cSld>
-    <p:spTree>
-      <p:nvGrpSpPr>
-        <p:cNvPr id="1" name=""/>
-        <p:cNvGrpSpPr/>
-        <p:nvPr/>
-      </p:nvGrpSpPr>
-      <p:grpSpPr/>
-      <p:sp>
-        <p:nvSpPr>
-          <p:cNvPr id="2" name="Rectangle 1"/>
-          <p:cNvSpPr/>
-          <p:nvPr/>
-        </p:nvSpPr>
-        <p:spPr>
-          <a:xfrm>
-            <a:off x="0" y="0"/>
-            <a:ext cx="12191695" cy="6858000"/>
-          </a:xfrm>
-          <a:prstGeom prst="rect">
-            <a:avLst/>
-          </a:prstGeom>
-          <a:solidFill>
-            <a:srgbClr val="0E1013"/>
-          </a:solidFill>
-          <a:ln>
-            <a:noFill/>
-          </a:ln>
-        </p:spPr>
-        <p:style>
-          <a:lnRef idx="1">
-            <a:schemeClr val="accent1"/>
-          </a:lnRef>
-          <a:fillRef idx="3">
-            <a:schemeClr val="accent1"/>
-          </a:fillRef>
-          <a:effectRef idx="2">
-            <a:schemeClr val="accent1"/>
-          </a:effectRef>
-          <a:fontRef idx="minor">
-            <a:schemeClr val="lt1"/>
-          </a:fontRef>
-        </p:style>
-        <p:txBody>
-          <a:bodyPr rtlCol="0" anchor="ctr"/>
-          <a:lstStyle/>
-          <a:p>
-            <a:pPr algn="ctr"/>
-          </a:p>
-        </p:txBody>
-      </p:sp>
-      <p:sp>
-        <p:nvSpPr>
-          <p:cNvPr id="3" name="TextBox 2"/>
-          <p:cNvSpPr txBox="1"/>
-          <p:nvPr/>
-        </p:nvSpPr>
-        <p:spPr>
-          <a:xfrm>
-            <a:off x="731520" y="365760"/>
-            <a:ext cx="10698480" cy="320040"/>
-          </a:xfrm>
-          <a:prstGeom prst="rect">
-            <a:avLst/>
-          </a:prstGeom>
-          <a:noFill/>
-        </p:spPr>
-        <p:txBody>
-          <a:bodyPr wrap="square" lIns="0" tIns="0" rIns="0" bIns="0">
-            <a:spAutoFit/>
-          </a:bodyPr>
-          <a:lstStyle/>
-          <a:p>
-            <a:pPr>
-              <a:defRPr sz="1000" b="1">
-                <a:solidFill>
-                  <a:srgbClr val="C5A880"/>
-                </a:solidFill>
-                <a:latin typeface="Segoe UI"/>
-              </a:defRPr>
-            </a:pPr>
-            <a:r>
-              <a:t>БИЗНЕС-МОДЕЛЬ</a:t>
-            </a:r>
-          </a:p>
-        </p:txBody>
-      </p:sp>
-      <p:sp>
-        <p:nvSpPr>
-          <p:cNvPr id="4" name="TextBox 3"/>
-          <p:cNvSpPr txBox="1"/>
-          <p:nvPr/>
-        </p:nvSpPr>
-        <p:spPr>
-          <a:xfrm>
-            <a:off x="731520" y="658368"/>
-            <a:ext cx="10698480" cy="502920"/>
-          </a:xfrm>
-          <a:prstGeom prst="rect">
-            <a:avLst/>
-          </a:prstGeom>
-          <a:noFill/>
-        </p:spPr>
-        <p:txBody>
-          <a:bodyPr wrap="square" lIns="0" tIns="0" rIns="0" bIns="0">
-            <a:spAutoFit/>
-          </a:bodyPr>
-          <a:lstStyle/>
-          <a:p>
-            <a:pPr>
-              <a:defRPr sz="2200" b="1">
-                <a:solidFill>
-                  <a:srgbClr val="F4F2EE"/>
-                </a:solidFill>
-                <a:latin typeface="Georgia"/>
-              </a:defRPr>
-            </a:pPr>
-            <a:r>
-              <a:t>Тарифные планы и окупаемость для заведения</a:t>
-            </a:r>
-          </a:p>
-        </p:txBody>
-      </p:sp>
-      <p:sp>
-        <p:nvSpPr>
-          <p:cNvPr id="5" name="TextBox 4"/>
-          <p:cNvSpPr txBox="1"/>
-          <p:nvPr/>
-        </p:nvSpPr>
-        <p:spPr>
-          <a:xfrm>
-            <a:off x="731520" y="1188720"/>
-            <a:ext cx="10698480" cy="320040"/>
-          </a:xfrm>
-          <a:prstGeom prst="rect">
-            <a:avLst/>
-          </a:prstGeom>
-          <a:noFill/>
-        </p:spPr>
-        <p:txBody>
-          <a:bodyPr wrap="square" lIns="0" tIns="0" rIns="0" bIns="0">
-            <a:spAutoFit/>
-          </a:bodyPr>
-          <a:lstStyle/>
-          <a:p>
-            <a:pPr>
-              <a:defRPr sz="1200">
-                <a:solidFill>
-                  <a:srgbClr val="9CA3AF"/>
-                </a:solidFill>
-                <a:latin typeface="Segoe UI"/>
-              </a:defRPr>
-            </a:pPr>
-            <a:r>
-              <a:t>Окупается за 1 спасенную бронь банкета на 8-10 человек в месяц</a:t>
-            </a:r>
-          </a:p>
-        </p:txBody>
-      </p:sp>
-      <p:sp>
-        <p:nvSpPr>
-          <p:cNvPr id="6" name="Rounded Rectangle 5"/>
-          <p:cNvSpPr/>
-          <p:nvPr/>
-        </p:nvSpPr>
-        <p:spPr>
-          <a:xfrm>
-            <a:off x="731520" y="1645920"/>
-            <a:ext cx="3474720" cy="4663440"/>
-          </a:xfrm>
-          <a:prstGeom prst="roundRect">
-            <a:avLst/>
-          </a:prstGeom>
-          <a:solidFill>
-            <a:srgbClr val="15171D"/>
-          </a:solidFill>
-          <a:ln w="12700">
-            <a:solidFill>
-              <a:srgbClr val="323741"/>
-            </a:solidFill>
-          </a:ln>
-        </p:spPr>
-        <p:style>
-          <a:lnRef idx="1">
-            <a:schemeClr val="accent1"/>
-          </a:lnRef>
-          <a:fillRef idx="3">
-            <a:schemeClr val="accent1"/>
-          </a:fillRef>
-          <a:effectRef idx="2">
-            <a:schemeClr val="accent1"/>
-          </a:effectRef>
-          <a:fontRef idx="minor">
-            <a:schemeClr val="lt1"/>
-          </a:fontRef>
-        </p:style>
-        <p:txBody>
-          <a:bodyPr rtlCol="0" anchor="ctr"/>
-          <a:lstStyle/>
-          <a:p>
-            <a:pPr algn="ctr"/>
-          </a:p>
-        </p:txBody>
-      </p:sp>
-      <p:sp>
-        <p:nvSpPr>
-          <p:cNvPr id="7" name="TextBox 6"/>
-          <p:cNvSpPr txBox="1"/>
-          <p:nvPr/>
-        </p:nvSpPr>
-        <p:spPr>
-          <a:xfrm>
-            <a:off x="914400" y="1828800"/>
-            <a:ext cx="3108960" cy="4297680"/>
-          </a:xfrm>
-          <a:prstGeom prst="rect">
-            <a:avLst/>
-          </a:prstGeom>
-          <a:noFill/>
-        </p:spPr>
-        <p:txBody>
-          <a:bodyPr wrap="square">
-            <a:spAutoFit/>
-          </a:bodyPr>
-          <a:lstStyle/>
-          <a:p>
-            <a:pPr>
-              <a:defRPr sz="1300" b="1">
-                <a:solidFill>
-                  <a:srgbClr val="F4F2EE"/>
-                </a:solidFill>
-              </a:defRPr>
-            </a:pPr>
-            <a:r>
-              <a:t>ТАРИФ «СТАРТ»</a:t>
-            </a:r>
-          </a:p>
-          <a:p>
-            <a:pPr>
-              <a:spcBef>
-                <a:spcPts val="600"/>
-              </a:spcBef>
-              <a:defRPr sz="2800" b="1">
-                <a:solidFill>
-                  <a:srgbClr val="F4F2EE"/>
-                </a:solidFill>
-              </a:defRPr>
-            </a:pPr>
-            <a:r>
-              <a:t>35 000 ₸</a:t>
-            </a:r>
-          </a:p>
-          <a:p>
-            <a:pPr>
-              <a:spcBef>
-                <a:spcPts val="200"/>
-              </a:spcBef>
-              <a:defRPr sz="950">
-                <a:solidFill>
-                  <a:srgbClr val="9CA3AF"/>
-                </a:solidFill>
-              </a:defRPr>
-            </a:pPr>
-            <a:r>
-              <a:t>в месяц за заведение</a:t>
-            </a:r>
-          </a:p>
-          <a:p>
-            <a:pPr>
-              <a:spcBef>
-                <a:spcPts val="800"/>
-              </a:spcBef>
-              <a:defRPr sz="1050">
-                <a:solidFill>
-                  <a:srgbClr val="F4F2EE"/>
-                </a:solidFill>
-              </a:defRPr>
-            </a:pPr>
-            <a:r>
-              <a:t>✓ До 12 столиков в заведении</a:t>
-            </a:r>
-          </a:p>
-          <a:p>
-            <a:pPr>
-              <a:spcBef>
-                <a:spcPts val="800"/>
-              </a:spcBef>
-              <a:defRPr sz="1050">
-                <a:solidFill>
-                  <a:srgbClr val="F4F2EE"/>
-                </a:solidFill>
-              </a:defRPr>
-            </a:pPr>
-            <a:r>
-              <a:t>✓ Гостевой Telegram Mini App</a:t>
-            </a:r>
-          </a:p>
-          <a:p>
-            <a:pPr>
-              <a:spcBef>
-                <a:spcPts val="800"/>
-              </a:spcBef>
-              <a:defRPr sz="1050">
-                <a:solidFill>
-                  <a:srgbClr val="F4F2EE"/>
-                </a:solidFill>
-              </a:defRPr>
-            </a:pPr>
-            <a:r>
-              <a:t>✓ Журнал онлайн-бронирований</a:t>
-            </a:r>
-          </a:p>
-          <a:p>
-            <a:pPr>
-              <a:spcBef>
-                <a:spcPts val="800"/>
-              </a:spcBef>
-              <a:defRPr sz="1050">
-                <a:solidFill>
-                  <a:srgbClr val="F4F2EE"/>
-                </a:solidFill>
-              </a:defRPr>
-            </a:pPr>
-            <a:r>
-              <a:t>✓ Напоминания гостям в Telegram</a:t>
-            </a:r>
-          </a:p>
-          <a:p>
-            <a:pPr>
-              <a:spcBef>
-                <a:spcPts val="800"/>
-              </a:spcBef>
-              <a:defRPr sz="1050">
-                <a:solidFill>
-                  <a:srgbClr val="F4F2EE"/>
-                </a:solidFill>
-              </a:defRPr>
-            </a:pPr>
-            <a:r>
-              <a:t>✓ Техническая поддержка 7 дней</a:t>
-            </a:r>
-          </a:p>
-        </p:txBody>
-      </p:sp>
-      <p:sp>
-        <p:nvSpPr>
-          <p:cNvPr id="8" name="Rounded Rectangle 7"/>
-          <p:cNvSpPr/>
-          <p:nvPr/>
-        </p:nvSpPr>
-        <p:spPr>
-          <a:xfrm>
-            <a:off x="4343400" y="1645920"/>
-            <a:ext cx="3474720" cy="4663440"/>
-          </a:xfrm>
-          <a:prstGeom prst="roundRect">
-            <a:avLst/>
-          </a:prstGeom>
-          <a:solidFill>
-            <a:srgbClr val="1C1F26"/>
-          </a:solidFill>
-          <a:ln w="12700">
-            <a:solidFill>
-              <a:srgbClr val="C5A880"/>
-            </a:solidFill>
-          </a:ln>
-        </p:spPr>
-        <p:style>
-          <a:lnRef idx="1">
-            <a:schemeClr val="accent1"/>
-          </a:lnRef>
-          <a:fillRef idx="3">
-            <a:schemeClr val="accent1"/>
-          </a:fillRef>
-          <a:effectRef idx="2">
-            <a:schemeClr val="accent1"/>
-          </a:effectRef>
-          <a:fontRef idx="minor">
-            <a:schemeClr val="lt1"/>
-          </a:fontRef>
-        </p:style>
-        <p:txBody>
-          <a:bodyPr rtlCol="0" anchor="ctr"/>
-          <a:lstStyle/>
-          <a:p>
-            <a:pPr algn="ctr"/>
-          </a:p>
-        </p:txBody>
-      </p:sp>
-      <p:sp>
-        <p:nvSpPr>
-          <p:cNvPr id="9" name="TextBox 8"/>
-          <p:cNvSpPr txBox="1"/>
-          <p:nvPr/>
-        </p:nvSpPr>
-        <p:spPr>
-          <a:xfrm>
-            <a:off x="4526280" y="1828800"/>
-            <a:ext cx="3108960" cy="4297680"/>
-          </a:xfrm>
-          <a:prstGeom prst="rect">
-            <a:avLst/>
-          </a:prstGeom>
-          <a:noFill/>
-        </p:spPr>
-        <p:txBody>
-          <a:bodyPr wrap="square">
-            <a:spAutoFit/>
-          </a:bodyPr>
-          <a:lstStyle/>
-          <a:p>
-            <a:pPr>
-              <a:defRPr sz="1300" b="1">
-                <a:solidFill>
-                  <a:srgbClr val="C5A880"/>
-                </a:solidFill>
-              </a:defRPr>
-            </a:pPr>
-            <a:r>
-              <a:t>ТАРИФ «PRO ХИТ»</a:t>
-            </a:r>
-          </a:p>
-          <a:p>
-            <a:pPr>
-              <a:spcBef>
-                <a:spcPts val="600"/>
-              </a:spcBef>
-              <a:defRPr sz="2800" b="1">
-                <a:solidFill>
-                  <a:srgbClr val="F4F2EE"/>
-                </a:solidFill>
-              </a:defRPr>
-            </a:pPr>
-            <a:r>
-              <a:t>49 000 ₸</a:t>
-            </a:r>
-          </a:p>
-          <a:p>
-            <a:pPr>
-              <a:spcBef>
-                <a:spcPts val="200"/>
-              </a:spcBef>
-              <a:defRPr sz="950">
-                <a:solidFill>
-                  <a:srgbClr val="9CA3AF"/>
-                </a:solidFill>
-              </a:defRPr>
-            </a:pPr>
-            <a:r>
-              <a:t>в месяц за заведение (Рекомендуемый)</a:t>
-            </a:r>
-          </a:p>
-          <a:p>
-            <a:pPr>
-              <a:spcBef>
-                <a:spcPts val="800"/>
-              </a:spcBef>
-              <a:defRPr sz="1050">
-                <a:solidFill>
-                  <a:srgbClr val="F4F2EE"/>
-                </a:solidFill>
-              </a:defRPr>
-            </a:pPr>
-            <a:r>
-              <a:t>✓ Неограниченное число столов</a:t>
-            </a:r>
-          </a:p>
-          <a:p>
-            <a:pPr>
-              <a:spcBef>
-                <a:spcPts val="800"/>
-              </a:spcBef>
-              <a:defRPr sz="1050">
-                <a:solidFill>
-                  <a:srgbClr val="F4F2EE"/>
-                </a:solidFill>
-              </a:defRPr>
-            </a:pPr>
-            <a:r>
-              <a:t>✓ Интерактивная карта зала и шахматка</a:t>
-            </a:r>
-          </a:p>
-          <a:p>
-            <a:pPr>
-              <a:spcBef>
-                <a:spcPts val="800"/>
-              </a:spcBef>
-              <a:defRPr sz="1050">
-                <a:solidFill>
-                  <a:srgbClr val="F4F2EE"/>
-                </a:solidFill>
-              </a:defRPr>
-            </a:pPr>
-            <a:r>
-              <a:t>✓ Управление рабочей сменой и Z-отчет</a:t>
-            </a:r>
-          </a:p>
-          <a:p>
-            <a:pPr>
-              <a:spcBef>
-                <a:spcPts val="800"/>
-              </a:spcBef>
-              <a:defRPr sz="1050">
-                <a:solidFill>
-                  <a:srgbClr val="F4F2EE"/>
-                </a:solidFill>
-              </a:defRPr>
-            </a:pPr>
-            <a:r>
-              <a:t>✓ Звуковые уведомления (Chime)</a:t>
-            </a:r>
-          </a:p>
-          <a:p>
-            <a:pPr>
-              <a:spcBef>
-                <a:spcPts val="800"/>
-              </a:spcBef>
-              <a:defRPr sz="1050">
-                <a:solidFill>
-                  <a:srgbClr val="F4F2EE"/>
-                </a:solidFill>
-              </a:defRPr>
-            </a:pPr>
-            <a:r>
-              <a:t>✓ Модуль Walk-in (бронь от двери)</a:t>
-            </a:r>
-          </a:p>
-          <a:p>
-            <a:pPr>
-              <a:spcBef>
-                <a:spcPts val="800"/>
-              </a:spcBef>
-              <a:defRPr sz="1050">
-                <a:solidFill>
-                  <a:srgbClr val="F4F2EE"/>
-                </a:solidFill>
-              </a:defRPr>
-            </a:pPr>
-            <a:r>
-              <a:t>✓ Приоритетная поддержка 24/7</a:t>
-            </a:r>
-          </a:p>
-        </p:txBody>
-      </p:sp>
-      <p:sp>
-        <p:nvSpPr>
-          <p:cNvPr id="10" name="Rounded Rectangle 9"/>
-          <p:cNvSpPr/>
-          <p:nvPr/>
-        </p:nvSpPr>
-        <p:spPr>
-          <a:xfrm>
-            <a:off x="7955280" y="1645920"/>
-            <a:ext cx="3474720" cy="4663440"/>
-          </a:xfrm>
-          <a:prstGeom prst="roundRect">
-            <a:avLst/>
-          </a:prstGeom>
-          <a:solidFill>
-            <a:srgbClr val="15171D"/>
-          </a:solidFill>
-          <a:ln w="12700">
-            <a:solidFill>
-              <a:srgbClr val="323741"/>
-            </a:solidFill>
-          </a:ln>
-        </p:spPr>
-        <p:style>
-          <a:lnRef idx="1">
-            <a:schemeClr val="accent1"/>
-          </a:lnRef>
-          <a:fillRef idx="3">
-            <a:schemeClr val="accent1"/>
-          </a:fillRef>
-          <a:effectRef idx="2">
-            <a:schemeClr val="accent1"/>
-          </a:effectRef>
-          <a:fontRef idx="minor">
-            <a:schemeClr val="lt1"/>
-          </a:fontRef>
-        </p:style>
-        <p:txBody>
-          <a:bodyPr rtlCol="0" anchor="ctr"/>
-          <a:lstStyle/>
-          <a:p>
-            <a:pPr algn="ctr"/>
-          </a:p>
-        </p:txBody>
-      </p:sp>
-      <p:sp>
-        <p:nvSpPr>
-          <p:cNvPr id="11" name="TextBox 10"/>
-          <p:cNvSpPr txBox="1"/>
-          <p:nvPr/>
-        </p:nvSpPr>
-        <p:spPr>
-          <a:xfrm>
-            <a:off x="8138160" y="1828800"/>
-            <a:ext cx="3108960" cy="4297680"/>
-          </a:xfrm>
-          <a:prstGeom prst="rect">
-            <a:avLst/>
-          </a:prstGeom>
-          <a:noFill/>
-        </p:spPr>
-        <p:txBody>
-          <a:bodyPr wrap="square">
-            <a:spAutoFit/>
-          </a:bodyPr>
-          <a:lstStyle/>
-          <a:p>
-            <a:pPr>
-              <a:defRPr sz="1300" b="1">
-                <a:solidFill>
-                  <a:srgbClr val="38BDF8"/>
-                </a:solidFill>
-              </a:defRPr>
-            </a:pPr>
-            <a:r>
-              <a:t>ТАРИФ «СЕТЬ / VIP»</a:t>
-            </a:r>
-          </a:p>
-          <a:p>
-            <a:pPr>
-              <a:spcBef>
-                <a:spcPts val="600"/>
-              </a:spcBef>
-              <a:defRPr sz="2800" b="1">
-                <a:solidFill>
-                  <a:srgbClr val="F4F2EE"/>
-                </a:solidFill>
-              </a:defRPr>
-            </a:pPr>
-            <a:r>
-              <a:t>65 000 ₸</a:t>
-            </a:r>
-          </a:p>
-          <a:p>
-            <a:pPr>
-              <a:spcBef>
-                <a:spcPts val="200"/>
-              </a:spcBef>
-              <a:defRPr sz="950">
-                <a:solidFill>
-                  <a:srgbClr val="9CA3AF"/>
-                </a:solidFill>
-              </a:defRPr>
-            </a:pPr>
-            <a:r>
-              <a:t>в месяц за точку (для сетей)</a:t>
-            </a:r>
-          </a:p>
-          <a:p>
-            <a:pPr>
-              <a:spcBef>
-                <a:spcPts val="800"/>
-              </a:spcBef>
-              <a:defRPr sz="1050">
-                <a:solidFill>
-                  <a:srgbClr val="F4F2EE"/>
-                </a:solidFill>
-              </a:defRPr>
-            </a:pPr>
-            <a:r>
-              <a:t>✓ Всё, что входит в тариф PRO</a:t>
-            </a:r>
-          </a:p>
-          <a:p>
-            <a:pPr>
-              <a:spcBef>
-                <a:spcPts val="800"/>
-              </a:spcBef>
-              <a:defRPr sz="1050">
-                <a:solidFill>
-                  <a:srgbClr val="F4F2EE"/>
-                </a:solidFill>
-              </a:defRPr>
-            </a:pPr>
-            <a:r>
-              <a:t>✓ Единый мультилокационный кабинет</a:t>
-            </a:r>
-          </a:p>
-          <a:p>
-            <a:pPr>
-              <a:spcBef>
-                <a:spcPts val="800"/>
-              </a:spcBef>
-              <a:defRPr sz="1050">
-                <a:solidFill>
-                  <a:srgbClr val="F4F2EE"/>
-                </a:solidFill>
-              </a:defRPr>
-            </a:pPr>
-            <a:r>
-              <a:t>✓ Неограниченное число филиалов сети</a:t>
-            </a:r>
-          </a:p>
-          <a:p>
-            <a:pPr>
-              <a:spcBef>
-                <a:spcPts val="800"/>
-              </a:spcBef>
-              <a:defRPr sz="1050">
-                <a:solidFill>
-                  <a:srgbClr val="F4F2EE"/>
-                </a:solidFill>
-              </a:defRPr>
-            </a:pPr>
-            <a:r>
-              <a:t>✓ Персональный менеджер внедрения</a:t>
-            </a:r>
-          </a:p>
-          <a:p>
-            <a:pPr>
-              <a:spcBef>
-                <a:spcPts val="800"/>
-              </a:spcBef>
-              <a:defRPr sz="1050">
-                <a:solidFill>
-                  <a:srgbClr val="F4F2EE"/>
-                </a:solidFill>
-              </a:defRPr>
-            </a:pPr>
-            <a:r>
-              <a:t>✓ Кастомизация под брендбук ресторана</a:t>
-            </a:r>
-          </a:p>
-        </p:txBody>
-      </p:sp>
-    </p:spTree>
-  </p:cSld>
-  <p:clrMapOvr>
-    <a:masterClrMapping/>
-  </p:clrMapOvr>
-</p:sld>
-</file>
-
 <file path=ppt/slides/slide12.xml><?xml version="1.0" encoding="utf-8"?>
 <p:sld xmlns:a="http://schemas.openxmlformats.org/drawingml/2006/main" xmlns:p="http://schemas.openxmlformats.org/presentationml/2006/main" xmlns:r="http://schemas.openxmlformats.org/officeDocument/2006/relationships">
   <p:cSld>
@@ -5268,7 +5819,7 @@
               </a:defRPr>
             </a:pPr>
             <a:r>
-              <a:t>РАЗВИТИЕ И КОНТАКТЫ</a:t>
+              <a:t>СТРАТЕГИЯ РЫНКА</a:t>
             </a:r>
           </a:p>
         </p:txBody>
@@ -5296,7 +5847,7 @@
           <a:lstStyle/>
           <a:p>
             <a:pPr>
-              <a:defRPr sz="2200" b="1">
+              <a:defRPr sz="2100" b="1">
                 <a:solidFill>
                   <a:srgbClr val="F4F2EE"/>
                 </a:solidFill>
@@ -5304,7 +5855,7 @@
               </a:defRPr>
             </a:pPr>
             <a:r>
-              <a:t>Дорожная карта RestoKZ &amp; Живое тестирование</a:t>
+              <a:t>Позиционирование: «Голубой океан» RestoKZ PRO</a:t>
             </a:r>
           </a:p>
         </p:txBody>
@@ -5317,7 +5868,7 @@
         </p:nvSpPr>
         <p:spPr>
           <a:xfrm>
-            <a:off x="731520" y="1188720"/>
+            <a:off x="731520" y="1170432"/>
             <a:ext cx="10698480" cy="320040"/>
           </a:xfrm>
           <a:prstGeom prst="rect">
@@ -5332,7 +5883,7 @@
           <a:lstStyle/>
           <a:p>
             <a:pPr>
-              <a:defRPr sz="1200">
+              <a:defRPr sz="1150">
                 <a:solidFill>
                   <a:srgbClr val="9CA3AF"/>
                 </a:solidFill>
@@ -5340,7 +5891,7 @@
               </a:defRPr>
             </a:pPr>
             <a:r>
-              <a:t>Готовое рабочее решение, готовое к пилотному запуску в ресторанах уже сегодня</a:t>
+              <a:t>Мы не конкурируем с монополистами (2GIS, Kaspi, iiko), а создаем с ними взаимовыгодный симбиоз</a:t>
             </a:r>
           </a:p>
         </p:txBody>
@@ -5354,7 +5905,476 @@
         <p:spPr>
           <a:xfrm>
             <a:off x="731520" y="1645920"/>
-            <a:ext cx="5486400" cy="4663440"/>
+            <a:ext cx="3474720" cy="4663440"/>
+          </a:xfrm>
+          <a:prstGeom prst="roundRect">
+            <a:avLst/>
+          </a:prstGeom>
+          <a:solidFill>
+            <a:srgbClr val="15171D"/>
+          </a:solidFill>
+          <a:ln w="12700">
+            <a:solidFill>
+              <a:srgbClr val="38BDF8"/>
+            </a:solidFill>
+          </a:ln>
+        </p:spPr>
+        <p:style>
+          <a:lnRef idx="1">
+            <a:schemeClr val="accent1"/>
+          </a:lnRef>
+          <a:fillRef idx="3">
+            <a:schemeClr val="accent1"/>
+          </a:fillRef>
+          <a:effectRef idx="2">
+            <a:schemeClr val="accent1"/>
+          </a:effectRef>
+          <a:fontRef idx="minor">
+            <a:schemeClr val="lt1"/>
+          </a:fontRef>
+        </p:style>
+        <p:txBody>
+          <a:bodyPr rtlCol="0" anchor="ctr"/>
+          <a:lstStyle/>
+          <a:p>
+            <a:pPr algn="ctr"/>
+          </a:p>
+        </p:txBody>
+      </p:sp>
+      <p:sp>
+        <p:nvSpPr>
+          <p:cNvPr id="7" name="TextBox 6"/>
+          <p:cNvSpPr txBox="1"/>
+          <p:nvPr/>
+        </p:nvSpPr>
+        <p:spPr>
+          <a:xfrm>
+            <a:off x="914400" y="1828800"/>
+            <a:ext cx="3108960" cy="4297680"/>
+          </a:xfrm>
+          <a:prstGeom prst="rect">
+            <a:avLst/>
+          </a:prstGeom>
+          <a:noFill/>
+        </p:spPr>
+        <p:txBody>
+          <a:bodyPr wrap="square">
+            <a:spAutoFit/>
+          </a:bodyPr>
+          <a:lstStyle/>
+          <a:p>
+            <a:pPr>
+              <a:defRPr sz="1300" b="1">
+                <a:solidFill>
+                  <a:srgbClr val="38BDF8"/>
+                </a:solidFill>
+              </a:defRPr>
+            </a:pPr>
+            <a:r>
+              <a:t>🤝 1. Симбиоз с 2GIS и Instagram</a:t>
+            </a:r>
+          </a:p>
+          <a:p>
+            <a:pPr>
+              <a:spcBef>
+                <a:spcPts val="1200"/>
+              </a:spcBef>
+              <a:defRPr sz="1050">
+                <a:solidFill>
+                  <a:srgbClr val="F4F2EE"/>
+                </a:solidFill>
+              </a:defRPr>
+            </a:pPr>
+            <a:r>
+              <a:t>Заведения тратят до 1.5 млн ₸ на рекламу. Сейчас трафик сливается в WhatsApp с конверсией всего 4%.</a:t>
+            </a:r>
+            <a:br/>
+            <a:br/>
+            <a:r>
+              <a:t>Ссылка на RestoKZ Mini App в шапке Instagram и в карточке 2GIS увеличивает конверсию рекламы в реальную посадку в 3-4 раза. Мы монетизируем их трафик без войны.</a:t>
+            </a:r>
+          </a:p>
+        </p:txBody>
+      </p:sp>
+      <p:sp>
+        <p:nvSpPr>
+          <p:cNvPr id="8" name="Rounded Rectangle 7"/>
+          <p:cNvSpPr/>
+          <p:nvPr/>
+        </p:nvSpPr>
+        <p:spPr>
+          <a:xfrm>
+            <a:off x="4343400" y="1645920"/>
+            <a:ext cx="3474720" cy="4663440"/>
+          </a:xfrm>
+          <a:prstGeom prst="roundRect">
+            <a:avLst/>
+          </a:prstGeom>
+          <a:solidFill>
+            <a:srgbClr val="15171D"/>
+          </a:solidFill>
+          <a:ln w="12700">
+            <a:solidFill>
+              <a:srgbClr val="C5A880"/>
+            </a:solidFill>
+          </a:ln>
+        </p:spPr>
+        <p:style>
+          <a:lnRef idx="1">
+            <a:schemeClr val="accent1"/>
+          </a:lnRef>
+          <a:fillRef idx="3">
+            <a:schemeClr val="accent1"/>
+          </a:fillRef>
+          <a:effectRef idx="2">
+            <a:schemeClr val="accent1"/>
+          </a:effectRef>
+          <a:fontRef idx="minor">
+            <a:schemeClr val="lt1"/>
+          </a:fontRef>
+        </p:style>
+        <p:txBody>
+          <a:bodyPr rtlCol="0" anchor="ctr"/>
+          <a:lstStyle/>
+          <a:p>
+            <a:pPr algn="ctr"/>
+          </a:p>
+        </p:txBody>
+      </p:sp>
+      <p:sp>
+        <p:nvSpPr>
+          <p:cNvPr id="9" name="TextBox 8"/>
+          <p:cNvSpPr txBox="1"/>
+          <p:nvPr/>
+        </p:nvSpPr>
+        <p:spPr>
+          <a:xfrm>
+            <a:off x="4526280" y="1828800"/>
+            <a:ext cx="3108960" cy="4297680"/>
+          </a:xfrm>
+          <a:prstGeom prst="rect">
+            <a:avLst/>
+          </a:prstGeom>
+          <a:noFill/>
+        </p:spPr>
+        <p:txBody>
+          <a:bodyPr wrap="square">
+            <a:spAutoFit/>
+          </a:bodyPr>
+          <a:lstStyle/>
+          <a:p>
+            <a:pPr>
+              <a:defRPr sz="1300" b="1">
+                <a:solidFill>
+                  <a:srgbClr val="C5A880"/>
+                </a:solidFill>
+              </a:defRPr>
+            </a:pPr>
+            <a:r>
+              <a:t>💻 2. Симбиоз с кассовыми ERP (iiko / R-Keeper)</a:t>
+            </a:r>
+          </a:p>
+          <a:p>
+            <a:pPr>
+              <a:spcBef>
+                <a:spcPts val="1200"/>
+              </a:spcBef>
+              <a:defRPr sz="1050">
+                <a:solidFill>
+                  <a:srgbClr val="F4F2EE"/>
+                </a:solidFill>
+              </a:defRPr>
+            </a:pPr>
+            <a:r>
+              <a:t>iiko идеально считает себестоимость стейков на кухне и склад, но слишком громоздка для смартфона хостес у входной двери.</a:t>
+            </a:r>
+            <a:br/>
+            <a:br/>
+            <a:r>
+              <a:t>RestoKZ закрывает узкую боль мобильной посадки зала и приема гостей, не требуя от ресторана дорогостоящей смены касс.</a:t>
+            </a:r>
+          </a:p>
+        </p:txBody>
+      </p:sp>
+      <p:sp>
+        <p:nvSpPr>
+          <p:cNvPr id="10" name="Rounded Rectangle 9"/>
+          <p:cNvSpPr/>
+          <p:nvPr/>
+        </p:nvSpPr>
+        <p:spPr>
+          <a:xfrm>
+            <a:off x="7955280" y="1645920"/>
+            <a:ext cx="3474720" cy="4663440"/>
+          </a:xfrm>
+          <a:prstGeom prst="roundRect">
+            <a:avLst/>
+          </a:prstGeom>
+          <a:solidFill>
+            <a:srgbClr val="15171D"/>
+          </a:solidFill>
+          <a:ln w="12700">
+            <a:solidFill>
+              <a:srgbClr val="34D399"/>
+            </a:solidFill>
+          </a:ln>
+        </p:spPr>
+        <p:style>
+          <a:lnRef idx="1">
+            <a:schemeClr val="accent1"/>
+          </a:lnRef>
+          <a:fillRef idx="3">
+            <a:schemeClr val="accent1"/>
+          </a:fillRef>
+          <a:effectRef idx="2">
+            <a:schemeClr val="accent1"/>
+          </a:effectRef>
+          <a:fontRef idx="minor">
+            <a:schemeClr val="lt1"/>
+          </a:fontRef>
+        </p:style>
+        <p:txBody>
+          <a:bodyPr rtlCol="0" anchor="ctr"/>
+          <a:lstStyle/>
+          <a:p>
+            <a:pPr algn="ctr"/>
+          </a:p>
+        </p:txBody>
+      </p:sp>
+      <p:sp>
+        <p:nvSpPr>
+          <p:cNvPr id="11" name="TextBox 10"/>
+          <p:cNvSpPr txBox="1"/>
+          <p:nvPr/>
+        </p:nvSpPr>
+        <p:spPr>
+          <a:xfrm>
+            <a:off x="8138160" y="1828800"/>
+            <a:ext cx="3108960" cy="4297680"/>
+          </a:xfrm>
+          <a:prstGeom prst="rect">
+            <a:avLst/>
+          </a:prstGeom>
+          <a:noFill/>
+        </p:spPr>
+        <p:txBody>
+          <a:bodyPr wrap="square">
+            <a:spAutoFit/>
+          </a:bodyPr>
+          <a:lstStyle/>
+          <a:p>
+            <a:pPr>
+              <a:defRPr sz="1300" b="1">
+                <a:solidFill>
+                  <a:srgbClr val="34D399"/>
+                </a:solidFill>
+              </a:defRPr>
+            </a:pPr>
+            <a:r>
+              <a:t>🛡 3. Локальный защитный ров (Local Moat)</a:t>
+            </a:r>
+          </a:p>
+          <a:p>
+            <a:pPr>
+              <a:spcBef>
+                <a:spcPts val="1200"/>
+              </a:spcBef>
+              <a:defRPr sz="1050">
+                <a:solidFill>
+                  <a:srgbClr val="F4F2EE"/>
+                </a:solidFill>
+              </a:defRPr>
+            </a:pPr>
+            <a:r>
+              <a:t>Ни один зарубежный сервис не понимает, что такое «бронь топчана на құдалық на 15 человек» или «звонок от Баке с просьбой занять лучший стол».</a:t>
+            </a:r>
+            <a:br/>
+            <a:br/>
+            <a:r>
+              <a:t>Интерфейс на казахском языке и модуль «По звонку» за 3 секунды создают непреодолимый барьер для внешних конкурентов.</a:t>
+            </a:r>
+          </a:p>
+        </p:txBody>
+      </p:sp>
+    </p:spTree>
+  </p:cSld>
+  <p:clrMapOvr>
+    <a:masterClrMapping/>
+  </p:clrMapOvr>
+</p:sld>
+</file>
+
+<file path=ppt/slides/slide13.xml><?xml version="1.0" encoding="utf-8"?>
+<p:sld xmlns:a="http://schemas.openxmlformats.org/drawingml/2006/main" xmlns:p="http://schemas.openxmlformats.org/presentationml/2006/main" xmlns:r="http://schemas.openxmlformats.org/officeDocument/2006/relationships">
+  <p:cSld>
+    <p:spTree>
+      <p:nvGrpSpPr>
+        <p:cNvPr id="1" name=""/>
+        <p:cNvGrpSpPr/>
+        <p:nvPr/>
+      </p:nvGrpSpPr>
+      <p:grpSpPr/>
+      <p:sp>
+        <p:nvSpPr>
+          <p:cNvPr id="2" name="Rectangle 1"/>
+          <p:cNvSpPr/>
+          <p:nvPr/>
+        </p:nvSpPr>
+        <p:spPr>
+          <a:xfrm>
+            <a:off x="0" y="0"/>
+            <a:ext cx="12191695" cy="6858000"/>
+          </a:xfrm>
+          <a:prstGeom prst="rect">
+            <a:avLst/>
+          </a:prstGeom>
+          <a:solidFill>
+            <a:srgbClr val="0E1013"/>
+          </a:solidFill>
+          <a:ln>
+            <a:noFill/>
+          </a:ln>
+        </p:spPr>
+        <p:style>
+          <a:lnRef idx="1">
+            <a:schemeClr val="accent1"/>
+          </a:lnRef>
+          <a:fillRef idx="3">
+            <a:schemeClr val="accent1"/>
+          </a:fillRef>
+          <a:effectRef idx="2">
+            <a:schemeClr val="accent1"/>
+          </a:effectRef>
+          <a:fontRef idx="minor">
+            <a:schemeClr val="lt1"/>
+          </a:fontRef>
+        </p:style>
+        <p:txBody>
+          <a:bodyPr rtlCol="0" anchor="ctr"/>
+          <a:lstStyle/>
+          <a:p>
+            <a:pPr algn="ctr"/>
+          </a:p>
+        </p:txBody>
+      </p:sp>
+      <p:sp>
+        <p:nvSpPr>
+          <p:cNvPr id="3" name="TextBox 2"/>
+          <p:cNvSpPr txBox="1"/>
+          <p:nvPr/>
+        </p:nvSpPr>
+        <p:spPr>
+          <a:xfrm>
+            <a:off x="731520" y="365760"/>
+            <a:ext cx="10698480" cy="320040"/>
+          </a:xfrm>
+          <a:prstGeom prst="rect">
+            <a:avLst/>
+          </a:prstGeom>
+          <a:noFill/>
+        </p:spPr>
+        <p:txBody>
+          <a:bodyPr wrap="square" lIns="0" tIns="0" rIns="0" bIns="0">
+            <a:spAutoFit/>
+          </a:bodyPr>
+          <a:lstStyle/>
+          <a:p>
+            <a:pPr>
+              <a:defRPr sz="1000" b="1">
+                <a:solidFill>
+                  <a:srgbClr val="C5A880"/>
+                </a:solidFill>
+                <a:latin typeface="Segoe UI"/>
+              </a:defRPr>
+            </a:pPr>
+            <a:r>
+              <a:t>БИЗНЕС-МОДЕЛЬ</a:t>
+            </a:r>
+          </a:p>
+        </p:txBody>
+      </p:sp>
+      <p:sp>
+        <p:nvSpPr>
+          <p:cNvPr id="4" name="TextBox 3"/>
+          <p:cNvSpPr txBox="1"/>
+          <p:nvPr/>
+        </p:nvSpPr>
+        <p:spPr>
+          <a:xfrm>
+            <a:off x="731520" y="658368"/>
+            <a:ext cx="10698480" cy="502920"/>
+          </a:xfrm>
+          <a:prstGeom prst="rect">
+            <a:avLst/>
+          </a:prstGeom>
+          <a:noFill/>
+        </p:spPr>
+        <p:txBody>
+          <a:bodyPr wrap="square" lIns="0" tIns="0" rIns="0" bIns="0">
+            <a:spAutoFit/>
+          </a:bodyPr>
+          <a:lstStyle/>
+          <a:p>
+            <a:pPr>
+              <a:defRPr sz="2100" b="1">
+                <a:solidFill>
+                  <a:srgbClr val="F4F2EE"/>
+                </a:solidFill>
+                <a:latin typeface="Georgia"/>
+              </a:defRPr>
+            </a:pPr>
+            <a:r>
+              <a:t>Тарифные планы и окупаемость для заведения</a:t>
+            </a:r>
+          </a:p>
+        </p:txBody>
+      </p:sp>
+      <p:sp>
+        <p:nvSpPr>
+          <p:cNvPr id="5" name="TextBox 4"/>
+          <p:cNvSpPr txBox="1"/>
+          <p:nvPr/>
+        </p:nvSpPr>
+        <p:spPr>
+          <a:xfrm>
+            <a:off x="731520" y="1170432"/>
+            <a:ext cx="10698480" cy="320040"/>
+          </a:xfrm>
+          <a:prstGeom prst="rect">
+            <a:avLst/>
+          </a:prstGeom>
+          <a:noFill/>
+        </p:spPr>
+        <p:txBody>
+          <a:bodyPr wrap="square" lIns="0" tIns="0" rIns="0" bIns="0">
+            <a:spAutoFit/>
+          </a:bodyPr>
+          <a:lstStyle/>
+          <a:p>
+            <a:pPr>
+              <a:defRPr sz="1150">
+                <a:solidFill>
+                  <a:srgbClr val="9CA3AF"/>
+                </a:solidFill>
+                <a:latin typeface="Segoe UI"/>
+              </a:defRPr>
+            </a:pPr>
+            <a:r>
+              <a:t>Формула 1:1 — окупается всего за 1 спасенный банкетный стол на 8-10 человек в месяц</a:t>
+            </a:r>
+          </a:p>
+        </p:txBody>
+      </p:sp>
+      <p:sp>
+        <p:nvSpPr>
+          <p:cNvPr id="6" name="Rounded Rectangle 5"/>
+          <p:cNvSpPr/>
+          <p:nvPr/>
+        </p:nvSpPr>
+        <p:spPr>
+          <a:xfrm>
+            <a:off x="731520" y="1645920"/>
+            <a:ext cx="3474720" cy="4663440"/>
           </a:xfrm>
           <a:prstGeom prst="roundRect">
             <a:avLst/>
@@ -5398,8 +6418,8 @@
         </p:nvSpPr>
         <p:spPr>
           <a:xfrm>
-            <a:off x="1005840" y="1828800"/>
-            <a:ext cx="4937760" cy="4297680"/>
+            <a:off x="914400" y="1828800"/>
+            <a:ext cx="3108960" cy="4297680"/>
           </a:xfrm>
           <a:prstGeom prst="rect">
             <a:avLst/>
@@ -5415,12 +6435,1340 @@
             <a:pPr>
               <a:defRPr sz="1300" b="1">
                 <a:solidFill>
+                  <a:srgbClr val="F4F2EE"/>
+                </a:solidFill>
+              </a:defRPr>
+            </a:pPr>
+            <a:r>
+              <a:t>ТАРИФ «СТАРТ»</a:t>
+            </a:r>
+          </a:p>
+          <a:p>
+            <a:pPr>
+              <a:spcBef>
+                <a:spcPts val="600"/>
+              </a:spcBef>
+              <a:defRPr sz="2800" b="1">
+                <a:solidFill>
+                  <a:srgbClr val="F4F2EE"/>
+                </a:solidFill>
+              </a:defRPr>
+            </a:pPr>
+            <a:r>
+              <a:t>35 000 ₸</a:t>
+            </a:r>
+          </a:p>
+          <a:p>
+            <a:pPr>
+              <a:spcBef>
+                <a:spcPts val="200"/>
+              </a:spcBef>
+              <a:defRPr sz="950">
+                <a:solidFill>
+                  <a:srgbClr val="9CA3AF"/>
+                </a:solidFill>
+              </a:defRPr>
+            </a:pPr>
+            <a:r>
+              <a:t>в месяц за заведение</a:t>
+            </a:r>
+          </a:p>
+          <a:p>
+            <a:pPr>
+              <a:spcBef>
+                <a:spcPts val="800"/>
+              </a:spcBef>
+              <a:defRPr sz="1050">
+                <a:solidFill>
+                  <a:srgbClr val="F4F2EE"/>
+                </a:solidFill>
+              </a:defRPr>
+            </a:pPr>
+            <a:r>
+              <a:t>✓ До 12 столиков в заведении</a:t>
+            </a:r>
+          </a:p>
+          <a:p>
+            <a:pPr>
+              <a:spcBef>
+                <a:spcPts val="800"/>
+              </a:spcBef>
+              <a:defRPr sz="1050">
+                <a:solidFill>
+                  <a:srgbClr val="F4F2EE"/>
+                </a:solidFill>
+              </a:defRPr>
+            </a:pPr>
+            <a:r>
+              <a:t>✓ Гостевой Telegram Mini App</a:t>
+            </a:r>
+          </a:p>
+          <a:p>
+            <a:pPr>
+              <a:spcBef>
+                <a:spcPts val="800"/>
+              </a:spcBef>
+              <a:defRPr sz="1050">
+                <a:solidFill>
+                  <a:srgbClr val="F4F2EE"/>
+                </a:solidFill>
+              </a:defRPr>
+            </a:pPr>
+            <a:r>
+              <a:t>✓ Журнал онлайн-бронирований</a:t>
+            </a:r>
+          </a:p>
+          <a:p>
+            <a:pPr>
+              <a:spcBef>
+                <a:spcPts val="800"/>
+              </a:spcBef>
+              <a:defRPr sz="1050">
+                <a:solidFill>
+                  <a:srgbClr val="F4F2EE"/>
+                </a:solidFill>
+              </a:defRPr>
+            </a:pPr>
+            <a:r>
+              <a:t>✓ Напоминания гостям в Telegram</a:t>
+            </a:r>
+          </a:p>
+          <a:p>
+            <a:pPr>
+              <a:spcBef>
+                <a:spcPts val="800"/>
+              </a:spcBef>
+              <a:defRPr sz="1050">
+                <a:solidFill>
+                  <a:srgbClr val="F4F2EE"/>
+                </a:solidFill>
+              </a:defRPr>
+            </a:pPr>
+            <a:r>
+              <a:t>✓ Техническая поддержка 7 дней</a:t>
+            </a:r>
+          </a:p>
+        </p:txBody>
+      </p:sp>
+      <p:sp>
+        <p:nvSpPr>
+          <p:cNvPr id="8" name="Rounded Rectangle 7"/>
+          <p:cNvSpPr/>
+          <p:nvPr/>
+        </p:nvSpPr>
+        <p:spPr>
+          <a:xfrm>
+            <a:off x="4343400" y="1645920"/>
+            <a:ext cx="3474720" cy="4663440"/>
+          </a:xfrm>
+          <a:prstGeom prst="roundRect">
+            <a:avLst/>
+          </a:prstGeom>
+          <a:solidFill>
+            <a:srgbClr val="1C1F26"/>
+          </a:solidFill>
+          <a:ln w="12700">
+            <a:solidFill>
+              <a:srgbClr val="C5A880"/>
+            </a:solidFill>
+          </a:ln>
+        </p:spPr>
+        <p:style>
+          <a:lnRef idx="1">
+            <a:schemeClr val="accent1"/>
+          </a:lnRef>
+          <a:fillRef idx="3">
+            <a:schemeClr val="accent1"/>
+          </a:fillRef>
+          <a:effectRef idx="2">
+            <a:schemeClr val="accent1"/>
+          </a:effectRef>
+          <a:fontRef idx="minor">
+            <a:schemeClr val="lt1"/>
+          </a:fontRef>
+        </p:style>
+        <p:txBody>
+          <a:bodyPr rtlCol="0" anchor="ctr"/>
+          <a:lstStyle/>
+          <a:p>
+            <a:pPr algn="ctr"/>
+          </a:p>
+        </p:txBody>
+      </p:sp>
+      <p:sp>
+        <p:nvSpPr>
+          <p:cNvPr id="9" name="TextBox 8"/>
+          <p:cNvSpPr txBox="1"/>
+          <p:nvPr/>
+        </p:nvSpPr>
+        <p:spPr>
+          <a:xfrm>
+            <a:off x="4526280" y="1828800"/>
+            <a:ext cx="3108960" cy="4297680"/>
+          </a:xfrm>
+          <a:prstGeom prst="rect">
+            <a:avLst/>
+          </a:prstGeom>
+          <a:noFill/>
+        </p:spPr>
+        <p:txBody>
+          <a:bodyPr wrap="square">
+            <a:spAutoFit/>
+          </a:bodyPr>
+          <a:lstStyle/>
+          <a:p>
+            <a:pPr>
+              <a:defRPr sz="1300" b="1">
+                <a:solidFill>
                   <a:srgbClr val="C5A880"/>
                 </a:solidFill>
               </a:defRPr>
             </a:pPr>
             <a:r>
-              <a:t>🗺 ДОРОЖНАЯ КАРТА ПРОЕКТА</a:t>
+              <a:t>ТАРИФ «PRO ХИТ»</a:t>
+            </a:r>
+          </a:p>
+          <a:p>
+            <a:pPr>
+              <a:spcBef>
+                <a:spcPts val="600"/>
+              </a:spcBef>
+              <a:defRPr sz="2800" b="1">
+                <a:solidFill>
+                  <a:srgbClr val="F4F2EE"/>
+                </a:solidFill>
+              </a:defRPr>
+            </a:pPr>
+            <a:r>
+              <a:t>49 000 ₸</a:t>
+            </a:r>
+          </a:p>
+          <a:p>
+            <a:pPr>
+              <a:spcBef>
+                <a:spcPts val="200"/>
+              </a:spcBef>
+              <a:defRPr sz="950">
+                <a:solidFill>
+                  <a:srgbClr val="9CA3AF"/>
+                </a:solidFill>
+              </a:defRPr>
+            </a:pPr>
+            <a:r>
+              <a:t>в месяц за заведение (Рекомендуемый)</a:t>
+            </a:r>
+          </a:p>
+          <a:p>
+            <a:pPr>
+              <a:spcBef>
+                <a:spcPts val="800"/>
+              </a:spcBef>
+              <a:defRPr sz="1050">
+                <a:solidFill>
+                  <a:srgbClr val="F4F2EE"/>
+                </a:solidFill>
+              </a:defRPr>
+            </a:pPr>
+            <a:r>
+              <a:t>✓ Неограниченное число столов</a:t>
+            </a:r>
+          </a:p>
+          <a:p>
+            <a:pPr>
+              <a:spcBef>
+                <a:spcPts val="800"/>
+              </a:spcBef>
+              <a:defRPr sz="1050">
+                <a:solidFill>
+                  <a:srgbClr val="F4F2EE"/>
+                </a:solidFill>
+              </a:defRPr>
+            </a:pPr>
+            <a:r>
+              <a:t>✓ Интерактивная карта зала и шахматка</a:t>
+            </a:r>
+          </a:p>
+          <a:p>
+            <a:pPr>
+              <a:spcBef>
+                <a:spcPts val="800"/>
+              </a:spcBef>
+              <a:defRPr sz="1050">
+                <a:solidFill>
+                  <a:srgbClr val="F4F2EE"/>
+                </a:solidFill>
+              </a:defRPr>
+            </a:pPr>
+            <a:r>
+              <a:t>✓ Управление рабочей сменой и Z-отчет</a:t>
+            </a:r>
+          </a:p>
+          <a:p>
+            <a:pPr>
+              <a:spcBef>
+                <a:spcPts val="800"/>
+              </a:spcBef>
+              <a:defRPr sz="1050">
+                <a:solidFill>
+                  <a:srgbClr val="F4F2EE"/>
+                </a:solidFill>
+              </a:defRPr>
+            </a:pPr>
+            <a:r>
+              <a:t>✓ Звуковые уведомления (Chime)</a:t>
+            </a:r>
+          </a:p>
+          <a:p>
+            <a:pPr>
+              <a:spcBef>
+                <a:spcPts val="800"/>
+              </a:spcBef>
+              <a:defRPr sz="1050">
+                <a:solidFill>
+                  <a:srgbClr val="F4F2EE"/>
+                </a:solidFill>
+              </a:defRPr>
+            </a:pPr>
+            <a:r>
+              <a:t>✓ Модуль Walk-in (бронь от двери)</a:t>
+            </a:r>
+          </a:p>
+          <a:p>
+            <a:pPr>
+              <a:spcBef>
+                <a:spcPts val="800"/>
+              </a:spcBef>
+              <a:defRPr sz="1050">
+                <a:solidFill>
+                  <a:srgbClr val="F4F2EE"/>
+                </a:solidFill>
+              </a:defRPr>
+            </a:pPr>
+            <a:r>
+              <a:t>✓ Приоритетная поддержка 24/7</a:t>
+            </a:r>
+          </a:p>
+        </p:txBody>
+      </p:sp>
+      <p:sp>
+        <p:nvSpPr>
+          <p:cNvPr id="10" name="Rounded Rectangle 9"/>
+          <p:cNvSpPr/>
+          <p:nvPr/>
+        </p:nvSpPr>
+        <p:spPr>
+          <a:xfrm>
+            <a:off x="7955280" y="1645920"/>
+            <a:ext cx="3474720" cy="4663440"/>
+          </a:xfrm>
+          <a:prstGeom prst="roundRect">
+            <a:avLst/>
+          </a:prstGeom>
+          <a:solidFill>
+            <a:srgbClr val="15171D"/>
+          </a:solidFill>
+          <a:ln w="12700">
+            <a:solidFill>
+              <a:srgbClr val="323741"/>
+            </a:solidFill>
+          </a:ln>
+        </p:spPr>
+        <p:style>
+          <a:lnRef idx="1">
+            <a:schemeClr val="accent1"/>
+          </a:lnRef>
+          <a:fillRef idx="3">
+            <a:schemeClr val="accent1"/>
+          </a:fillRef>
+          <a:effectRef idx="2">
+            <a:schemeClr val="accent1"/>
+          </a:effectRef>
+          <a:fontRef idx="minor">
+            <a:schemeClr val="lt1"/>
+          </a:fontRef>
+        </p:style>
+        <p:txBody>
+          <a:bodyPr rtlCol="0" anchor="ctr"/>
+          <a:lstStyle/>
+          <a:p>
+            <a:pPr algn="ctr"/>
+          </a:p>
+        </p:txBody>
+      </p:sp>
+      <p:sp>
+        <p:nvSpPr>
+          <p:cNvPr id="11" name="TextBox 10"/>
+          <p:cNvSpPr txBox="1"/>
+          <p:nvPr/>
+        </p:nvSpPr>
+        <p:spPr>
+          <a:xfrm>
+            <a:off x="8138160" y="1828800"/>
+            <a:ext cx="3108960" cy="4297680"/>
+          </a:xfrm>
+          <a:prstGeom prst="rect">
+            <a:avLst/>
+          </a:prstGeom>
+          <a:noFill/>
+        </p:spPr>
+        <p:txBody>
+          <a:bodyPr wrap="square">
+            <a:spAutoFit/>
+          </a:bodyPr>
+          <a:lstStyle/>
+          <a:p>
+            <a:pPr>
+              <a:defRPr sz="1300" b="1">
+                <a:solidFill>
+                  <a:srgbClr val="38BDF8"/>
+                </a:solidFill>
+              </a:defRPr>
+            </a:pPr>
+            <a:r>
+              <a:t>ТАРИФ «СЕТЬ / VIP»</a:t>
+            </a:r>
+          </a:p>
+          <a:p>
+            <a:pPr>
+              <a:spcBef>
+                <a:spcPts val="600"/>
+              </a:spcBef>
+              <a:defRPr sz="2800" b="1">
+                <a:solidFill>
+                  <a:srgbClr val="F4F2EE"/>
+                </a:solidFill>
+              </a:defRPr>
+            </a:pPr>
+            <a:r>
+              <a:t>65 000 ₸</a:t>
+            </a:r>
+          </a:p>
+          <a:p>
+            <a:pPr>
+              <a:spcBef>
+                <a:spcPts val="200"/>
+              </a:spcBef>
+              <a:defRPr sz="950">
+                <a:solidFill>
+                  <a:srgbClr val="9CA3AF"/>
+                </a:solidFill>
+              </a:defRPr>
+            </a:pPr>
+            <a:r>
+              <a:t>в месяц за точку (для сетей)</a:t>
+            </a:r>
+          </a:p>
+          <a:p>
+            <a:pPr>
+              <a:spcBef>
+                <a:spcPts val="800"/>
+              </a:spcBef>
+              <a:defRPr sz="1050">
+                <a:solidFill>
+                  <a:srgbClr val="F4F2EE"/>
+                </a:solidFill>
+              </a:defRPr>
+            </a:pPr>
+            <a:r>
+              <a:t>✓ Всё, что входит в тариф PRO</a:t>
+            </a:r>
+          </a:p>
+          <a:p>
+            <a:pPr>
+              <a:spcBef>
+                <a:spcPts val="800"/>
+              </a:spcBef>
+              <a:defRPr sz="1050">
+                <a:solidFill>
+                  <a:srgbClr val="F4F2EE"/>
+                </a:solidFill>
+              </a:defRPr>
+            </a:pPr>
+            <a:r>
+              <a:t>✓ Единый мультилокационный кабинет</a:t>
+            </a:r>
+          </a:p>
+          <a:p>
+            <a:pPr>
+              <a:spcBef>
+                <a:spcPts val="800"/>
+              </a:spcBef>
+              <a:defRPr sz="1050">
+                <a:solidFill>
+                  <a:srgbClr val="F4F2EE"/>
+                </a:solidFill>
+              </a:defRPr>
+            </a:pPr>
+            <a:r>
+              <a:t>✓ Неограниченное число филиалов сети</a:t>
+            </a:r>
+          </a:p>
+          <a:p>
+            <a:pPr>
+              <a:spcBef>
+                <a:spcPts val="800"/>
+              </a:spcBef>
+              <a:defRPr sz="1050">
+                <a:solidFill>
+                  <a:srgbClr val="F4F2EE"/>
+                </a:solidFill>
+              </a:defRPr>
+            </a:pPr>
+            <a:r>
+              <a:t>✓ Персональный менеджер внедрения</a:t>
+            </a:r>
+          </a:p>
+          <a:p>
+            <a:pPr>
+              <a:spcBef>
+                <a:spcPts val="800"/>
+              </a:spcBef>
+              <a:defRPr sz="1050">
+                <a:solidFill>
+                  <a:srgbClr val="F4F2EE"/>
+                </a:solidFill>
+              </a:defRPr>
+            </a:pPr>
+            <a:r>
+              <a:t>✓ Кастомизация под брендбук ресторана</a:t>
+            </a:r>
+          </a:p>
+        </p:txBody>
+      </p:sp>
+    </p:spTree>
+  </p:cSld>
+  <p:clrMapOvr>
+    <a:masterClrMapping/>
+  </p:clrMapOvr>
+</p:sld>
+</file>
+
+<file path=ppt/slides/slide14.xml><?xml version="1.0" encoding="utf-8"?>
+<p:sld xmlns:a="http://schemas.openxmlformats.org/drawingml/2006/main" xmlns:p="http://schemas.openxmlformats.org/presentationml/2006/main" xmlns:r="http://schemas.openxmlformats.org/officeDocument/2006/relationships">
+  <p:cSld>
+    <p:spTree>
+      <p:nvGrpSpPr>
+        <p:cNvPr id="1" name=""/>
+        <p:cNvGrpSpPr/>
+        <p:nvPr/>
+      </p:nvGrpSpPr>
+      <p:grpSpPr/>
+      <p:sp>
+        <p:nvSpPr>
+          <p:cNvPr id="2" name="Rectangle 1"/>
+          <p:cNvSpPr/>
+          <p:nvPr/>
+        </p:nvSpPr>
+        <p:spPr>
+          <a:xfrm>
+            <a:off x="0" y="0"/>
+            <a:ext cx="12191695" cy="6858000"/>
+          </a:xfrm>
+          <a:prstGeom prst="rect">
+            <a:avLst/>
+          </a:prstGeom>
+          <a:solidFill>
+            <a:srgbClr val="0E1013"/>
+          </a:solidFill>
+          <a:ln>
+            <a:noFill/>
+          </a:ln>
+        </p:spPr>
+        <p:style>
+          <a:lnRef idx="1">
+            <a:schemeClr val="accent1"/>
+          </a:lnRef>
+          <a:fillRef idx="3">
+            <a:schemeClr val="accent1"/>
+          </a:fillRef>
+          <a:effectRef idx="2">
+            <a:schemeClr val="accent1"/>
+          </a:effectRef>
+          <a:fontRef idx="minor">
+            <a:schemeClr val="lt1"/>
+          </a:fontRef>
+        </p:style>
+        <p:txBody>
+          <a:bodyPr rtlCol="0" anchor="ctr"/>
+          <a:lstStyle/>
+          <a:p>
+            <a:pPr algn="ctr"/>
+          </a:p>
+        </p:txBody>
+      </p:sp>
+      <p:sp>
+        <p:nvSpPr>
+          <p:cNvPr id="3" name="TextBox 2"/>
+          <p:cNvSpPr txBox="1"/>
+          <p:nvPr/>
+        </p:nvSpPr>
+        <p:spPr>
+          <a:xfrm>
+            <a:off x="731520" y="365760"/>
+            <a:ext cx="10698480" cy="320040"/>
+          </a:xfrm>
+          <a:prstGeom prst="rect">
+            <a:avLst/>
+          </a:prstGeom>
+          <a:noFill/>
+        </p:spPr>
+        <p:txBody>
+          <a:bodyPr wrap="square" lIns="0" tIns="0" rIns="0" bIns="0">
+            <a:spAutoFit/>
+          </a:bodyPr>
+          <a:lstStyle/>
+          <a:p>
+            <a:pPr>
+              <a:defRPr sz="1000" b="1">
+                <a:solidFill>
+                  <a:srgbClr val="C5A880"/>
+                </a:solidFill>
+                <a:latin typeface="Segoe UI"/>
+              </a:defRPr>
+            </a:pPr>
+            <a:r>
+              <a:t>СТРАТЕГИЯ РАЗВИТИЯ</a:t>
+            </a:r>
+          </a:p>
+        </p:txBody>
+      </p:sp>
+      <p:sp>
+        <p:nvSpPr>
+          <p:cNvPr id="4" name="TextBox 3"/>
+          <p:cNvSpPr txBox="1"/>
+          <p:nvPr/>
+        </p:nvSpPr>
+        <p:spPr>
+          <a:xfrm>
+            <a:off x="731520" y="658368"/>
+            <a:ext cx="10698480" cy="502920"/>
+          </a:xfrm>
+          <a:prstGeom prst="rect">
+            <a:avLst/>
+          </a:prstGeom>
+          <a:noFill/>
+        </p:spPr>
+        <p:txBody>
+          <a:bodyPr wrap="square" lIns="0" tIns="0" rIns="0" bIns="0">
+            <a:spAutoFit/>
+          </a:bodyPr>
+          <a:lstStyle/>
+          <a:p>
+            <a:pPr>
+              <a:defRPr sz="2100" b="1">
+                <a:solidFill>
+                  <a:srgbClr val="F4F2EE"/>
+                </a:solidFill>
+                <a:latin typeface="Georgia"/>
+              </a:defRPr>
+            </a:pPr>
+            <a:r>
+              <a:t>Дорожная карта: От пилота к экосистеме №1 в Казахстане</a:t>
+            </a:r>
+          </a:p>
+        </p:txBody>
+      </p:sp>
+      <p:sp>
+        <p:nvSpPr>
+          <p:cNvPr id="5" name="TextBox 4"/>
+          <p:cNvSpPr txBox="1"/>
+          <p:nvPr/>
+        </p:nvSpPr>
+        <p:spPr>
+          <a:xfrm>
+            <a:off x="731520" y="1170432"/>
+            <a:ext cx="10698480" cy="320040"/>
+          </a:xfrm>
+          <a:prstGeom prst="rect">
+            <a:avLst/>
+          </a:prstGeom>
+          <a:noFill/>
+        </p:spPr>
+        <p:txBody>
+          <a:bodyPr wrap="square" lIns="0" tIns="0" rIns="0" bIns="0">
+            <a:spAutoFit/>
+          </a:bodyPr>
+          <a:lstStyle/>
+          <a:p>
+            <a:pPr>
+              <a:defRPr sz="1150">
+                <a:solidFill>
+                  <a:srgbClr val="9CA3AF"/>
+                </a:solidFill>
+                <a:latin typeface="Segoe UI"/>
+              </a:defRPr>
+            </a:pPr>
+            <a:r>
+              <a:t>Поэтапное расширение функционала и ликвидация No-Show до абсолютного нуля</a:t>
+            </a:r>
+          </a:p>
+        </p:txBody>
+      </p:sp>
+      <p:sp>
+        <p:nvSpPr>
+          <p:cNvPr id="6" name="Rounded Rectangle 5"/>
+          <p:cNvSpPr/>
+          <p:nvPr/>
+        </p:nvSpPr>
+        <p:spPr>
+          <a:xfrm>
+            <a:off x="731520" y="1645920"/>
+            <a:ext cx="3474720" cy="4663440"/>
+          </a:xfrm>
+          <a:prstGeom prst="roundRect">
+            <a:avLst/>
+          </a:prstGeom>
+          <a:solidFill>
+            <a:srgbClr val="15171D"/>
+          </a:solidFill>
+          <a:ln w="12700">
+            <a:solidFill>
+              <a:srgbClr val="34D399"/>
+            </a:solidFill>
+          </a:ln>
+        </p:spPr>
+        <p:style>
+          <a:lnRef idx="1">
+            <a:schemeClr val="accent1"/>
+          </a:lnRef>
+          <a:fillRef idx="3">
+            <a:schemeClr val="accent1"/>
+          </a:fillRef>
+          <a:effectRef idx="2">
+            <a:schemeClr val="accent1"/>
+          </a:effectRef>
+          <a:fontRef idx="minor">
+            <a:schemeClr val="lt1"/>
+          </a:fontRef>
+        </p:style>
+        <p:txBody>
+          <a:bodyPr rtlCol="0" anchor="ctr"/>
+          <a:lstStyle/>
+          <a:p>
+            <a:pPr algn="ctr"/>
+          </a:p>
+        </p:txBody>
+      </p:sp>
+      <p:sp>
+        <p:nvSpPr>
+          <p:cNvPr id="7" name="TextBox 6"/>
+          <p:cNvSpPr txBox="1"/>
+          <p:nvPr/>
+        </p:nvSpPr>
+        <p:spPr>
+          <a:xfrm>
+            <a:off x="914400" y="1828800"/>
+            <a:ext cx="3108960" cy="4297680"/>
+          </a:xfrm>
+          <a:prstGeom prst="rect">
+            <a:avLst/>
+          </a:prstGeom>
+          <a:noFill/>
+        </p:spPr>
+        <p:txBody>
+          <a:bodyPr wrap="square">
+            <a:spAutoFit/>
+          </a:bodyPr>
+          <a:lstStyle/>
+          <a:p>
+            <a:pPr>
+              <a:defRPr sz="1300" b="1">
+                <a:solidFill>
+                  <a:srgbClr val="34D399"/>
+                </a:solidFill>
+              </a:defRPr>
+            </a:pPr>
+            <a:r>
+              <a:t>v2.4 Live (РЕАЛИЗОВАНО)</a:t>
+            </a:r>
+          </a:p>
+          <a:p>
+            <a:pPr>
+              <a:spcBef>
+                <a:spcPts val="800"/>
+              </a:spcBef>
+              <a:defRPr sz="1050">
+                <a:solidFill>
+                  <a:srgbClr val="F4F2EE"/>
+                </a:solidFill>
+              </a:defRPr>
+            </a:pPr>
+            <a:r>
+              <a:t>• Полноценный гостевой WebApp с выбором залов и меню</a:t>
+            </a:r>
+          </a:p>
+          <a:p>
+            <a:pPr>
+              <a:spcBef>
+                <a:spcPts val="800"/>
+              </a:spcBef>
+              <a:defRPr sz="1050">
+                <a:solidFill>
+                  <a:srgbClr val="F4F2EE"/>
+                </a:solidFill>
+              </a:defRPr>
+            </a:pPr>
+            <a:r>
+              <a:t>• Мобильный терминал хостес с контекстными кнопками</a:t>
+            </a:r>
+          </a:p>
+          <a:p>
+            <a:pPr>
+              <a:spcBef>
+                <a:spcPts val="800"/>
+              </a:spcBef>
+              <a:defRPr sz="1050">
+                <a:solidFill>
+                  <a:srgbClr val="F4F2EE"/>
+                </a:solidFill>
+              </a:defRPr>
+            </a:pPr>
+            <a:r>
+              <a:t>• Интерактивная карта зала с цветовой занятостью столов</a:t>
+            </a:r>
+          </a:p>
+          <a:p>
+            <a:pPr>
+              <a:spcBef>
+                <a:spcPts val="800"/>
+              </a:spcBef>
+              <a:defRPr sz="1050">
+                <a:solidFill>
+                  <a:srgbClr val="F4F2EE"/>
+                </a:solidFill>
+              </a:defRPr>
+            </a:pPr>
+            <a:r>
+              <a:t>• Учет смены персонала, Z-отчеты и консьерж-гонг Chime</a:t>
+            </a:r>
+          </a:p>
+          <a:p>
+            <a:pPr>
+              <a:spcBef>
+                <a:spcPts val="800"/>
+              </a:spcBef>
+              <a:defRPr sz="1050">
+                <a:solidFill>
+                  <a:srgbClr val="F4F2EE"/>
+                </a:solidFill>
+              </a:defRPr>
+            </a:pPr>
+            <a:r>
+              <a:t>• Мультилокация и трехъязычие (KZ / RU / EN)</a:t>
+            </a:r>
+          </a:p>
+        </p:txBody>
+      </p:sp>
+      <p:sp>
+        <p:nvSpPr>
+          <p:cNvPr id="8" name="Rounded Rectangle 7"/>
+          <p:cNvSpPr/>
+          <p:nvPr/>
+        </p:nvSpPr>
+        <p:spPr>
+          <a:xfrm>
+            <a:off x="4343400" y="1645920"/>
+            <a:ext cx="3474720" cy="4663440"/>
+          </a:xfrm>
+          <a:prstGeom prst="roundRect">
+            <a:avLst/>
+          </a:prstGeom>
+          <a:solidFill>
+            <a:srgbClr val="15171D"/>
+          </a:solidFill>
+          <a:ln w="12700">
+            <a:solidFill>
+              <a:srgbClr val="38BDF8"/>
+            </a:solidFill>
+          </a:ln>
+        </p:spPr>
+        <p:style>
+          <a:lnRef idx="1">
+            <a:schemeClr val="accent1"/>
+          </a:lnRef>
+          <a:fillRef idx="3">
+            <a:schemeClr val="accent1"/>
+          </a:fillRef>
+          <a:effectRef idx="2">
+            <a:schemeClr val="accent1"/>
+          </a:effectRef>
+          <a:fontRef idx="minor">
+            <a:schemeClr val="lt1"/>
+          </a:fontRef>
+        </p:style>
+        <p:txBody>
+          <a:bodyPr rtlCol="0" anchor="ctr"/>
+          <a:lstStyle/>
+          <a:p>
+            <a:pPr algn="ctr"/>
+          </a:p>
+        </p:txBody>
+      </p:sp>
+      <p:sp>
+        <p:nvSpPr>
+          <p:cNvPr id="9" name="TextBox 8"/>
+          <p:cNvSpPr txBox="1"/>
+          <p:nvPr/>
+        </p:nvSpPr>
+        <p:spPr>
+          <a:xfrm>
+            <a:off x="4526280" y="1828800"/>
+            <a:ext cx="3108960" cy="4297680"/>
+          </a:xfrm>
+          <a:prstGeom prst="rect">
+            <a:avLst/>
+          </a:prstGeom>
+          <a:noFill/>
+        </p:spPr>
+        <p:txBody>
+          <a:bodyPr wrap="square">
+            <a:spAutoFit/>
+          </a:bodyPr>
+          <a:lstStyle/>
+          <a:p>
+            <a:pPr>
+              <a:defRPr sz="1300" b="1">
+                <a:solidFill>
+                  <a:srgbClr val="38BDF8"/>
+                </a:solidFill>
+              </a:defRPr>
+            </a:pPr>
+            <a:r>
+              <a:t>Q4 2026: Kaspi QR Депозиты</a:t>
+            </a:r>
+          </a:p>
+          <a:p>
+            <a:pPr>
+              <a:spcBef>
+                <a:spcPts val="800"/>
+              </a:spcBef>
+              <a:defRPr sz="1050">
+                <a:solidFill>
+                  <a:srgbClr val="F4F2EE"/>
+                </a:solidFill>
+              </a:defRPr>
+            </a:pPr>
+            <a:r>
+              <a:t>• Взимание онлайн-предоплаты через Kaspi QR при бронировании VIP-кабин и топчанов</a:t>
+            </a:r>
+          </a:p>
+          <a:p>
+            <a:pPr>
+              <a:spcBef>
+                <a:spcPts val="800"/>
+              </a:spcBef>
+              <a:defRPr sz="1050">
+                <a:solidFill>
+                  <a:srgbClr val="F4F2EE"/>
+                </a:solidFill>
+              </a:defRPr>
+            </a:pPr>
+            <a:r>
+              <a:t>• 100% ликвидация проблемы неявки (No-Show)</a:t>
+            </a:r>
+          </a:p>
+          <a:p>
+            <a:pPr>
+              <a:spcBef>
+                <a:spcPts val="800"/>
+              </a:spcBef>
+              <a:defRPr sz="1050">
+                <a:solidFill>
+                  <a:srgbClr val="F4F2EE"/>
+                </a:solidFill>
+              </a:defRPr>
+            </a:pPr>
+            <a:r>
+              <a:t>• В CustDev 6 из 10 гостей подтвердили готовность внести аванс 5 000 – 10 000 ₸ ради гарантии лучшего стола</a:t>
+            </a:r>
+          </a:p>
+          <a:p>
+            <a:pPr>
+              <a:spcBef>
+                <a:spcPts val="800"/>
+              </a:spcBef>
+              <a:defRPr sz="1050">
+                <a:solidFill>
+                  <a:srgbClr val="F4F2EE"/>
+                </a:solidFill>
+              </a:defRPr>
+            </a:pPr>
+            <a:r>
+              <a:t>• Дополнительный финтех-поток монетизации</a:t>
+            </a:r>
+          </a:p>
+        </p:txBody>
+      </p:sp>
+      <p:sp>
+        <p:nvSpPr>
+          <p:cNvPr id="10" name="Rounded Rectangle 9"/>
+          <p:cNvSpPr/>
+          <p:nvPr/>
+        </p:nvSpPr>
+        <p:spPr>
+          <a:xfrm>
+            <a:off x="7955280" y="1645920"/>
+            <a:ext cx="3474720" cy="4663440"/>
+          </a:xfrm>
+          <a:prstGeom prst="roundRect">
+            <a:avLst/>
+          </a:prstGeom>
+          <a:solidFill>
+            <a:srgbClr val="15171D"/>
+          </a:solidFill>
+          <a:ln w="12700">
+            <a:solidFill>
+              <a:srgbClr val="FBBF24"/>
+            </a:solidFill>
+          </a:ln>
+        </p:spPr>
+        <p:style>
+          <a:lnRef idx="1">
+            <a:schemeClr val="accent1"/>
+          </a:lnRef>
+          <a:fillRef idx="3">
+            <a:schemeClr val="accent1"/>
+          </a:fillRef>
+          <a:effectRef idx="2">
+            <a:schemeClr val="accent1"/>
+          </a:effectRef>
+          <a:fontRef idx="minor">
+            <a:schemeClr val="lt1"/>
+          </a:fontRef>
+        </p:style>
+        <p:txBody>
+          <a:bodyPr rtlCol="0" anchor="ctr"/>
+          <a:lstStyle/>
+          <a:p>
+            <a:pPr algn="ctr"/>
+          </a:p>
+        </p:txBody>
+      </p:sp>
+      <p:sp>
+        <p:nvSpPr>
+          <p:cNvPr id="11" name="TextBox 10"/>
+          <p:cNvSpPr txBox="1"/>
+          <p:nvPr/>
+        </p:nvSpPr>
+        <p:spPr>
+          <a:xfrm>
+            <a:off x="8138160" y="1828800"/>
+            <a:ext cx="3108960" cy="4297680"/>
+          </a:xfrm>
+          <a:prstGeom prst="rect">
+            <a:avLst/>
+          </a:prstGeom>
+          <a:noFill/>
+        </p:spPr>
+        <p:txBody>
+          <a:bodyPr wrap="square">
+            <a:spAutoFit/>
+          </a:bodyPr>
+          <a:lstStyle/>
+          <a:p>
+            <a:pPr>
+              <a:defRPr sz="1300" b="1">
+                <a:solidFill>
+                  <a:srgbClr val="FBBF24"/>
+                </a:solidFill>
+              </a:defRPr>
+            </a:pPr>
+            <a:r>
+              <a:t>Q1 2027: AI-Голос &amp; WhatsApp API</a:t>
+            </a:r>
+          </a:p>
+          <a:p>
+            <a:pPr>
+              <a:spcBef>
+                <a:spcPts val="800"/>
+              </a:spcBef>
+              <a:defRPr sz="1050">
+                <a:solidFill>
+                  <a:srgbClr val="F4F2EE"/>
+                </a:solidFill>
+              </a:defRPr>
+            </a:pPr>
+            <a:r>
+              <a:t>• Голосовой AI-ассистент для автоматического приема звонков по телефону на казахском и русском языках</a:t>
+            </a:r>
+          </a:p>
+          <a:p>
+            <a:pPr>
+              <a:spcBef>
+                <a:spcPts val="800"/>
+              </a:spcBef>
+              <a:defRPr sz="1050">
+                <a:solidFill>
+                  <a:srgbClr val="F4F2EE"/>
+                </a:solidFill>
+              </a:defRPr>
+            </a:pPr>
+            <a:r>
+              <a:t>• Официальный WhatsApp Business API шлюз для автоматических ответов на стандартные вопросы</a:t>
+            </a:r>
+          </a:p>
+          <a:p>
+            <a:pPr>
+              <a:spcBef>
+                <a:spcPts val="800"/>
+              </a:spcBef>
+              <a:defRPr sz="1050">
+                <a:solidFill>
+                  <a:srgbClr val="F4F2EE"/>
+                </a:solidFill>
+              </a:defRPr>
+            </a:pPr>
+            <a:r>
+              <a:t>• Масштабирование на Алматы, Астану, Ташкент и Баку</a:t>
+            </a:r>
+          </a:p>
+        </p:txBody>
+      </p:sp>
+    </p:spTree>
+  </p:cSld>
+  <p:clrMapOvr>
+    <a:masterClrMapping/>
+  </p:clrMapOvr>
+</p:sld>
+</file>
+
+<file path=ppt/slides/slide15.xml><?xml version="1.0" encoding="utf-8"?>
+<p:sld xmlns:a="http://schemas.openxmlformats.org/drawingml/2006/main" xmlns:p="http://schemas.openxmlformats.org/presentationml/2006/main" xmlns:r="http://schemas.openxmlformats.org/officeDocument/2006/relationships">
+  <p:cSld>
+    <p:spTree>
+      <p:nvGrpSpPr>
+        <p:cNvPr id="1" name=""/>
+        <p:cNvGrpSpPr/>
+        <p:nvPr/>
+      </p:nvGrpSpPr>
+      <p:grpSpPr/>
+      <p:sp>
+        <p:nvSpPr>
+          <p:cNvPr id="2" name="Rectangle 1"/>
+          <p:cNvSpPr/>
+          <p:nvPr/>
+        </p:nvSpPr>
+        <p:spPr>
+          <a:xfrm>
+            <a:off x="0" y="0"/>
+            <a:ext cx="12191695" cy="6858000"/>
+          </a:xfrm>
+          <a:prstGeom prst="rect">
+            <a:avLst/>
+          </a:prstGeom>
+          <a:solidFill>
+            <a:srgbClr val="0E1013"/>
+          </a:solidFill>
+          <a:ln>
+            <a:noFill/>
+          </a:ln>
+        </p:spPr>
+        <p:style>
+          <a:lnRef idx="1">
+            <a:schemeClr val="accent1"/>
+          </a:lnRef>
+          <a:fillRef idx="3">
+            <a:schemeClr val="accent1"/>
+          </a:fillRef>
+          <a:effectRef idx="2">
+            <a:schemeClr val="accent1"/>
+          </a:effectRef>
+          <a:fontRef idx="minor">
+            <a:schemeClr val="lt1"/>
+          </a:fontRef>
+        </p:style>
+        <p:txBody>
+          <a:bodyPr rtlCol="0" anchor="ctr"/>
+          <a:lstStyle/>
+          <a:p>
+            <a:pPr algn="ctr"/>
+          </a:p>
+        </p:txBody>
+      </p:sp>
+      <p:sp>
+        <p:nvSpPr>
+          <p:cNvPr id="3" name="TextBox 2"/>
+          <p:cNvSpPr txBox="1"/>
+          <p:nvPr/>
+        </p:nvSpPr>
+        <p:spPr>
+          <a:xfrm>
+            <a:off x="731520" y="365760"/>
+            <a:ext cx="10698480" cy="320040"/>
+          </a:xfrm>
+          <a:prstGeom prst="rect">
+            <a:avLst/>
+          </a:prstGeom>
+          <a:noFill/>
+        </p:spPr>
+        <p:txBody>
+          <a:bodyPr wrap="square" lIns="0" tIns="0" rIns="0" bIns="0">
+            <a:spAutoFit/>
+          </a:bodyPr>
+          <a:lstStyle/>
+          <a:p>
+            <a:pPr>
+              <a:defRPr sz="1000" b="1">
+                <a:solidFill>
+                  <a:srgbClr val="C5A880"/>
+                </a:solidFill>
+                <a:latin typeface="Segoe UI"/>
+              </a:defRPr>
+            </a:pPr>
+            <a:r>
+              <a:t>ДЕМОНСТРАЦИЯ И КОНТАКТЫ</a:t>
+            </a:r>
+          </a:p>
+        </p:txBody>
+      </p:sp>
+      <p:sp>
+        <p:nvSpPr>
+          <p:cNvPr id="4" name="TextBox 3"/>
+          <p:cNvSpPr txBox="1"/>
+          <p:nvPr/>
+        </p:nvSpPr>
+        <p:spPr>
+          <a:xfrm>
+            <a:off x="731520" y="658368"/>
+            <a:ext cx="10698480" cy="502920"/>
+          </a:xfrm>
+          <a:prstGeom prst="rect">
+            <a:avLst/>
+          </a:prstGeom>
+          <a:noFill/>
+        </p:spPr>
+        <p:txBody>
+          <a:bodyPr wrap="square" lIns="0" tIns="0" rIns="0" bIns="0">
+            <a:spAutoFit/>
+          </a:bodyPr>
+          <a:lstStyle/>
+          <a:p>
+            <a:pPr>
+              <a:defRPr sz="2100" b="1">
+                <a:solidFill>
+                  <a:srgbClr val="F4F2EE"/>
+                </a:solidFill>
+                <a:latin typeface="Georgia"/>
+              </a:defRPr>
+            </a:pPr>
+            <a:r>
+              <a:t>Протестируйте систему RestoKZ прямо сейчас</a:t>
+            </a:r>
+          </a:p>
+        </p:txBody>
+      </p:sp>
+      <p:sp>
+        <p:nvSpPr>
+          <p:cNvPr id="5" name="TextBox 4"/>
+          <p:cNvSpPr txBox="1"/>
+          <p:nvPr/>
+        </p:nvSpPr>
+        <p:spPr>
+          <a:xfrm>
+            <a:off x="731520" y="1170432"/>
+            <a:ext cx="10698480" cy="320040"/>
+          </a:xfrm>
+          <a:prstGeom prst="rect">
+            <a:avLst/>
+          </a:prstGeom>
+          <a:noFill/>
+        </p:spPr>
+        <p:txBody>
+          <a:bodyPr wrap="square" lIns="0" tIns="0" rIns="0" bIns="0">
+            <a:spAutoFit/>
+          </a:bodyPr>
+          <a:lstStyle/>
+          <a:p>
+            <a:pPr>
+              <a:defRPr sz="1150">
+                <a:solidFill>
+                  <a:srgbClr val="9CA3AF"/>
+                </a:solidFill>
+                <a:latin typeface="Segoe UI"/>
+              </a:defRPr>
+            </a:pPr>
+            <a:r>
+              <a:t>Готовое боевое решение, готовое к пилотному внедрению в заведениях уже сегодня</a:t>
+            </a:r>
+          </a:p>
+        </p:txBody>
+      </p:sp>
+      <p:sp>
+        <p:nvSpPr>
+          <p:cNvPr id="6" name="Rounded Rectangle 5"/>
+          <p:cNvSpPr/>
+          <p:nvPr/>
+        </p:nvSpPr>
+        <p:spPr>
+          <a:xfrm>
+            <a:off x="731520" y="1645920"/>
+            <a:ext cx="5486400" cy="4663440"/>
+          </a:xfrm>
+          <a:prstGeom prst="roundRect">
+            <a:avLst/>
+          </a:prstGeom>
+          <a:solidFill>
+            <a:srgbClr val="15171D"/>
+          </a:solidFill>
+          <a:ln w="12700">
+            <a:solidFill>
+              <a:srgbClr val="323741"/>
+            </a:solidFill>
+          </a:ln>
+        </p:spPr>
+        <p:style>
+          <a:lnRef idx="1">
+            <a:schemeClr val="accent1"/>
+          </a:lnRef>
+          <a:fillRef idx="3">
+            <a:schemeClr val="accent1"/>
+          </a:fillRef>
+          <a:effectRef idx="2">
+            <a:schemeClr val="accent1"/>
+          </a:effectRef>
+          <a:fontRef idx="minor">
+            <a:schemeClr val="lt1"/>
+          </a:fontRef>
+        </p:style>
+        <p:txBody>
+          <a:bodyPr rtlCol="0" anchor="ctr"/>
+          <a:lstStyle/>
+          <a:p>
+            <a:pPr algn="ctr"/>
+          </a:p>
+        </p:txBody>
+      </p:sp>
+      <p:sp>
+        <p:nvSpPr>
+          <p:cNvPr id="7" name="TextBox 6"/>
+          <p:cNvSpPr txBox="1"/>
+          <p:nvPr/>
+        </p:nvSpPr>
+        <p:spPr>
+          <a:xfrm>
+            <a:off x="1005840" y="1828800"/>
+            <a:ext cx="4937760" cy="4297680"/>
+          </a:xfrm>
+          <a:prstGeom prst="rect">
+            <a:avLst/>
+          </a:prstGeom>
+          <a:noFill/>
+        </p:spPr>
+        <p:txBody>
+          <a:bodyPr wrap="square">
+            <a:spAutoFit/>
+          </a:bodyPr>
+          <a:lstStyle/>
+          <a:p>
+            <a:pPr>
+              <a:defRPr sz="1300" b="1">
+                <a:solidFill>
+                  <a:srgbClr val="C5A880"/>
+                </a:solidFill>
+              </a:defRPr>
+            </a:pPr>
+            <a:r>
+              <a:t>🚀 ССЫЛКИ ДЛЯ ТЕСТИРОВАНИЯ В РЕАЛЬНОМ ВРЕМЕНИ</a:t>
             </a:r>
           </a:p>
           <a:p>
@@ -5428,14 +7776,14 @@
               <a:spcBef>
                 <a:spcPts val="1000"/>
               </a:spcBef>
-              <a:defRPr sz="1150" b="1">
-                <a:solidFill>
-                  <a:srgbClr val="34D399"/>
-                </a:solidFill>
-              </a:defRPr>
-            </a:pPr>
-            <a:r>
-              <a:t>Реализовано (v2.4 Live)</a:t>
+              <a:defRPr sz="1100" b="1">
+                <a:solidFill>
+                  <a:srgbClr val="DFCAAB"/>
+                </a:solidFill>
+              </a:defRPr>
+            </a:pPr>
+            <a:r>
+              <a:t>🍽 Гостевая витрина Mini App (Live):</a:t>
             </a:r>
           </a:p>
           <a:p>
@@ -5443,14 +7791,29 @@
               <a:spcBef>
                 <a:spcPts val="200"/>
               </a:spcBef>
-              <a:defRPr sz="1000">
+              <a:defRPr sz="1050">
                 <a:solidFill>
                   <a:srgbClr val="F4F2EE"/>
                 </a:solidFill>
               </a:defRPr>
             </a:pPr>
             <a:r>
-              <a:t>• Полноценный гостевой WebApp с выбором залов и блюд</a:t>
+              <a:t>https://sp1ceman.github.io/restokz-bot/</a:t>
+            </a:r>
+          </a:p>
+          <a:p>
+            <a:pPr>
+              <a:spcBef>
+                <a:spcPts val="1000"/>
+              </a:spcBef>
+              <a:defRPr sz="1100" b="1">
+                <a:solidFill>
+                  <a:srgbClr val="DFCAAB"/>
+                </a:solidFill>
+              </a:defRPr>
+            </a:pPr>
+            <a:r>
+              <a:t>👑 Терминал хостес RestoKZ PRO:</a:t>
             </a:r>
           </a:p>
           <a:p>
@@ -5458,14 +7821,29 @@
               <a:spcBef>
                 <a:spcPts val="200"/>
               </a:spcBef>
-              <a:defRPr sz="1000">
+              <a:defRPr sz="1050">
                 <a:solidFill>
                   <a:srgbClr val="F4F2EE"/>
                 </a:solidFill>
               </a:defRPr>
             </a:pPr>
             <a:r>
-              <a:t>• Терминал хостес с интерактивной шахматкой столов</a:t>
+              <a:t>https://sp1ceman.github.io/restokz-bot/admin.html</a:t>
+            </a:r>
+          </a:p>
+          <a:p>
+            <a:pPr>
+              <a:spcBef>
+                <a:spcPts val="1000"/>
+              </a:spcBef>
+              <a:defRPr sz="1100" b="1">
+                <a:solidFill>
+                  <a:srgbClr val="DFCAAB"/>
+                </a:solidFill>
+              </a:defRPr>
+            </a:pPr>
+            <a:r>
+              <a:t>📊 Интерактивная Web-презентация:</a:t>
             </a:r>
           </a:p>
           <a:p>
@@ -5473,14 +7851,29 @@
               <a:spcBef>
                 <a:spcPts val="200"/>
               </a:spcBef>
-              <a:defRPr sz="1000">
+              <a:defRPr sz="1050">
                 <a:solidFill>
                   <a:srgbClr val="F4F2EE"/>
                 </a:solidFill>
               </a:defRPr>
             </a:pPr>
             <a:r>
-              <a:t>• Управление сменой, Z-отчеты и звуковые гонг-оповещения</a:t>
+              <a:t>https://sp1ceman.github.io/restokz-bot/presentation.html</a:t>
+            </a:r>
+          </a:p>
+          <a:p>
+            <a:pPr>
+              <a:spcBef>
+                <a:spcPts val="1000"/>
+              </a:spcBef>
+              <a:defRPr sz="1100" b="1">
+                <a:solidFill>
+                  <a:srgbClr val="DFCAAB"/>
+                </a:solidFill>
+              </a:defRPr>
+            </a:pPr>
+            <a:r>
+              <a:t>💬 Telegram бот сервиса:</a:t>
             </a:r>
           </a:p>
           <a:p>
@@ -5488,14 +7881,14 @@
               <a:spcBef>
                 <a:spcPts val="200"/>
               </a:spcBef>
-              <a:defRPr sz="1000">
+              <a:defRPr sz="1050">
                 <a:solidFill>
                   <a:srgbClr val="F4F2EE"/>
                 </a:solidFill>
               </a:defRPr>
             </a:pPr>
             <a:r>
-              <a:t>• Мультилокация и регистрация ресторанов</a:t>
+              <a:t>@RestoKZ_Bot</a:t>
             </a:r>
           </a:p>
           <a:p>
@@ -5503,14 +7896,14 @@
               <a:spcBef>
                 <a:spcPts val="1000"/>
               </a:spcBef>
-              <a:defRPr sz="1150" b="1">
-                <a:solidFill>
-                  <a:srgbClr val="38BDF8"/>
-                </a:solidFill>
-              </a:defRPr>
-            </a:pPr>
-            <a:r>
-              <a:t>Q4 2026: Kaspi QR Депозиты</a:t>
+              <a:defRPr sz="1100" b="1">
+                <a:solidFill>
+                  <a:srgbClr val="DFCAAB"/>
+                </a:solidFill>
+              </a:defRPr>
+            </a:pPr>
+            <a:r>
+              <a:t>⚡ Время подключения точки:</a:t>
             </a:r>
           </a:p>
           <a:p>
@@ -5518,74 +7911,14 @@
               <a:spcBef>
                 <a:spcPts val="200"/>
               </a:spcBef>
-              <a:defRPr sz="1000">
+              <a:defRPr sz="1050">
                 <a:solidFill>
                   <a:srgbClr val="F4F2EE"/>
                 </a:solidFill>
               </a:defRPr>
             </a:pPr>
             <a:r>
-              <a:t>• Интеграция онлайн-депозитов через Kaspi QR для банкетов</a:t>
-            </a:r>
-          </a:p>
-          <a:p>
-            <a:pPr>
-              <a:spcBef>
-                <a:spcPts val="200"/>
-              </a:spcBef>
-              <a:defRPr sz="1000">
-                <a:solidFill>
-                  <a:srgbClr val="F4F2EE"/>
-                </a:solidFill>
-              </a:defRPr>
-            </a:pPr>
-            <a:r>
-              <a:t>• 100% защита от неявки гостей (No-Show)</a:t>
-            </a:r>
-          </a:p>
-          <a:p>
-            <a:pPr>
-              <a:spcBef>
-                <a:spcPts val="1000"/>
-              </a:spcBef>
-              <a:defRPr sz="1150" b="1">
-                <a:solidFill>
-                  <a:srgbClr val="FBBF24"/>
-                </a:solidFill>
-              </a:defRPr>
-            </a:pPr>
-            <a:r>
-              <a:t>Q1 2027: AI-Консьерж &amp; WhatsApp</a:t>
-            </a:r>
-          </a:p>
-          <a:p>
-            <a:pPr>
-              <a:spcBef>
-                <a:spcPts val="200"/>
-              </a:spcBef>
-              <a:defRPr sz="1000">
-                <a:solidFill>
-                  <a:srgbClr val="F4F2EE"/>
-                </a:solidFill>
-              </a:defRPr>
-            </a:pPr>
-            <a:r>
-              <a:t>• Голосовой AI-ассистент для приема броней по телефону</a:t>
-            </a:r>
-          </a:p>
-          <a:p>
-            <a:pPr>
-              <a:spcBef>
-                <a:spcPts val="200"/>
-              </a:spcBef>
-              <a:defRPr sz="1000">
-                <a:solidFill>
-                  <a:srgbClr val="F4F2EE"/>
-                </a:solidFill>
-              </a:defRPr>
-            </a:pPr>
-            <a:r>
-              <a:t>• Официальный WhatsApp Business API шлюз</a:t>
+              <a:t>Менее 1 дня на личном смартфоне хостес без покупки оборудования.</a:t>
             </a:r>
           </a:p>
         </p:txBody>
@@ -5665,7 +7998,7 @@
               </a:defRPr>
             </a:pPr>
             <a:r>
-              <a:t>🚀 ПРОТЕСТИРУЙТЕ СИСТЕМУ ПРЯМО СЕЙЧАС</a:t>
+              <a:t>💡 РЕЗЮМЕ ДЛЯ ИНВЕСТОРА</a:t>
             </a:r>
           </a:p>
           <a:p>
@@ -5680,7 +8013,7 @@
               </a:defRPr>
             </a:pPr>
             <a:r>
-              <a:t>🍽 Гостевое приложение (Live Демо):</a:t>
+              <a:t>• Рынок проверен фактами:</a:t>
             </a:r>
           </a:p>
           <a:p>
@@ -5688,14 +8021,14 @@
               <a:spcBef>
                 <a:spcPts val="200"/>
               </a:spcBef>
-              <a:defRPr sz="1050">
+              <a:defRPr sz="1000">
                 <a:solidFill>
                   <a:srgbClr val="F4F2EE"/>
                 </a:solidFill>
               </a:defRPr>
             </a:pPr>
             <a:r>
-              <a:t>https://sp1ceman.github.io/restokz-bot/</a:t>
+              <a:t>Проведено 20 глубинных интервью. Боль No-Show и коллапс WhatsApp подтверждены 100% заведений.</a:t>
             </a:r>
           </a:p>
           <a:p>
@@ -5710,7 +8043,7 @@
               </a:defRPr>
             </a:pPr>
             <a:r>
-              <a:t>👑 Терминал хостес RestoKZ PRO:</a:t>
+              <a:t>• Unit-экономика сходится:</a:t>
             </a:r>
           </a:p>
           <a:p>
@@ -5718,14 +8051,14 @@
               <a:spcBef>
                 <a:spcPts val="200"/>
               </a:spcBef>
-              <a:defRPr sz="1050">
+              <a:defRPr sz="1000">
                 <a:solidFill>
                   <a:srgbClr val="F4F2EE"/>
                 </a:solidFill>
               </a:defRPr>
             </a:pPr>
             <a:r>
-              <a:t>https://sp1ceman.github.io/restokz-bot/admin.html</a:t>
+              <a:t>Тариф 49 000 ₸ окупается ресторану за 1 банкетный стол в месяц. Очевидный ROI.</a:t>
             </a:r>
           </a:p>
           <a:p>
@@ -5740,7 +8073,7 @@
               </a:defRPr>
             </a:pPr>
             <a:r>
-              <a:t>💬 Telegram бот:</a:t>
+              <a:t>• Защитный ров (Local Moat):</a:t>
             </a:r>
           </a:p>
           <a:p>
@@ -5748,14 +8081,14 @@
               <a:spcBef>
                 <a:spcPts val="200"/>
               </a:spcBef>
-              <a:defRPr sz="1050">
+              <a:defRPr sz="1000">
                 <a:solidFill>
                   <a:srgbClr val="F4F2EE"/>
                 </a:solidFill>
               </a:defRPr>
             </a:pPr>
             <a:r>
-              <a:t>@RestoKZ_Bot</a:t>
+              <a:t>Учет менталитета Казахстана (топчаны, VIP, язык, звонки Баке) защищает от глобальных гигантов.</a:t>
             </a:r>
           </a:p>
           <a:p>
@@ -5770,7 +8103,7 @@
               </a:defRPr>
             </a:pPr>
             <a:r>
-              <a:t>💼 Готовность к внедрению:</a:t>
+              <a:t>• Команда и готовность:</a:t>
             </a:r>
           </a:p>
           <a:p>
@@ -5778,14 +8111,14 @@
               <a:spcBef>
                 <a:spcPts val="200"/>
               </a:spcBef>
-              <a:defRPr sz="1050">
+              <a:defRPr sz="1000">
                 <a:solidFill>
                   <a:srgbClr val="F4F2EE"/>
                 </a:solidFill>
               </a:defRPr>
             </a:pPr>
             <a:r>
-              <a:t>Запуск пилотного ресторана занимает менее 1 дня без необходимости покупки дорогого оборудования — работает на любом смартфоне хостес.</a:t>
+              <a:t>Продукт работает в продакшене. Пилотный запуск 30 ресторанов начинается сразу после раунда.</a:t>
             </a:r>
           </a:p>
         </p:txBody>
@@ -5910,7 +8243,7 @@
           <a:lstStyle/>
           <a:p>
             <a:pPr>
-              <a:defRPr sz="2200" b="1">
+              <a:defRPr sz="2100" b="1">
                 <a:solidFill>
                   <a:srgbClr val="F4F2EE"/>
                 </a:solidFill>
@@ -5931,7 +8264,7 @@
         </p:nvSpPr>
         <p:spPr>
           <a:xfrm>
-            <a:off x="731520" y="1188720"/>
+            <a:off x="731520" y="1170432"/>
             <a:ext cx="10698480" cy="320040"/>
           </a:xfrm>
           <a:prstGeom prst="rect">
@@ -5946,7 +8279,7 @@
           <a:lstStyle/>
           <a:p>
             <a:pPr>
-              <a:defRPr sz="1200">
+              <a:defRPr sz="1150">
                 <a:solidFill>
                   <a:srgbClr val="9CA3AF"/>
                 </a:solidFill>
@@ -6034,7 +8367,7 @@
               </a:defRPr>
             </a:pPr>
             <a:r>
-              <a:t>1. Хаос в WhatsApp и бумажных журналах</a:t>
+              <a:t>1. Хаос в WhatsApp и блокнотах</a:t>
             </a:r>
           </a:p>
           <a:p>
@@ -6049,7 +8382,7 @@
               </a:defRPr>
             </a:pPr>
             <a:r>
-              <a:t>📞 Ручная переписка отнимает до 3-4 часов времени хостес в день</a:t>
+              <a:t>📞 Ручная переписка отнимает 3-4 часа хостес в день</a:t>
             </a:r>
           </a:p>
           <a:p>
@@ -6064,7 +8397,7 @@
               </a:defRPr>
             </a:pPr>
             <a:r>
-              <a:t>⏳ В часы пик до 30% входящих звонков и сообщений остаются без ответа</a:t>
+              <a:t>⏳ В часы пик до 30% входящих звонков и аудио без ответа</a:t>
             </a:r>
           </a:p>
           <a:p>
@@ -6079,7 +8412,7 @@
               </a:defRPr>
             </a:pPr>
             <a:r>
-              <a:t>📝 Потери броней из-за неразборчивых записей, путаницы столов и смен</a:t>
+              <a:t>📝 Потери броней из-за неразборчивых записей в тетрадях</a:t>
             </a:r>
           </a:p>
           <a:p>
@@ -6094,7 +8427,7 @@
               </a:defRPr>
             </a:pPr>
             <a:r>
-              <a:t>📉 Нет единой прозрачной истории гостя и его предпочтений</a:t>
+              <a:t>📉 Нет единой базы гостей и истории посещений</a:t>
             </a:r>
           </a:p>
         </p:txBody>
@@ -6174,7 +8507,7 @@
               </a:defRPr>
             </a:pPr>
             <a:r>
-              <a:t>2. Эпидемия No-Show и пустые брони</a:t>
+              <a:t>2. Эпидемия No-Show (неявки)</a:t>
             </a:r>
           </a:p>
           <a:p>
@@ -6189,7 +8522,7 @@
               </a:defRPr>
             </a:pPr>
             <a:r>
-              <a:t>❌ 20-25% забронированных столов в пятницу и субботу пустуют</a:t>
+              <a:t>❌ 20-25% забронированных столов в выходные пустуют</a:t>
             </a:r>
           </a:p>
           <a:p>
@@ -6204,7 +8537,7 @@
               </a:defRPr>
             </a:pPr>
             <a:r>
-              <a:t>🤷 Гости бронируют сразу 2-3 места и приходят в одно, не предупреждая</a:t>
+              <a:t>🤷 Гости бронируют 2-3 места сразу и не предупреждают</a:t>
             </a:r>
           </a:p>
           <a:p>
@@ -6219,7 +8552,7 @@
               </a:defRPr>
             </a:pPr>
             <a:r>
-              <a:t>💸 Ресторан отказывает реальным гостям («у нас всё занято»), а стол пуст</a:t>
+              <a:t>💸 Ресторан отказывает гостям у двери («все занято»), а стол пуст</a:t>
             </a:r>
           </a:p>
           <a:p>
@@ -6234,7 +8567,7 @@
               </a:defRPr>
             </a:pPr>
             <a:r>
-              <a:t>💔 Прямые финансовые потери: от 80 000 до 350 000 ₸ за один вечер</a:t>
+              <a:t>💔 Прямой убыток: от 100 000 до 450 000 ₸ за один вечер</a:t>
             </a:r>
           </a:p>
         </p:txBody>
@@ -6314,7 +8647,7 @@
               </a:defRPr>
             </a:pPr>
             <a:r>
-              <a:t>3. Ловушка агрегаторов и тяжелых систем</a:t>
+              <a:t>3. Ловушка комиссий агрегаторов</a:t>
             </a:r>
           </a:p>
           <a:p>
@@ -6329,7 +8662,7 @@
               </a:defRPr>
             </a:pPr>
             <a:r>
-              <a:t>💳 Агрегаторы берут 10-15% комиссии или от 500 ₸ за каждого гостя</a:t>
+              <a:t>💳 Агрегаторы берут 10-15% с чека или от 500 ₸ за гостя</a:t>
             </a:r>
           </a:p>
           <a:p>
@@ -6344,7 +8677,7 @@
               </a:defRPr>
             </a:pPr>
             <a:r>
-              <a:t>💻 Кассовые ERP (iiko, R-Keeper) перегружены и неудобны на смартфонах</a:t>
+              <a:t>💻 Кассовые POS (iiko/R-Keeper) тяжелы для смартфонов</a:t>
             </a:r>
           </a:p>
           <a:p>
@@ -6359,7 +8692,7 @@
               </a:defRPr>
             </a:pPr>
             <a:r>
-              <a:t>📱 У хостес нет легкого мобильного терминала для оперативной посадки</a:t>
+              <a:t>📱 У хостес нет легкого мобильного терминала для зала</a:t>
             </a:r>
           </a:p>
           <a:p>
@@ -6374,7 +8707,7 @@
               </a:defRPr>
             </a:pPr>
             <a:r>
-              <a:t>🔒 Данные гостей остаются у сторонних сервисов, а не у ресторана</a:t>
+              <a:t>🔒 База гостей остается у сторонних сервисов</a:t>
             </a:r>
           </a:p>
         </p:txBody>
@@ -6471,7 +8804,7 @@
               </a:defRPr>
             </a:pPr>
             <a:r>
-              <a:t>РЕШЕНИЕ ПЛАТФОРМЫ</a:t>
+              <a:t>ПРОДУКТОВАЯ ВАЛИДАЦИЯ</a:t>
             </a:r>
           </a:p>
         </p:txBody>
@@ -6499,7 +8832,7 @@
           <a:lstStyle/>
           <a:p>
             <a:pPr>
-              <a:defRPr sz="2200" b="1">
+              <a:defRPr sz="2100" b="1">
                 <a:solidFill>
                   <a:srgbClr val="F4F2EE"/>
                 </a:solidFill>
@@ -6507,7 +8840,7 @@
               </a:defRPr>
             </a:pPr>
             <a:r>
-              <a:t>RestoKZ: Единая двусторонняя цифровая экосистема</a:t>
+              <a:t>Customer Development: 6 гипотез, проверенных на 20 интервью</a:t>
             </a:r>
           </a:p>
         </p:txBody>
@@ -6520,7 +8853,7 @@
         </p:nvSpPr>
         <p:spPr>
           <a:xfrm>
-            <a:off x="731520" y="1188720"/>
+            <a:off x="731520" y="1170432"/>
             <a:ext cx="10698480" cy="320040"/>
           </a:xfrm>
           <a:prstGeom prst="rect">
@@ -6535,7 +8868,7 @@
           <a:lstStyle/>
           <a:p>
             <a:pPr>
-              <a:defRPr sz="1200">
+              <a:defRPr sz="1150">
                 <a:solidFill>
                   <a:srgbClr val="9CA3AF"/>
                 </a:solidFill>
@@ -6543,351 +8876,697 @@
               </a:defRPr>
             </a:pPr>
             <a:r>
-              <a:t>Связка клиента и ресторана в режиме реального времени без сторонних приложений</a:t>
-            </a:r>
-          </a:p>
-        </p:txBody>
-      </p:sp>
-      <p:sp>
-        <p:nvSpPr>
-          <p:cNvPr id="6" name="Rounded Rectangle 5"/>
-          <p:cNvSpPr/>
-          <p:nvPr/>
-        </p:nvSpPr>
-        <p:spPr>
-          <a:xfrm>
-            <a:off x="731520" y="1645920"/>
-            <a:ext cx="5212080" cy="4663440"/>
-          </a:xfrm>
-          <a:prstGeom prst="roundRect">
-            <a:avLst/>
-          </a:prstGeom>
-          <a:solidFill>
-            <a:srgbClr val="15171D"/>
-          </a:solidFill>
-          <a:ln w="12700">
-            <a:solidFill>
-              <a:srgbClr val="38BDF8"/>
-            </a:solidFill>
-          </a:ln>
-        </p:spPr>
-        <p:style>
-          <a:lnRef idx="1">
-            <a:schemeClr val="accent1"/>
-          </a:lnRef>
-          <a:fillRef idx="3">
-            <a:schemeClr val="accent1"/>
-          </a:fillRef>
-          <a:effectRef idx="2">
-            <a:schemeClr val="accent1"/>
-          </a:effectRef>
-          <a:fontRef idx="minor">
-            <a:schemeClr val="lt1"/>
-          </a:fontRef>
-        </p:style>
-        <p:txBody>
-          <a:bodyPr rtlCol="0" anchor="ctr"/>
-          <a:lstStyle/>
-          <a:p>
-            <a:pPr algn="ctr"/>
-          </a:p>
-        </p:txBody>
-      </p:sp>
-      <p:sp>
-        <p:nvSpPr>
-          <p:cNvPr id="7" name="TextBox 6"/>
-          <p:cNvSpPr txBox="1"/>
-          <p:nvPr/>
-        </p:nvSpPr>
-        <p:spPr>
-          <a:xfrm>
-            <a:off x="1005840" y="1828800"/>
-            <a:ext cx="4663440" cy="4297680"/>
-          </a:xfrm>
-          <a:prstGeom prst="rect">
-            <a:avLst/>
-          </a:prstGeom>
-          <a:noFill/>
-        </p:spPr>
-        <p:txBody>
-          <a:bodyPr wrap="square">
-            <a:spAutoFit/>
-          </a:bodyPr>
-          <a:lstStyle/>
-          <a:p>
-            <a:pPr>
-              <a:defRPr sz="1400" b="1">
-                <a:solidFill>
-                  <a:srgbClr val="38BDF8"/>
-                </a:solidFill>
-              </a:defRPr>
-            </a:pPr>
-            <a:r>
-              <a:t>🍽 ДЛЯ ГОСТЯ (B2C WEBAPP)</a:t>
-            </a:r>
-          </a:p>
-          <a:p>
-            <a:pPr>
-              <a:spcBef>
-                <a:spcPts val="400"/>
-              </a:spcBef>
-              <a:defRPr sz="1100">
-                <a:solidFill>
-                  <a:srgbClr val="DFCAAB"/>
-                </a:solidFill>
-              </a:defRPr>
-            </a:pPr>
-            <a:r>
-              <a:t>Telegram Mini App — открывается мгновенно в 1 клик</a:t>
-            </a:r>
-          </a:p>
-          <a:p>
-            <a:pPr>
-              <a:spcBef>
-                <a:spcPts val="1000"/>
-              </a:spcBef>
-              <a:defRPr sz="1100">
-                <a:solidFill>
-                  <a:srgbClr val="F4F2EE"/>
-                </a:solidFill>
-              </a:defRPr>
-            </a:pPr>
-            <a:r>
-              <a:t>⚡ Бронирование за 30 секунд без скачивания приложений из App Store</a:t>
-            </a:r>
-          </a:p>
-          <a:p>
-            <a:pPr>
-              <a:spcBef>
-                <a:spcPts val="1000"/>
-              </a:spcBef>
-              <a:defRPr sz="1100">
-                <a:solidFill>
-                  <a:srgbClr val="F4F2EE"/>
-                </a:solidFill>
-              </a:defRPr>
-            </a:pPr>
-            <a:r>
-              <a:t>🪑 Интерактивный выбор понравившегося столика на реальной схеме зала</a:t>
-            </a:r>
-          </a:p>
-          <a:p>
-            <a:pPr>
-              <a:spcBef>
-                <a:spcPts val="1000"/>
-              </a:spcBef>
-              <a:defRPr sz="1100">
-                <a:solidFill>
-                  <a:srgbClr val="F4F2EE"/>
-                </a:solidFill>
-              </a:defRPr>
-            </a:pPr>
-            <a:r>
-              <a:t>📖 Просмотр фото интерьера, актуального меню и среднего чека</a:t>
-            </a:r>
-          </a:p>
-          <a:p>
-            <a:pPr>
-              <a:spcBef>
-                <a:spcPts val="1000"/>
-              </a:spcBef>
-              <a:defRPr sz="1100">
-                <a:solidFill>
-                  <a:srgbClr val="F4F2EE"/>
-                </a:solidFill>
-              </a:defRPr>
-            </a:pPr>
-            <a:r>
-              <a:t>🔔 Автоматические статусы и напоминания в Telegram (защита от забывчивости)</a:t>
-            </a:r>
-          </a:p>
-          <a:p>
-            <a:pPr>
-              <a:spcBef>
-                <a:spcPts val="1000"/>
-              </a:spcBef>
-              <a:defRPr sz="1100">
-                <a:solidFill>
-                  <a:srgbClr val="F4F2EE"/>
-                </a:solidFill>
-              </a:defRPr>
-            </a:pPr>
-            <a:r>
-              <a:t>🌐 Поддержка 3 языков (Казахский, Русский, Английский)</a:t>
-            </a:r>
-          </a:p>
-        </p:txBody>
-      </p:sp>
-      <p:sp>
-        <p:nvSpPr>
-          <p:cNvPr id="8" name="Rounded Rectangle 7"/>
-          <p:cNvSpPr/>
-          <p:nvPr/>
-        </p:nvSpPr>
-        <p:spPr>
-          <a:xfrm>
-            <a:off x="6217920" y="1645920"/>
-            <a:ext cx="5212080" cy="4663440"/>
-          </a:xfrm>
-          <a:prstGeom prst="roundRect">
-            <a:avLst/>
-          </a:prstGeom>
-          <a:solidFill>
-            <a:srgbClr val="15171D"/>
-          </a:solidFill>
-          <a:ln w="12700">
-            <a:solidFill>
-              <a:srgbClr val="C5A880"/>
-            </a:solidFill>
-          </a:ln>
-        </p:spPr>
-        <p:style>
-          <a:lnRef idx="1">
-            <a:schemeClr val="accent1"/>
-          </a:lnRef>
-          <a:fillRef idx="3">
-            <a:schemeClr val="accent1"/>
-          </a:fillRef>
-          <a:effectRef idx="2">
-            <a:schemeClr val="accent1"/>
-          </a:effectRef>
-          <a:fontRef idx="minor">
-            <a:schemeClr val="lt1"/>
-          </a:fontRef>
-        </p:style>
-        <p:txBody>
-          <a:bodyPr rtlCol="0" anchor="ctr"/>
-          <a:lstStyle/>
-          <a:p>
-            <a:pPr algn="ctr"/>
-          </a:p>
-        </p:txBody>
-      </p:sp>
-      <p:sp>
-        <p:nvSpPr>
-          <p:cNvPr id="9" name="TextBox 8"/>
-          <p:cNvSpPr txBox="1"/>
-          <p:nvPr/>
-        </p:nvSpPr>
-        <p:spPr>
-          <a:xfrm>
-            <a:off x="6492240" y="1828800"/>
-            <a:ext cx="4663440" cy="4297680"/>
-          </a:xfrm>
-          <a:prstGeom prst="rect">
-            <a:avLst/>
-          </a:prstGeom>
-          <a:noFill/>
-        </p:spPr>
-        <p:txBody>
-          <a:bodyPr wrap="square">
-            <a:spAutoFit/>
-          </a:bodyPr>
-          <a:lstStyle/>
-          <a:p>
-            <a:pPr>
-              <a:defRPr sz="1400" b="1">
-                <a:solidFill>
-                  <a:srgbClr val="C5A880"/>
-                </a:solidFill>
-              </a:defRPr>
-            </a:pPr>
-            <a:r>
-              <a:t>👑 ДЛЯ РЕСТОРАНА (RESTOKZ PRO B2B)</a:t>
-            </a:r>
-          </a:p>
-          <a:p>
-            <a:pPr>
-              <a:spcBef>
-                <a:spcPts val="400"/>
-              </a:spcBef>
-              <a:defRPr sz="1100">
-                <a:solidFill>
-                  <a:srgbClr val="DFCAAB"/>
-                </a:solidFill>
-              </a:defRPr>
-            </a:pPr>
-            <a:r>
-              <a:t>Мобильный терминал хостес и управляющего</a:t>
-            </a:r>
-          </a:p>
-          <a:p>
-            <a:pPr>
-              <a:spcBef>
-                <a:spcPts val="1000"/>
-              </a:spcBef>
-              <a:defRPr sz="1100">
-                <a:solidFill>
-                  <a:srgbClr val="F4F2EE"/>
-                </a:solidFill>
-              </a:defRPr>
-            </a:pPr>
-            <a:r>
-              <a:t>📋 Живой журнал заявок со статусами (Новые, В брони, За столом, Отмена)</a:t>
-            </a:r>
-          </a:p>
-          <a:p>
-            <a:pPr>
-              <a:spcBef>
-                <a:spcPts val="1000"/>
-              </a:spcBef>
-              <a:defRPr sz="1100">
-                <a:solidFill>
-                  <a:srgbClr val="F4F2EE"/>
-                </a:solidFill>
-              </a:defRPr>
-            </a:pPr>
-            <a:r>
-              <a:t>🎯 Умные контекстные кнопки действий в 1 клик (Подтвердить / Посадить)</a:t>
-            </a:r>
-          </a:p>
-          <a:p>
-            <a:pPr>
-              <a:spcBef>
-                <a:spcPts val="1000"/>
-              </a:spcBef>
-              <a:defRPr sz="1100">
-                <a:solidFill>
-                  <a:srgbClr val="F4F2EE"/>
-                </a:solidFill>
-              </a:defRPr>
-            </a:pPr>
-            <a:r>
-              <a:t>🗺 Интерактивная карта зала с цветовой занятостью столов в реальном времени</a:t>
-            </a:r>
-          </a:p>
-          <a:p>
-            <a:pPr>
-              <a:spcBef>
-                <a:spcPts val="1000"/>
-              </a:spcBef>
-              <a:defRPr sz="1100">
-                <a:solidFill>
-                  <a:srgbClr val="F4F2EE"/>
-                </a:solidFill>
-              </a:defRPr>
-            </a:pPr>
-            <a:r>
-              <a:t>⏱ Контроль рабочей смены хостес, живой таймер и итоговый Z-отчет</a:t>
-            </a:r>
-          </a:p>
-          <a:p>
-            <a:pPr>
-              <a:spcBef>
-                <a:spcPts val="1000"/>
-              </a:spcBef>
-              <a:defRPr sz="1100">
-                <a:solidFill>
-                  <a:srgbClr val="F4F2EE"/>
-                </a:solidFill>
-              </a:defRPr>
-            </a:pPr>
-            <a:r>
-              <a:t>🔔 Мгновенные звуковые консьерж-уведомления (Chime) о новых бронях</a:t>
-            </a:r>
-          </a:p>
-        </p:txBody>
-      </p:sp>
+              <a:t>10 рестораторов и администраторов (B2B) + 10 реальных гостей (B2C) в г. Шымкент</a:t>
+            </a:r>
+          </a:p>
+        </p:txBody>
+      </p:sp>
+      <p:graphicFrame>
+        <p:nvGraphicFramePr>
+          <p:cNvPr id="6" name="Table 5"/>
+          <p:cNvGraphicFramePr>
+            <a:graphicFrameLocks noGrp="1"/>
+          </p:cNvGraphicFramePr>
+          <p:nvPr/>
+        </p:nvGraphicFramePr>
+        <p:xfrm>
+          <a:off x="731520" y="1645920"/>
+          <a:ext cx="10725912" cy="4663440"/>
+        </p:xfrm>
+        <a:graphic>
+          <a:graphicData uri="http://schemas.openxmlformats.org/drawingml/2006/table">
+            <a:tbl>
+              <a:tblPr firstRow="1" bandRow="1">
+                <a:tableStyleId>{5C22544A-7EE6-4342-B048-85BDC9FD1C3A}</a:tableStyleId>
+              </a:tblPr>
+              <a:tblGrid>
+                <a:gridCol w="1645920"/>
+                <a:gridCol w="2926080"/>
+                <a:gridCol w="3108960"/>
+                <a:gridCol w="3044952"/>
+              </a:tblGrid>
+              <a:tr h="666205">
+                <a:tc>
+                  <a:txBody>
+                    <a:bodyPr/>
+                    <a:lstStyle/>
+                    <a:p>
+                      <a:pPr algn="ctr">
+                        <a:defRPr b="1" sz="1100">
+                          <a:solidFill>
+                            <a:srgbClr val="C5A880"/>
+                          </a:solidFill>
+                        </a:defRPr>
+                      </a:pPr>
+                      <a:r>
+                        <a:t>Гипотеза / Код</a:t>
+                      </a:r>
+                    </a:p>
+                  </a:txBody>
+                  <a:tcPr>
+                    <a:solidFill>
+                      <a:srgbClr val="1C1F26"/>
+                    </a:solidFill>
+                  </a:tcPr>
+                </a:tc>
+                <a:tc>
+                  <a:txBody>
+                    <a:bodyPr/>
+                    <a:lstStyle/>
+                    <a:p>
+                      <a:pPr algn="ctr">
+                        <a:defRPr b="1" sz="1100">
+                          <a:solidFill>
+                            <a:srgbClr val="C5A880"/>
+                          </a:solidFill>
+                        </a:defRPr>
+                      </a:pPr>
+                      <a:r>
+                        <a:t>Исходное предположение</a:t>
+                      </a:r>
+                    </a:p>
+                  </a:txBody>
+                  <a:tcPr>
+                    <a:solidFill>
+                      <a:srgbClr val="1C1F26"/>
+                    </a:solidFill>
+                  </a:tcPr>
+                </a:tc>
+                <a:tc>
+                  <a:txBody>
+                    <a:bodyPr/>
+                    <a:lstStyle/>
+                    <a:p>
+                      <a:pPr algn="ctr">
+                        <a:defRPr b="1" sz="1100">
+                          <a:solidFill>
+                            <a:srgbClr val="C5A880"/>
+                          </a:solidFill>
+                        </a:defRPr>
+                      </a:pPr>
+                      <a:r>
+                        <a:t>Факты CustDev &amp; Инсайт</a:t>
+                      </a:r>
+                    </a:p>
+                  </a:txBody>
+                  <a:tcPr>
+                    <a:solidFill>
+                      <a:srgbClr val="1C1F26"/>
+                    </a:solidFill>
+                  </a:tcPr>
+                </a:tc>
+                <a:tc>
+                  <a:txBody>
+                    <a:bodyPr/>
+                    <a:lstStyle/>
+                    <a:p>
+                      <a:pPr algn="ctr">
+                        <a:defRPr b="1" sz="1100">
+                          <a:solidFill>
+                            <a:srgbClr val="0E1013"/>
+                          </a:solidFill>
+                        </a:defRPr>
+                      </a:pPr>
+                      <a:r>
+                        <a:t>Решение в RestoKZ PRO</a:t>
+                      </a:r>
+                    </a:p>
+                  </a:txBody>
+                  <a:tcPr>
+                    <a:solidFill>
+                      <a:srgbClr val="C5A880"/>
+                    </a:solidFill>
+                  </a:tcPr>
+                </a:tc>
+              </a:tr>
+              <a:tr h="666205">
+                <a:tc>
+                  <a:txBody>
+                    <a:bodyPr/>
+                    <a:lstStyle/>
+                    <a:p>
+                      <a:pPr>
+                        <a:defRPr sz="950" b="1">
+                          <a:solidFill>
+                            <a:srgbClr val="F4F2EE"/>
+                          </a:solidFill>
+                        </a:defRPr>
+                      </a:pPr>
+                      <a:r>
+                        <a:t>H1: Боль No-Show</a:t>
+                      </a:r>
+                    </a:p>
+                  </a:txBody>
+                  <a:tcPr>
+                    <a:solidFill>
+                      <a:srgbClr val="15171D"/>
+                    </a:solidFill>
+                  </a:tcPr>
+                </a:tc>
+                <a:tc>
+                  <a:txBody>
+                    <a:bodyPr/>
+                    <a:lstStyle/>
+                    <a:p>
+                      <a:pPr>
+                        <a:defRPr sz="950">
+                          <a:solidFill>
+                            <a:srgbClr val="F4F2EE"/>
+                          </a:solidFill>
+                        </a:defRPr>
+                      </a:pPr>
+                      <a:r>
+                        <a:t>Рестораны теряют до 25% столов на неявках гостей без предупреждения</a:t>
+                      </a:r>
+                    </a:p>
+                  </a:txBody>
+                  <a:tcPr>
+                    <a:solidFill>
+                      <a:srgbClr val="15171D"/>
+                    </a:solidFill>
+                  </a:tcPr>
+                </a:tc>
+                <a:tc>
+                  <a:txBody>
+                    <a:bodyPr/>
+                    <a:lstStyle/>
+                    <a:p>
+                      <a:pPr>
+                        <a:defRPr sz="950">
+                          <a:solidFill>
+                            <a:srgbClr val="F4F2EE"/>
+                          </a:solidFill>
+                        </a:defRPr>
+                      </a:pPr>
+                      <a:r>
+                        <a:t>✅ 10/10 подтвердили. Убытки до 450к₸/уикенд. Инсайт: гостям стыдно звонить отменять</a:t>
+                      </a:r>
+                    </a:p>
+                  </a:txBody>
+                  <a:tcPr>
+                    <a:solidFill>
+                      <a:srgbClr val="15171D"/>
+                    </a:solidFill>
+                  </a:tcPr>
+                </a:tc>
+                <a:tc>
+                  <a:txBody>
+                    <a:bodyPr/>
+                    <a:lstStyle/>
+                    <a:p>
+                      <a:pPr>
+                        <a:defRPr sz="950" b="1">
+                          <a:solidFill>
+                            <a:srgbClr val="DFCAAB"/>
+                          </a:solidFill>
+                        </a:defRPr>
+                      </a:pPr>
+                      <a:r>
+                        <a:t>Пуш за 2ч + кнопка отмены в 1 клик (освобождает стол мгновенно)</a:t>
+                      </a:r>
+                    </a:p>
+                  </a:txBody>
+                  <a:tcPr>
+                    <a:solidFill>
+                      <a:srgbClr val="1C202A"/>
+                    </a:solidFill>
+                  </a:tcPr>
+                </a:tc>
+              </a:tr>
+              <a:tr h="666205">
+                <a:tc>
+                  <a:txBody>
+                    <a:bodyPr/>
+                    <a:lstStyle/>
+                    <a:p>
+                      <a:pPr>
+                        <a:defRPr sz="950" b="1">
+                          <a:solidFill>
+                            <a:srgbClr val="F4F2EE"/>
+                          </a:solidFill>
+                        </a:defRPr>
+                      </a:pPr>
+                      <a:r>
+                        <a:t>H2: Затор WhatsApp</a:t>
+                      </a:r>
+                    </a:p>
+                  </a:txBody>
+                  <a:tcPr>
+                    <a:solidFill>
+                      <a:srgbClr val="15171D"/>
+                    </a:solidFill>
+                  </a:tcPr>
+                </a:tc>
+                <a:tc>
+                  <a:txBody>
+                    <a:bodyPr/>
+                    <a:lstStyle/>
+                    <a:p>
+                      <a:pPr>
+                        <a:defRPr sz="950">
+                          <a:solidFill>
+                            <a:srgbClr val="F4F2EE"/>
+                          </a:solidFill>
+                        </a:defRPr>
+                      </a:pPr>
+                      <a:r>
+                        <a:t>WhatsApp захлебывается в часы пик из-за десятков голосовых сообщений</a:t>
+                      </a:r>
+                    </a:p>
+                  </a:txBody>
+                  <a:tcPr>
+                    <a:solidFill>
+                      <a:srgbClr val="15171D"/>
+                    </a:solidFill>
+                  </a:tcPr>
+                </a:tc>
+                <a:tc>
+                  <a:txBody>
+                    <a:bodyPr/>
+                    <a:lstStyle/>
+                    <a:p>
+                      <a:pPr>
+                        <a:defRPr sz="950">
+                          <a:solidFill>
+                            <a:srgbClr val="F4F2EE"/>
+                          </a:solidFill>
+                        </a:defRPr>
+                      </a:pPr>
+                      <a:r>
+                        <a:t>✅ 9/10 подтвердили. Задержка ответа 40-90 мин, слив 15-20 столов за вечер</a:t>
+                      </a:r>
+                    </a:p>
+                  </a:txBody>
+                  <a:tcPr>
+                    <a:solidFill>
+                      <a:srgbClr val="15171D"/>
+                    </a:solidFill>
+                  </a:tcPr>
+                </a:tc>
+                <a:tc>
+                  <a:txBody>
+                    <a:bodyPr/>
+                    <a:lstStyle/>
+                    <a:p>
+                      <a:pPr>
+                        <a:defRPr sz="950" b="1">
+                          <a:solidFill>
+                            <a:srgbClr val="DFCAAB"/>
+                          </a:solidFill>
+                        </a:defRPr>
+                      </a:pPr>
+                      <a:r>
+                        <a:t>Self-service WebApp: прямая бронь со свободного слота за 30 секунд</a:t>
+                      </a:r>
+                    </a:p>
+                  </a:txBody>
+                  <a:tcPr>
+                    <a:solidFill>
+                      <a:srgbClr val="1C202A"/>
+                    </a:solidFill>
+                  </a:tcPr>
+                </a:tc>
+              </a:tr>
+              <a:tr h="666205">
+                <a:tc>
+                  <a:txBody>
+                    <a:bodyPr/>
+                    <a:lstStyle/>
+                    <a:p>
+                      <a:pPr>
+                        <a:defRPr sz="950" b="1">
+                          <a:solidFill>
+                            <a:srgbClr val="F4F2EE"/>
+                          </a:solidFill>
+                        </a:defRPr>
+                      </a:pPr>
+                      <a:r>
+                        <a:t>H3: Барьер AppStore</a:t>
+                      </a:r>
+                    </a:p>
+                  </a:txBody>
+                  <a:tcPr>
+                    <a:solidFill>
+                      <a:srgbClr val="15171D"/>
+                    </a:solidFill>
+                  </a:tcPr>
+                </a:tc>
+                <a:tc>
+                  <a:txBody>
+                    <a:bodyPr/>
+                    <a:lstStyle/>
+                    <a:p>
+                      <a:pPr>
+                        <a:defRPr sz="950">
+                          <a:solidFill>
+                            <a:srgbClr val="F4F2EE"/>
+                          </a:solidFill>
+                        </a:defRPr>
+                      </a:pPr>
+                      <a:r>
+                        <a:t>Гости откажутся скачивать нативное приложение на 80Мб ради брони</a:t>
+                      </a:r>
+                    </a:p>
+                  </a:txBody>
+                  <a:tcPr>
+                    <a:solidFill>
+                      <a:srgbClr val="15171D"/>
+                    </a:solidFill>
+                  </a:tcPr>
+                </a:tc>
+                <a:tc>
+                  <a:txBody>
+                    <a:bodyPr/>
+                    <a:lstStyle/>
+                    <a:p>
+                      <a:pPr>
+                        <a:defRPr sz="950">
+                          <a:solidFill>
+                            <a:srgbClr val="F4F2EE"/>
+                          </a:solidFill>
+                        </a:defRPr>
+                      </a:pPr>
+                      <a:r>
+                        <a:t>✅ 10/10 гостей отказались от установки отдельных приложений с СМС</a:t>
+                      </a:r>
+                    </a:p>
+                  </a:txBody>
+                  <a:tcPr>
+                    <a:solidFill>
+                      <a:srgbClr val="15171D"/>
+                    </a:solidFill>
+                  </a:tcPr>
+                </a:tc>
+                <a:tc>
+                  <a:txBody>
+                    <a:bodyPr/>
+                    <a:lstStyle/>
+                    <a:p>
+                      <a:pPr>
+                        <a:defRPr sz="950" b="1">
+                          <a:solidFill>
+                            <a:srgbClr val="DFCAAB"/>
+                          </a:solidFill>
+                        </a:defRPr>
+                      </a:pPr>
+                      <a:r>
+                        <a:t>Telegram Mini App: запуск в 1 касание без установок и регистраций</a:t>
+                      </a:r>
+                    </a:p>
+                  </a:txBody>
+                  <a:tcPr>
+                    <a:solidFill>
+                      <a:srgbClr val="1C202A"/>
+                    </a:solidFill>
+                  </a:tcPr>
+                </a:tc>
+              </a:tr>
+              <a:tr h="666205">
+                <a:tc>
+                  <a:txBody>
+                    <a:bodyPr/>
+                    <a:lstStyle/>
+                    <a:p>
+                      <a:pPr>
+                        <a:defRPr sz="950" b="1">
+                          <a:solidFill>
+                            <a:srgbClr val="F4F2EE"/>
+                          </a:solidFill>
+                        </a:defRPr>
+                      </a:pPr>
+                      <a:r>
+                        <a:t>H4: Менталитет зала</a:t>
+                      </a:r>
+                    </a:p>
+                  </a:txBody>
+                  <a:tcPr>
+                    <a:solidFill>
+                      <a:srgbClr val="15171D"/>
+                    </a:solidFill>
+                  </a:tcPr>
+                </a:tc>
+                <a:tc>
+                  <a:txBody>
+                    <a:bodyPr/>
+                    <a:lstStyle/>
+                    <a:p>
+                      <a:pPr>
+                        <a:defRPr sz="950">
+                          <a:solidFill>
+                            <a:srgbClr val="F4F2EE"/>
+                          </a:solidFill>
+                        </a:defRPr>
+                      </a:pPr>
+                      <a:r>
+                        <a:t>Важны топчаны, VIP-кабины и звонки директору («от Кайреке»)</a:t>
+                      </a:r>
+                    </a:p>
+                  </a:txBody>
+                  <a:tcPr>
+                    <a:solidFill>
+                      <a:srgbClr val="15171D"/>
+                    </a:solidFill>
+                  </a:tcPr>
+                </a:tc>
+                <a:tc>
+                  <a:txBody>
+                    <a:bodyPr/>
+                    <a:lstStyle/>
+                    <a:p>
+                      <a:pPr>
+                        <a:defRPr sz="950">
+                          <a:solidFill>
+                            <a:srgbClr val="F4F2EE"/>
+                          </a:solidFill>
+                        </a:defRPr>
+                      </a:pPr>
+                      <a:r>
+                        <a:t>✅ 10/10 подтвердили. Конфликты из-за плохих столов у проходов</a:t>
+                      </a:r>
+                    </a:p>
+                  </a:txBody>
+                  <a:tcPr>
+                    <a:solidFill>
+                      <a:srgbClr val="15171D"/>
+                    </a:solidFill>
+                  </a:tcPr>
+                </a:tc>
+                <a:tc>
+                  <a:txBody>
+                    <a:bodyPr/>
+                    <a:lstStyle/>
+                    <a:p>
+                      <a:pPr>
+                        <a:defRPr sz="950" b="1">
+                          <a:solidFill>
+                            <a:srgbClr val="DFCAAB"/>
+                          </a:solidFill>
+                        </a:defRPr>
+                      </a:pPr>
+                      <a:r>
+                        <a:t>Зонирование (Топчан, VIP, Окно) + модуль 'По звонку' за 3 сек</a:t>
+                      </a:r>
+                    </a:p>
+                  </a:txBody>
+                  <a:tcPr>
+                    <a:solidFill>
+                      <a:srgbClr val="1C202A"/>
+                    </a:solidFill>
+                  </a:tcPr>
+                </a:tc>
+              </a:tr>
+              <a:tr h="666205">
+                <a:tc>
+                  <a:txBody>
+                    <a:bodyPr/>
+                    <a:lstStyle/>
+                    <a:p>
+                      <a:pPr>
+                        <a:defRPr sz="950" b="1">
+                          <a:solidFill>
+                            <a:srgbClr val="F4F2EE"/>
+                          </a:solidFill>
+                        </a:defRPr>
+                      </a:pPr>
+                      <a:r>
+                        <a:t>H5: Готовность платить</a:t>
+                      </a:r>
+                    </a:p>
+                  </a:txBody>
+                  <a:tcPr>
+                    <a:solidFill>
+                      <a:srgbClr val="15171D"/>
+                    </a:solidFill>
+                  </a:tcPr>
+                </a:tc>
+                <a:tc>
+                  <a:txBody>
+                    <a:bodyPr/>
+                    <a:lstStyle/>
+                    <a:p>
+                      <a:pPr>
+                        <a:defRPr sz="950">
+                          <a:solidFill>
+                            <a:srgbClr val="F4F2EE"/>
+                          </a:solidFill>
+                        </a:defRPr>
+                      </a:pPr>
+                      <a:r>
+                        <a:t>Рестораторы заплатят 35–49 тыс ₸/мес вместо комиссий агрегаторов</a:t>
+                      </a:r>
+                    </a:p>
+                  </a:txBody>
+                  <a:tcPr>
+                    <a:solidFill>
+                      <a:srgbClr val="15171D"/>
+                    </a:solidFill>
+                  </a:tcPr>
+                </a:tc>
+                <a:tc>
+                  <a:txBody>
+                    <a:bodyPr/>
+                    <a:lstStyle/>
+                    <a:p>
+                      <a:pPr>
+                        <a:defRPr sz="950">
+                          <a:solidFill>
+                            <a:srgbClr val="F4F2EE"/>
+                          </a:solidFill>
+                        </a:defRPr>
+                      </a:pPr>
+                      <a:r>
+                        <a:t>✅ 8/10 готовы платить. Окупается за 1 банкетный стол на 8 персон</a:t>
+                      </a:r>
+                    </a:p>
+                  </a:txBody>
+                  <a:tcPr>
+                    <a:solidFill>
+                      <a:srgbClr val="15171D"/>
+                    </a:solidFill>
+                  </a:tcPr>
+                </a:tc>
+                <a:tc>
+                  <a:txBody>
+                    <a:bodyPr/>
+                    <a:lstStyle/>
+                    <a:p>
+                      <a:pPr>
+                        <a:defRPr sz="950" b="1">
+                          <a:solidFill>
+                            <a:srgbClr val="DFCAAB"/>
+                          </a:solidFill>
+                        </a:defRPr>
+                      </a:pPr>
+                      <a:r>
+                        <a:t>Фиксированная подписка (0% скрытых комиссий с чека или гостей)</a:t>
+                      </a:r>
+                    </a:p>
+                  </a:txBody>
+                  <a:tcPr>
+                    <a:solidFill>
+                      <a:srgbClr val="1C202A"/>
+                    </a:solidFill>
+                  </a:tcPr>
+                </a:tc>
+              </a:tr>
+              <a:tr h="666210">
+                <a:tc>
+                  <a:txBody>
+                    <a:bodyPr/>
+                    <a:lstStyle/>
+                    <a:p>
+                      <a:pPr>
+                        <a:defRPr sz="950" b="1">
+                          <a:solidFill>
+                            <a:srgbClr val="F4F2EE"/>
+                          </a:solidFill>
+                        </a:defRPr>
+                      </a:pPr>
+                      <a:r>
+                        <a:t>H6: Контроль персонала</a:t>
+                      </a:r>
+                    </a:p>
+                  </a:txBody>
+                  <a:tcPr>
+                    <a:solidFill>
+                      <a:srgbClr val="15171D"/>
+                    </a:solidFill>
+                  </a:tcPr>
+                </a:tc>
+                <a:tc>
+                  <a:txBody>
+                    <a:bodyPr/>
+                    <a:lstStyle/>
+                    <a:p>
+                      <a:pPr>
+                        <a:defRPr sz="950">
+                          <a:solidFill>
+                            <a:srgbClr val="F4F2EE"/>
+                          </a:solidFill>
+                        </a:defRPr>
+                      </a:pPr>
+                      <a:r>
+                        <a:t>Владельцам не хватает контроля смен хостес и защиты гостевой базы</a:t>
+                      </a:r>
+                    </a:p>
+                  </a:txBody>
+                  <a:tcPr>
+                    <a:solidFill>
+                      <a:srgbClr val="15171D"/>
+                    </a:solidFill>
+                  </a:tcPr>
+                </a:tc>
+                <a:tc>
+                  <a:txBody>
+                    <a:bodyPr/>
+                    <a:lstStyle/>
+                    <a:p>
+                      <a:pPr>
+                        <a:defRPr sz="950">
+                          <a:solidFill>
+                            <a:srgbClr val="F4F2EE"/>
+                          </a:solidFill>
+                        </a:defRPr>
+                      </a:pPr>
+                      <a:r>
+                        <a:t>✅ 10/10 управляющих. Журналы теряются, хостес уходят с номерами</a:t>
+                      </a:r>
+                    </a:p>
+                  </a:txBody>
+                  <a:tcPr>
+                    <a:solidFill>
+                      <a:srgbClr val="15171D"/>
+                    </a:solidFill>
+                  </a:tcPr>
+                </a:tc>
+                <a:tc>
+                  <a:txBody>
+                    <a:bodyPr/>
+                    <a:lstStyle/>
+                    <a:p>
+                      <a:pPr>
+                        <a:defRPr sz="950" b="1">
+                          <a:solidFill>
+                            <a:srgbClr val="DFCAAB"/>
+                          </a:solidFill>
+                        </a:defRPr>
+                      </a:pPr>
+                      <a:r>
+                        <a:t>Живой таймер смены хостес, Z-отчеты и облачная база гостей</a:t>
+                      </a:r>
+                    </a:p>
+                  </a:txBody>
+                  <a:tcPr>
+                    <a:solidFill>
+                      <a:srgbClr val="1C202A"/>
+                    </a:solidFill>
+                  </a:tcPr>
+                </a:tc>
+              </a:tr>
+            </a:tbl>
+          </a:graphicData>
+        </a:graphic>
+      </p:graphicFrame>
     </p:spTree>
   </p:cSld>
   <p:clrMapOvr>
@@ -6980,7 +9659,7 @@
               </a:defRPr>
             </a:pPr>
             <a:r>
-              <a:t>ИНТЕРФЕЙС ГОСТЯ</a:t>
+              <a:t>РЕШЕНИЕ ПЛАТФОРМЫ</a:t>
             </a:r>
           </a:p>
         </p:txBody>
@@ -7008,7 +9687,7 @@
           <a:lstStyle/>
           <a:p>
             <a:pPr>
-              <a:defRPr sz="2200" b="1">
+              <a:defRPr sz="2100" b="1">
                 <a:solidFill>
                   <a:srgbClr val="F4F2EE"/>
                 </a:solidFill>
@@ -7016,7 +9695,7 @@
               </a:defRPr>
             </a:pPr>
             <a:r>
-              <a:t>Telegram Mini App: Бронирование столика в 3 касания</a:t>
+              <a:t>RestoKZ: Единая двусторонняя цифровая экосистема</a:t>
             </a:r>
           </a:p>
         </p:txBody>
@@ -7029,7 +9708,7 @@
         </p:nvSpPr>
         <p:spPr>
           <a:xfrm>
-            <a:off x="731520" y="1188720"/>
+            <a:off x="731520" y="1170432"/>
             <a:ext cx="10698480" cy="320040"/>
           </a:xfrm>
           <a:prstGeom prst="rect">
@@ -7044,7 +9723,7 @@
           <a:lstStyle/>
           <a:p>
             <a:pPr>
-              <a:defRPr sz="1200">
+              <a:defRPr sz="1150">
                 <a:solidFill>
                   <a:srgbClr val="9CA3AF"/>
                 </a:solidFill>
@@ -7052,7 +9731,7 @@
               </a:defRPr>
             </a:pPr>
             <a:r>
-              <a:t>Максимальная конверсия за счет нулевого трения — без логинов, SMS и паролей</a:t>
+              <a:t>Связка клиента и ресторана в режиме реального времени без сторонних приложений</a:t>
             </a:r>
           </a:p>
         </p:txBody>
@@ -7066,7 +9745,7 @@
         <p:spPr>
           <a:xfrm>
             <a:off x="731520" y="1645920"/>
-            <a:ext cx="5943600" cy="4663440"/>
+            <a:ext cx="5212080" cy="4663440"/>
           </a:xfrm>
           <a:prstGeom prst="roundRect">
             <a:avLst/>
@@ -7076,7 +9755,7 @@
           </a:solidFill>
           <a:ln w="12700">
             <a:solidFill>
-              <a:srgbClr val="323741"/>
+              <a:srgbClr val="38BDF8"/>
             </a:solidFill>
           </a:ln>
         </p:spPr>
@@ -7111,7 +9790,7 @@
         <p:spPr>
           <a:xfrm>
             <a:off x="1005840" y="1828800"/>
-            <a:ext cx="5394960" cy="4297680"/>
+            <a:ext cx="4663440" cy="4297680"/>
           </a:xfrm>
           <a:prstGeom prst="rect">
             <a:avLst/>
@@ -7125,149 +9804,104 @@
           <a:lstStyle/>
           <a:p>
             <a:pPr>
-              <a:defRPr sz="1200" b="1">
-                <a:solidFill>
-                  <a:srgbClr val="C5A880"/>
-                </a:solidFill>
-              </a:defRPr>
-            </a:pPr>
-            <a:r>
-              <a:t>1. Умный каталог ресторанов</a:t>
-            </a:r>
-          </a:p>
-          <a:p>
-            <a:pPr>
-              <a:spcBef>
-                <a:spcPts val="200"/>
-              </a:spcBef>
-              <a:defRPr sz="1050">
+              <a:defRPr sz="1400" b="1">
+                <a:solidFill>
+                  <a:srgbClr val="38BDF8"/>
+                </a:solidFill>
+              </a:defRPr>
+            </a:pPr>
+            <a:r>
+              <a:t>🍽 ДЛЯ ГОСТЯ (B2C WEBAPP)</a:t>
+            </a:r>
+          </a:p>
+          <a:p>
+            <a:pPr>
+              <a:spcBef>
+                <a:spcPts val="400"/>
+              </a:spcBef>
+              <a:defRPr sz="1100">
+                <a:solidFill>
+                  <a:srgbClr val="DFCAAB"/>
+                </a:solidFill>
+              </a:defRPr>
+            </a:pPr>
+            <a:r>
+              <a:t>Telegram Mini App — открывается мгновенно в 1 клик</a:t>
+            </a:r>
+          </a:p>
+          <a:p>
+            <a:pPr>
+              <a:spcBef>
+                <a:spcPts val="1000"/>
+              </a:spcBef>
+              <a:defRPr sz="1100">
                 <a:solidFill>
                   <a:srgbClr val="F4F2EE"/>
                 </a:solidFill>
               </a:defRPr>
             </a:pPr>
             <a:r>
-              <a:t>Гость выбирает город (Алматы, Астана, Шымкент), фильтрует по кухне (Казахская, Итальянская, Восточная) и находит любимое заведение.</a:t>
-            </a:r>
-          </a:p>
-          <a:p>
-            <a:pPr>
-              <a:spcBef>
-                <a:spcPts val="800"/>
-              </a:spcBef>
-              <a:defRPr sz="1200" b="1">
-                <a:solidFill>
-                  <a:srgbClr val="C5A880"/>
-                </a:solidFill>
-              </a:defRPr>
-            </a:pPr>
-            <a:r>
-              <a:t>2. Выбор даты, времени и компании</a:t>
-            </a:r>
-          </a:p>
-          <a:p>
-            <a:pPr>
-              <a:spcBef>
-                <a:spcPts val="200"/>
-              </a:spcBef>
-              <a:defRPr sz="1050">
+              <a:t>⚡ Бронирование за 30 секунд без скачивания приложений из App Store</a:t>
+            </a:r>
+          </a:p>
+          <a:p>
+            <a:pPr>
+              <a:spcBef>
+                <a:spcPts val="1000"/>
+              </a:spcBef>
+              <a:defRPr sz="1100">
                 <a:solidFill>
                   <a:srgbClr val="F4F2EE"/>
                 </a:solidFill>
               </a:defRPr>
             </a:pPr>
             <a:r>
-              <a:t>Удобная сетка тайм-слотов (обед, ужин, пиковые часы) и количества гостей. Система сразу показывает свободные столики.</a:t>
-            </a:r>
-          </a:p>
-          <a:p>
-            <a:pPr>
-              <a:spcBef>
-                <a:spcPts val="800"/>
-              </a:spcBef>
-              <a:defRPr sz="1200" b="1">
-                <a:solidFill>
-                  <a:srgbClr val="C5A880"/>
-                </a:solidFill>
-              </a:defRPr>
-            </a:pPr>
-            <a:r>
-              <a:t>3. Интерактивная схема зала</a:t>
-            </a:r>
-          </a:p>
-          <a:p>
-            <a:pPr>
-              <a:spcBef>
-                <a:spcPts val="200"/>
-              </a:spcBef>
-              <a:defRPr sz="1050">
+              <a:t>🪑 Интерактивный выбор столика на реальной схеме зала (VIP, топчан, окно)</a:t>
+            </a:r>
+          </a:p>
+          <a:p>
+            <a:pPr>
+              <a:spcBef>
+                <a:spcPts val="1000"/>
+              </a:spcBef>
+              <a:defRPr sz="1100">
                 <a:solidFill>
                   <a:srgbClr val="F4F2EE"/>
                 </a:solidFill>
               </a:defRPr>
             </a:pPr>
             <a:r>
-              <a:t>Гость может выбрать конкретное место: панорамное окно, летняя терраса, VIP-кабина, топчан или банкетный дастархан.</a:t>
-            </a:r>
-          </a:p>
-          <a:p>
-            <a:pPr>
-              <a:spcBef>
-                <a:spcPts val="800"/>
-              </a:spcBef>
-              <a:defRPr sz="1200" b="1">
-                <a:solidFill>
-                  <a:srgbClr val="C5A880"/>
-                </a:solidFill>
-              </a:defRPr>
-            </a:pPr>
-            <a:r>
-              <a:t>4. Меню и детальная информация</a:t>
-            </a:r>
-          </a:p>
-          <a:p>
-            <a:pPr>
-              <a:spcBef>
-                <a:spcPts val="200"/>
-              </a:spcBef>
-              <a:defRPr sz="1050">
+              <a:t>📖 Просмотр фото интерьера, актуального меню и среднего чека</a:t>
+            </a:r>
+          </a:p>
+          <a:p>
+            <a:pPr>
+              <a:spcBef>
+                <a:spcPts val="1000"/>
+              </a:spcBef>
+              <a:defRPr sz="1100">
                 <a:solidFill>
                   <a:srgbClr val="F4F2EE"/>
                 </a:solidFill>
               </a:defRPr>
             </a:pPr>
             <a:r>
-              <a:t>Цены, фирменные блюда, фотографии интерьера, геолокация и прямой переход в 2GIS / Instagram.</a:t>
-            </a:r>
-          </a:p>
-          <a:p>
-            <a:pPr>
-              <a:spcBef>
-                <a:spcPts val="800"/>
-              </a:spcBef>
-              <a:defRPr sz="1200" b="1">
-                <a:solidFill>
-                  <a:srgbClr val="C5A880"/>
-                </a:solidFill>
-              </a:defRPr>
-            </a:pPr>
-            <a:r>
-              <a:t>5. Автоматическое подтверждение</a:t>
-            </a:r>
-          </a:p>
-          <a:p>
-            <a:pPr>
-              <a:spcBef>
-                <a:spcPts val="200"/>
-              </a:spcBef>
-              <a:defRPr sz="1050">
+              <a:t>🔔 Автоматические статусы и напоминания в Telegram (защита от забывчивости)</a:t>
+            </a:r>
+          </a:p>
+          <a:p>
+            <a:pPr>
+              <a:spcBef>
+                <a:spcPts val="1000"/>
+              </a:spcBef>
+              <a:defRPr sz="1100">
                 <a:solidFill>
                   <a:srgbClr val="F4F2EE"/>
                 </a:solidFill>
               </a:defRPr>
             </a:pPr>
             <a:r>
-              <a:t>Билет бронирования с уникальным ID сохраняется в Telegram. За 2 часа до визита бот отправляет вежливое напоминание.</a:t>
+              <a:t>🌐 Поддержка 3 языков (Казахский, Русский, Английский)</a:t>
             </a:r>
           </a:p>
         </p:txBody>
@@ -7280,16 +9914,16 @@
         </p:nvSpPr>
         <p:spPr>
           <a:xfrm>
-            <a:off x="6912864" y="1609344"/>
-            <a:ext cx="2267712" cy="4736592"/>
+            <a:off x="6217920" y="1645920"/>
+            <a:ext cx="5212080" cy="4663440"/>
           </a:xfrm>
           <a:prstGeom prst="roundRect">
             <a:avLst/>
           </a:prstGeom>
           <a:solidFill>
-            <a:srgbClr val="1C1F26"/>
+            <a:srgbClr val="15171D"/>
           </a:solidFill>
-          <a:ln w="19050">
+          <a:ln w="12700">
             <a:solidFill>
               <a:srgbClr val="C5A880"/>
             </a:solidFill>
@@ -7317,99 +9951,131 @@
           </a:p>
         </p:txBody>
       </p:sp>
-      <p:pic>
-        <p:nvPicPr>
-          <p:cNvPr id="9" name="Picture 8" descr="guest_catalog_mobile.png"/>
-          <p:cNvPicPr>
-            <a:picLocks noChangeAspect="1"/>
-          </p:cNvPicPr>
-          <p:nvPr/>
-        </p:nvPicPr>
-        <p:blipFill>
-          <a:blip r:embed="rId2"/>
-          <a:stretch>
-            <a:fillRect/>
-          </a:stretch>
-        </p:blipFill>
-        <p:spPr>
-          <a:xfrm>
-            <a:off x="6949440" y="1645920"/>
-            <a:ext cx="2194560" cy="4663440"/>
+      <p:sp>
+        <p:nvSpPr>
+          <p:cNvPr id="9" name="TextBox 8"/>
+          <p:cNvSpPr txBox="1"/>
+          <p:nvPr/>
+        </p:nvSpPr>
+        <p:spPr>
+          <a:xfrm>
+            <a:off x="6492240" y="1828800"/>
+            <a:ext cx="4663440" cy="4297680"/>
           </a:xfrm>
           <a:prstGeom prst="rect">
             <a:avLst/>
           </a:prstGeom>
-        </p:spPr>
-      </p:pic>
-      <p:sp>
-        <p:nvSpPr>
-          <p:cNvPr id="10" name="Rounded Rectangle 9"/>
-          <p:cNvSpPr/>
-          <p:nvPr/>
-        </p:nvSpPr>
-        <p:spPr>
-          <a:xfrm>
-            <a:off x="9381744" y="1609344"/>
-            <a:ext cx="2267712" cy="4736592"/>
-          </a:xfrm>
-          <a:prstGeom prst="roundRect">
-            <a:avLst/>
-          </a:prstGeom>
-          <a:solidFill>
-            <a:srgbClr val="1C1F26"/>
-          </a:solidFill>
-          <a:ln w="19050">
-            <a:solidFill>
-              <a:srgbClr val="C5A880"/>
-            </a:solidFill>
-          </a:ln>
-        </p:spPr>
-        <p:style>
-          <a:lnRef idx="1">
-            <a:schemeClr val="accent1"/>
-          </a:lnRef>
-          <a:fillRef idx="3">
-            <a:schemeClr val="accent1"/>
-          </a:fillRef>
-          <a:effectRef idx="2">
-            <a:schemeClr val="accent1"/>
-          </a:effectRef>
-          <a:fontRef idx="minor">
-            <a:schemeClr val="lt1"/>
-          </a:fontRef>
-        </p:style>
-        <p:txBody>
-          <a:bodyPr rtlCol="0" anchor="ctr"/>
-          <a:lstStyle/>
-          <a:p>
-            <a:pPr algn="ctr"/>
-          </a:p>
-        </p:txBody>
-      </p:sp>
-      <p:pic>
-        <p:nvPicPr>
-          <p:cNvPr id="11" name="Picture 10" descr="guest_restaurant_modal.png"/>
-          <p:cNvPicPr>
-            <a:picLocks noChangeAspect="1"/>
-          </p:cNvPicPr>
-          <p:nvPr/>
-        </p:nvPicPr>
-        <p:blipFill>
-          <a:blip r:embed="rId3"/>
-          <a:stretch>
-            <a:fillRect/>
-          </a:stretch>
-        </p:blipFill>
-        <p:spPr>
-          <a:xfrm>
-            <a:off x="9418320" y="1645920"/>
-            <a:ext cx="2194560" cy="4663440"/>
-          </a:xfrm>
-          <a:prstGeom prst="rect">
-            <a:avLst/>
-          </a:prstGeom>
-        </p:spPr>
-      </p:pic>
+          <a:noFill/>
+        </p:spPr>
+        <p:txBody>
+          <a:bodyPr wrap="square">
+            <a:spAutoFit/>
+          </a:bodyPr>
+          <a:lstStyle/>
+          <a:p>
+            <a:pPr>
+              <a:defRPr sz="1400" b="1">
+                <a:solidFill>
+                  <a:srgbClr val="C5A880"/>
+                </a:solidFill>
+              </a:defRPr>
+            </a:pPr>
+            <a:r>
+              <a:t>👑 ДЛЯ РЕСТОРАНА (RESTOKZ PRO B2B)</a:t>
+            </a:r>
+          </a:p>
+          <a:p>
+            <a:pPr>
+              <a:spcBef>
+                <a:spcPts val="400"/>
+              </a:spcBef>
+              <a:defRPr sz="1100">
+                <a:solidFill>
+                  <a:srgbClr val="DFCAAB"/>
+                </a:solidFill>
+              </a:defRPr>
+            </a:pPr>
+            <a:r>
+              <a:t>Мобильный терминал хостес и управляющего</a:t>
+            </a:r>
+          </a:p>
+          <a:p>
+            <a:pPr>
+              <a:spcBef>
+                <a:spcPts val="1000"/>
+              </a:spcBef>
+              <a:defRPr sz="1100">
+                <a:solidFill>
+                  <a:srgbClr val="F4F2EE"/>
+                </a:solidFill>
+              </a:defRPr>
+            </a:pPr>
+            <a:r>
+              <a:t>📋 Живой журнал заявок со статусами (Новые, В брони, За столом, Отмена)</a:t>
+            </a:r>
+          </a:p>
+          <a:p>
+            <a:pPr>
+              <a:spcBef>
+                <a:spcPts val="1000"/>
+              </a:spcBef>
+              <a:defRPr sz="1100">
+                <a:solidFill>
+                  <a:srgbClr val="F4F2EE"/>
+                </a:solidFill>
+              </a:defRPr>
+            </a:pPr>
+            <a:r>
+              <a:t>🎯 Умные контекстные кнопки действий в 1 клик (Подтвердить / Посадить)</a:t>
+            </a:r>
+          </a:p>
+          <a:p>
+            <a:pPr>
+              <a:spcBef>
+                <a:spcPts val="1000"/>
+              </a:spcBef>
+              <a:defRPr sz="1100">
+                <a:solidFill>
+                  <a:srgbClr val="F4F2EE"/>
+                </a:solidFill>
+              </a:defRPr>
+            </a:pPr>
+            <a:r>
+              <a:t>🗺 Интерактивная карта зала с цветовой занятостью столов в реальном времени</a:t>
+            </a:r>
+          </a:p>
+          <a:p>
+            <a:pPr>
+              <a:spcBef>
+                <a:spcPts val="1000"/>
+              </a:spcBef>
+              <a:defRPr sz="1100">
+                <a:solidFill>
+                  <a:srgbClr val="F4F2EE"/>
+                </a:solidFill>
+              </a:defRPr>
+            </a:pPr>
+            <a:r>
+              <a:t>⏱ Контроль рабочей смены хостес, живой таймер и итоговый Z-отчет</a:t>
+            </a:r>
+          </a:p>
+          <a:p>
+            <a:pPr>
+              <a:spcBef>
+                <a:spcPts val="1000"/>
+              </a:spcBef>
+              <a:defRPr sz="1100">
+                <a:solidFill>
+                  <a:srgbClr val="F4F2EE"/>
+                </a:solidFill>
+              </a:defRPr>
+            </a:pPr>
+            <a:r>
+              <a:t>🔔 Мгновенные звуковые консьерж-уведомления (Chime) о новых бронях</a:t>
+            </a:r>
+          </a:p>
+        </p:txBody>
+      </p:sp>
     </p:spTree>
   </p:cSld>
   <p:clrMapOvr>
@@ -7502,7 +10168,7 @@
               </a:defRPr>
             </a:pPr>
             <a:r>
-              <a:t>ТЕРМИНАЛ РЕСТОРАНА</a:t>
+              <a:t>ИНТЕРФЕЙС ГОСТЯ</a:t>
             </a:r>
           </a:p>
         </p:txBody>
@@ -7530,7 +10196,7 @@
           <a:lstStyle/>
           <a:p>
             <a:pPr>
-              <a:defRPr sz="2200" b="1">
+              <a:defRPr sz="2100" b="1">
                 <a:solidFill>
                   <a:srgbClr val="F4F2EE"/>
                 </a:solidFill>
@@ -7538,7 +10204,7 @@
               </a:defRPr>
             </a:pPr>
             <a:r>
-              <a:t>RestoKZ PRO: Журнал броней с контекстными действиями</a:t>
+              <a:t>Telegram Mini App: Бронирование столика в 3 касания</a:t>
             </a:r>
           </a:p>
         </p:txBody>
@@ -7551,7 +10217,7 @@
         </p:nvSpPr>
         <p:spPr>
           <a:xfrm>
-            <a:off x="731520" y="1188720"/>
+            <a:off x="731520" y="1170432"/>
             <a:ext cx="10698480" cy="320040"/>
           </a:xfrm>
           <a:prstGeom prst="rect">
@@ -7566,7 +10232,7 @@
           <a:lstStyle/>
           <a:p>
             <a:pPr>
-              <a:defRPr sz="1200">
+              <a:defRPr sz="1150">
                 <a:solidFill>
                   <a:srgbClr val="9CA3AF"/>
                 </a:solidFill>
@@ -7574,7 +10240,7 @@
               </a:defRPr>
             </a:pPr>
             <a:r>
-              <a:t>Специально разработан под экраны смартфонов хостес с крупными шрифтами и тактильным откликом</a:t>
+              <a:t>Максимальная конверсия за счет нулевого трения — без логинов, SMS и паролей</a:t>
             </a:r>
           </a:p>
         </p:txBody>
@@ -7654,7 +10320,7 @@
               </a:defRPr>
             </a:pPr>
             <a:r>
-              <a:t>⚡ Контекстные умные действия в 1 клик</a:t>
+              <a:t>1. Умный каталог ресторанов</a:t>
             </a:r>
           </a:p>
           <a:p>
@@ -7662,26 +10328,14 @@
               <a:spcBef>
                 <a:spcPts val="200"/>
               </a:spcBef>
-              <a:defRPr sz="1000">
+              <a:defRPr sz="1050">
                 <a:solidFill>
                   <a:srgbClr val="F4F2EE"/>
                 </a:solidFill>
               </a:defRPr>
             </a:pPr>
             <a:r>
-              <a:t>Кнопки динамически подстраиваются под статус заявки:</a:t>
-            </a:r>
-            <a:br/>
-            <a:r>
-              <a:t>• Ожидает: [✅ Подтвердить] + [❌ Отказ]</a:t>
-            </a:r>
-            <a:br/>
-            <a:r>
-              <a:t>• Подтверждена: [🥂 Посадить за стол] + [Отмена]</a:t>
-            </a:r>
-            <a:br/>
-            <a:r>
-              <a:t>• Гости сидят: [🔓 Стол освободился] + [↩ В бронь]</a:t>
+              <a:t>Гость выбирает город (Алматы, Астана, Шымкент), фильтрует по кухне (Казахская, Итальянская, Восточная) и находит заведение.</a:t>
             </a:r>
           </a:p>
           <a:p>
@@ -7696,7 +10350,7 @@
               </a:defRPr>
             </a:pPr>
             <a:r>
-              <a:t>🔍 Мгновенный поиск и фильтрация</a:t>
+              <a:t>2. Выбор даты, времени и компании</a:t>
             </a:r>
           </a:p>
           <a:p>
@@ -7704,14 +10358,14 @@
               <a:spcBef>
                 <a:spcPts val="200"/>
               </a:spcBef>
-              <a:defRPr sz="1000">
+              <a:defRPr sz="1050">
                 <a:solidFill>
                   <a:srgbClr val="F4F2EE"/>
                 </a:solidFill>
               </a:defRPr>
             </a:pPr>
             <a:r>
-              <a:t>Поиск за доли секунды по имени гостя, номеру телефона или #ID заявки. Сегментный переключатель дат: «Все дни | Сегодня | Завтра».</a:t>
+              <a:t>Сетка тайм-слотов (обед, ужин) и количества персон. Система сразу показывает доступные столы.</a:t>
             </a:r>
           </a:p>
           <a:p>
@@ -7726,7 +10380,7 @@
               </a:defRPr>
             </a:pPr>
             <a:r>
-              <a:t>📊 Живой KPI-дашборд смены</a:t>
+              <a:t>3. Интерактивная схема зала</a:t>
             </a:r>
           </a:p>
           <a:p>
@@ -7734,14 +10388,14 @@
               <a:spcBef>
                 <a:spcPts val="200"/>
               </a:spcBef>
-              <a:defRPr sz="1000">
+              <a:defRPr sz="1050">
                 <a:solidFill>
                   <a:srgbClr val="F4F2EE"/>
                 </a:solidFill>
               </a:defRPr>
             </a:pPr>
             <a:r>
-              <a:t>Крупные показатели вверху экрана: сколько заявок ждут ответа (⏳), сколько столов в брони (✅) и сколько гостей обслужено за смену (👥).</a:t>
+              <a:t>Гость может выбрать конкретное место: панорамное окно, летняя терраса, VIP-кабина, топчан или дастархан.</a:t>
             </a:r>
           </a:p>
           <a:p>
@@ -7756,7 +10410,7 @@
               </a:defRPr>
             </a:pPr>
             <a:r>
-              <a:t>🔔 Звуковые консьерж-уведомления (Chime)</a:t>
+              <a:t>4. Меню и детальная информация</a:t>
             </a:r>
           </a:p>
           <a:p>
@@ -7764,14 +10418,14 @@
               <a:spcBef>
                 <a:spcPts val="200"/>
               </a:spcBef>
-              <a:defRPr sz="1000">
+              <a:defRPr sz="1050">
                 <a:solidFill>
                   <a:srgbClr val="F4F2EE"/>
                 </a:solidFill>
               </a:defRPr>
             </a:pPr>
             <a:r>
-              <a:t>При поступлении новой онлайн-заявки терминал издает благородный мягкий гонг (Web Audio API), чтобы хостес не пропустила гостя.</a:t>
+              <a:t>Цены, фирменные блюда, фотографии порций, геолокация и прямой переход в 2GIS / Instagram.</a:t>
             </a:r>
           </a:p>
           <a:p>
@@ -7786,7 +10440,7 @@
               </a:defRPr>
             </a:pPr>
             <a:r>
-              <a:t>🛡 Исключение ошибок человеческого фактора</a:t>
+              <a:t>5. Автоматическое подтверждение</a:t>
             </a:r>
           </a:p>
           <a:p>
@@ -7794,14 +10448,14 @@
               <a:spcBef>
                 <a:spcPts val="200"/>
               </a:spcBef>
-              <a:defRPr sz="1000">
+              <a:defRPr sz="1050">
                 <a:solidFill>
                   <a:srgbClr val="F4F2EE"/>
                 </a:solidFill>
               </a:defRPr>
             </a:pPr>
             <a:r>
-              <a:t>Невозможно случайно удалить бронь или повторно отменить уже отклоненную заявку. Полная синхронизация с базой данных.</a:t>
+              <a:t>Билет бронирования сохраняется в Telegram. За 2 часа до визита бот отправляет вежливое напоминание.</a:t>
             </a:r>
           </a:p>
         </p:txBody>
@@ -7853,7 +10507,7 @@
       </p:sp>
       <p:pic>
         <p:nvPicPr>
-          <p:cNvPr id="9" name="Picture 8" descr="admin_terminal_mobile.png"/>
+          <p:cNvPr id="9" name="Picture 8" descr="guest_catalog_mobile.png"/>
           <p:cNvPicPr>
             <a:picLocks noChangeAspect="1"/>
           </p:cNvPicPr>
@@ -7883,8 +10537,8 @@
         </p:nvSpPr>
         <p:spPr>
           <a:xfrm>
-            <a:off x="9290304" y="2249424"/>
-            <a:ext cx="2450592" cy="3547872"/>
+            <a:off x="9381744" y="1609344"/>
+            <a:ext cx="2267712" cy="4736592"/>
           </a:xfrm>
           <a:prstGeom prst="roundRect">
             <a:avLst/>
@@ -7922,7 +10576,7 @@
       </p:sp>
       <p:pic>
         <p:nvPicPr>
-          <p:cNvPr id="11" name="Picture 10" descr="admin_desktop_terminal.png"/>
+          <p:cNvPr id="11" name="Picture 10" descr="guest_restaurant_modal.png"/>
           <p:cNvPicPr>
             <a:picLocks noChangeAspect="1"/>
           </p:cNvPicPr>
@@ -7936,8 +10590,8 @@
         </p:blipFill>
         <p:spPr>
           <a:xfrm>
-            <a:off x="9326880" y="2286000"/>
-            <a:ext cx="2377440" cy="3474720"/>
+            <a:off x="9418320" y="1645920"/>
+            <a:ext cx="2194560" cy="4663440"/>
           </a:xfrm>
           <a:prstGeom prst="rect">
             <a:avLst/>
@@ -8036,7 +10690,7 @@
               </a:defRPr>
             </a:pPr>
             <a:r>
-              <a:t>СХЕМА РАССАДКИ</a:t>
+              <a:t>ТЕРМИНАЛ РЕСТОРАНА</a:t>
             </a:r>
           </a:p>
         </p:txBody>
@@ -8064,7 +10718,7 @@
           <a:lstStyle/>
           <a:p>
             <a:pPr>
-              <a:defRPr sz="2200" b="1">
+              <a:defRPr sz="2100" b="1">
                 <a:solidFill>
                   <a:srgbClr val="F4F2EE"/>
                 </a:solidFill>
@@ -8072,7 +10726,7 @@
               </a:defRPr>
             </a:pPr>
             <a:r>
-              <a:t>Интерактивная карта зала: Наглядный контроль занятости</a:t>
+              <a:t>RestoKZ PRO: Журнал броней с контекстными действиями</a:t>
             </a:r>
           </a:p>
         </p:txBody>
@@ -8085,7 +10739,7 @@
         </p:nvSpPr>
         <p:spPr>
           <a:xfrm>
-            <a:off x="731520" y="1188720"/>
+            <a:off x="731520" y="1170432"/>
             <a:ext cx="10698480" cy="320040"/>
           </a:xfrm>
           <a:prstGeom prst="rect">
@@ -8100,7 +10754,7 @@
           <a:lstStyle/>
           <a:p>
             <a:pPr>
-              <a:defRPr sz="1200">
+              <a:defRPr sz="1150">
                 <a:solidFill>
                   <a:srgbClr val="9CA3AF"/>
                 </a:solidFill>
@@ -8108,7 +10762,7 @@
               </a:defRPr>
             </a:pPr>
             <a:r>
-              <a:t>Никаких накладок, путаницы столов и потери контроля в часы пиковой загрузки</a:t>
+              <a:t>Специально разработан под экраны смартфонов хостес с крупными шрифтами и тактильным откликом</a:t>
             </a:r>
           </a:p>
         </p:txBody>
@@ -8181,131 +10835,161 @@
           <a:lstStyle/>
           <a:p>
             <a:pPr>
-              <a:defRPr sz="1300" b="1">
-                <a:solidFill>
-                  <a:srgbClr val="34D399"/>
-                </a:solidFill>
-              </a:defRPr>
-            </a:pPr>
-            <a:r>
-              <a:t>🟢 Наглядная цветовая легенда статусов</a:t>
-            </a:r>
-          </a:p>
-          <a:p>
-            <a:pPr>
-              <a:spcBef>
-                <a:spcPts val="300"/>
-              </a:spcBef>
-              <a:defRPr sz="1100">
+              <a:defRPr sz="1200" b="1">
+                <a:solidFill>
+                  <a:srgbClr val="C5A880"/>
+                </a:solidFill>
+              </a:defRPr>
+            </a:pPr>
+            <a:r>
+              <a:t>⚡ Контекстные умные действия в 1 клик</a:t>
+            </a:r>
+          </a:p>
+          <a:p>
+            <a:pPr>
+              <a:spcBef>
+                <a:spcPts val="200"/>
+              </a:spcBef>
+              <a:defRPr sz="1000">
                 <a:solidFill>
                   <a:srgbClr val="F4F2EE"/>
                 </a:solidFill>
               </a:defRPr>
             </a:pPr>
             <a:r>
-              <a:t>• Изумрудный: стол свободен для посадки</a:t>
+              <a:t>Кнопки динамически подстраиваются под статус заявки:</a:t>
             </a:r>
             <a:br/>
             <a:r>
-              <a:t>• Золотой: стол подтвержден в бронь на выбранное время</a:t>
+              <a:t>• Ожидает: [✅ Подтвердить] + [❌ Отказ]</a:t>
             </a:r>
             <a:br/>
             <a:r>
-              <a:t>• Лазурный: гости уже сидят за столом</a:t>
+              <a:t>• Подтверждена: [🥂 Посадить за стол] + [Отмена]</a:t>
             </a:r>
             <a:br/>
             <a:r>
-              <a:t>• Янтарный: новая заявка ожидает подтверждения</a:t>
-            </a:r>
-          </a:p>
-          <a:p>
-            <a:pPr>
-              <a:spcBef>
-                <a:spcPts val="1200"/>
-              </a:spcBef>
-              <a:defRPr sz="1300" b="1">
-                <a:solidFill>
-                  <a:srgbClr val="34D399"/>
-                </a:solidFill>
-              </a:defRPr>
-            </a:pPr>
-            <a:r>
-              <a:t>⚡ Посадка от двери в 2 клика (Walk-in)</a:t>
-            </a:r>
-          </a:p>
-          <a:p>
-            <a:pPr>
-              <a:spcBef>
-                <a:spcPts val="300"/>
-              </a:spcBef>
-              <a:defRPr sz="1100">
+              <a:t>• Гости сидят: [🔓 Стол освободился] + [↩ В бронь]</a:t>
+            </a:r>
+          </a:p>
+          <a:p>
+            <a:pPr>
+              <a:spcBef>
+                <a:spcPts val="800"/>
+              </a:spcBef>
+              <a:defRPr sz="1200" b="1">
+                <a:solidFill>
+                  <a:srgbClr val="C5A880"/>
+                </a:solidFill>
+              </a:defRPr>
+            </a:pPr>
+            <a:r>
+              <a:t>🔍 Мгновенный поиск и фильтрация</a:t>
+            </a:r>
+          </a:p>
+          <a:p>
+            <a:pPr>
+              <a:spcBef>
+                <a:spcPts val="200"/>
+              </a:spcBef>
+              <a:defRPr sz="1000">
                 <a:solidFill>
                   <a:srgbClr val="F4F2EE"/>
                 </a:solidFill>
               </a:defRPr>
             </a:pPr>
             <a:r>
-              <a:t>Гости пришли с улицы без брони? Хостес просто тапает на свободный стол в зале — карточка посадки открывается мгновенно.</a:t>
-            </a:r>
-          </a:p>
-          <a:p>
-            <a:pPr>
-              <a:spcBef>
-                <a:spcPts val="1200"/>
-              </a:spcBef>
-              <a:defRPr sz="1300" b="1">
-                <a:solidFill>
-                  <a:srgbClr val="34D399"/>
-                </a:solidFill>
-              </a:defRPr>
-            </a:pPr>
-            <a:r>
-              <a:t>🛡 Защита от овербукинга и коллизий</a:t>
-            </a:r>
-          </a:p>
-          <a:p>
-            <a:pPr>
-              <a:spcBef>
-                <a:spcPts val="300"/>
-              </a:spcBef>
-              <a:defRPr sz="1100">
+              <a:t>Поиск за доли секунды по имени гостя, номеру телефона или #ID заявки. Сегментный переключатель дат: «Все дни | Сегодня | Завтра».</a:t>
+            </a:r>
+          </a:p>
+          <a:p>
+            <a:pPr>
+              <a:spcBef>
+                <a:spcPts val="800"/>
+              </a:spcBef>
+              <a:defRPr sz="1200" b="1">
+                <a:solidFill>
+                  <a:srgbClr val="C5A880"/>
+                </a:solidFill>
+              </a:defRPr>
+            </a:pPr>
+            <a:r>
+              <a:t>📊 Живой KPI-дашборд смены</a:t>
+            </a:r>
+          </a:p>
+          <a:p>
+            <a:pPr>
+              <a:spcBef>
+                <a:spcPts val="200"/>
+              </a:spcBef>
+              <a:defRPr sz="1000">
                 <a:solidFill>
                   <a:srgbClr val="F4F2EE"/>
                 </a:solidFill>
               </a:defRPr>
             </a:pPr>
             <a:r>
-              <a:t>Система автоматически блокирует стол на 2 часа вокруг времени брони. Никаких конфликтов из-за посадки двух компаний на один диван.</a:t>
-            </a:r>
-          </a:p>
-          <a:p>
-            <a:pPr>
-              <a:spcBef>
-                <a:spcPts val="1200"/>
-              </a:spcBef>
-              <a:defRPr sz="1300" b="1">
-                <a:solidFill>
-                  <a:srgbClr val="34D399"/>
-                </a:solidFill>
-              </a:defRPr>
-            </a:pPr>
-            <a:r>
-              <a:t>🏢 Зонирование ресторана</a:t>
-            </a:r>
-          </a:p>
-          <a:p>
-            <a:pPr>
-              <a:spcBef>
-                <a:spcPts val="300"/>
-              </a:spcBef>
-              <a:defRPr sz="1100">
+              <a:t>Крупные показатели вверху экрана: сколько заявок ждут ответа (⏳), сколько столов в брони (✅) и сколько гостей обслужено за смену (👥).</a:t>
+            </a:r>
+          </a:p>
+          <a:p>
+            <a:pPr>
+              <a:spcBef>
+                <a:spcPts val="800"/>
+              </a:spcBef>
+              <a:defRPr sz="1200" b="1">
+                <a:solidFill>
+                  <a:srgbClr val="C5A880"/>
+                </a:solidFill>
+              </a:defRPr>
+            </a:pPr>
+            <a:r>
+              <a:t>🔔 Звуковые консьерж-уведомления (Chime)</a:t>
+            </a:r>
+          </a:p>
+          <a:p>
+            <a:pPr>
+              <a:spcBef>
+                <a:spcPts val="200"/>
+              </a:spcBef>
+              <a:defRPr sz="1000">
                 <a:solidFill>
                   <a:srgbClr val="F4F2EE"/>
                 </a:solidFill>
               </a:defRPr>
             </a:pPr>
             <a:r>
-              <a:t>Четкое разделение на зоны: основной зал, панорамные окна, летняя терраса, тихая зона, топчаны и VIP-кабины.</a:t>
+              <a:t>При поступлении новой онлайн-заявки терминал издает благородный мягкий гонг (Web Audio API), чтобы хостес не пропустила гостя.</a:t>
+            </a:r>
+          </a:p>
+          <a:p>
+            <a:pPr>
+              <a:spcBef>
+                <a:spcPts val="800"/>
+              </a:spcBef>
+              <a:defRPr sz="1200" b="1">
+                <a:solidFill>
+                  <a:srgbClr val="C5A880"/>
+                </a:solidFill>
+              </a:defRPr>
+            </a:pPr>
+            <a:r>
+              <a:t>🛡 Исключение ошибок человеческого фактора</a:t>
+            </a:r>
+          </a:p>
+          <a:p>
+            <a:pPr>
+              <a:spcBef>
+                <a:spcPts val="200"/>
+              </a:spcBef>
+              <a:defRPr sz="1000">
+                <a:solidFill>
+                  <a:srgbClr val="F4F2EE"/>
+                </a:solidFill>
+              </a:defRPr>
+            </a:pPr>
+            <a:r>
+              <a:t>Невозможно случайно удалить бронь или повторно отменить уже отклоненную заявку. Полная синхронизация с базой данных.</a:t>
             </a:r>
           </a:p>
         </p:txBody>
@@ -8318,8 +11002,8 @@
         </p:nvSpPr>
         <p:spPr>
           <a:xfrm>
-            <a:off x="7735824" y="1609344"/>
-            <a:ext cx="2313432" cy="4736592"/>
+            <a:off x="6912864" y="1609344"/>
+            <a:ext cx="2267712" cy="4736592"/>
           </a:xfrm>
           <a:prstGeom prst="roundRect">
             <a:avLst/>
@@ -8357,7 +11041,7 @@
       </p:sp>
       <p:pic>
         <p:nvPicPr>
-          <p:cNvPr id="9" name="Picture 8" descr="admin_floor_map.png"/>
+          <p:cNvPr id="9" name="Picture 8" descr="admin_terminal_mobile.png"/>
           <p:cNvPicPr>
             <a:picLocks noChangeAspect="1"/>
           </p:cNvPicPr>
@@ -8371,8 +11055,77 @@
         </p:blipFill>
         <p:spPr>
           <a:xfrm>
-            <a:off x="7772400" y="1645920"/>
-            <a:ext cx="2240280" cy="4663440"/>
+            <a:off x="6949440" y="1645920"/>
+            <a:ext cx="2194560" cy="4663440"/>
+          </a:xfrm>
+          <a:prstGeom prst="rect">
+            <a:avLst/>
+          </a:prstGeom>
+        </p:spPr>
+      </p:pic>
+      <p:sp>
+        <p:nvSpPr>
+          <p:cNvPr id="10" name="Rounded Rectangle 9"/>
+          <p:cNvSpPr/>
+          <p:nvPr/>
+        </p:nvSpPr>
+        <p:spPr>
+          <a:xfrm>
+            <a:off x="9290304" y="2249424"/>
+            <a:ext cx="2450592" cy="3547872"/>
+          </a:xfrm>
+          <a:prstGeom prst="roundRect">
+            <a:avLst/>
+          </a:prstGeom>
+          <a:solidFill>
+            <a:srgbClr val="1C1F26"/>
+          </a:solidFill>
+          <a:ln w="19050">
+            <a:solidFill>
+              <a:srgbClr val="C5A880"/>
+            </a:solidFill>
+          </a:ln>
+        </p:spPr>
+        <p:style>
+          <a:lnRef idx="1">
+            <a:schemeClr val="accent1"/>
+          </a:lnRef>
+          <a:fillRef idx="3">
+            <a:schemeClr val="accent1"/>
+          </a:fillRef>
+          <a:effectRef idx="2">
+            <a:schemeClr val="accent1"/>
+          </a:effectRef>
+          <a:fontRef idx="minor">
+            <a:schemeClr val="lt1"/>
+          </a:fontRef>
+        </p:style>
+        <p:txBody>
+          <a:bodyPr rtlCol="0" anchor="ctr"/>
+          <a:lstStyle/>
+          <a:p>
+            <a:pPr algn="ctr"/>
+          </a:p>
+        </p:txBody>
+      </p:sp>
+      <p:pic>
+        <p:nvPicPr>
+          <p:cNvPr id="11" name="Picture 10" descr="admin_desktop_terminal.png"/>
+          <p:cNvPicPr>
+            <a:picLocks noChangeAspect="1"/>
+          </p:cNvPicPr>
+          <p:nvPr/>
+        </p:nvPicPr>
+        <p:blipFill>
+          <a:blip r:embed="rId3"/>
+          <a:stretch>
+            <a:fillRect/>
+          </a:stretch>
+        </p:blipFill>
+        <p:spPr>
+          <a:xfrm>
+            <a:off x="9326880" y="2286000"/>
+            <a:ext cx="2377440" cy="3474720"/>
           </a:xfrm>
           <a:prstGeom prst="rect">
             <a:avLst/>
@@ -8471,7 +11224,7 @@
               </a:defRPr>
             </a:pPr>
             <a:r>
-              <a:t>УПРАВЛЕНИЕ ПЕРСОНАЛОМ</a:t>
+              <a:t>СХЕМА РАССАДКИ</a:t>
             </a:r>
           </a:p>
         </p:txBody>
@@ -8499,7 +11252,7 @@
           <a:lstStyle/>
           <a:p>
             <a:pPr>
-              <a:defRPr sz="2200" b="1">
+              <a:defRPr sz="2100" b="1">
                 <a:solidFill>
                   <a:srgbClr val="F4F2EE"/>
                 </a:solidFill>
@@ -8507,7 +11260,7 @@
               </a:defRPr>
             </a:pPr>
             <a:r>
-              <a:t>Рабочая смена и Z-отчётность: Полная прозрачность для владельца</a:t>
+              <a:t>Интерактивная карта зала: Наглядный контроль занятости</a:t>
             </a:r>
           </a:p>
         </p:txBody>
@@ -8520,7 +11273,7 @@
         </p:nvSpPr>
         <p:spPr>
           <a:xfrm>
-            <a:off x="731520" y="1188720"/>
+            <a:off x="731520" y="1170432"/>
             <a:ext cx="10698480" cy="320040"/>
           </a:xfrm>
           <a:prstGeom prst="rect">
@@ -8535,7 +11288,7 @@
           <a:lstStyle/>
           <a:p>
             <a:pPr>
-              <a:defRPr sz="1200">
+              <a:defRPr sz="1150">
                 <a:solidFill>
                   <a:srgbClr val="9CA3AF"/>
                 </a:solidFill>
@@ -8543,7 +11296,7 @@
               </a:defRPr>
             </a:pPr>
             <a:r>
-              <a:t>Хостес подотчетна системе, а управляющий видит реальные цифры загрузки зала</a:t>
+              <a:t>Никаких накладок, путаницы столов и потери контроля в часы пиковой загрузки</a:t>
             </a:r>
           </a:p>
         </p:txBody>
@@ -8618,12 +11371,12 @@
             <a:pPr>
               <a:defRPr sz="1300" b="1">
                 <a:solidFill>
-                  <a:srgbClr val="C5A880"/>
-                </a:solidFill>
-              </a:defRPr>
-            </a:pPr>
-            <a:r>
-              <a:t>⏱ Интерактивный статус-бар смены</a:t>
+                  <a:srgbClr val="34D399"/>
+                </a:solidFill>
+              </a:defRPr>
+            </a:pPr>
+            <a:r>
+              <a:t>🟢 Наглядная цветовая легенда статусов</a:t>
             </a:r>
           </a:p>
           <a:p>
@@ -8638,22 +11391,34 @@
               </a:defRPr>
             </a:pPr>
             <a:r>
-              <a:t>В шапке терминала отображается пульсирующий статус с живым таймером (например, «● Смена 3ч 45м»). Данные сохраняются при перезагрузках.</a:t>
-            </a:r>
-          </a:p>
-          <a:p>
-            <a:pPr>
-              <a:spcBef>
-                <a:spcPts val="1000"/>
+              <a:t>• Изумрудный: стол свободен для посадки</a:t>
+            </a:r>
+            <a:br/>
+            <a:r>
+              <a:t>• Золотой: стол подтвержден в бронь на выбранное время</a:t>
+            </a:r>
+            <a:br/>
+            <a:r>
+              <a:t>• Лазурный: гости уже сидят за столом</a:t>
+            </a:r>
+            <a:br/>
+            <a:r>
+              <a:t>• Янтарный: новая заявка ожидает подтверждения</a:t>
+            </a:r>
+          </a:p>
+          <a:p>
+            <a:pPr>
+              <a:spcBef>
+                <a:spcPts val="1200"/>
               </a:spcBef>
               <a:defRPr sz="1300" b="1">
                 <a:solidFill>
-                  <a:srgbClr val="C5A880"/>
-                </a:solidFill>
-              </a:defRPr>
-            </a:pPr>
-            <a:r>
-              <a:t>📊 Автоматический подсчет метрик смены</a:t>
+                  <a:srgbClr val="34D399"/>
+                </a:solidFill>
+              </a:defRPr>
+            </a:pPr>
+            <a:r>
+              <a:t>⚡ Посадка от двери в 2 клика (Walk-in)</a:t>
             </a:r>
           </a:p>
           <a:p>
@@ -8668,34 +11433,22 @@
               </a:defRPr>
             </a:pPr>
             <a:r>
-              <a:t>Терминал в реальном времени считает:</a:t>
-            </a:r>
-            <a:br/>
-            <a:r>
-              <a:t>• Количество поступивших и обработанных заявок</a:t>
-            </a:r>
-            <a:br/>
-            <a:r>
-              <a:t>• Суммарное количество реально посаженных гостей</a:t>
-            </a:r>
-            <a:br/>
-            <a:r>
-              <a:t>• Количество отмен и отказов с причинами</a:t>
-            </a:r>
-          </a:p>
-          <a:p>
-            <a:pPr>
-              <a:spcBef>
-                <a:spcPts val="1000"/>
+              <a:t>Гости пришли с улицы без брони? Хостес просто тапает на свободный стол в зале — карточка посадки открывается мгновенно.</a:t>
+            </a:r>
+          </a:p>
+          <a:p>
+            <a:pPr>
+              <a:spcBef>
+                <a:spcPts val="1200"/>
               </a:spcBef>
               <a:defRPr sz="1300" b="1">
                 <a:solidFill>
-                  <a:srgbClr val="C5A880"/>
-                </a:solidFill>
-              </a:defRPr>
-            </a:pPr>
-            <a:r>
-              <a:t>🏁 Закрытие смены по кнопке и Z-отчет</a:t>
+                  <a:srgbClr val="34D399"/>
+                </a:solidFill>
+              </a:defRPr>
+            </a:pPr>
+            <a:r>
+              <a:t>🛡 Защита от овербукинга и коллизий</a:t>
             </a:r>
           </a:p>
           <a:p>
@@ -8710,22 +11463,22 @@
               </a:defRPr>
             </a:pPr>
             <a:r>
-              <a:t>Хостес не может просто уйти — по окончании дня она нажимает «Завершить рабочую смену». Формируется итоговая сводка смены для передачи управляющему.</a:t>
-            </a:r>
-          </a:p>
-          <a:p>
-            <a:pPr>
-              <a:spcBef>
-                <a:spcPts val="1000"/>
+              <a:t>Система автоматически блокирует стол на 2 часа вокруг времени брони. Никаких конфликтов из-за посадки двух компаний на один диван.</a:t>
+            </a:r>
+          </a:p>
+          <a:p>
+            <a:pPr>
+              <a:spcBef>
+                <a:spcPts val="1200"/>
               </a:spcBef>
               <a:defRPr sz="1300" b="1">
                 <a:solidFill>
-                  <a:srgbClr val="C5A880"/>
-                </a:solidFill>
-              </a:defRPr>
-            </a:pPr>
-            <a:r>
-              <a:t>👤 Персональная ответственность</a:t>
+                  <a:srgbClr val="34D399"/>
+                </a:solidFill>
+              </a:defRPr>
+            </a:pPr>
+            <a:r>
+              <a:t>🏢 Зонирование ресторана</a:t>
             </a:r>
           </a:p>
           <a:p>
@@ -8740,7 +11493,7 @@
               </a:defRPr>
             </a:pPr>
             <a:r>
-              <a:t>Каждая смена привязана к имени дежурного администратора, исключая перекладывание вины за потерянные брони.</a:t>
+              <a:t>Четкое разделение на зоны: основной зал, панорамные окна, летняя терраса, тихая зона, топчаны и VIP-кабины.</a:t>
             </a:r>
           </a:p>
         </p:txBody>
@@ -8792,7 +11545,7 @@
       </p:sp>
       <p:pic>
         <p:nvPicPr>
-          <p:cNvPr id="9" name="Picture 8" descr="admin_shift_modal.png"/>
+          <p:cNvPr id="9" name="Picture 8" descr="admin_floor_map.png"/>
           <p:cNvPicPr>
             <a:picLocks noChangeAspect="1"/>
           </p:cNvPicPr>
@@ -8906,7 +11659,7 @@
               </a:defRPr>
             </a:pPr>
             <a:r>
-              <a:t>СОВРЕМЕННЫЙ UX/UI</a:t>
+              <a:t>УПРАВЛЕНИЕ ПЕРСОНАЛОМ</a:t>
             </a:r>
           </a:p>
         </p:txBody>
@@ -8934,7 +11687,7 @@
           <a:lstStyle/>
           <a:p>
             <a:pPr>
-              <a:defRPr sz="2200" b="1">
+              <a:defRPr sz="2100" b="1">
                 <a:solidFill>
                   <a:srgbClr val="F4F2EE"/>
                 </a:solidFill>
@@ -8942,7 +11695,7 @@
               </a:defRPr>
             </a:pPr>
             <a:r>
-              <a:t>Мультилокация и быстрое управление сетью ресторанов</a:t>
+              <a:t>Рабочая смена и Z-отчётность: Полная прозрачность для владельца</a:t>
             </a:r>
           </a:p>
         </p:txBody>
@@ -8955,7 +11708,7 @@
         </p:nvSpPr>
         <p:spPr>
           <a:xfrm>
-            <a:off x="731520" y="1188720"/>
+            <a:off x="731520" y="1170432"/>
             <a:ext cx="10698480" cy="320040"/>
           </a:xfrm>
           <a:prstGeom prst="rect">
@@ -8970,7 +11723,7 @@
           <a:lstStyle/>
           <a:p>
             <a:pPr>
-              <a:defRPr sz="1200">
+              <a:defRPr sz="1150">
                 <a:solidFill>
                   <a:srgbClr val="9CA3AF"/>
                 </a:solidFill>
@@ -8978,7 +11731,7 @@
               </a:defRPr>
             </a:pPr>
             <a:r>
-              <a:t>Замена устаревших браузерных элементов на премиальные Bottom Sheets и боковое меню</a:t>
+              <a:t>Хостес подотчетна системе, а управляющий видит реальные цифры загрузки зала</a:t>
             </a:r>
           </a:p>
         </p:txBody>
@@ -9051,149 +11804,131 @@
           <a:lstStyle/>
           <a:p>
             <a:pPr>
-              <a:defRPr sz="1200" b="1">
-                <a:solidFill>
-                  <a:srgbClr val="DFCAAB"/>
-                </a:solidFill>
-              </a:defRPr>
-            </a:pPr>
-            <a:r>
-              <a:t>🏛 Кастомный Luxury Bottom Sheet выбора заведения</a:t>
-            </a:r>
-          </a:p>
-          <a:p>
-            <a:pPr>
-              <a:spcBef>
-                <a:spcPts val="200"/>
-              </a:spcBef>
-              <a:defRPr sz="1000">
+              <a:defRPr sz="1300" b="1">
+                <a:solidFill>
+                  <a:srgbClr val="C5A880"/>
+                </a:solidFill>
+              </a:defRPr>
+            </a:pPr>
+            <a:r>
+              <a:t>⏱ Интерактивный статус-бар смены</a:t>
+            </a:r>
+          </a:p>
+          <a:p>
+            <a:pPr>
+              <a:spcBef>
+                <a:spcPts val="300"/>
+              </a:spcBef>
+              <a:defRPr sz="1100">
                 <a:solidFill>
                   <a:srgbClr val="F4F2EE"/>
                 </a:solidFill>
               </a:defRPr>
             </a:pPr>
             <a:r>
-              <a:t>Вместо архаичного селектора — современная шторка с поиском, бейджами городов, количеством столов и моментальным переключением филиалов.</a:t>
-            </a:r>
-          </a:p>
-          <a:p>
-            <a:pPr>
-              <a:spcBef>
-                <a:spcPts val="800"/>
-              </a:spcBef>
-              <a:defRPr sz="1200" b="1">
-                <a:solidFill>
-                  <a:srgbClr val="DFCAAB"/>
-                </a:solidFill>
-              </a:defRPr>
-            </a:pPr>
-            <a:r>
-              <a:t>☰ Боковое меню (Side Drawer)</a:t>
-            </a:r>
-          </a:p>
-          <a:p>
-            <a:pPr>
-              <a:spcBef>
-                <a:spcPts val="200"/>
-              </a:spcBef>
-              <a:defRPr sz="1000">
+              <a:t>В шапке терминала отображается пульсирующий статус с живым таймером (например, «● Смена 3ч 45м»). Данные сохраняются при перезагрузках.</a:t>
+            </a:r>
+          </a:p>
+          <a:p>
+            <a:pPr>
+              <a:spcBef>
+                <a:spcPts val="1000"/>
+              </a:spcBef>
+              <a:defRPr sz="1300" b="1">
+                <a:solidFill>
+                  <a:srgbClr val="C5A880"/>
+                </a:solidFill>
+              </a:defRPr>
+            </a:pPr>
+            <a:r>
+              <a:t>📊 Автоматический подсчет метрик смены</a:t>
+            </a:r>
+          </a:p>
+          <a:p>
+            <a:pPr>
+              <a:spcBef>
+                <a:spcPts val="300"/>
+              </a:spcBef>
+              <a:defRPr sz="1100">
                 <a:solidFill>
                   <a:srgbClr val="F4F2EE"/>
                 </a:solidFill>
               </a:defRPr>
             </a:pPr>
             <a:r>
-              <a:t>Все служебные функции аккуратно спрятаны под гамбургер-меню, освобождая экран терминала для главного — броней и карты зала.</a:t>
-            </a:r>
-          </a:p>
-          <a:p>
-            <a:pPr>
-              <a:spcBef>
-                <a:spcPts val="800"/>
-              </a:spcBef>
-              <a:defRPr sz="1200" b="1">
-                <a:solidFill>
-                  <a:srgbClr val="DFCAAB"/>
-                </a:solidFill>
-              </a:defRPr>
-            </a:pPr>
-            <a:r>
-              <a:t>🌐 Трехъязычный интерфейс (RU / KZ / EN)</a:t>
-            </a:r>
-          </a:p>
-          <a:p>
-            <a:pPr>
-              <a:spcBef>
-                <a:spcPts val="200"/>
-              </a:spcBef>
-              <a:defRPr sz="1000">
+              <a:t>Терминал в реальном времени считает:</a:t>
+            </a:r>
+            <a:br/>
+            <a:r>
+              <a:t>• Количество поступивших и обработанных заявок</a:t>
+            </a:r>
+            <a:br/>
+            <a:r>
+              <a:t>• Суммарное количество реально посаженных гостей</a:t>
+            </a:r>
+            <a:br/>
+            <a:r>
+              <a:t>• Количество отмен и отказов с причинами</a:t>
+            </a:r>
+          </a:p>
+          <a:p>
+            <a:pPr>
+              <a:spcBef>
+                <a:spcPts val="1000"/>
+              </a:spcBef>
+              <a:defRPr sz="1300" b="1">
+                <a:solidFill>
+                  <a:srgbClr val="C5A880"/>
+                </a:solidFill>
+              </a:defRPr>
+            </a:pPr>
+            <a:r>
+              <a:t>🏁 Закрытие смены по кнопке и Z-отчет</a:t>
+            </a:r>
+          </a:p>
+          <a:p>
+            <a:pPr>
+              <a:spcBef>
+                <a:spcPts val="300"/>
+              </a:spcBef>
+              <a:defRPr sz="1100">
                 <a:solidFill>
                   <a:srgbClr val="F4F2EE"/>
                 </a:solidFill>
               </a:defRPr>
             </a:pPr>
             <a:r>
-              <a:t>Крупные удобные кнопки переключения языка для сотрудников и гостей в любом регионе Казахстана.</a:t>
-            </a:r>
-          </a:p>
-          <a:p>
-            <a:pPr>
-              <a:spcBef>
-                <a:spcPts val="800"/>
-              </a:spcBef>
-              <a:defRPr sz="1200" b="1">
-                <a:solidFill>
-                  <a:srgbClr val="DFCAAB"/>
-                </a:solidFill>
-              </a:defRPr>
-            </a:pPr>
-            <a:r>
-              <a:t>🍽 Быстрый переход «Терминал ↔ Витрина гостя»</a:t>
-            </a:r>
-          </a:p>
-          <a:p>
-            <a:pPr>
-              <a:spcBef>
-                <a:spcPts val="200"/>
-              </a:spcBef>
-              <a:defRPr sz="1000">
+              <a:t>Хостес не может просто уйти — по окончании дня она нажимает «Завершить рабочую смену». Формируется итоговая сводка смены для передачи управляющему.</a:t>
+            </a:r>
+          </a:p>
+          <a:p>
+            <a:pPr>
+              <a:spcBef>
+                <a:spcPts val="1000"/>
+              </a:spcBef>
+              <a:defRPr sz="1300" b="1">
+                <a:solidFill>
+                  <a:srgbClr val="C5A880"/>
+                </a:solidFill>
+              </a:defRPr>
+            </a:pPr>
+            <a:r>
+              <a:t>👤 Персональная ответственность</a:t>
+            </a:r>
+          </a:p>
+          <a:p>
+            <a:pPr>
+              <a:spcBef>
+                <a:spcPts val="300"/>
+              </a:spcBef>
+              <a:defRPr sz="1100">
                 <a:solidFill>
                   <a:srgbClr val="F4F2EE"/>
                 </a:solidFill>
               </a:defRPr>
             </a:pPr>
             <a:r>
-              <a:t>Хостес может в любой момент открыть клиентскую витрину и увидеть свой ресторан глазами гостя.</a:t>
-            </a:r>
-          </a:p>
-          <a:p>
-            <a:pPr>
-              <a:spcBef>
-                <a:spcPts val="800"/>
-              </a:spcBef>
-              <a:defRPr sz="1200" b="1">
-                <a:solidFill>
-                  <a:srgbClr val="DFCAAB"/>
-                </a:solidFill>
-              </a:defRPr>
-            </a:pPr>
-            <a:r>
-              <a:t>⚡ Тактильный отклик и анимации</a:t>
-            </a:r>
-          </a:p>
-          <a:p>
-            <a:pPr>
-              <a:spcBef>
-                <a:spcPts val="200"/>
-              </a:spcBef>
-              <a:defRPr sz="1000">
-                <a:solidFill>
-                  <a:srgbClr val="F4F2EE"/>
-                </a:solidFill>
-              </a:defRPr>
-            </a:pPr>
-            <a:r>
-              <a:t>Плавная физика сжатия кнопок (Spring physics), адаптивность под Home Bar iPhone (Safe Area).</a:t>
+              <a:t>Каждая смена привязана к имени дежурного администратора, исключая перекладывание вины за потерянные брони.</a:t>
             </a:r>
           </a:p>
         </p:txBody>
@@ -9206,8 +11941,8 @@
         </p:nvSpPr>
         <p:spPr>
           <a:xfrm>
-            <a:off x="6912864" y="1609344"/>
-            <a:ext cx="2267712" cy="4736592"/>
+            <a:off x="7735824" y="1609344"/>
+            <a:ext cx="2313432" cy="4736592"/>
           </a:xfrm>
           <a:prstGeom prst="roundRect">
             <a:avLst/>
@@ -9245,7 +11980,7 @@
       </p:sp>
       <p:pic>
         <p:nvPicPr>
-          <p:cNvPr id="9" name="Picture 8" descr="admin_rest_picker.png"/>
+          <p:cNvPr id="9" name="Picture 8" descr="admin_shift_modal.png"/>
           <p:cNvPicPr>
             <a:picLocks noChangeAspect="1"/>
           </p:cNvPicPr>
@@ -9259,77 +11994,8 @@
         </p:blipFill>
         <p:spPr>
           <a:xfrm>
-            <a:off x="6949440" y="1645920"/>
-            <a:ext cx="2194560" cy="4663440"/>
-          </a:xfrm>
-          <a:prstGeom prst="rect">
-            <a:avLst/>
-          </a:prstGeom>
-        </p:spPr>
-      </p:pic>
-      <p:sp>
-        <p:nvSpPr>
-          <p:cNvPr id="10" name="Rounded Rectangle 9"/>
-          <p:cNvSpPr/>
-          <p:nvPr/>
-        </p:nvSpPr>
-        <p:spPr>
-          <a:xfrm>
-            <a:off x="9381744" y="1609344"/>
-            <a:ext cx="2267712" cy="4736592"/>
-          </a:xfrm>
-          <a:prstGeom prst="roundRect">
-            <a:avLst/>
-          </a:prstGeom>
-          <a:solidFill>
-            <a:srgbClr val="1C1F26"/>
-          </a:solidFill>
-          <a:ln w="19050">
-            <a:solidFill>
-              <a:srgbClr val="C5A880"/>
-            </a:solidFill>
-          </a:ln>
-        </p:spPr>
-        <p:style>
-          <a:lnRef idx="1">
-            <a:schemeClr val="accent1"/>
-          </a:lnRef>
-          <a:fillRef idx="3">
-            <a:schemeClr val="accent1"/>
-          </a:fillRef>
-          <a:effectRef idx="2">
-            <a:schemeClr val="accent1"/>
-          </a:effectRef>
-          <a:fontRef idx="minor">
-            <a:schemeClr val="lt1"/>
-          </a:fontRef>
-        </p:style>
-        <p:txBody>
-          <a:bodyPr rtlCol="0" anchor="ctr"/>
-          <a:lstStyle/>
-          <a:p>
-            <a:pPr algn="ctr"/>
-          </a:p>
-        </p:txBody>
-      </p:sp>
-      <p:pic>
-        <p:nvPicPr>
-          <p:cNvPr id="11" name="Picture 10" descr="admin_drawer_menu.png"/>
-          <p:cNvPicPr>
-            <a:picLocks noChangeAspect="1"/>
-          </p:cNvPicPr>
-          <p:nvPr/>
-        </p:nvPicPr>
-        <p:blipFill>
-          <a:blip r:embed="rId3"/>
-          <a:stretch>
-            <a:fillRect/>
-          </a:stretch>
-        </p:blipFill>
-        <p:spPr>
-          <a:xfrm>
-            <a:off x="9418320" y="1645920"/>
-            <a:ext cx="2194560" cy="4663440"/>
+            <a:off x="7772400" y="1645920"/>
+            <a:ext cx="2240280" cy="4663440"/>
           </a:xfrm>
           <a:prstGeom prst="rect">
             <a:avLst/>
@@ -9428,7 +12094,7 @@
               </a:defRPr>
             </a:pPr>
             <a:r>
-              <a:t>НАСТРОЙКА И КАСТОМИЗАЦИЯ</a:t>
+              <a:t>СОВРЕМЕННЫЙ UX/UI</a:t>
             </a:r>
           </a:p>
         </p:txBody>
@@ -9456,7 +12122,7 @@
           <a:lstStyle/>
           <a:p>
             <a:pPr>
-              <a:defRPr sz="2200" b="1">
+              <a:defRPr sz="2100" b="1">
                 <a:solidFill>
                   <a:srgbClr val="F4F2EE"/>
                 </a:solidFill>
@@ -9464,7 +12130,7 @@
               </a:defRPr>
             </a:pPr>
             <a:r>
-              <a:t>Конструктор зала и Управление рестораном</a:t>
+              <a:t>Мультилокация и быстрое управление сетью ресторанов</a:t>
             </a:r>
           </a:p>
         </p:txBody>
@@ -9477,7 +12143,7 @@
         </p:nvSpPr>
         <p:spPr>
           <a:xfrm>
-            <a:off x="731520" y="1188720"/>
+            <a:off x="731520" y="1170432"/>
             <a:ext cx="10698480" cy="320040"/>
           </a:xfrm>
           <a:prstGeom prst="rect">
@@ -9492,7 +12158,7 @@
           <a:lstStyle/>
           <a:p>
             <a:pPr>
-              <a:defRPr sz="1200">
+              <a:defRPr sz="1150">
                 <a:solidFill>
                   <a:srgbClr val="9CA3AF"/>
                 </a:solidFill>
@@ -9500,7 +12166,7 @@
               </a:defRPr>
             </a:pPr>
             <a:r>
-              <a:t>Полная автономия заведения — добавление точек, настройка столов и блюд за 5 минут</a:t>
+              <a:t>Замена устаревших браузерных элементов на премиальные Bottom Sheets и боковое меню</a:t>
             </a:r>
           </a:p>
         </p:txBody>
@@ -9514,7 +12180,7 @@
         <p:spPr>
           <a:xfrm>
             <a:off x="731520" y="1645920"/>
-            <a:ext cx="3474720" cy="4663440"/>
+            <a:ext cx="5943600" cy="4663440"/>
           </a:xfrm>
           <a:prstGeom prst="roundRect">
             <a:avLst/>
@@ -9524,7 +12190,7 @@
           </a:solidFill>
           <a:ln w="12700">
             <a:solidFill>
-              <a:srgbClr val="38BDF8"/>
+              <a:srgbClr val="323741"/>
             </a:solidFill>
           </a:ln>
         </p:spPr>
@@ -9558,8 +12224,8 @@
         </p:nvSpPr>
         <p:spPr>
           <a:xfrm>
-            <a:off x="914400" y="1828800"/>
-            <a:ext cx="3108960" cy="4297680"/>
+            <a:off x="1005840" y="1828800"/>
+            <a:ext cx="5394960" cy="4297680"/>
           </a:xfrm>
           <a:prstGeom prst="rect">
             <a:avLst/>
@@ -9573,14 +12239,29 @@
           <a:lstStyle/>
           <a:p>
             <a:pPr>
-              <a:defRPr sz="1400" b="1">
-                <a:solidFill>
-                  <a:srgbClr val="38BDF8"/>
-                </a:solidFill>
-              </a:defRPr>
-            </a:pPr>
-            <a:r>
-              <a:t>🏢 Профиль &amp; Соцсети</a:t>
+              <a:defRPr sz="1200" b="1">
+                <a:solidFill>
+                  <a:srgbClr val="DFCAAB"/>
+                </a:solidFill>
+              </a:defRPr>
+            </a:pPr>
+            <a:r>
+              <a:t>🏛 Кастомный Luxury Bottom Sheet выбора заведения</a:t>
+            </a:r>
+          </a:p>
+          <a:p>
+            <a:pPr>
+              <a:spcBef>
+                <a:spcPts val="200"/>
+              </a:spcBef>
+              <a:defRPr sz="1000">
+                <a:solidFill>
+                  <a:srgbClr val="F4F2EE"/>
+                </a:solidFill>
+              </a:defRPr>
+            </a:pPr>
+            <a:r>
+              <a:t>Вместо архаичного селектора — современная шторка с поиском, бейджами городов, количеством столов и моментальным переключением филиалов.</a:t>
             </a:r>
           </a:p>
           <a:p>
@@ -9588,14 +12269,29 @@
               <a:spcBef>
                 <a:spcPts val="800"/>
               </a:spcBef>
-              <a:defRPr sz="1100">
+              <a:defRPr sz="1200" b="1">
+                <a:solidFill>
+                  <a:srgbClr val="DFCAAB"/>
+                </a:solidFill>
+              </a:defRPr>
+            </a:pPr>
+            <a:r>
+              <a:t>☰ Боковое меню (Side Drawer)</a:t>
+            </a:r>
+          </a:p>
+          <a:p>
+            <a:pPr>
+              <a:spcBef>
+                <a:spcPts val="200"/>
+              </a:spcBef>
+              <a:defRPr sz="1000">
                 <a:solidFill>
                   <a:srgbClr val="F4F2EE"/>
                 </a:solidFill>
               </a:defRPr>
             </a:pPr>
             <a:r>
-              <a:t>• Редактирование адреса, телефона и режима работы</a:t>
+              <a:t>Все служебные функции аккуратно спрятаны под гамбургер-меню, освобождая экран терминала для главного — броней и карты зала.</a:t>
             </a:r>
           </a:p>
           <a:p>
@@ -9603,14 +12299,29 @@
               <a:spcBef>
                 <a:spcPts val="800"/>
               </a:spcBef>
-              <a:defRPr sz="1100">
+              <a:defRPr sz="1200" b="1">
+                <a:solidFill>
+                  <a:srgbClr val="DFCAAB"/>
+                </a:solidFill>
+              </a:defRPr>
+            </a:pPr>
+            <a:r>
+              <a:t>🌐 Трехъязычный интерфейс (RU / KZ / EN)</a:t>
+            </a:r>
+          </a:p>
+          <a:p>
+            <a:pPr>
+              <a:spcBef>
+                <a:spcPts val="200"/>
+              </a:spcBef>
+              <a:defRPr sz="1000">
                 <a:solidFill>
                   <a:srgbClr val="F4F2EE"/>
                 </a:solidFill>
               </a:defRPr>
             </a:pPr>
             <a:r>
-              <a:t>• Прямые кликабельные ссылки на 2GIS, Instagram, WhatsApp</a:t>
+              <a:t>Крупные удобные кнопки переключения языка для сотрудников и гостей в любом регионе Казахстана.</a:t>
             </a:r>
           </a:p>
           <a:p>
@@ -9618,14 +12329,29 @@
               <a:spcBef>
                 <a:spcPts val="800"/>
               </a:spcBef>
-              <a:defRPr sz="1100">
+              <a:defRPr sz="1200" b="1">
+                <a:solidFill>
+                  <a:srgbClr val="DFCAAB"/>
+                </a:solidFill>
+              </a:defRPr>
+            </a:pPr>
+            <a:r>
+              <a:t>🍽 Быстрый переход «Терминал ↔ Витрина гостя»</a:t>
+            </a:r>
+          </a:p>
+          <a:p>
+            <a:pPr>
+              <a:spcBef>
+                <a:spcPts val="200"/>
+              </a:spcBef>
+              <a:defRPr sz="1000">
                 <a:solidFill>
                   <a:srgbClr val="F4F2EE"/>
                 </a:solidFill>
               </a:defRPr>
             </a:pPr>
             <a:r>
-              <a:t>• Указание среднего чека и концепта кухни</a:t>
+              <a:t>Хостес может в любой момент открыть клиентскую витрину и увидеть свой ресторан глазами гостя.</a:t>
             </a:r>
           </a:p>
           <a:p>
@@ -9633,14 +12359,29 @@
               <a:spcBef>
                 <a:spcPts val="800"/>
               </a:spcBef>
-              <a:defRPr sz="1100">
+              <a:defRPr sz="1200" b="1">
+                <a:solidFill>
+                  <a:srgbClr val="DFCAAB"/>
+                </a:solidFill>
+              </a:defRPr>
+            </a:pPr>
+            <a:r>
+              <a:t>⚡ Тактильный отклик и анимации</a:t>
+            </a:r>
+          </a:p>
+          <a:p>
+            <a:pPr>
+              <a:spcBef>
+                <a:spcPts val="200"/>
+              </a:spcBef>
+              <a:defRPr sz="1000">
                 <a:solidFill>
                   <a:srgbClr val="F4F2EE"/>
                 </a:solidFill>
               </a:defRPr>
             </a:pPr>
             <a:r>
-              <a:t>• Регистрация нового филиала сети в 1 клик</a:t>
+              <a:t>Плавная физика сжатия кнопок (Spring physics), адаптивность под Home Bar iPhone (Safe Area).</a:t>
             </a:r>
           </a:p>
         </p:txBody>
@@ -9653,16 +12394,16 @@
         </p:nvSpPr>
         <p:spPr>
           <a:xfrm>
-            <a:off x="4343400" y="1645920"/>
-            <a:ext cx="3474720" cy="4663440"/>
+            <a:off x="6912864" y="1609344"/>
+            <a:ext cx="2267712" cy="4736592"/>
           </a:xfrm>
           <a:prstGeom prst="roundRect">
             <a:avLst/>
           </a:prstGeom>
           <a:solidFill>
-            <a:srgbClr val="15171D"/>
+            <a:srgbClr val="1C1F26"/>
           </a:solidFill>
-          <a:ln w="12700">
+          <a:ln w="19050">
             <a:solidFill>
               <a:srgbClr val="C5A880"/>
             </a:solidFill>
@@ -9690,101 +12431,30 @@
           </a:p>
         </p:txBody>
       </p:sp>
-      <p:sp>
-        <p:nvSpPr>
-          <p:cNvPr id="9" name="TextBox 8"/>
-          <p:cNvSpPr txBox="1"/>
-          <p:nvPr/>
-        </p:nvSpPr>
-        <p:spPr>
-          <a:xfrm>
-            <a:off x="4526280" y="1828800"/>
-            <a:ext cx="3108960" cy="4297680"/>
+      <p:pic>
+        <p:nvPicPr>
+          <p:cNvPr id="9" name="Picture 8" descr="admin_rest_picker.png"/>
+          <p:cNvPicPr>
+            <a:picLocks noChangeAspect="1"/>
+          </p:cNvPicPr>
+          <p:nvPr/>
+        </p:nvPicPr>
+        <p:blipFill>
+          <a:blip r:embed="rId2"/>
+          <a:stretch>
+            <a:fillRect/>
+          </a:stretch>
+        </p:blipFill>
+        <p:spPr>
+          <a:xfrm>
+            <a:off x="6949440" y="1645920"/>
+            <a:ext cx="2194560" cy="4663440"/>
           </a:xfrm>
           <a:prstGeom prst="rect">
             <a:avLst/>
           </a:prstGeom>
-          <a:noFill/>
-        </p:spPr>
-        <p:txBody>
-          <a:bodyPr wrap="square">
-            <a:spAutoFit/>
-          </a:bodyPr>
-          <a:lstStyle/>
-          <a:p>
-            <a:pPr>
-              <a:defRPr sz="1400" b="1">
-                <a:solidFill>
-                  <a:srgbClr val="C5A880"/>
-                </a:solidFill>
-              </a:defRPr>
-            </a:pPr>
-            <a:r>
-              <a:t>🍽 Электронное Меню</a:t>
-            </a:r>
-          </a:p>
-          <a:p>
-            <a:pPr>
-              <a:spcBef>
-                <a:spcPts val="800"/>
-              </a:spcBef>
-              <a:defRPr sz="1100">
-                <a:solidFill>
-                  <a:srgbClr val="F4F2EE"/>
-                </a:solidFill>
-              </a:defRPr>
-            </a:pPr>
-            <a:r>
-              <a:t>• Добавление блюд по категориям (Основные, Закуски, Напитки)</a:t>
-            </a:r>
-          </a:p>
-          <a:p>
-            <a:pPr>
-              <a:spcBef>
-                <a:spcPts val="800"/>
-              </a:spcBef>
-              <a:defRPr sz="1100">
-                <a:solidFill>
-                  <a:srgbClr val="F4F2EE"/>
-                </a:solidFill>
-              </a:defRPr>
-            </a:pPr>
-            <a:r>
-              <a:t>• Загрузка фото, указание граммовки и актуальных цен</a:t>
-            </a:r>
-          </a:p>
-          <a:p>
-            <a:pPr>
-              <a:spcBef>
-                <a:spcPts val="800"/>
-              </a:spcBef>
-              <a:defRPr sz="1100">
-                <a:solidFill>
-                  <a:srgbClr val="F4F2EE"/>
-                </a:solidFill>
-              </a:defRPr>
-            </a:pPr>
-            <a:r>
-              <a:t>• Мгновенное скрытие блюд на «стоп-листе»</a:t>
-            </a:r>
-          </a:p>
-          <a:p>
-            <a:pPr>
-              <a:spcBef>
-                <a:spcPts val="800"/>
-              </a:spcBef>
-              <a:defRPr sz="1100">
-                <a:solidFill>
-                  <a:srgbClr val="F4F2EE"/>
-                </a:solidFill>
-              </a:defRPr>
-            </a:pPr>
-            <a:r>
-              <a:t>• Синхронизация меню с витриной гостя</a:t>
-            </a:r>
-          </a:p>
-        </p:txBody>
-      </p:sp>
+        </p:spPr>
+      </p:pic>
       <p:sp>
         <p:nvSpPr>
           <p:cNvPr id="10" name="Rounded Rectangle 9"/>
@@ -9793,18 +12463,18 @@
         </p:nvSpPr>
         <p:spPr>
           <a:xfrm>
-            <a:off x="7955280" y="1645920"/>
-            <a:ext cx="3474720" cy="4663440"/>
+            <a:off x="9381744" y="1609344"/>
+            <a:ext cx="2267712" cy="4736592"/>
           </a:xfrm>
           <a:prstGeom prst="roundRect">
             <a:avLst/>
           </a:prstGeom>
           <a:solidFill>
-            <a:srgbClr val="15171D"/>
+            <a:srgbClr val="1C1F26"/>
           </a:solidFill>
-          <a:ln w="12700">
+          <a:ln w="19050">
             <a:solidFill>
-              <a:srgbClr val="34D399"/>
+              <a:srgbClr val="C5A880"/>
             </a:solidFill>
           </a:ln>
         </p:spPr>
@@ -9830,101 +12500,30 @@
           </a:p>
         </p:txBody>
       </p:sp>
-      <p:sp>
-        <p:nvSpPr>
-          <p:cNvPr id="11" name="TextBox 10"/>
-          <p:cNvSpPr txBox="1"/>
-          <p:nvPr/>
-        </p:nvSpPr>
-        <p:spPr>
-          <a:xfrm>
-            <a:off x="8138160" y="1828800"/>
-            <a:ext cx="3108960" cy="4297680"/>
+      <p:pic>
+        <p:nvPicPr>
+          <p:cNvPr id="11" name="Picture 10" descr="admin_drawer_menu.png"/>
+          <p:cNvPicPr>
+            <a:picLocks noChangeAspect="1"/>
+          </p:cNvPicPr>
+          <p:nvPr/>
+        </p:nvPicPr>
+        <p:blipFill>
+          <a:blip r:embed="rId3"/>
+          <a:stretch>
+            <a:fillRect/>
+          </a:stretch>
+        </p:blipFill>
+        <p:spPr>
+          <a:xfrm>
+            <a:off x="9418320" y="1645920"/>
+            <a:ext cx="2194560" cy="4663440"/>
           </a:xfrm>
           <a:prstGeom prst="rect">
             <a:avLst/>
           </a:prstGeom>
-          <a:noFill/>
-        </p:spPr>
-        <p:txBody>
-          <a:bodyPr wrap="square">
-            <a:spAutoFit/>
-          </a:bodyPr>
-          <a:lstStyle/>
-          <a:p>
-            <a:pPr>
-              <a:defRPr sz="1400" b="1">
-                <a:solidFill>
-                  <a:srgbClr val="34D399"/>
-                </a:solidFill>
-              </a:defRPr>
-            </a:pPr>
-            <a:r>
-              <a:t>🪑 Конструктор Столов</a:t>
-            </a:r>
-          </a:p>
-          <a:p>
-            <a:pPr>
-              <a:spcBef>
-                <a:spcPts val="800"/>
-              </a:spcBef>
-              <a:defRPr sz="1100">
-                <a:solidFill>
-                  <a:srgbClr val="F4F2EE"/>
-                </a:solidFill>
-              </a:defRPr>
-            </a:pPr>
-            <a:r>
-              <a:t>• Добавление новых столиков в зал с номерами</a:t>
-            </a:r>
-          </a:p>
-          <a:p>
-            <a:pPr>
-              <a:spcBef>
-                <a:spcPts val="800"/>
-              </a:spcBef>
-              <a:defRPr sz="1100">
-                <a:solidFill>
-                  <a:srgbClr val="F4F2EE"/>
-                </a:solidFill>
-              </a:defRPr>
-            </a:pPr>
-            <a:r>
-              <a:t>• Настройка вместимости (2, 4, 6, 8, 10, 12+ персон)</a:t>
-            </a:r>
-          </a:p>
-          <a:p>
-            <a:pPr>
-              <a:spcBef>
-                <a:spcPts val="800"/>
-              </a:spcBef>
-              <a:defRPr sz="1100">
-                <a:solidFill>
-                  <a:srgbClr val="F4F2EE"/>
-                </a:solidFill>
-              </a:defRPr>
-            </a:pPr>
-            <a:r>
-              <a:t>• Выбор зоны (У окна, Терраса, VIP, Топчан)</a:t>
-            </a:r>
-          </a:p>
-          <a:p>
-            <a:pPr>
-              <a:spcBef>
-                <a:spcPts val="800"/>
-              </a:spcBef>
-              <a:defRPr sz="1100">
-                <a:solidFill>
-                  <a:srgbClr val="F4F2EE"/>
-                </a:solidFill>
-              </a:defRPr>
-            </a:pPr>
-            <a:r>
-              <a:t>• Описание столика (у камина, панорамный вид)</a:t>
-            </a:r>
-          </a:p>
-        </p:txBody>
-      </p:sp>
+        </p:spPr>
+      </p:pic>
     </p:spTree>
   </p:cSld>
   <p:clrMapOvr>

--- a/RestoKZ_Presentation.pptx
+++ b/RestoKZ_Presentation.pptx
@@ -3117,7 +3117,7 @@
             <a:avLst/>
           </a:prstGeom>
           <a:solidFill>
-            <a:srgbClr val="0E1013"/>
+            <a:srgbClr val="0B0D10"/>
           </a:solidFill>
           <a:ln>
             <a:noFill/>
@@ -3196,8 +3196,8 @@
         </p:nvSpPr>
         <p:spPr>
           <a:xfrm>
-            <a:off x="1005840" y="1280160"/>
-            <a:ext cx="6858000" cy="3474720"/>
+            <a:off x="1005840" y="1234440"/>
+            <a:ext cx="6858000" cy="3566160"/>
           </a:xfrm>
           <a:prstGeom prst="rect">
             <a:avLst/>
@@ -3211,7 +3211,7 @@
           <a:lstStyle/>
           <a:p>
             <a:pPr>
-              <a:defRPr sz="1300" b="1">
+              <a:defRPr sz="1350" b="1">
                 <a:solidFill>
                   <a:srgbClr val="C5A880"/>
                 </a:solidFill>
@@ -3227,9 +3227,9 @@
               <a:spcBef>
                 <a:spcPts val="1200"/>
               </a:spcBef>
-              <a:defRPr sz="2900" b="1">
-                <a:solidFill>
-                  <a:srgbClr val="F4F2EE"/>
+              <a:defRPr sz="3000" b="1">
+                <a:solidFill>
+                  <a:srgbClr val="F9F9FB"/>
                 </a:solidFill>
                 <a:latin typeface="Georgia"/>
               </a:defRPr>
@@ -3243,9 +3243,9 @@
               <a:spcBef>
                 <a:spcPts val="1000"/>
               </a:spcBef>
-              <a:defRPr sz="1350">
-                <a:solidFill>
-                  <a:srgbClr val="DFCAAB"/>
+              <a:defRPr sz="1400">
+                <a:solidFill>
+                  <a:srgbClr val="E5D5C0"/>
                 </a:solidFill>
                 <a:latin typeface="Segoe UI"/>
               </a:defRPr>
@@ -3271,9 +3271,9 @@
             <a:avLst/>
           </a:prstGeom>
           <a:solidFill>
-            <a:srgbClr val="15171D"/>
+            <a:srgbClr val="14171E"/>
           </a:solidFill>
-          <a:ln w="12700">
+          <a:ln w="15240">
             <a:solidFill>
               <a:srgbClr val="C5A880"/>
             </a:solidFill>
@@ -3324,9 +3324,9 @@
           <a:lstStyle/>
           <a:p>
             <a:pPr>
-              <a:defRPr sz="1100" b="1">
-                <a:solidFill>
-                  <a:srgbClr val="F4F2EE"/>
+              <a:defRPr sz="1150" b="1">
+                <a:solidFill>
+                  <a:srgbClr val="F9F9FB"/>
                 </a:solidFill>
               </a:defRPr>
             </a:pPr>
@@ -3339,9 +3339,9 @@
               <a:spcBef>
                 <a:spcPts val="300"/>
               </a:spcBef>
-              <a:defRPr sz="950">
-                <a:solidFill>
-                  <a:srgbClr val="9CA3AF"/>
+              <a:defRPr sz="1000">
+                <a:solidFill>
+                  <a:srgbClr val="A3AAB8"/>
                 </a:solidFill>
               </a:defRPr>
             </a:pPr>
@@ -3366,9 +3366,9 @@
             <a:avLst/>
           </a:prstGeom>
           <a:solidFill>
-            <a:srgbClr val="15171D"/>
+            <a:srgbClr val="14171E"/>
           </a:solidFill>
-          <a:ln w="12700">
+          <a:ln w="15240">
             <a:solidFill>
               <a:srgbClr val="C5A880"/>
             </a:solidFill>
@@ -3419,9 +3419,9 @@
           <a:lstStyle/>
           <a:p>
             <a:pPr>
-              <a:defRPr sz="1100" b="1">
-                <a:solidFill>
-                  <a:srgbClr val="F4F2EE"/>
+              <a:defRPr sz="1150" b="1">
+                <a:solidFill>
+                  <a:srgbClr val="F9F9FB"/>
                 </a:solidFill>
               </a:defRPr>
             </a:pPr>
@@ -3434,9 +3434,9 @@
               <a:spcBef>
                 <a:spcPts val="300"/>
               </a:spcBef>
-              <a:defRPr sz="950">
-                <a:solidFill>
-                  <a:srgbClr val="9CA3AF"/>
+              <a:defRPr sz="1000">
+                <a:solidFill>
+                  <a:srgbClr val="A3AAB8"/>
                 </a:solidFill>
               </a:defRPr>
             </a:pPr>
@@ -3461,9 +3461,9 @@
             <a:avLst/>
           </a:prstGeom>
           <a:solidFill>
-            <a:srgbClr val="15171D"/>
+            <a:srgbClr val="14171E"/>
           </a:solidFill>
-          <a:ln w="12700">
+          <a:ln w="15240">
             <a:solidFill>
               <a:srgbClr val="C5A880"/>
             </a:solidFill>
@@ -3514,9 +3514,9 @@
           <a:lstStyle/>
           <a:p>
             <a:pPr>
-              <a:defRPr sz="1100" b="1">
-                <a:solidFill>
-                  <a:srgbClr val="F4F2EE"/>
+              <a:defRPr sz="1150" b="1">
+                <a:solidFill>
+                  <a:srgbClr val="F9F9FB"/>
                 </a:solidFill>
               </a:defRPr>
             </a:pPr>
@@ -3529,9 +3529,9 @@
               <a:spcBef>
                 <a:spcPts val="300"/>
               </a:spcBef>
-              <a:defRPr sz="950">
-                <a:solidFill>
-                  <a:srgbClr val="9CA3AF"/>
+              <a:defRPr sz="1000">
+                <a:solidFill>
+                  <a:srgbClr val="A3AAB8"/>
                 </a:solidFill>
               </a:defRPr>
             </a:pPr>
@@ -3550,13 +3550,13 @@
         <p:spPr>
           <a:xfrm>
             <a:off x="8375904" y="1060704"/>
-            <a:ext cx="2450592" cy="5193792"/>
+            <a:ext cx="2313432" cy="4919472"/>
           </a:xfrm>
           <a:prstGeom prst="roundRect">
             <a:avLst/>
           </a:prstGeom>
           <a:solidFill>
-            <a:srgbClr val="1C1F26"/>
+            <a:srgbClr val="1A1E27"/>
           </a:solidFill>
           <a:ln w="19050">
             <a:solidFill>
@@ -3603,7 +3603,7 @@
         <p:spPr>
           <a:xfrm>
             <a:off x="8412480" y="1097280"/>
-            <a:ext cx="2377440" cy="5120640"/>
+            <a:ext cx="2240280" cy="4846320"/>
           </a:xfrm>
           <a:prstGeom prst="rect">
             <a:avLst/>
@@ -3625,7 +3625,7 @@
             <a:avLst/>
           </a:prstGeom>
           <a:solidFill>
-            <a:srgbClr val="1C1F26"/>
+            <a:srgbClr val="1A1E27"/>
           </a:solidFill>
           <a:ln w="19050">
             <a:solidFill>
@@ -3712,7 +3712,7 @@
             <a:avLst/>
           </a:prstGeom>
           <a:solidFill>
-            <a:srgbClr val="0E1013"/>
+            <a:srgbClr val="0B0D10"/>
           </a:solidFill>
           <a:ln>
             <a:noFill/>
@@ -3748,7 +3748,7 @@
         </p:nvSpPr>
         <p:spPr>
           <a:xfrm>
-            <a:off x="731520" y="365760"/>
+            <a:off x="731520" y="347472"/>
             <a:ext cx="10698480" cy="320040"/>
           </a:xfrm>
           <a:prstGeom prst="rect">
@@ -3763,7 +3763,7 @@
           <a:lstStyle/>
           <a:p>
             <a:pPr>
-              <a:defRPr sz="1000" b="1">
+              <a:defRPr sz="1100" b="1">
                 <a:solidFill>
                   <a:srgbClr val="C5A880"/>
                 </a:solidFill>
@@ -3784,7 +3784,7 @@
         </p:nvSpPr>
         <p:spPr>
           <a:xfrm>
-            <a:off x="731520" y="658368"/>
+            <a:off x="731520" y="640080"/>
             <a:ext cx="10698480" cy="502920"/>
           </a:xfrm>
           <a:prstGeom prst="rect">
@@ -3799,9 +3799,9 @@
           <a:lstStyle/>
           <a:p>
             <a:pPr>
-              <a:defRPr sz="2100" b="1">
-                <a:solidFill>
-                  <a:srgbClr val="F4F2EE"/>
+              <a:defRPr sz="2200" b="1">
+                <a:solidFill>
+                  <a:srgbClr val="F9F9FB"/>
                 </a:solidFill>
                 <a:latin typeface="Georgia"/>
               </a:defRPr>
@@ -3835,9 +3835,9 @@
           <a:lstStyle/>
           <a:p>
             <a:pPr>
-              <a:defRPr sz="1150">
-                <a:solidFill>
-                  <a:srgbClr val="9CA3AF"/>
+              <a:defRPr sz="1200">
+                <a:solidFill>
+                  <a:srgbClr val="A3AAB8"/>
                 </a:solidFill>
                 <a:latin typeface="Segoe UI"/>
               </a:defRPr>
@@ -3863,9 +3863,9 @@
             <a:avLst/>
           </a:prstGeom>
           <a:solidFill>
-            <a:srgbClr val="15171D"/>
+            <a:srgbClr val="14171E"/>
           </a:solidFill>
-          <a:ln w="12700">
+          <a:ln w="15240">
             <a:solidFill>
               <a:srgbClr val="38BDF8"/>
             </a:solidFill>
@@ -3916,7 +3916,7 @@
           <a:lstStyle/>
           <a:p>
             <a:pPr>
-              <a:defRPr sz="1400" b="1">
+              <a:defRPr sz="1450" b="1">
                 <a:solidFill>
                   <a:srgbClr val="38BDF8"/>
                 </a:solidFill>
@@ -3931,9 +3931,9 @@
               <a:spcBef>
                 <a:spcPts val="800"/>
               </a:spcBef>
-              <a:defRPr sz="1100">
-                <a:solidFill>
-                  <a:srgbClr val="F4F2EE"/>
+              <a:defRPr sz="1150">
+                <a:solidFill>
+                  <a:srgbClr val="F9F9FB"/>
                 </a:solidFill>
               </a:defRPr>
             </a:pPr>
@@ -3946,9 +3946,9 @@
               <a:spcBef>
                 <a:spcPts val="800"/>
               </a:spcBef>
-              <a:defRPr sz="1100">
-                <a:solidFill>
-                  <a:srgbClr val="F4F2EE"/>
+              <a:defRPr sz="1150">
+                <a:solidFill>
+                  <a:srgbClr val="F9F9FB"/>
                 </a:solidFill>
               </a:defRPr>
             </a:pPr>
@@ -3961,9 +3961,9 @@
               <a:spcBef>
                 <a:spcPts val="800"/>
               </a:spcBef>
-              <a:defRPr sz="1100">
-                <a:solidFill>
-                  <a:srgbClr val="F4F2EE"/>
+              <a:defRPr sz="1150">
+                <a:solidFill>
+                  <a:srgbClr val="F9F9FB"/>
                 </a:solidFill>
               </a:defRPr>
             </a:pPr>
@@ -3976,9 +3976,9 @@
               <a:spcBef>
                 <a:spcPts val="800"/>
               </a:spcBef>
-              <a:defRPr sz="1100">
-                <a:solidFill>
-                  <a:srgbClr val="F4F2EE"/>
+              <a:defRPr sz="1150">
+                <a:solidFill>
+                  <a:srgbClr val="F9F9FB"/>
                 </a:solidFill>
               </a:defRPr>
             </a:pPr>
@@ -4003,9 +4003,9 @@
             <a:avLst/>
           </a:prstGeom>
           <a:solidFill>
-            <a:srgbClr val="15171D"/>
+            <a:srgbClr val="14171E"/>
           </a:solidFill>
-          <a:ln w="12700">
+          <a:ln w="15240">
             <a:solidFill>
               <a:srgbClr val="C5A880"/>
             </a:solidFill>
@@ -4056,7 +4056,7 @@
           <a:lstStyle/>
           <a:p>
             <a:pPr>
-              <a:defRPr sz="1400" b="1">
+              <a:defRPr sz="1450" b="1">
                 <a:solidFill>
                   <a:srgbClr val="C5A880"/>
                 </a:solidFill>
@@ -4071,9 +4071,9 @@
               <a:spcBef>
                 <a:spcPts val="800"/>
               </a:spcBef>
-              <a:defRPr sz="1100">
-                <a:solidFill>
-                  <a:srgbClr val="F4F2EE"/>
+              <a:defRPr sz="1150">
+                <a:solidFill>
+                  <a:srgbClr val="F9F9FB"/>
                 </a:solidFill>
               </a:defRPr>
             </a:pPr>
@@ -4086,9 +4086,9 @@
               <a:spcBef>
                 <a:spcPts val="800"/>
               </a:spcBef>
-              <a:defRPr sz="1100">
-                <a:solidFill>
-                  <a:srgbClr val="F4F2EE"/>
+              <a:defRPr sz="1150">
+                <a:solidFill>
+                  <a:srgbClr val="F9F9FB"/>
                 </a:solidFill>
               </a:defRPr>
             </a:pPr>
@@ -4101,9 +4101,9 @@
               <a:spcBef>
                 <a:spcPts val="800"/>
               </a:spcBef>
-              <a:defRPr sz="1100">
-                <a:solidFill>
-                  <a:srgbClr val="F4F2EE"/>
+              <a:defRPr sz="1150">
+                <a:solidFill>
+                  <a:srgbClr val="F9F9FB"/>
                 </a:solidFill>
               </a:defRPr>
             </a:pPr>
@@ -4116,9 +4116,9 @@
               <a:spcBef>
                 <a:spcPts val="800"/>
               </a:spcBef>
-              <a:defRPr sz="1100">
-                <a:solidFill>
-                  <a:srgbClr val="F4F2EE"/>
+              <a:defRPr sz="1150">
+                <a:solidFill>
+                  <a:srgbClr val="F9F9FB"/>
                 </a:solidFill>
               </a:defRPr>
             </a:pPr>
@@ -4143,9 +4143,9 @@
             <a:avLst/>
           </a:prstGeom>
           <a:solidFill>
-            <a:srgbClr val="15171D"/>
+            <a:srgbClr val="14171E"/>
           </a:solidFill>
-          <a:ln w="12700">
+          <a:ln w="15240">
             <a:solidFill>
               <a:srgbClr val="34D399"/>
             </a:solidFill>
@@ -4196,7 +4196,7 @@
           <a:lstStyle/>
           <a:p>
             <a:pPr>
-              <a:defRPr sz="1400" b="1">
+              <a:defRPr sz="1450" b="1">
                 <a:solidFill>
                   <a:srgbClr val="34D399"/>
                 </a:solidFill>
@@ -4211,9 +4211,9 @@
               <a:spcBef>
                 <a:spcPts val="800"/>
               </a:spcBef>
-              <a:defRPr sz="1100">
-                <a:solidFill>
-                  <a:srgbClr val="F4F2EE"/>
+              <a:defRPr sz="1150">
+                <a:solidFill>
+                  <a:srgbClr val="F9F9FB"/>
                 </a:solidFill>
               </a:defRPr>
             </a:pPr>
@@ -4226,9 +4226,9 @@
               <a:spcBef>
                 <a:spcPts val="800"/>
               </a:spcBef>
-              <a:defRPr sz="1100">
-                <a:solidFill>
-                  <a:srgbClr val="F4F2EE"/>
+              <a:defRPr sz="1150">
+                <a:solidFill>
+                  <a:srgbClr val="F9F9FB"/>
                 </a:solidFill>
               </a:defRPr>
             </a:pPr>
@@ -4241,9 +4241,9 @@
               <a:spcBef>
                 <a:spcPts val="800"/>
               </a:spcBef>
-              <a:defRPr sz="1100">
-                <a:solidFill>
-                  <a:srgbClr val="F4F2EE"/>
+              <a:defRPr sz="1150">
+                <a:solidFill>
+                  <a:srgbClr val="F9F9FB"/>
                 </a:solidFill>
               </a:defRPr>
             </a:pPr>
@@ -4256,9 +4256,9 @@
               <a:spcBef>
                 <a:spcPts val="800"/>
               </a:spcBef>
-              <a:defRPr sz="1100">
-                <a:solidFill>
-                  <a:srgbClr val="F4F2EE"/>
+              <a:defRPr sz="1150">
+                <a:solidFill>
+                  <a:srgbClr val="F9F9FB"/>
                 </a:solidFill>
               </a:defRPr>
             </a:pPr>
@@ -4301,7 +4301,7 @@
             <a:avLst/>
           </a:prstGeom>
           <a:solidFill>
-            <a:srgbClr val="0E1013"/>
+            <a:srgbClr val="0B0D10"/>
           </a:solidFill>
           <a:ln>
             <a:noFill/>
@@ -4337,7 +4337,7 @@
         </p:nvSpPr>
         <p:spPr>
           <a:xfrm>
-            <a:off x="731520" y="365760"/>
+            <a:off x="731520" y="347472"/>
             <a:ext cx="10698480" cy="320040"/>
           </a:xfrm>
           <a:prstGeom prst="rect">
@@ -4352,7 +4352,7 @@
           <a:lstStyle/>
           <a:p>
             <a:pPr>
-              <a:defRPr sz="1000" b="1">
+              <a:defRPr sz="1100" b="1">
                 <a:solidFill>
                   <a:srgbClr val="C5A880"/>
                 </a:solidFill>
@@ -4373,7 +4373,7 @@
         </p:nvSpPr>
         <p:spPr>
           <a:xfrm>
-            <a:off x="731520" y="658368"/>
+            <a:off x="731520" y="640080"/>
             <a:ext cx="10698480" cy="502920"/>
           </a:xfrm>
           <a:prstGeom prst="rect">
@@ -4388,9 +4388,9 @@
           <a:lstStyle/>
           <a:p>
             <a:pPr>
-              <a:defRPr sz="2100" b="1">
-                <a:solidFill>
-                  <a:srgbClr val="F4F2EE"/>
+              <a:defRPr sz="2200" b="1">
+                <a:solidFill>
+                  <a:srgbClr val="F9F9FB"/>
                 </a:solidFill>
                 <a:latin typeface="Georgia"/>
               </a:defRPr>
@@ -4424,9 +4424,9 @@
           <a:lstStyle/>
           <a:p>
             <a:pPr>
-              <a:defRPr sz="1150">
-                <a:solidFill>
-                  <a:srgbClr val="9CA3AF"/>
+              <a:defRPr sz="1200">
+                <a:solidFill>
+                  <a:srgbClr val="A3AAB8"/>
                 </a:solidFill>
                 <a:latin typeface="Segoe UI"/>
               </a:defRPr>
@@ -4470,7 +4470,7 @@
                     <a:lstStyle/>
                     <a:p>
                       <a:pPr algn="ctr">
-                        <a:defRPr b="1" sz="1050">
+                        <a:defRPr b="1" sz="1100">
                           <a:solidFill>
                             <a:srgbClr val="C5A880"/>
                           </a:solidFill>
@@ -4483,7 +4483,7 @@
                   </a:txBody>
                   <a:tcPr>
                     <a:solidFill>
-                      <a:srgbClr val="1C1F26"/>
+                      <a:srgbClr val="1A1E27"/>
                     </a:solidFill>
                   </a:tcPr>
                 </a:tc>
@@ -4493,7 +4493,7 @@
                     <a:lstStyle/>
                     <a:p>
                       <a:pPr algn="ctr">
-                        <a:defRPr b="1" sz="1050">
+                        <a:defRPr b="1" sz="1100">
                           <a:solidFill>
                             <a:srgbClr val="C5A880"/>
                           </a:solidFill>
@@ -4506,7 +4506,7 @@
                   </a:txBody>
                   <a:tcPr>
                     <a:solidFill>
-                      <a:srgbClr val="1C1F26"/>
+                      <a:srgbClr val="1A1E27"/>
                     </a:solidFill>
                   </a:tcPr>
                 </a:tc>
@@ -4516,7 +4516,7 @@
                     <a:lstStyle/>
                     <a:p>
                       <a:pPr algn="ctr">
-                        <a:defRPr b="1" sz="1050">
+                        <a:defRPr b="1" sz="1100">
                           <a:solidFill>
                             <a:srgbClr val="C5A880"/>
                           </a:solidFill>
@@ -4529,7 +4529,7 @@
                   </a:txBody>
                   <a:tcPr>
                     <a:solidFill>
-                      <a:srgbClr val="1C1F26"/>
+                      <a:srgbClr val="1A1E27"/>
                     </a:solidFill>
                   </a:tcPr>
                 </a:tc>
@@ -4539,7 +4539,7 @@
                     <a:lstStyle/>
                     <a:p>
                       <a:pPr algn="ctr">
-                        <a:defRPr b="1" sz="1050">
+                        <a:defRPr b="1" sz="1100">
                           <a:solidFill>
                             <a:srgbClr val="C5A880"/>
                           </a:solidFill>
@@ -4552,7 +4552,7 @@
                   </a:txBody>
                   <a:tcPr>
                     <a:solidFill>
-                      <a:srgbClr val="1C1F26"/>
+                      <a:srgbClr val="1A1E27"/>
                     </a:solidFill>
                   </a:tcPr>
                 </a:tc>
@@ -4562,7 +4562,7 @@
                     <a:lstStyle/>
                     <a:p>
                       <a:pPr algn="ctr">
-                        <a:defRPr b="1" sz="1050">
+                        <a:defRPr b="1" sz="1100">
                           <a:solidFill>
                             <a:srgbClr val="C5A880"/>
                           </a:solidFill>
@@ -4575,7 +4575,7 @@
                   </a:txBody>
                   <a:tcPr>
                     <a:solidFill>
-                      <a:srgbClr val="1C1F26"/>
+                      <a:srgbClr val="1A1E27"/>
                     </a:solidFill>
                   </a:tcPr>
                 </a:tc>
@@ -4585,9 +4585,9 @@
                     <a:lstStyle/>
                     <a:p>
                       <a:pPr algn="ctr">
-                        <a:defRPr b="1" sz="1050">
+                        <a:defRPr b="1" sz="1100">
                           <a:solidFill>
-                            <a:srgbClr val="0E1013"/>
+                            <a:srgbClr val="0B0D10"/>
                           </a:solidFill>
                         </a:defRPr>
                       </a:pPr>
@@ -4610,9 +4610,9 @@
                     <a:lstStyle/>
                     <a:p>
                       <a:pPr>
-                        <a:defRPr sz="900" b="1">
+                        <a:defRPr sz="950" b="1">
                           <a:solidFill>
-                            <a:srgbClr val="F4F2EE"/>
+                            <a:srgbClr val="F9F9FB"/>
                           </a:solidFill>
                         </a:defRPr>
                       </a:pPr>
@@ -4623,7 +4623,7 @@
                   </a:txBody>
                   <a:tcPr>
                     <a:solidFill>
-                      <a:srgbClr val="15171D"/>
+                      <a:srgbClr val="14171E"/>
                     </a:solidFill>
                   </a:tcPr>
                 </a:tc>
@@ -4633,9 +4633,9 @@
                     <a:lstStyle/>
                     <a:p>
                       <a:pPr algn="ctr">
-                        <a:defRPr sz="900">
+                        <a:defRPr sz="950">
                           <a:solidFill>
-                            <a:srgbClr val="F4F2EE"/>
+                            <a:srgbClr val="F9F9FB"/>
                           </a:solidFill>
                         </a:defRPr>
                       </a:pPr>
@@ -4646,7 +4646,7 @@
                   </a:txBody>
                   <a:tcPr>
                     <a:solidFill>
-                      <a:srgbClr val="15171D"/>
+                      <a:srgbClr val="14171E"/>
                     </a:solidFill>
                   </a:tcPr>
                 </a:tc>
@@ -4656,9 +4656,9 @@
                     <a:lstStyle/>
                     <a:p>
                       <a:pPr algn="ctr">
-                        <a:defRPr sz="900">
+                        <a:defRPr sz="950">
                           <a:solidFill>
-                            <a:srgbClr val="F4F2EE"/>
+                            <a:srgbClr val="F9F9FB"/>
                           </a:solidFill>
                         </a:defRPr>
                       </a:pPr>
@@ -4669,7 +4669,7 @@
                   </a:txBody>
                   <a:tcPr>
                     <a:solidFill>
-                      <a:srgbClr val="15171D"/>
+                      <a:srgbClr val="14171E"/>
                     </a:solidFill>
                   </a:tcPr>
                 </a:tc>
@@ -4679,9 +4679,9 @@
                     <a:lstStyle/>
                     <a:p>
                       <a:pPr algn="ctr">
-                        <a:defRPr sz="900">
+                        <a:defRPr sz="950">
                           <a:solidFill>
-                            <a:srgbClr val="F4F2EE"/>
+                            <a:srgbClr val="F9F9FB"/>
                           </a:solidFill>
                         </a:defRPr>
                       </a:pPr>
@@ -4692,7 +4692,7 @@
                   </a:txBody>
                   <a:tcPr>
                     <a:solidFill>
-                      <a:srgbClr val="15171D"/>
+                      <a:srgbClr val="14171E"/>
                     </a:solidFill>
                   </a:tcPr>
                 </a:tc>
@@ -4702,9 +4702,9 @@
                     <a:lstStyle/>
                     <a:p>
                       <a:pPr algn="ctr">
-                        <a:defRPr sz="900">
+                        <a:defRPr sz="950">
                           <a:solidFill>
-                            <a:srgbClr val="F4F2EE"/>
+                            <a:srgbClr val="F9F9FB"/>
                           </a:solidFill>
                         </a:defRPr>
                       </a:pPr>
@@ -4715,7 +4715,7 @@
                   </a:txBody>
                   <a:tcPr>
                     <a:solidFill>
-                      <a:srgbClr val="15171D"/>
+                      <a:srgbClr val="14171E"/>
                     </a:solidFill>
                   </a:tcPr>
                 </a:tc>
@@ -4725,9 +4725,9 @@
                     <a:lstStyle/>
                     <a:p>
                       <a:pPr algn="ctr">
-                        <a:defRPr sz="900" b="1">
+                        <a:defRPr sz="950" b="1">
                           <a:solidFill>
-                            <a:srgbClr val="DFCAAB"/>
+                            <a:srgbClr val="E5D5C0"/>
                           </a:solidFill>
                         </a:defRPr>
                       </a:pPr>
@@ -4738,7 +4738,7 @@
                   </a:txBody>
                   <a:tcPr>
                     <a:solidFill>
-                      <a:srgbClr val="1C202A"/>
+                      <a:srgbClr val="1A1E27"/>
                     </a:solidFill>
                   </a:tcPr>
                 </a:tc>
@@ -4750,9 +4750,9 @@
                     <a:lstStyle/>
                     <a:p>
                       <a:pPr>
-                        <a:defRPr sz="900" b="1">
+                        <a:defRPr sz="950" b="1">
                           <a:solidFill>
-                            <a:srgbClr val="F4F2EE"/>
+                            <a:srgbClr val="F9F9FB"/>
                           </a:solidFill>
                         </a:defRPr>
                       </a:pPr>
@@ -4763,7 +4763,7 @@
                   </a:txBody>
                   <a:tcPr>
                     <a:solidFill>
-                      <a:srgbClr val="15171D"/>
+                      <a:srgbClr val="14171E"/>
                     </a:solidFill>
                   </a:tcPr>
                 </a:tc>
@@ -4773,9 +4773,9 @@
                     <a:lstStyle/>
                     <a:p>
                       <a:pPr algn="ctr">
-                        <a:defRPr sz="900">
+                        <a:defRPr sz="950">
                           <a:solidFill>
-                            <a:srgbClr val="F4F2EE"/>
+                            <a:srgbClr val="F9F9FB"/>
                           </a:solidFill>
                         </a:defRPr>
                       </a:pPr>
@@ -4786,7 +4786,7 @@
                   </a:txBody>
                   <a:tcPr>
                     <a:solidFill>
-                      <a:srgbClr val="15171D"/>
+                      <a:srgbClr val="14171E"/>
                     </a:solidFill>
                   </a:tcPr>
                 </a:tc>
@@ -4796,9 +4796,9 @@
                     <a:lstStyle/>
                     <a:p>
                       <a:pPr algn="ctr">
-                        <a:defRPr sz="900">
+                        <a:defRPr sz="950">
                           <a:solidFill>
-                            <a:srgbClr val="F4F2EE"/>
+                            <a:srgbClr val="F9F9FB"/>
                           </a:solidFill>
                         </a:defRPr>
                       </a:pPr>
@@ -4809,7 +4809,7 @@
                   </a:txBody>
                   <a:tcPr>
                     <a:solidFill>
-                      <a:srgbClr val="15171D"/>
+                      <a:srgbClr val="14171E"/>
                     </a:solidFill>
                   </a:tcPr>
                 </a:tc>
@@ -4819,9 +4819,9 @@
                     <a:lstStyle/>
                     <a:p>
                       <a:pPr algn="ctr">
-                        <a:defRPr sz="900">
+                        <a:defRPr sz="950">
                           <a:solidFill>
-                            <a:srgbClr val="F4F2EE"/>
+                            <a:srgbClr val="F9F9FB"/>
                           </a:solidFill>
                         </a:defRPr>
                       </a:pPr>
@@ -4832,7 +4832,7 @@
                   </a:txBody>
                   <a:tcPr>
                     <a:solidFill>
-                      <a:srgbClr val="15171D"/>
+                      <a:srgbClr val="14171E"/>
                     </a:solidFill>
                   </a:tcPr>
                 </a:tc>
@@ -4842,9 +4842,9 @@
                     <a:lstStyle/>
                     <a:p>
                       <a:pPr algn="ctr">
-                        <a:defRPr sz="900">
+                        <a:defRPr sz="950">
                           <a:solidFill>
-                            <a:srgbClr val="F4F2EE"/>
+                            <a:srgbClr val="F9F9FB"/>
                           </a:solidFill>
                         </a:defRPr>
                       </a:pPr>
@@ -4855,7 +4855,7 @@
                   </a:txBody>
                   <a:tcPr>
                     <a:solidFill>
-                      <a:srgbClr val="15171D"/>
+                      <a:srgbClr val="14171E"/>
                     </a:solidFill>
                   </a:tcPr>
                 </a:tc>
@@ -4865,9 +4865,9 @@
                     <a:lstStyle/>
                     <a:p>
                       <a:pPr algn="ctr">
-                        <a:defRPr sz="900" b="1">
+                        <a:defRPr sz="950" b="1">
                           <a:solidFill>
-                            <a:srgbClr val="DFCAAB"/>
+                            <a:srgbClr val="E5D5C0"/>
                           </a:solidFill>
                         </a:defRPr>
                       </a:pPr>
@@ -4878,7 +4878,7 @@
                   </a:txBody>
                   <a:tcPr>
                     <a:solidFill>
-                      <a:srgbClr val="1C202A"/>
+                      <a:srgbClr val="1A1E27"/>
                     </a:solidFill>
                   </a:tcPr>
                 </a:tc>
@@ -4890,9 +4890,9 @@
                     <a:lstStyle/>
                     <a:p>
                       <a:pPr>
-                        <a:defRPr sz="900" b="1">
+                        <a:defRPr sz="950" b="1">
                           <a:solidFill>
-                            <a:srgbClr val="F4F2EE"/>
+                            <a:srgbClr val="F9F9FB"/>
                           </a:solidFill>
                         </a:defRPr>
                       </a:pPr>
@@ -4903,7 +4903,7 @@
                   </a:txBody>
                   <a:tcPr>
                     <a:solidFill>
-                      <a:srgbClr val="15171D"/>
+                      <a:srgbClr val="14171E"/>
                     </a:solidFill>
                   </a:tcPr>
                 </a:tc>
@@ -4913,9 +4913,9 @@
                     <a:lstStyle/>
                     <a:p>
                       <a:pPr algn="ctr">
-                        <a:defRPr sz="900">
+                        <a:defRPr sz="950">
                           <a:solidFill>
-                            <a:srgbClr val="F4F2EE"/>
+                            <a:srgbClr val="F9F9FB"/>
                           </a:solidFill>
                         </a:defRPr>
                       </a:pPr>
@@ -4926,7 +4926,7 @@
                   </a:txBody>
                   <a:tcPr>
                     <a:solidFill>
-                      <a:srgbClr val="15171D"/>
+                      <a:srgbClr val="14171E"/>
                     </a:solidFill>
                   </a:tcPr>
                 </a:tc>
@@ -4936,9 +4936,9 @@
                     <a:lstStyle/>
                     <a:p>
                       <a:pPr algn="ctr">
-                        <a:defRPr sz="900">
+                        <a:defRPr sz="950">
                           <a:solidFill>
-                            <a:srgbClr val="F4F2EE"/>
+                            <a:srgbClr val="F9F9FB"/>
                           </a:solidFill>
                         </a:defRPr>
                       </a:pPr>
@@ -4949,7 +4949,7 @@
                   </a:txBody>
                   <a:tcPr>
                     <a:solidFill>
-                      <a:srgbClr val="15171D"/>
+                      <a:srgbClr val="14171E"/>
                     </a:solidFill>
                   </a:tcPr>
                 </a:tc>
@@ -4959,9 +4959,9 @@
                     <a:lstStyle/>
                     <a:p>
                       <a:pPr algn="ctr">
-                        <a:defRPr sz="900">
+                        <a:defRPr sz="950">
                           <a:solidFill>
-                            <a:srgbClr val="F4F2EE"/>
+                            <a:srgbClr val="F9F9FB"/>
                           </a:solidFill>
                         </a:defRPr>
                       </a:pPr>
@@ -4972,7 +4972,7 @@
                   </a:txBody>
                   <a:tcPr>
                     <a:solidFill>
-                      <a:srgbClr val="15171D"/>
+                      <a:srgbClr val="14171E"/>
                     </a:solidFill>
                   </a:tcPr>
                 </a:tc>
@@ -4982,9 +4982,9 @@
                     <a:lstStyle/>
                     <a:p>
                       <a:pPr algn="ctr">
-                        <a:defRPr sz="900">
+                        <a:defRPr sz="950">
                           <a:solidFill>
-                            <a:srgbClr val="F4F2EE"/>
+                            <a:srgbClr val="F9F9FB"/>
                           </a:solidFill>
                         </a:defRPr>
                       </a:pPr>
@@ -4995,7 +4995,7 @@
                   </a:txBody>
                   <a:tcPr>
                     <a:solidFill>
-                      <a:srgbClr val="15171D"/>
+                      <a:srgbClr val="14171E"/>
                     </a:solidFill>
                   </a:tcPr>
                 </a:tc>
@@ -5005,9 +5005,9 @@
                     <a:lstStyle/>
                     <a:p>
                       <a:pPr algn="ctr">
-                        <a:defRPr sz="900" b="1">
+                        <a:defRPr sz="950" b="1">
                           <a:solidFill>
-                            <a:srgbClr val="DFCAAB"/>
+                            <a:srgbClr val="E5D5C0"/>
                           </a:solidFill>
                         </a:defRPr>
                       </a:pPr>
@@ -5018,7 +5018,7 @@
                   </a:txBody>
                   <a:tcPr>
                     <a:solidFill>
-                      <a:srgbClr val="1C202A"/>
+                      <a:srgbClr val="1A1E27"/>
                     </a:solidFill>
                   </a:tcPr>
                 </a:tc>
@@ -5030,9 +5030,9 @@
                     <a:lstStyle/>
                     <a:p>
                       <a:pPr>
-                        <a:defRPr sz="900" b="1">
+                        <a:defRPr sz="950" b="1">
                           <a:solidFill>
-                            <a:srgbClr val="F4F2EE"/>
+                            <a:srgbClr val="F9F9FB"/>
                           </a:solidFill>
                         </a:defRPr>
                       </a:pPr>
@@ -5043,7 +5043,7 @@
                   </a:txBody>
                   <a:tcPr>
                     <a:solidFill>
-                      <a:srgbClr val="15171D"/>
+                      <a:srgbClr val="14171E"/>
                     </a:solidFill>
                   </a:tcPr>
                 </a:tc>
@@ -5053,9 +5053,9 @@
                     <a:lstStyle/>
                     <a:p>
                       <a:pPr algn="ctr">
-                        <a:defRPr sz="900">
+                        <a:defRPr sz="950">
                           <a:solidFill>
-                            <a:srgbClr val="F4F2EE"/>
+                            <a:srgbClr val="F9F9FB"/>
                           </a:solidFill>
                         </a:defRPr>
                       </a:pPr>
@@ -5066,7 +5066,7 @@
                   </a:txBody>
                   <a:tcPr>
                     <a:solidFill>
-                      <a:srgbClr val="15171D"/>
+                      <a:srgbClr val="14171E"/>
                     </a:solidFill>
                   </a:tcPr>
                 </a:tc>
@@ -5076,9 +5076,9 @@
                     <a:lstStyle/>
                     <a:p>
                       <a:pPr algn="ctr">
-                        <a:defRPr sz="900">
+                        <a:defRPr sz="950">
                           <a:solidFill>
-                            <a:srgbClr val="F4F2EE"/>
+                            <a:srgbClr val="F9F9FB"/>
                           </a:solidFill>
                         </a:defRPr>
                       </a:pPr>
@@ -5089,7 +5089,7 @@
                   </a:txBody>
                   <a:tcPr>
                     <a:solidFill>
-                      <a:srgbClr val="15171D"/>
+                      <a:srgbClr val="14171E"/>
                     </a:solidFill>
                   </a:tcPr>
                 </a:tc>
@@ -5099,9 +5099,9 @@
                     <a:lstStyle/>
                     <a:p>
                       <a:pPr algn="ctr">
-                        <a:defRPr sz="900">
+                        <a:defRPr sz="950">
                           <a:solidFill>
-                            <a:srgbClr val="F4F2EE"/>
+                            <a:srgbClr val="F9F9FB"/>
                           </a:solidFill>
                         </a:defRPr>
                       </a:pPr>
@@ -5112,7 +5112,7 @@
                   </a:txBody>
                   <a:tcPr>
                     <a:solidFill>
-                      <a:srgbClr val="15171D"/>
+                      <a:srgbClr val="14171E"/>
                     </a:solidFill>
                   </a:tcPr>
                 </a:tc>
@@ -5122,9 +5122,9 @@
                     <a:lstStyle/>
                     <a:p>
                       <a:pPr algn="ctr">
-                        <a:defRPr sz="900">
+                        <a:defRPr sz="950">
                           <a:solidFill>
-                            <a:srgbClr val="F4F2EE"/>
+                            <a:srgbClr val="F9F9FB"/>
                           </a:solidFill>
                         </a:defRPr>
                       </a:pPr>
@@ -5135,7 +5135,7 @@
                   </a:txBody>
                   <a:tcPr>
                     <a:solidFill>
-                      <a:srgbClr val="15171D"/>
+                      <a:srgbClr val="14171E"/>
                     </a:solidFill>
                   </a:tcPr>
                 </a:tc>
@@ -5145,9 +5145,9 @@
                     <a:lstStyle/>
                     <a:p>
                       <a:pPr algn="ctr">
-                        <a:defRPr sz="900" b="1">
+                        <a:defRPr sz="950" b="1">
                           <a:solidFill>
-                            <a:srgbClr val="DFCAAB"/>
+                            <a:srgbClr val="E5D5C0"/>
                           </a:solidFill>
                         </a:defRPr>
                       </a:pPr>
@@ -5158,7 +5158,7 @@
                   </a:txBody>
                   <a:tcPr>
                     <a:solidFill>
-                      <a:srgbClr val="1C202A"/>
+                      <a:srgbClr val="1A1E27"/>
                     </a:solidFill>
                   </a:tcPr>
                 </a:tc>
@@ -5170,9 +5170,9 @@
                     <a:lstStyle/>
                     <a:p>
                       <a:pPr>
-                        <a:defRPr sz="900" b="1">
+                        <a:defRPr sz="950" b="1">
                           <a:solidFill>
-                            <a:srgbClr val="F4F2EE"/>
+                            <a:srgbClr val="F9F9FB"/>
                           </a:solidFill>
                         </a:defRPr>
                       </a:pPr>
@@ -5183,7 +5183,7 @@
                   </a:txBody>
                   <a:tcPr>
                     <a:solidFill>
-                      <a:srgbClr val="15171D"/>
+                      <a:srgbClr val="14171E"/>
                     </a:solidFill>
                   </a:tcPr>
                 </a:tc>
@@ -5193,9 +5193,9 @@
                     <a:lstStyle/>
                     <a:p>
                       <a:pPr algn="ctr">
-                        <a:defRPr sz="900">
+                        <a:defRPr sz="950">
                           <a:solidFill>
-                            <a:srgbClr val="F4F2EE"/>
+                            <a:srgbClr val="F9F9FB"/>
                           </a:solidFill>
                         </a:defRPr>
                       </a:pPr>
@@ -5206,7 +5206,7 @@
                   </a:txBody>
                   <a:tcPr>
                     <a:solidFill>
-                      <a:srgbClr val="15171D"/>
+                      <a:srgbClr val="14171E"/>
                     </a:solidFill>
                   </a:tcPr>
                 </a:tc>
@@ -5216,9 +5216,9 @@
                     <a:lstStyle/>
                     <a:p>
                       <a:pPr algn="ctr">
-                        <a:defRPr sz="900">
+                        <a:defRPr sz="950">
                           <a:solidFill>
-                            <a:srgbClr val="F4F2EE"/>
+                            <a:srgbClr val="F9F9FB"/>
                           </a:solidFill>
                         </a:defRPr>
                       </a:pPr>
@@ -5229,7 +5229,7 @@
                   </a:txBody>
                   <a:tcPr>
                     <a:solidFill>
-                      <a:srgbClr val="15171D"/>
+                      <a:srgbClr val="14171E"/>
                     </a:solidFill>
                   </a:tcPr>
                 </a:tc>
@@ -5239,9 +5239,9 @@
                     <a:lstStyle/>
                     <a:p>
                       <a:pPr algn="ctr">
-                        <a:defRPr sz="900">
+                        <a:defRPr sz="950">
                           <a:solidFill>
-                            <a:srgbClr val="F4F2EE"/>
+                            <a:srgbClr val="F9F9FB"/>
                           </a:solidFill>
                         </a:defRPr>
                       </a:pPr>
@@ -5252,7 +5252,7 @@
                   </a:txBody>
                   <a:tcPr>
                     <a:solidFill>
-                      <a:srgbClr val="15171D"/>
+                      <a:srgbClr val="14171E"/>
                     </a:solidFill>
                   </a:tcPr>
                 </a:tc>
@@ -5262,9 +5262,9 @@
                     <a:lstStyle/>
                     <a:p>
                       <a:pPr algn="ctr">
-                        <a:defRPr sz="900">
+                        <a:defRPr sz="950">
                           <a:solidFill>
-                            <a:srgbClr val="F4F2EE"/>
+                            <a:srgbClr val="F9F9FB"/>
                           </a:solidFill>
                         </a:defRPr>
                       </a:pPr>
@@ -5275,7 +5275,7 @@
                   </a:txBody>
                   <a:tcPr>
                     <a:solidFill>
-                      <a:srgbClr val="15171D"/>
+                      <a:srgbClr val="14171E"/>
                     </a:solidFill>
                   </a:tcPr>
                 </a:tc>
@@ -5285,9 +5285,9 @@
                     <a:lstStyle/>
                     <a:p>
                       <a:pPr algn="ctr">
-                        <a:defRPr sz="900" b="1">
+                        <a:defRPr sz="950" b="1">
                           <a:solidFill>
-                            <a:srgbClr val="DFCAAB"/>
+                            <a:srgbClr val="E5D5C0"/>
                           </a:solidFill>
                         </a:defRPr>
                       </a:pPr>
@@ -5298,7 +5298,7 @@
                   </a:txBody>
                   <a:tcPr>
                     <a:solidFill>
-                      <a:srgbClr val="1C202A"/>
+                      <a:srgbClr val="1A1E27"/>
                     </a:solidFill>
                   </a:tcPr>
                 </a:tc>
@@ -5310,9 +5310,9 @@
                     <a:lstStyle/>
                     <a:p>
                       <a:pPr>
-                        <a:defRPr sz="900" b="1">
+                        <a:defRPr sz="950" b="1">
                           <a:solidFill>
-                            <a:srgbClr val="F4F2EE"/>
+                            <a:srgbClr val="F9F9FB"/>
                           </a:solidFill>
                         </a:defRPr>
                       </a:pPr>
@@ -5323,7 +5323,7 @@
                   </a:txBody>
                   <a:tcPr>
                     <a:solidFill>
-                      <a:srgbClr val="15171D"/>
+                      <a:srgbClr val="14171E"/>
                     </a:solidFill>
                   </a:tcPr>
                 </a:tc>
@@ -5333,9 +5333,9 @@
                     <a:lstStyle/>
                     <a:p>
                       <a:pPr algn="ctr">
-                        <a:defRPr sz="900">
+                        <a:defRPr sz="950">
                           <a:solidFill>
-                            <a:srgbClr val="F4F2EE"/>
+                            <a:srgbClr val="F9F9FB"/>
                           </a:solidFill>
                         </a:defRPr>
                       </a:pPr>
@@ -5346,7 +5346,7 @@
                   </a:txBody>
                   <a:tcPr>
                     <a:solidFill>
-                      <a:srgbClr val="15171D"/>
+                      <a:srgbClr val="14171E"/>
                     </a:solidFill>
                   </a:tcPr>
                 </a:tc>
@@ -5356,9 +5356,9 @@
                     <a:lstStyle/>
                     <a:p>
                       <a:pPr algn="ctr">
-                        <a:defRPr sz="900">
+                        <a:defRPr sz="950">
                           <a:solidFill>
-                            <a:srgbClr val="F4F2EE"/>
+                            <a:srgbClr val="F9F9FB"/>
                           </a:solidFill>
                         </a:defRPr>
                       </a:pPr>
@@ -5369,7 +5369,7 @@
                   </a:txBody>
                   <a:tcPr>
                     <a:solidFill>
-                      <a:srgbClr val="15171D"/>
+                      <a:srgbClr val="14171E"/>
                     </a:solidFill>
                   </a:tcPr>
                 </a:tc>
@@ -5379,9 +5379,9 @@
                     <a:lstStyle/>
                     <a:p>
                       <a:pPr algn="ctr">
-                        <a:defRPr sz="900">
+                        <a:defRPr sz="950">
                           <a:solidFill>
-                            <a:srgbClr val="F4F2EE"/>
+                            <a:srgbClr val="F9F9FB"/>
                           </a:solidFill>
                         </a:defRPr>
                       </a:pPr>
@@ -5392,7 +5392,7 @@
                   </a:txBody>
                   <a:tcPr>
                     <a:solidFill>
-                      <a:srgbClr val="15171D"/>
+                      <a:srgbClr val="14171E"/>
                     </a:solidFill>
                   </a:tcPr>
                 </a:tc>
@@ -5402,9 +5402,9 @@
                     <a:lstStyle/>
                     <a:p>
                       <a:pPr algn="ctr">
-                        <a:defRPr sz="900">
+                        <a:defRPr sz="950">
                           <a:solidFill>
-                            <a:srgbClr val="F4F2EE"/>
+                            <a:srgbClr val="F9F9FB"/>
                           </a:solidFill>
                         </a:defRPr>
                       </a:pPr>
@@ -5415,7 +5415,7 @@
                   </a:txBody>
                   <a:tcPr>
                     <a:solidFill>
-                      <a:srgbClr val="15171D"/>
+                      <a:srgbClr val="14171E"/>
                     </a:solidFill>
                   </a:tcPr>
                 </a:tc>
@@ -5425,9 +5425,9 @@
                     <a:lstStyle/>
                     <a:p>
                       <a:pPr algn="ctr">
-                        <a:defRPr sz="900" b="1">
+                        <a:defRPr sz="950" b="1">
                           <a:solidFill>
-                            <a:srgbClr val="DFCAAB"/>
+                            <a:srgbClr val="E5D5C0"/>
                           </a:solidFill>
                         </a:defRPr>
                       </a:pPr>
@@ -5438,7 +5438,7 @@
                   </a:txBody>
                   <a:tcPr>
                     <a:solidFill>
-                      <a:srgbClr val="1C202A"/>
+                      <a:srgbClr val="1A1E27"/>
                     </a:solidFill>
                   </a:tcPr>
                 </a:tc>
@@ -5450,9 +5450,9 @@
                     <a:lstStyle/>
                     <a:p>
                       <a:pPr>
-                        <a:defRPr sz="900" b="1">
+                        <a:defRPr sz="950" b="1">
                           <a:solidFill>
-                            <a:srgbClr val="F4F2EE"/>
+                            <a:srgbClr val="F9F9FB"/>
                           </a:solidFill>
                         </a:defRPr>
                       </a:pPr>
@@ -5463,7 +5463,7 @@
                   </a:txBody>
                   <a:tcPr>
                     <a:solidFill>
-                      <a:srgbClr val="15171D"/>
+                      <a:srgbClr val="14171E"/>
                     </a:solidFill>
                   </a:tcPr>
                 </a:tc>
@@ -5473,9 +5473,9 @@
                     <a:lstStyle/>
                     <a:p>
                       <a:pPr algn="ctr">
-                        <a:defRPr sz="900">
+                        <a:defRPr sz="950">
                           <a:solidFill>
-                            <a:srgbClr val="F4F2EE"/>
+                            <a:srgbClr val="F9F9FB"/>
                           </a:solidFill>
                         </a:defRPr>
                       </a:pPr>
@@ -5486,7 +5486,7 @@
                   </a:txBody>
                   <a:tcPr>
                     <a:solidFill>
-                      <a:srgbClr val="15171D"/>
+                      <a:srgbClr val="14171E"/>
                     </a:solidFill>
                   </a:tcPr>
                 </a:tc>
@@ -5496,9 +5496,9 @@
                     <a:lstStyle/>
                     <a:p>
                       <a:pPr algn="ctr">
-                        <a:defRPr sz="900">
+                        <a:defRPr sz="950">
                           <a:solidFill>
-                            <a:srgbClr val="F4F2EE"/>
+                            <a:srgbClr val="F9F9FB"/>
                           </a:solidFill>
                         </a:defRPr>
                       </a:pPr>
@@ -5509,7 +5509,7 @@
                   </a:txBody>
                   <a:tcPr>
                     <a:solidFill>
-                      <a:srgbClr val="15171D"/>
+                      <a:srgbClr val="14171E"/>
                     </a:solidFill>
                   </a:tcPr>
                 </a:tc>
@@ -5519,9 +5519,9 @@
                     <a:lstStyle/>
                     <a:p>
                       <a:pPr algn="ctr">
-                        <a:defRPr sz="900">
+                        <a:defRPr sz="950">
                           <a:solidFill>
-                            <a:srgbClr val="F4F2EE"/>
+                            <a:srgbClr val="F9F9FB"/>
                           </a:solidFill>
                         </a:defRPr>
                       </a:pPr>
@@ -5532,7 +5532,7 @@
                   </a:txBody>
                   <a:tcPr>
                     <a:solidFill>
-                      <a:srgbClr val="15171D"/>
+                      <a:srgbClr val="14171E"/>
                     </a:solidFill>
                   </a:tcPr>
                 </a:tc>
@@ -5542,9 +5542,9 @@
                     <a:lstStyle/>
                     <a:p>
                       <a:pPr algn="ctr">
-                        <a:defRPr sz="900">
+                        <a:defRPr sz="950">
                           <a:solidFill>
-                            <a:srgbClr val="F4F2EE"/>
+                            <a:srgbClr val="F9F9FB"/>
                           </a:solidFill>
                         </a:defRPr>
                       </a:pPr>
@@ -5555,7 +5555,7 @@
                   </a:txBody>
                   <a:tcPr>
                     <a:solidFill>
-                      <a:srgbClr val="15171D"/>
+                      <a:srgbClr val="14171E"/>
                     </a:solidFill>
                   </a:tcPr>
                 </a:tc>
@@ -5565,9 +5565,9 @@
                     <a:lstStyle/>
                     <a:p>
                       <a:pPr algn="ctr">
-                        <a:defRPr sz="900" b="1">
+                        <a:defRPr sz="950" b="1">
                           <a:solidFill>
-                            <a:srgbClr val="DFCAAB"/>
+                            <a:srgbClr val="E5D5C0"/>
                           </a:solidFill>
                         </a:defRPr>
                       </a:pPr>
@@ -5578,7 +5578,7 @@
                   </a:txBody>
                   <a:tcPr>
                     <a:solidFill>
-                      <a:srgbClr val="1C202A"/>
+                      <a:srgbClr val="1A1E27"/>
                     </a:solidFill>
                   </a:tcPr>
                 </a:tc>
@@ -5590,9 +5590,9 @@
                     <a:lstStyle/>
                     <a:p>
                       <a:pPr>
-                        <a:defRPr sz="900" b="1">
+                        <a:defRPr sz="950" b="1">
                           <a:solidFill>
-                            <a:srgbClr val="F4F2EE"/>
+                            <a:srgbClr val="F9F9FB"/>
                           </a:solidFill>
                         </a:defRPr>
                       </a:pPr>
@@ -5603,7 +5603,7 @@
                   </a:txBody>
                   <a:tcPr>
                     <a:solidFill>
-                      <a:srgbClr val="15171D"/>
+                      <a:srgbClr val="14171E"/>
                     </a:solidFill>
                   </a:tcPr>
                 </a:tc>
@@ -5613,9 +5613,9 @@
                     <a:lstStyle/>
                     <a:p>
                       <a:pPr algn="ctr">
-                        <a:defRPr sz="900">
+                        <a:defRPr sz="950">
                           <a:solidFill>
-                            <a:srgbClr val="F4F2EE"/>
+                            <a:srgbClr val="F9F9FB"/>
                           </a:solidFill>
                         </a:defRPr>
                       </a:pPr>
@@ -5626,7 +5626,7 @@
                   </a:txBody>
                   <a:tcPr>
                     <a:solidFill>
-                      <a:srgbClr val="15171D"/>
+                      <a:srgbClr val="14171E"/>
                     </a:solidFill>
                   </a:tcPr>
                 </a:tc>
@@ -5636,9 +5636,9 @@
                     <a:lstStyle/>
                     <a:p>
                       <a:pPr algn="ctr">
-                        <a:defRPr sz="900">
+                        <a:defRPr sz="950">
                           <a:solidFill>
-                            <a:srgbClr val="F4F2EE"/>
+                            <a:srgbClr val="F9F9FB"/>
                           </a:solidFill>
                         </a:defRPr>
                       </a:pPr>
@@ -5649,7 +5649,7 @@
                   </a:txBody>
                   <a:tcPr>
                     <a:solidFill>
-                      <a:srgbClr val="15171D"/>
+                      <a:srgbClr val="14171E"/>
                     </a:solidFill>
                   </a:tcPr>
                 </a:tc>
@@ -5659,9 +5659,9 @@
                     <a:lstStyle/>
                     <a:p>
                       <a:pPr algn="ctr">
-                        <a:defRPr sz="900">
+                        <a:defRPr sz="950">
                           <a:solidFill>
-                            <a:srgbClr val="F4F2EE"/>
+                            <a:srgbClr val="F9F9FB"/>
                           </a:solidFill>
                         </a:defRPr>
                       </a:pPr>
@@ -5672,7 +5672,7 @@
                   </a:txBody>
                   <a:tcPr>
                     <a:solidFill>
-                      <a:srgbClr val="15171D"/>
+                      <a:srgbClr val="14171E"/>
                     </a:solidFill>
                   </a:tcPr>
                 </a:tc>
@@ -5682,9 +5682,9 @@
                     <a:lstStyle/>
                     <a:p>
                       <a:pPr algn="ctr">
-                        <a:defRPr sz="900">
+                        <a:defRPr sz="950">
                           <a:solidFill>
-                            <a:srgbClr val="F4F2EE"/>
+                            <a:srgbClr val="F9F9FB"/>
                           </a:solidFill>
                         </a:defRPr>
                       </a:pPr>
@@ -5695,7 +5695,7 @@
                   </a:txBody>
                   <a:tcPr>
                     <a:solidFill>
-                      <a:srgbClr val="15171D"/>
+                      <a:srgbClr val="14171E"/>
                     </a:solidFill>
                   </a:tcPr>
                 </a:tc>
@@ -5705,9 +5705,9 @@
                     <a:lstStyle/>
                     <a:p>
                       <a:pPr algn="ctr">
-                        <a:defRPr sz="900" b="1">
+                        <a:defRPr sz="950" b="1">
                           <a:solidFill>
-                            <a:srgbClr val="DFCAAB"/>
+                            <a:srgbClr val="E5D5C0"/>
                           </a:solidFill>
                         </a:defRPr>
                       </a:pPr>
@@ -5718,7 +5718,7 @@
                   </a:txBody>
                   <a:tcPr>
                     <a:solidFill>
-                      <a:srgbClr val="1C202A"/>
+                      <a:srgbClr val="1A1E27"/>
                     </a:solidFill>
                   </a:tcPr>
                 </a:tc>
@@ -5760,7 +5760,7 @@
             <a:avLst/>
           </a:prstGeom>
           <a:solidFill>
-            <a:srgbClr val="0E1013"/>
+            <a:srgbClr val="0B0D10"/>
           </a:solidFill>
           <a:ln>
             <a:noFill/>
@@ -5796,7 +5796,7 @@
         </p:nvSpPr>
         <p:spPr>
           <a:xfrm>
-            <a:off x="731520" y="365760"/>
+            <a:off x="731520" y="347472"/>
             <a:ext cx="10698480" cy="320040"/>
           </a:xfrm>
           <a:prstGeom prst="rect">
@@ -5811,7 +5811,7 @@
           <a:lstStyle/>
           <a:p>
             <a:pPr>
-              <a:defRPr sz="1000" b="1">
+              <a:defRPr sz="1100" b="1">
                 <a:solidFill>
                   <a:srgbClr val="C5A880"/>
                 </a:solidFill>
@@ -5832,7 +5832,7 @@
         </p:nvSpPr>
         <p:spPr>
           <a:xfrm>
-            <a:off x="731520" y="658368"/>
+            <a:off x="731520" y="640080"/>
             <a:ext cx="10698480" cy="502920"/>
           </a:xfrm>
           <a:prstGeom prst="rect">
@@ -5847,9 +5847,9 @@
           <a:lstStyle/>
           <a:p>
             <a:pPr>
-              <a:defRPr sz="2100" b="1">
-                <a:solidFill>
-                  <a:srgbClr val="F4F2EE"/>
+              <a:defRPr sz="2200" b="1">
+                <a:solidFill>
+                  <a:srgbClr val="F9F9FB"/>
                 </a:solidFill>
                 <a:latin typeface="Georgia"/>
               </a:defRPr>
@@ -5883,9 +5883,9 @@
           <a:lstStyle/>
           <a:p>
             <a:pPr>
-              <a:defRPr sz="1150">
-                <a:solidFill>
-                  <a:srgbClr val="9CA3AF"/>
+              <a:defRPr sz="1200">
+                <a:solidFill>
+                  <a:srgbClr val="A3AAB8"/>
                 </a:solidFill>
                 <a:latin typeface="Segoe UI"/>
               </a:defRPr>
@@ -5911,9 +5911,9 @@
             <a:avLst/>
           </a:prstGeom>
           <a:solidFill>
-            <a:srgbClr val="15171D"/>
+            <a:srgbClr val="14171E"/>
           </a:solidFill>
-          <a:ln w="12700">
+          <a:ln w="15240">
             <a:solidFill>
               <a:srgbClr val="38BDF8"/>
             </a:solidFill>
@@ -5964,7 +5964,7 @@
           <a:lstStyle/>
           <a:p>
             <a:pPr>
-              <a:defRPr sz="1300" b="1">
+              <a:defRPr sz="1350" b="1">
                 <a:solidFill>
                   <a:srgbClr val="38BDF8"/>
                 </a:solidFill>
@@ -5979,9 +5979,9 @@
               <a:spcBef>
                 <a:spcPts val="1200"/>
               </a:spcBef>
-              <a:defRPr sz="1050">
-                <a:solidFill>
-                  <a:srgbClr val="F4F2EE"/>
+              <a:defRPr sz="1100">
+                <a:solidFill>
+                  <a:srgbClr val="F9F9FB"/>
                 </a:solidFill>
               </a:defRPr>
             </a:pPr>
@@ -6011,9 +6011,9 @@
             <a:avLst/>
           </a:prstGeom>
           <a:solidFill>
-            <a:srgbClr val="15171D"/>
+            <a:srgbClr val="14171E"/>
           </a:solidFill>
-          <a:ln w="12700">
+          <a:ln w="15240">
             <a:solidFill>
               <a:srgbClr val="C5A880"/>
             </a:solidFill>
@@ -6064,7 +6064,7 @@
           <a:lstStyle/>
           <a:p>
             <a:pPr>
-              <a:defRPr sz="1300" b="1">
+              <a:defRPr sz="1350" b="1">
                 <a:solidFill>
                   <a:srgbClr val="C5A880"/>
                 </a:solidFill>
@@ -6079,9 +6079,9 @@
               <a:spcBef>
                 <a:spcPts val="1200"/>
               </a:spcBef>
-              <a:defRPr sz="1050">
-                <a:solidFill>
-                  <a:srgbClr val="F4F2EE"/>
+              <a:defRPr sz="1100">
+                <a:solidFill>
+                  <a:srgbClr val="F9F9FB"/>
                 </a:solidFill>
               </a:defRPr>
             </a:pPr>
@@ -6111,9 +6111,9 @@
             <a:avLst/>
           </a:prstGeom>
           <a:solidFill>
-            <a:srgbClr val="15171D"/>
+            <a:srgbClr val="14171E"/>
           </a:solidFill>
-          <a:ln w="12700">
+          <a:ln w="15240">
             <a:solidFill>
               <a:srgbClr val="34D399"/>
             </a:solidFill>
@@ -6164,7 +6164,7 @@
           <a:lstStyle/>
           <a:p>
             <a:pPr>
-              <a:defRPr sz="1300" b="1">
+              <a:defRPr sz="1350" b="1">
                 <a:solidFill>
                   <a:srgbClr val="34D399"/>
                 </a:solidFill>
@@ -6179,9 +6179,9 @@
               <a:spcBef>
                 <a:spcPts val="1200"/>
               </a:spcBef>
-              <a:defRPr sz="1050">
-                <a:solidFill>
-                  <a:srgbClr val="F4F2EE"/>
+              <a:defRPr sz="1100">
+                <a:solidFill>
+                  <a:srgbClr val="F9F9FB"/>
                 </a:solidFill>
               </a:defRPr>
             </a:pPr>
@@ -6229,7 +6229,7 @@
             <a:avLst/>
           </a:prstGeom>
           <a:solidFill>
-            <a:srgbClr val="0E1013"/>
+            <a:srgbClr val="0B0D10"/>
           </a:solidFill>
           <a:ln>
             <a:noFill/>
@@ -6265,7 +6265,7 @@
         </p:nvSpPr>
         <p:spPr>
           <a:xfrm>
-            <a:off x="731520" y="365760"/>
+            <a:off x="731520" y="347472"/>
             <a:ext cx="10698480" cy="320040"/>
           </a:xfrm>
           <a:prstGeom prst="rect">
@@ -6280,7 +6280,7 @@
           <a:lstStyle/>
           <a:p>
             <a:pPr>
-              <a:defRPr sz="1000" b="1">
+              <a:defRPr sz="1100" b="1">
                 <a:solidFill>
                   <a:srgbClr val="C5A880"/>
                 </a:solidFill>
@@ -6301,7 +6301,7 @@
         </p:nvSpPr>
         <p:spPr>
           <a:xfrm>
-            <a:off x="731520" y="658368"/>
+            <a:off x="731520" y="640080"/>
             <a:ext cx="10698480" cy="502920"/>
           </a:xfrm>
           <a:prstGeom prst="rect">
@@ -6316,9 +6316,9 @@
           <a:lstStyle/>
           <a:p>
             <a:pPr>
-              <a:defRPr sz="2100" b="1">
-                <a:solidFill>
-                  <a:srgbClr val="F4F2EE"/>
+              <a:defRPr sz="2200" b="1">
+                <a:solidFill>
+                  <a:srgbClr val="F9F9FB"/>
                 </a:solidFill>
                 <a:latin typeface="Georgia"/>
               </a:defRPr>
@@ -6352,9 +6352,9 @@
           <a:lstStyle/>
           <a:p>
             <a:pPr>
-              <a:defRPr sz="1150">
-                <a:solidFill>
-                  <a:srgbClr val="9CA3AF"/>
+              <a:defRPr sz="1200">
+                <a:solidFill>
+                  <a:srgbClr val="A3AAB8"/>
                 </a:solidFill>
                 <a:latin typeface="Segoe UI"/>
               </a:defRPr>
@@ -6380,11 +6380,11 @@
             <a:avLst/>
           </a:prstGeom>
           <a:solidFill>
-            <a:srgbClr val="15171D"/>
+            <a:srgbClr val="14171E"/>
           </a:solidFill>
-          <a:ln w="12700">
+          <a:ln w="15240">
             <a:solidFill>
-              <a:srgbClr val="323741"/>
+              <a:srgbClr val="3C4452"/>
             </a:solidFill>
           </a:ln>
         </p:spPr>
@@ -6433,9 +6433,9 @@
           <a:lstStyle/>
           <a:p>
             <a:pPr>
-              <a:defRPr sz="1300" b="1">
-                <a:solidFill>
-                  <a:srgbClr val="F4F2EE"/>
+              <a:defRPr sz="1350" b="1">
+                <a:solidFill>
+                  <a:srgbClr val="F9F9FB"/>
                 </a:solidFill>
               </a:defRPr>
             </a:pPr>
@@ -6450,7 +6450,7 @@
               </a:spcBef>
               <a:defRPr sz="2800" b="1">
                 <a:solidFill>
-                  <a:srgbClr val="F4F2EE"/>
+                  <a:srgbClr val="F9F9FB"/>
                 </a:solidFill>
               </a:defRPr>
             </a:pPr>
@@ -6463,9 +6463,9 @@
               <a:spcBef>
                 <a:spcPts val="200"/>
               </a:spcBef>
-              <a:defRPr sz="950">
-                <a:solidFill>
-                  <a:srgbClr val="9CA3AF"/>
+              <a:defRPr sz="1000">
+                <a:solidFill>
+                  <a:srgbClr val="A3AAB8"/>
                 </a:solidFill>
               </a:defRPr>
             </a:pPr>
@@ -6478,9 +6478,9 @@
               <a:spcBef>
                 <a:spcPts val="800"/>
               </a:spcBef>
-              <a:defRPr sz="1050">
-                <a:solidFill>
-                  <a:srgbClr val="F4F2EE"/>
+              <a:defRPr sz="1100">
+                <a:solidFill>
+                  <a:srgbClr val="F9F9FB"/>
                 </a:solidFill>
               </a:defRPr>
             </a:pPr>
@@ -6493,9 +6493,9 @@
               <a:spcBef>
                 <a:spcPts val="800"/>
               </a:spcBef>
-              <a:defRPr sz="1050">
-                <a:solidFill>
-                  <a:srgbClr val="F4F2EE"/>
+              <a:defRPr sz="1100">
+                <a:solidFill>
+                  <a:srgbClr val="F9F9FB"/>
                 </a:solidFill>
               </a:defRPr>
             </a:pPr>
@@ -6508,9 +6508,9 @@
               <a:spcBef>
                 <a:spcPts val="800"/>
               </a:spcBef>
-              <a:defRPr sz="1050">
-                <a:solidFill>
-                  <a:srgbClr val="F4F2EE"/>
+              <a:defRPr sz="1100">
+                <a:solidFill>
+                  <a:srgbClr val="F9F9FB"/>
                 </a:solidFill>
               </a:defRPr>
             </a:pPr>
@@ -6523,9 +6523,9 @@
               <a:spcBef>
                 <a:spcPts val="800"/>
               </a:spcBef>
-              <a:defRPr sz="1050">
-                <a:solidFill>
-                  <a:srgbClr val="F4F2EE"/>
+              <a:defRPr sz="1100">
+                <a:solidFill>
+                  <a:srgbClr val="F9F9FB"/>
                 </a:solidFill>
               </a:defRPr>
             </a:pPr>
@@ -6538,9 +6538,9 @@
               <a:spcBef>
                 <a:spcPts val="800"/>
               </a:spcBef>
-              <a:defRPr sz="1050">
-                <a:solidFill>
-                  <a:srgbClr val="F4F2EE"/>
+              <a:defRPr sz="1100">
+                <a:solidFill>
+                  <a:srgbClr val="F9F9FB"/>
                 </a:solidFill>
               </a:defRPr>
             </a:pPr>
@@ -6565,9 +6565,9 @@
             <a:avLst/>
           </a:prstGeom>
           <a:solidFill>
-            <a:srgbClr val="1C1F26"/>
+            <a:srgbClr val="1A1E27"/>
           </a:solidFill>
-          <a:ln w="12700">
+          <a:ln w="15240">
             <a:solidFill>
               <a:srgbClr val="C5A880"/>
             </a:solidFill>
@@ -6618,7 +6618,7 @@
           <a:lstStyle/>
           <a:p>
             <a:pPr>
-              <a:defRPr sz="1300" b="1">
+              <a:defRPr sz="1350" b="1">
                 <a:solidFill>
                   <a:srgbClr val="C5A880"/>
                 </a:solidFill>
@@ -6635,7 +6635,7 @@
               </a:spcBef>
               <a:defRPr sz="2800" b="1">
                 <a:solidFill>
-                  <a:srgbClr val="F4F2EE"/>
+                  <a:srgbClr val="F9F9FB"/>
                 </a:solidFill>
               </a:defRPr>
             </a:pPr>
@@ -6648,9 +6648,9 @@
               <a:spcBef>
                 <a:spcPts val="200"/>
               </a:spcBef>
-              <a:defRPr sz="950">
-                <a:solidFill>
-                  <a:srgbClr val="9CA3AF"/>
+              <a:defRPr sz="1000">
+                <a:solidFill>
+                  <a:srgbClr val="A3AAB8"/>
                 </a:solidFill>
               </a:defRPr>
             </a:pPr>
@@ -6663,9 +6663,9 @@
               <a:spcBef>
                 <a:spcPts val="800"/>
               </a:spcBef>
-              <a:defRPr sz="1050">
-                <a:solidFill>
-                  <a:srgbClr val="F4F2EE"/>
+              <a:defRPr sz="1100">
+                <a:solidFill>
+                  <a:srgbClr val="F9F9FB"/>
                 </a:solidFill>
               </a:defRPr>
             </a:pPr>
@@ -6678,9 +6678,9 @@
               <a:spcBef>
                 <a:spcPts val="800"/>
               </a:spcBef>
-              <a:defRPr sz="1050">
-                <a:solidFill>
-                  <a:srgbClr val="F4F2EE"/>
+              <a:defRPr sz="1100">
+                <a:solidFill>
+                  <a:srgbClr val="F9F9FB"/>
                 </a:solidFill>
               </a:defRPr>
             </a:pPr>
@@ -6693,9 +6693,9 @@
               <a:spcBef>
                 <a:spcPts val="800"/>
               </a:spcBef>
-              <a:defRPr sz="1050">
-                <a:solidFill>
-                  <a:srgbClr val="F4F2EE"/>
+              <a:defRPr sz="1100">
+                <a:solidFill>
+                  <a:srgbClr val="F9F9FB"/>
                 </a:solidFill>
               </a:defRPr>
             </a:pPr>
@@ -6708,9 +6708,9 @@
               <a:spcBef>
                 <a:spcPts val="800"/>
               </a:spcBef>
-              <a:defRPr sz="1050">
-                <a:solidFill>
-                  <a:srgbClr val="F4F2EE"/>
+              <a:defRPr sz="1100">
+                <a:solidFill>
+                  <a:srgbClr val="F9F9FB"/>
                 </a:solidFill>
               </a:defRPr>
             </a:pPr>
@@ -6723,9 +6723,9 @@
               <a:spcBef>
                 <a:spcPts val="800"/>
               </a:spcBef>
-              <a:defRPr sz="1050">
-                <a:solidFill>
-                  <a:srgbClr val="F4F2EE"/>
+              <a:defRPr sz="1100">
+                <a:solidFill>
+                  <a:srgbClr val="F9F9FB"/>
                 </a:solidFill>
               </a:defRPr>
             </a:pPr>
@@ -6738,9 +6738,9 @@
               <a:spcBef>
                 <a:spcPts val="800"/>
               </a:spcBef>
-              <a:defRPr sz="1050">
-                <a:solidFill>
-                  <a:srgbClr val="F4F2EE"/>
+              <a:defRPr sz="1100">
+                <a:solidFill>
+                  <a:srgbClr val="F9F9FB"/>
                 </a:solidFill>
               </a:defRPr>
             </a:pPr>
@@ -6765,11 +6765,11 @@
             <a:avLst/>
           </a:prstGeom>
           <a:solidFill>
-            <a:srgbClr val="15171D"/>
+            <a:srgbClr val="14171E"/>
           </a:solidFill>
-          <a:ln w="12700">
+          <a:ln w="15240">
             <a:solidFill>
-              <a:srgbClr val="323741"/>
+              <a:srgbClr val="3C4452"/>
             </a:solidFill>
           </a:ln>
         </p:spPr>
@@ -6818,7 +6818,7 @@
           <a:lstStyle/>
           <a:p>
             <a:pPr>
-              <a:defRPr sz="1300" b="1">
+              <a:defRPr sz="1350" b="1">
                 <a:solidFill>
                   <a:srgbClr val="38BDF8"/>
                 </a:solidFill>
@@ -6835,7 +6835,7 @@
               </a:spcBef>
               <a:defRPr sz="2800" b="1">
                 <a:solidFill>
-                  <a:srgbClr val="F4F2EE"/>
+                  <a:srgbClr val="F9F9FB"/>
                 </a:solidFill>
               </a:defRPr>
             </a:pPr>
@@ -6848,9 +6848,9 @@
               <a:spcBef>
                 <a:spcPts val="200"/>
               </a:spcBef>
-              <a:defRPr sz="950">
-                <a:solidFill>
-                  <a:srgbClr val="9CA3AF"/>
+              <a:defRPr sz="1000">
+                <a:solidFill>
+                  <a:srgbClr val="A3AAB8"/>
                 </a:solidFill>
               </a:defRPr>
             </a:pPr>
@@ -6863,9 +6863,9 @@
               <a:spcBef>
                 <a:spcPts val="800"/>
               </a:spcBef>
-              <a:defRPr sz="1050">
-                <a:solidFill>
-                  <a:srgbClr val="F4F2EE"/>
+              <a:defRPr sz="1100">
+                <a:solidFill>
+                  <a:srgbClr val="F9F9FB"/>
                 </a:solidFill>
               </a:defRPr>
             </a:pPr>
@@ -6878,9 +6878,9 @@
               <a:spcBef>
                 <a:spcPts val="800"/>
               </a:spcBef>
-              <a:defRPr sz="1050">
-                <a:solidFill>
-                  <a:srgbClr val="F4F2EE"/>
+              <a:defRPr sz="1100">
+                <a:solidFill>
+                  <a:srgbClr val="F9F9FB"/>
                 </a:solidFill>
               </a:defRPr>
             </a:pPr>
@@ -6893,9 +6893,9 @@
               <a:spcBef>
                 <a:spcPts val="800"/>
               </a:spcBef>
-              <a:defRPr sz="1050">
-                <a:solidFill>
-                  <a:srgbClr val="F4F2EE"/>
+              <a:defRPr sz="1100">
+                <a:solidFill>
+                  <a:srgbClr val="F9F9FB"/>
                 </a:solidFill>
               </a:defRPr>
             </a:pPr>
@@ -6908,9 +6908,9 @@
               <a:spcBef>
                 <a:spcPts val="800"/>
               </a:spcBef>
-              <a:defRPr sz="1050">
-                <a:solidFill>
-                  <a:srgbClr val="F4F2EE"/>
+              <a:defRPr sz="1100">
+                <a:solidFill>
+                  <a:srgbClr val="F9F9FB"/>
                 </a:solidFill>
               </a:defRPr>
             </a:pPr>
@@ -6923,9 +6923,9 @@
               <a:spcBef>
                 <a:spcPts val="800"/>
               </a:spcBef>
-              <a:defRPr sz="1050">
-                <a:solidFill>
-                  <a:srgbClr val="F4F2EE"/>
+              <a:defRPr sz="1100">
+                <a:solidFill>
+                  <a:srgbClr val="F9F9FB"/>
                 </a:solidFill>
               </a:defRPr>
             </a:pPr>
@@ -6968,7 +6968,7 @@
             <a:avLst/>
           </a:prstGeom>
           <a:solidFill>
-            <a:srgbClr val="0E1013"/>
+            <a:srgbClr val="0B0D10"/>
           </a:solidFill>
           <a:ln>
             <a:noFill/>
@@ -7004,7 +7004,7 @@
         </p:nvSpPr>
         <p:spPr>
           <a:xfrm>
-            <a:off x="731520" y="365760"/>
+            <a:off x="731520" y="347472"/>
             <a:ext cx="10698480" cy="320040"/>
           </a:xfrm>
           <a:prstGeom prst="rect">
@@ -7019,7 +7019,7 @@
           <a:lstStyle/>
           <a:p>
             <a:pPr>
-              <a:defRPr sz="1000" b="1">
+              <a:defRPr sz="1100" b="1">
                 <a:solidFill>
                   <a:srgbClr val="C5A880"/>
                 </a:solidFill>
@@ -7040,7 +7040,7 @@
         </p:nvSpPr>
         <p:spPr>
           <a:xfrm>
-            <a:off x="731520" y="658368"/>
+            <a:off x="731520" y="640080"/>
             <a:ext cx="10698480" cy="502920"/>
           </a:xfrm>
           <a:prstGeom prst="rect">
@@ -7055,9 +7055,9 @@
           <a:lstStyle/>
           <a:p>
             <a:pPr>
-              <a:defRPr sz="2100" b="1">
-                <a:solidFill>
-                  <a:srgbClr val="F4F2EE"/>
+              <a:defRPr sz="2200" b="1">
+                <a:solidFill>
+                  <a:srgbClr val="F9F9FB"/>
                 </a:solidFill>
                 <a:latin typeface="Georgia"/>
               </a:defRPr>
@@ -7091,9 +7091,9 @@
           <a:lstStyle/>
           <a:p>
             <a:pPr>
-              <a:defRPr sz="1150">
-                <a:solidFill>
-                  <a:srgbClr val="9CA3AF"/>
+              <a:defRPr sz="1200">
+                <a:solidFill>
+                  <a:srgbClr val="A3AAB8"/>
                 </a:solidFill>
                 <a:latin typeface="Segoe UI"/>
               </a:defRPr>
@@ -7119,9 +7119,9 @@
             <a:avLst/>
           </a:prstGeom>
           <a:solidFill>
-            <a:srgbClr val="15171D"/>
+            <a:srgbClr val="14171E"/>
           </a:solidFill>
-          <a:ln w="12700">
+          <a:ln w="15240">
             <a:solidFill>
               <a:srgbClr val="34D399"/>
             </a:solidFill>
@@ -7172,7 +7172,7 @@
           <a:lstStyle/>
           <a:p>
             <a:pPr>
-              <a:defRPr sz="1300" b="1">
+              <a:defRPr sz="1350" b="1">
                 <a:solidFill>
                   <a:srgbClr val="34D399"/>
                 </a:solidFill>
@@ -7187,9 +7187,9 @@
               <a:spcBef>
                 <a:spcPts val="800"/>
               </a:spcBef>
-              <a:defRPr sz="1050">
-                <a:solidFill>
-                  <a:srgbClr val="F4F2EE"/>
+              <a:defRPr sz="1100">
+                <a:solidFill>
+                  <a:srgbClr val="F9F9FB"/>
                 </a:solidFill>
               </a:defRPr>
             </a:pPr>
@@ -7202,9 +7202,9 @@
               <a:spcBef>
                 <a:spcPts val="800"/>
               </a:spcBef>
-              <a:defRPr sz="1050">
-                <a:solidFill>
-                  <a:srgbClr val="F4F2EE"/>
+              <a:defRPr sz="1100">
+                <a:solidFill>
+                  <a:srgbClr val="F9F9FB"/>
                 </a:solidFill>
               </a:defRPr>
             </a:pPr>
@@ -7217,9 +7217,9 @@
               <a:spcBef>
                 <a:spcPts val="800"/>
               </a:spcBef>
-              <a:defRPr sz="1050">
-                <a:solidFill>
-                  <a:srgbClr val="F4F2EE"/>
+              <a:defRPr sz="1100">
+                <a:solidFill>
+                  <a:srgbClr val="F9F9FB"/>
                 </a:solidFill>
               </a:defRPr>
             </a:pPr>
@@ -7232,9 +7232,9 @@
               <a:spcBef>
                 <a:spcPts val="800"/>
               </a:spcBef>
-              <a:defRPr sz="1050">
-                <a:solidFill>
-                  <a:srgbClr val="F4F2EE"/>
+              <a:defRPr sz="1100">
+                <a:solidFill>
+                  <a:srgbClr val="F9F9FB"/>
                 </a:solidFill>
               </a:defRPr>
             </a:pPr>
@@ -7247,9 +7247,9 @@
               <a:spcBef>
                 <a:spcPts val="800"/>
               </a:spcBef>
-              <a:defRPr sz="1050">
-                <a:solidFill>
-                  <a:srgbClr val="F4F2EE"/>
+              <a:defRPr sz="1100">
+                <a:solidFill>
+                  <a:srgbClr val="F9F9FB"/>
                 </a:solidFill>
               </a:defRPr>
             </a:pPr>
@@ -7274,9 +7274,9 @@
             <a:avLst/>
           </a:prstGeom>
           <a:solidFill>
-            <a:srgbClr val="15171D"/>
+            <a:srgbClr val="14171E"/>
           </a:solidFill>
-          <a:ln w="12700">
+          <a:ln w="15240">
             <a:solidFill>
               <a:srgbClr val="38BDF8"/>
             </a:solidFill>
@@ -7327,7 +7327,7 @@
           <a:lstStyle/>
           <a:p>
             <a:pPr>
-              <a:defRPr sz="1300" b="1">
+              <a:defRPr sz="1350" b="1">
                 <a:solidFill>
                   <a:srgbClr val="38BDF8"/>
                 </a:solidFill>
@@ -7342,9 +7342,9 @@
               <a:spcBef>
                 <a:spcPts val="800"/>
               </a:spcBef>
-              <a:defRPr sz="1050">
-                <a:solidFill>
-                  <a:srgbClr val="F4F2EE"/>
+              <a:defRPr sz="1100">
+                <a:solidFill>
+                  <a:srgbClr val="F9F9FB"/>
                 </a:solidFill>
               </a:defRPr>
             </a:pPr>
@@ -7357,9 +7357,9 @@
               <a:spcBef>
                 <a:spcPts val="800"/>
               </a:spcBef>
-              <a:defRPr sz="1050">
-                <a:solidFill>
-                  <a:srgbClr val="F4F2EE"/>
+              <a:defRPr sz="1100">
+                <a:solidFill>
+                  <a:srgbClr val="F9F9FB"/>
                 </a:solidFill>
               </a:defRPr>
             </a:pPr>
@@ -7372,9 +7372,9 @@
               <a:spcBef>
                 <a:spcPts val="800"/>
               </a:spcBef>
-              <a:defRPr sz="1050">
-                <a:solidFill>
-                  <a:srgbClr val="F4F2EE"/>
+              <a:defRPr sz="1100">
+                <a:solidFill>
+                  <a:srgbClr val="F9F9FB"/>
                 </a:solidFill>
               </a:defRPr>
             </a:pPr>
@@ -7387,9 +7387,9 @@
               <a:spcBef>
                 <a:spcPts val="800"/>
               </a:spcBef>
-              <a:defRPr sz="1050">
-                <a:solidFill>
-                  <a:srgbClr val="F4F2EE"/>
+              <a:defRPr sz="1100">
+                <a:solidFill>
+                  <a:srgbClr val="F9F9FB"/>
                 </a:solidFill>
               </a:defRPr>
             </a:pPr>
@@ -7414,9 +7414,9 @@
             <a:avLst/>
           </a:prstGeom>
           <a:solidFill>
-            <a:srgbClr val="15171D"/>
+            <a:srgbClr val="14171E"/>
           </a:solidFill>
-          <a:ln w="12700">
+          <a:ln w="15240">
             <a:solidFill>
               <a:srgbClr val="FBBF24"/>
             </a:solidFill>
@@ -7467,7 +7467,7 @@
           <a:lstStyle/>
           <a:p>
             <a:pPr>
-              <a:defRPr sz="1300" b="1">
+              <a:defRPr sz="1350" b="1">
                 <a:solidFill>
                   <a:srgbClr val="FBBF24"/>
                 </a:solidFill>
@@ -7482,9 +7482,9 @@
               <a:spcBef>
                 <a:spcPts val="800"/>
               </a:spcBef>
-              <a:defRPr sz="1050">
-                <a:solidFill>
-                  <a:srgbClr val="F4F2EE"/>
+              <a:defRPr sz="1100">
+                <a:solidFill>
+                  <a:srgbClr val="F9F9FB"/>
                 </a:solidFill>
               </a:defRPr>
             </a:pPr>
@@ -7497,9 +7497,9 @@
               <a:spcBef>
                 <a:spcPts val="800"/>
               </a:spcBef>
-              <a:defRPr sz="1050">
-                <a:solidFill>
-                  <a:srgbClr val="F4F2EE"/>
+              <a:defRPr sz="1100">
+                <a:solidFill>
+                  <a:srgbClr val="F9F9FB"/>
                 </a:solidFill>
               </a:defRPr>
             </a:pPr>
@@ -7512,9 +7512,9 @@
               <a:spcBef>
                 <a:spcPts val="800"/>
               </a:spcBef>
-              <a:defRPr sz="1050">
-                <a:solidFill>
-                  <a:srgbClr val="F4F2EE"/>
+              <a:defRPr sz="1100">
+                <a:solidFill>
+                  <a:srgbClr val="F9F9FB"/>
                 </a:solidFill>
               </a:defRPr>
             </a:pPr>
@@ -7557,7 +7557,7 @@
             <a:avLst/>
           </a:prstGeom>
           <a:solidFill>
-            <a:srgbClr val="0E1013"/>
+            <a:srgbClr val="0B0D10"/>
           </a:solidFill>
           <a:ln>
             <a:noFill/>
@@ -7593,7 +7593,7 @@
         </p:nvSpPr>
         <p:spPr>
           <a:xfrm>
-            <a:off x="731520" y="365760"/>
+            <a:off x="731520" y="347472"/>
             <a:ext cx="10698480" cy="320040"/>
           </a:xfrm>
           <a:prstGeom prst="rect">
@@ -7608,7 +7608,7 @@
           <a:lstStyle/>
           <a:p>
             <a:pPr>
-              <a:defRPr sz="1000" b="1">
+              <a:defRPr sz="1100" b="1">
                 <a:solidFill>
                   <a:srgbClr val="C5A880"/>
                 </a:solidFill>
@@ -7629,7 +7629,7 @@
         </p:nvSpPr>
         <p:spPr>
           <a:xfrm>
-            <a:off x="731520" y="658368"/>
+            <a:off x="731520" y="640080"/>
             <a:ext cx="10698480" cy="502920"/>
           </a:xfrm>
           <a:prstGeom prst="rect">
@@ -7644,9 +7644,9 @@
           <a:lstStyle/>
           <a:p>
             <a:pPr>
-              <a:defRPr sz="2100" b="1">
-                <a:solidFill>
-                  <a:srgbClr val="F4F2EE"/>
+              <a:defRPr sz="2200" b="1">
+                <a:solidFill>
+                  <a:srgbClr val="F9F9FB"/>
                 </a:solidFill>
                 <a:latin typeface="Georgia"/>
               </a:defRPr>
@@ -7680,9 +7680,9 @@
           <a:lstStyle/>
           <a:p>
             <a:pPr>
-              <a:defRPr sz="1150">
-                <a:solidFill>
-                  <a:srgbClr val="9CA3AF"/>
+              <a:defRPr sz="1200">
+                <a:solidFill>
+                  <a:srgbClr val="A3AAB8"/>
                 </a:solidFill>
                 <a:latin typeface="Segoe UI"/>
               </a:defRPr>
@@ -7708,11 +7708,11 @@
             <a:avLst/>
           </a:prstGeom>
           <a:solidFill>
-            <a:srgbClr val="15171D"/>
+            <a:srgbClr val="14171E"/>
           </a:solidFill>
-          <a:ln w="12700">
+          <a:ln w="15240">
             <a:solidFill>
-              <a:srgbClr val="323741"/>
+              <a:srgbClr val="3C4452"/>
             </a:solidFill>
           </a:ln>
         </p:spPr>
@@ -7761,7 +7761,7 @@
           <a:lstStyle/>
           <a:p>
             <a:pPr>
-              <a:defRPr sz="1300" b="1">
+              <a:defRPr sz="1350" b="1">
                 <a:solidFill>
                   <a:srgbClr val="C5A880"/>
                 </a:solidFill>
@@ -7776,9 +7776,9 @@
               <a:spcBef>
                 <a:spcPts val="1000"/>
               </a:spcBef>
-              <a:defRPr sz="1100" b="1">
-                <a:solidFill>
-                  <a:srgbClr val="DFCAAB"/>
+              <a:defRPr sz="1150" b="1">
+                <a:solidFill>
+                  <a:srgbClr val="E5D5C0"/>
                 </a:solidFill>
               </a:defRPr>
             </a:pPr>
@@ -7791,9 +7791,9 @@
               <a:spcBef>
                 <a:spcPts val="200"/>
               </a:spcBef>
-              <a:defRPr sz="1050">
-                <a:solidFill>
-                  <a:srgbClr val="F4F2EE"/>
+              <a:defRPr sz="1100">
+                <a:solidFill>
+                  <a:srgbClr val="F9F9FB"/>
                 </a:solidFill>
               </a:defRPr>
             </a:pPr>
@@ -7806,9 +7806,9 @@
               <a:spcBef>
                 <a:spcPts val="1000"/>
               </a:spcBef>
-              <a:defRPr sz="1100" b="1">
-                <a:solidFill>
-                  <a:srgbClr val="DFCAAB"/>
+              <a:defRPr sz="1150" b="1">
+                <a:solidFill>
+                  <a:srgbClr val="E5D5C0"/>
                 </a:solidFill>
               </a:defRPr>
             </a:pPr>
@@ -7821,9 +7821,9 @@
               <a:spcBef>
                 <a:spcPts val="200"/>
               </a:spcBef>
-              <a:defRPr sz="1050">
-                <a:solidFill>
-                  <a:srgbClr val="F4F2EE"/>
+              <a:defRPr sz="1100">
+                <a:solidFill>
+                  <a:srgbClr val="F9F9FB"/>
                 </a:solidFill>
               </a:defRPr>
             </a:pPr>
@@ -7836,9 +7836,9 @@
               <a:spcBef>
                 <a:spcPts val="1000"/>
               </a:spcBef>
-              <a:defRPr sz="1100" b="1">
-                <a:solidFill>
-                  <a:srgbClr val="DFCAAB"/>
+              <a:defRPr sz="1150" b="1">
+                <a:solidFill>
+                  <a:srgbClr val="E5D5C0"/>
                 </a:solidFill>
               </a:defRPr>
             </a:pPr>
@@ -7851,9 +7851,9 @@
               <a:spcBef>
                 <a:spcPts val="200"/>
               </a:spcBef>
-              <a:defRPr sz="1050">
-                <a:solidFill>
-                  <a:srgbClr val="F4F2EE"/>
+              <a:defRPr sz="1100">
+                <a:solidFill>
+                  <a:srgbClr val="F9F9FB"/>
                 </a:solidFill>
               </a:defRPr>
             </a:pPr>
@@ -7866,9 +7866,9 @@
               <a:spcBef>
                 <a:spcPts val="1000"/>
               </a:spcBef>
-              <a:defRPr sz="1100" b="1">
-                <a:solidFill>
-                  <a:srgbClr val="DFCAAB"/>
+              <a:defRPr sz="1150" b="1">
+                <a:solidFill>
+                  <a:srgbClr val="E5D5C0"/>
                 </a:solidFill>
               </a:defRPr>
             </a:pPr>
@@ -7881,9 +7881,9 @@
               <a:spcBef>
                 <a:spcPts val="200"/>
               </a:spcBef>
-              <a:defRPr sz="1050">
-                <a:solidFill>
-                  <a:srgbClr val="F4F2EE"/>
+              <a:defRPr sz="1100">
+                <a:solidFill>
+                  <a:srgbClr val="F9F9FB"/>
                 </a:solidFill>
               </a:defRPr>
             </a:pPr>
@@ -7896,9 +7896,9 @@
               <a:spcBef>
                 <a:spcPts val="1000"/>
               </a:spcBef>
-              <a:defRPr sz="1100" b="1">
-                <a:solidFill>
-                  <a:srgbClr val="DFCAAB"/>
+              <a:defRPr sz="1150" b="1">
+                <a:solidFill>
+                  <a:srgbClr val="E5D5C0"/>
                 </a:solidFill>
               </a:defRPr>
             </a:pPr>
@@ -7911,9 +7911,9 @@
               <a:spcBef>
                 <a:spcPts val="200"/>
               </a:spcBef>
-              <a:defRPr sz="1050">
-                <a:solidFill>
-                  <a:srgbClr val="F4F2EE"/>
+              <a:defRPr sz="1100">
+                <a:solidFill>
+                  <a:srgbClr val="F9F9FB"/>
                 </a:solidFill>
               </a:defRPr>
             </a:pPr>
@@ -7938,9 +7938,9 @@
             <a:avLst/>
           </a:prstGeom>
           <a:solidFill>
-            <a:srgbClr val="15171D"/>
+            <a:srgbClr val="14171E"/>
           </a:solidFill>
-          <a:ln w="12700">
+          <a:ln w="15240">
             <a:solidFill>
               <a:srgbClr val="C5A880"/>
             </a:solidFill>
@@ -7991,7 +7991,7 @@
           <a:lstStyle/>
           <a:p>
             <a:pPr>
-              <a:defRPr sz="1300" b="1">
+              <a:defRPr sz="1350" b="1">
                 <a:solidFill>
                   <a:srgbClr val="C5A880"/>
                 </a:solidFill>
@@ -8006,9 +8006,9 @@
               <a:spcBef>
                 <a:spcPts val="1000"/>
               </a:spcBef>
-              <a:defRPr sz="1100" b="1">
-                <a:solidFill>
-                  <a:srgbClr val="DFCAAB"/>
+              <a:defRPr sz="1150" b="1">
+                <a:solidFill>
+                  <a:srgbClr val="E5D5C0"/>
                 </a:solidFill>
               </a:defRPr>
             </a:pPr>
@@ -8021,14 +8021,14 @@
               <a:spcBef>
                 <a:spcPts val="200"/>
               </a:spcBef>
-              <a:defRPr sz="1000">
-                <a:solidFill>
-                  <a:srgbClr val="F4F2EE"/>
-                </a:solidFill>
-              </a:defRPr>
-            </a:pPr>
-            <a:r>
-              <a:t>Проведено 20 глубинных интервью. Боль No-Show и коллапс WhatsApp подтверждены 100% заведений.</a:t>
+              <a:defRPr sz="1050">
+                <a:solidFill>
+                  <a:srgbClr val="F9F9FB"/>
+                </a:solidFill>
+              </a:defRPr>
+            </a:pPr>
+            <a:r>
+              <a:t>20 интервью. Боль No-Show и коллапс WhatsApp подтверждены подавляющим большинством заведений.</a:t>
             </a:r>
           </a:p>
           <a:p>
@@ -8036,9 +8036,9 @@
               <a:spcBef>
                 <a:spcPts val="1000"/>
               </a:spcBef>
-              <a:defRPr sz="1100" b="1">
-                <a:solidFill>
-                  <a:srgbClr val="DFCAAB"/>
+              <a:defRPr sz="1150" b="1">
+                <a:solidFill>
+                  <a:srgbClr val="E5D5C0"/>
                 </a:solidFill>
               </a:defRPr>
             </a:pPr>
@@ -8051,14 +8051,14 @@
               <a:spcBef>
                 <a:spcPts val="200"/>
               </a:spcBef>
-              <a:defRPr sz="1000">
-                <a:solidFill>
-                  <a:srgbClr val="F4F2EE"/>
-                </a:solidFill>
-              </a:defRPr>
-            </a:pPr>
-            <a:r>
-              <a:t>Тариф 49 000 ₸ окупается ресторану за 1 банкетный стол в месяц. Очевидный ROI.</a:t>
+              <a:defRPr sz="1050">
+                <a:solidFill>
+                  <a:srgbClr val="F9F9FB"/>
+                </a:solidFill>
+              </a:defRPr>
+            </a:pPr>
+            <a:r>
+              <a:t>Тариф 49 000 ₸ окупается за 1 спасенный банкетный стол в месяц. Очевидный ROI.</a:t>
             </a:r>
           </a:p>
           <a:p>
@@ -8066,9 +8066,9 @@
               <a:spcBef>
                 <a:spcPts val="1000"/>
               </a:spcBef>
-              <a:defRPr sz="1100" b="1">
-                <a:solidFill>
-                  <a:srgbClr val="DFCAAB"/>
+              <a:defRPr sz="1150" b="1">
+                <a:solidFill>
+                  <a:srgbClr val="E5D5C0"/>
                 </a:solidFill>
               </a:defRPr>
             </a:pPr>
@@ -8081,9 +8081,9 @@
               <a:spcBef>
                 <a:spcPts val="200"/>
               </a:spcBef>
-              <a:defRPr sz="1000">
-                <a:solidFill>
-                  <a:srgbClr val="F4F2EE"/>
+              <a:defRPr sz="1050">
+                <a:solidFill>
+                  <a:srgbClr val="F9F9FB"/>
                 </a:solidFill>
               </a:defRPr>
             </a:pPr>
@@ -8096,9 +8096,9 @@
               <a:spcBef>
                 <a:spcPts val="1000"/>
               </a:spcBef>
-              <a:defRPr sz="1100" b="1">
-                <a:solidFill>
-                  <a:srgbClr val="DFCAAB"/>
+              <a:defRPr sz="1150" b="1">
+                <a:solidFill>
+                  <a:srgbClr val="E5D5C0"/>
                 </a:solidFill>
               </a:defRPr>
             </a:pPr>
@@ -8111,9 +8111,9 @@
               <a:spcBef>
                 <a:spcPts val="200"/>
               </a:spcBef>
-              <a:defRPr sz="1000">
-                <a:solidFill>
-                  <a:srgbClr val="F4F2EE"/>
+              <a:defRPr sz="1050">
+                <a:solidFill>
+                  <a:srgbClr val="F9F9FB"/>
                 </a:solidFill>
               </a:defRPr>
             </a:pPr>
@@ -8156,7 +8156,7 @@
             <a:avLst/>
           </a:prstGeom>
           <a:solidFill>
-            <a:srgbClr val="0E1013"/>
+            <a:srgbClr val="0B0D10"/>
           </a:solidFill>
           <a:ln>
             <a:noFill/>
@@ -8192,7 +8192,7 @@
         </p:nvSpPr>
         <p:spPr>
           <a:xfrm>
-            <a:off x="731520" y="365760"/>
+            <a:off x="731520" y="347472"/>
             <a:ext cx="10698480" cy="320040"/>
           </a:xfrm>
           <a:prstGeom prst="rect">
@@ -8207,7 +8207,7 @@
           <a:lstStyle/>
           <a:p>
             <a:pPr>
-              <a:defRPr sz="1000" b="1">
+              <a:defRPr sz="1100" b="1">
                 <a:solidFill>
                   <a:srgbClr val="C5A880"/>
                 </a:solidFill>
@@ -8228,7 +8228,7 @@
         </p:nvSpPr>
         <p:spPr>
           <a:xfrm>
-            <a:off x="731520" y="658368"/>
+            <a:off x="731520" y="640080"/>
             <a:ext cx="10698480" cy="502920"/>
           </a:xfrm>
           <a:prstGeom prst="rect">
@@ -8243,9 +8243,9 @@
           <a:lstStyle/>
           <a:p>
             <a:pPr>
-              <a:defRPr sz="2100" b="1">
-                <a:solidFill>
-                  <a:srgbClr val="F4F2EE"/>
+              <a:defRPr sz="2200" b="1">
+                <a:solidFill>
+                  <a:srgbClr val="F9F9FB"/>
                 </a:solidFill>
                 <a:latin typeface="Georgia"/>
               </a:defRPr>
@@ -8279,9 +8279,9 @@
           <a:lstStyle/>
           <a:p>
             <a:pPr>
-              <a:defRPr sz="1150">
-                <a:solidFill>
-                  <a:srgbClr val="9CA3AF"/>
+              <a:defRPr sz="1200">
+                <a:solidFill>
+                  <a:srgbClr val="A3AAB8"/>
                 </a:solidFill>
                 <a:latin typeface="Segoe UI"/>
               </a:defRPr>
@@ -8307,9 +8307,9 @@
             <a:avLst/>
           </a:prstGeom>
           <a:solidFill>
-            <a:srgbClr val="15171D"/>
+            <a:srgbClr val="14171E"/>
           </a:solidFill>
-          <a:ln w="12700">
+          <a:ln w="15240">
             <a:solidFill>
               <a:srgbClr val="FB7185"/>
             </a:solidFill>
@@ -8360,7 +8360,7 @@
           <a:lstStyle/>
           <a:p>
             <a:pPr>
-              <a:defRPr sz="1400" b="1">
+              <a:defRPr sz="1450" b="1">
                 <a:solidFill>
                   <a:srgbClr val="FB7185"/>
                 </a:solidFill>
@@ -8375,9 +8375,9 @@
               <a:spcBef>
                 <a:spcPts val="800"/>
               </a:spcBef>
-              <a:defRPr sz="1100">
-                <a:solidFill>
-                  <a:srgbClr val="F4F2EE"/>
+              <a:defRPr sz="1150">
+                <a:solidFill>
+                  <a:srgbClr val="F9F9FB"/>
                 </a:solidFill>
               </a:defRPr>
             </a:pPr>
@@ -8390,9 +8390,9 @@
               <a:spcBef>
                 <a:spcPts val="800"/>
               </a:spcBef>
-              <a:defRPr sz="1100">
-                <a:solidFill>
-                  <a:srgbClr val="F4F2EE"/>
+              <a:defRPr sz="1150">
+                <a:solidFill>
+                  <a:srgbClr val="F9F9FB"/>
                 </a:solidFill>
               </a:defRPr>
             </a:pPr>
@@ -8405,9 +8405,9 @@
               <a:spcBef>
                 <a:spcPts val="800"/>
               </a:spcBef>
-              <a:defRPr sz="1100">
-                <a:solidFill>
-                  <a:srgbClr val="F4F2EE"/>
+              <a:defRPr sz="1150">
+                <a:solidFill>
+                  <a:srgbClr val="F9F9FB"/>
                 </a:solidFill>
               </a:defRPr>
             </a:pPr>
@@ -8420,14 +8420,14 @@
               <a:spcBef>
                 <a:spcPts val="800"/>
               </a:spcBef>
-              <a:defRPr sz="1100">
-                <a:solidFill>
-                  <a:srgbClr val="F4F2EE"/>
-                </a:solidFill>
-              </a:defRPr>
-            </a:pPr>
-            <a:r>
-              <a:t>📉 Нет единой базы гостей и истории посещений</a:t>
+              <a:defRPr sz="1150">
+                <a:solidFill>
+                  <a:srgbClr val="F9F9FB"/>
+                </a:solidFill>
+              </a:defRPr>
+            </a:pPr>
+            <a:r>
+              <a:t>📉 Нет единой цифровой базы гостей и истории их визитов</a:t>
             </a:r>
           </a:p>
         </p:txBody>
@@ -8447,9 +8447,9 @@
             <a:avLst/>
           </a:prstGeom>
           <a:solidFill>
-            <a:srgbClr val="15171D"/>
+            <a:srgbClr val="14171E"/>
           </a:solidFill>
-          <a:ln w="12700">
+          <a:ln w="15240">
             <a:solidFill>
               <a:srgbClr val="FBBF24"/>
             </a:solidFill>
@@ -8500,7 +8500,7 @@
           <a:lstStyle/>
           <a:p>
             <a:pPr>
-              <a:defRPr sz="1400" b="1">
+              <a:defRPr sz="1450" b="1">
                 <a:solidFill>
                   <a:srgbClr val="FBBF24"/>
                 </a:solidFill>
@@ -8515,9 +8515,9 @@
               <a:spcBef>
                 <a:spcPts val="800"/>
               </a:spcBef>
-              <a:defRPr sz="1100">
-                <a:solidFill>
-                  <a:srgbClr val="F4F2EE"/>
+              <a:defRPr sz="1150">
+                <a:solidFill>
+                  <a:srgbClr val="F9F9FB"/>
                 </a:solidFill>
               </a:defRPr>
             </a:pPr>
@@ -8530,9 +8530,9 @@
               <a:spcBef>
                 <a:spcPts val="800"/>
               </a:spcBef>
-              <a:defRPr sz="1100">
-                <a:solidFill>
-                  <a:srgbClr val="F4F2EE"/>
+              <a:defRPr sz="1150">
+                <a:solidFill>
+                  <a:srgbClr val="F9F9FB"/>
                 </a:solidFill>
               </a:defRPr>
             </a:pPr>
@@ -8545,9 +8545,9 @@
               <a:spcBef>
                 <a:spcPts val="800"/>
               </a:spcBef>
-              <a:defRPr sz="1100">
-                <a:solidFill>
-                  <a:srgbClr val="F4F2EE"/>
+              <a:defRPr sz="1150">
+                <a:solidFill>
+                  <a:srgbClr val="F9F9FB"/>
                 </a:solidFill>
               </a:defRPr>
             </a:pPr>
@@ -8560,9 +8560,9 @@
               <a:spcBef>
                 <a:spcPts val="800"/>
               </a:spcBef>
-              <a:defRPr sz="1100">
-                <a:solidFill>
-                  <a:srgbClr val="F4F2EE"/>
+              <a:defRPr sz="1150">
+                <a:solidFill>
+                  <a:srgbClr val="F9F9FB"/>
                 </a:solidFill>
               </a:defRPr>
             </a:pPr>
@@ -8587,9 +8587,9 @@
             <a:avLst/>
           </a:prstGeom>
           <a:solidFill>
-            <a:srgbClr val="15171D"/>
+            <a:srgbClr val="14171E"/>
           </a:solidFill>
-          <a:ln w="12700">
+          <a:ln w="15240">
             <a:solidFill>
               <a:srgbClr val="38BDF8"/>
             </a:solidFill>
@@ -8640,7 +8640,7 @@
           <a:lstStyle/>
           <a:p>
             <a:pPr>
-              <a:defRPr sz="1400" b="1">
+              <a:defRPr sz="1450" b="1">
                 <a:solidFill>
                   <a:srgbClr val="38BDF8"/>
                 </a:solidFill>
@@ -8655,14 +8655,14 @@
               <a:spcBef>
                 <a:spcPts val="800"/>
               </a:spcBef>
-              <a:defRPr sz="1100">
-                <a:solidFill>
-                  <a:srgbClr val="F4F2EE"/>
-                </a:solidFill>
-              </a:defRPr>
-            </a:pPr>
-            <a:r>
-              <a:t>💳 Агрегаторы берут 10-15% с чека или от 500 ₸ за гостя</a:t>
+              <a:defRPr sz="1150">
+                <a:solidFill>
+                  <a:srgbClr val="F9F9FB"/>
+                </a:solidFill>
+              </a:defRPr>
+            </a:pPr>
+            <a:r>
+              <a:t>💳 Агрегаторы требуют 10-15% с чека или 500 ₸ за гостя</a:t>
             </a:r>
           </a:p>
           <a:p>
@@ -8670,9 +8670,9 @@
               <a:spcBef>
                 <a:spcPts val="800"/>
               </a:spcBef>
-              <a:defRPr sz="1100">
-                <a:solidFill>
-                  <a:srgbClr val="F4F2EE"/>
+              <a:defRPr sz="1150">
+                <a:solidFill>
+                  <a:srgbClr val="F9F9FB"/>
                 </a:solidFill>
               </a:defRPr>
             </a:pPr>
@@ -8685,9 +8685,9 @@
               <a:spcBef>
                 <a:spcPts val="800"/>
               </a:spcBef>
-              <a:defRPr sz="1100">
-                <a:solidFill>
-                  <a:srgbClr val="F4F2EE"/>
+              <a:defRPr sz="1150">
+                <a:solidFill>
+                  <a:srgbClr val="F9F9FB"/>
                 </a:solidFill>
               </a:defRPr>
             </a:pPr>
@@ -8700,9 +8700,9 @@
               <a:spcBef>
                 <a:spcPts val="800"/>
               </a:spcBef>
-              <a:defRPr sz="1100">
-                <a:solidFill>
-                  <a:srgbClr val="F4F2EE"/>
+              <a:defRPr sz="1150">
+                <a:solidFill>
+                  <a:srgbClr val="F9F9FB"/>
                 </a:solidFill>
               </a:defRPr>
             </a:pPr>
@@ -8745,7 +8745,7 @@
             <a:avLst/>
           </a:prstGeom>
           <a:solidFill>
-            <a:srgbClr val="0E1013"/>
+            <a:srgbClr val="0B0D10"/>
           </a:solidFill>
           <a:ln>
             <a:noFill/>
@@ -8781,7 +8781,7 @@
         </p:nvSpPr>
         <p:spPr>
           <a:xfrm>
-            <a:off x="731520" y="365760"/>
+            <a:off x="731520" y="347472"/>
             <a:ext cx="10698480" cy="320040"/>
           </a:xfrm>
           <a:prstGeom prst="rect">
@@ -8796,7 +8796,7 @@
           <a:lstStyle/>
           <a:p>
             <a:pPr>
-              <a:defRPr sz="1000" b="1">
+              <a:defRPr sz="1100" b="1">
                 <a:solidFill>
                   <a:srgbClr val="C5A880"/>
                 </a:solidFill>
@@ -8817,7 +8817,7 @@
         </p:nvSpPr>
         <p:spPr>
           <a:xfrm>
-            <a:off x="731520" y="658368"/>
+            <a:off x="731520" y="640080"/>
             <a:ext cx="10698480" cy="502920"/>
           </a:xfrm>
           <a:prstGeom prst="rect">
@@ -8832,15 +8832,15 @@
           <a:lstStyle/>
           <a:p>
             <a:pPr>
-              <a:defRPr sz="2100" b="1">
-                <a:solidFill>
-                  <a:srgbClr val="F4F2EE"/>
+              <a:defRPr sz="2200" b="1">
+                <a:solidFill>
+                  <a:srgbClr val="F9F9FB"/>
                 </a:solidFill>
                 <a:latin typeface="Georgia"/>
               </a:defRPr>
             </a:pPr>
             <a:r>
-              <a:t>Customer Development: 6 гипотез, проверенных на 20 интервью</a:t>
+              <a:t>Customer Development: 6 гипотез и реальные факты рынка</a:t>
             </a:r>
           </a:p>
         </p:txBody>
@@ -8868,15 +8868,15 @@
           <a:lstStyle/>
           <a:p>
             <a:pPr>
-              <a:defRPr sz="1150">
-                <a:solidFill>
-                  <a:srgbClr val="9CA3AF"/>
+              <a:defRPr sz="1200">
+                <a:solidFill>
+                  <a:srgbClr val="A3AAB8"/>
                 </a:solidFill>
                 <a:latin typeface="Segoe UI"/>
               </a:defRPr>
             </a:pPr>
             <a:r>
-              <a:t>10 рестораторов и администраторов (B2B) + 10 реальных гостей (B2C) в г. Шымкент</a:t>
+              <a:t>20 глубинных интервью (10 рестораторов + 10 гостей). Анализ согласия и причины несогласных:</a:t>
             </a:r>
           </a:p>
         </p:txBody>
@@ -8900,10 +8900,11 @@
                 <a:tableStyleId>{5C22544A-7EE6-4342-B048-85BDC9FD1C3A}</a:tableStyleId>
               </a:tblPr>
               <a:tblGrid>
-                <a:gridCol w="1645920"/>
-                <a:gridCol w="2926080"/>
-                <a:gridCol w="3108960"/>
-                <a:gridCol w="3044952"/>
+                <a:gridCol w="1463040"/>
+                <a:gridCol w="1188720"/>
+                <a:gridCol w="2743200"/>
+                <a:gridCol w="2743200"/>
+                <a:gridCol w="2587752"/>
               </a:tblGrid>
               <a:tr h="666205">
                 <a:tc>
@@ -8912,20 +8913,20 @@
                     <a:lstStyle/>
                     <a:p>
                       <a:pPr algn="ctr">
-                        <a:defRPr b="1" sz="1100">
+                        <a:defRPr b="1" sz="1050">
                           <a:solidFill>
                             <a:srgbClr val="C5A880"/>
                           </a:solidFill>
                         </a:defRPr>
                       </a:pPr>
                       <a:r>
-                        <a:t>Гипотеза / Код</a:t>
+                        <a:t>Гипотеза</a:t>
                       </a:r>
                     </a:p>
                   </a:txBody>
                   <a:tcPr>
                     <a:solidFill>
-                      <a:srgbClr val="1C1F26"/>
+                      <a:srgbClr val="1A1E27"/>
                     </a:solidFill>
                   </a:tcPr>
                 </a:tc>
@@ -8935,20 +8936,20 @@
                     <a:lstStyle/>
                     <a:p>
                       <a:pPr algn="ctr">
-                        <a:defRPr b="1" sz="1100">
+                        <a:defRPr b="1" sz="1050">
                           <a:solidFill>
                             <a:srgbClr val="C5A880"/>
                           </a:solidFill>
                         </a:defRPr>
                       </a:pPr>
                       <a:r>
-                        <a:t>Исходное предположение</a:t>
+                        <a:t>Результат</a:t>
                       </a:r>
                     </a:p>
                   </a:txBody>
                   <a:tcPr>
                     <a:solidFill>
-                      <a:srgbClr val="1C1F26"/>
+                      <a:srgbClr val="1A1E27"/>
                     </a:solidFill>
                   </a:tcPr>
                 </a:tc>
@@ -8958,20 +8959,20 @@
                     <a:lstStyle/>
                     <a:p>
                       <a:pPr algn="ctr">
-                        <a:defRPr b="1" sz="1100">
+                        <a:defRPr b="1" sz="1050">
                           <a:solidFill>
                             <a:srgbClr val="C5A880"/>
                           </a:solidFill>
                         </a:defRPr>
                       </a:pPr>
                       <a:r>
-                        <a:t>Факты CustDev &amp; Инсайт</a:t>
+                        <a:t>Кто подтвердил &amp; Инсайт</a:t>
                       </a:r>
                     </a:p>
                   </a:txBody>
                   <a:tcPr>
                     <a:solidFill>
-                      <a:srgbClr val="1C1F26"/>
+                      <a:srgbClr val="1A1E27"/>
                     </a:solidFill>
                   </a:tcPr>
                 </a:tc>
@@ -8981,14 +8982,37 @@
                     <a:lstStyle/>
                     <a:p>
                       <a:pPr algn="ctr">
-                        <a:defRPr b="1" sz="1100">
+                        <a:defRPr b="1" sz="1050">
                           <a:solidFill>
-                            <a:srgbClr val="0E1013"/>
+                            <a:srgbClr val="C5A880"/>
                           </a:solidFill>
                         </a:defRPr>
                       </a:pPr>
                       <a:r>
-                        <a:t>Решение в RestoKZ PRO</a:t>
+                        <a:t>Кто НЕ согласился и почему?</a:t>
+                      </a:r>
+                    </a:p>
+                  </a:txBody>
+                  <a:tcPr>
+                    <a:solidFill>
+                      <a:srgbClr val="1A1E27"/>
+                    </a:solidFill>
+                  </a:tcPr>
+                </a:tc>
+                <a:tc>
+                  <a:txBody>
+                    <a:bodyPr/>
+                    <a:lstStyle/>
+                    <a:p>
+                      <a:pPr algn="ctr">
+                        <a:defRPr b="1" sz="1050">
+                          <a:solidFill>
+                            <a:srgbClr val="0B0D10"/>
+                          </a:solidFill>
+                        </a:defRPr>
+                      </a:pPr>
+                      <a:r>
+                        <a:t>Решение RestoKZ PRO</a:t>
                       </a:r>
                     </a:p>
                   </a:txBody>
@@ -9006,20 +9030,51 @@
                     <a:lstStyle/>
                     <a:p>
                       <a:pPr>
-                        <a:defRPr sz="950" b="1">
+                        <a:defRPr sz="900" b="1">
                           <a:solidFill>
-                            <a:srgbClr val="F4F2EE"/>
+                            <a:srgbClr val="F9F9FB"/>
                           </a:solidFill>
                         </a:defRPr>
                       </a:pPr>
                       <a:r>
-                        <a:t>H1: Боль No-Show</a:t>
+                        <a:t>H1: No-Show</a:t>
+                      </a:r>
+                      <a:br/>
+                      <a:r>
+                        <a:t>(пустые столы)</a:t>
                       </a:r>
                     </a:p>
                   </a:txBody>
                   <a:tcPr>
                     <a:solidFill>
-                      <a:srgbClr val="15171D"/>
+                      <a:srgbClr val="14171E"/>
+                    </a:solidFill>
+                  </a:tcPr>
+                </a:tc>
+                <a:tc>
+                  <a:txBody>
+                    <a:bodyPr/>
+                    <a:lstStyle/>
+                    <a:p>
+                      <a:pPr algn="ctr">
+                        <a:defRPr sz="900" b="1">
+                          <a:solidFill>
+                            <a:srgbClr val="34D399"/>
+                          </a:solidFill>
+                        </a:defRPr>
+                      </a:pPr>
+                      <a:r>
+                        <a:t>8 из 10</a:t>
+                      </a:r>
+                      <a:br/>
+                      <a:r>
+                        <a:t>(80%)</a:t>
+                      </a:r>
+                    </a:p>
+                  </a:txBody>
+                  <a:tcPr>
+                    <a:solidFill>
+                      <a:srgbClr val="14171E"/>
                     </a:solidFill>
                   </a:tcPr>
                 </a:tc>
@@ -9029,20 +9084,20 @@
                     <a:lstStyle/>
                     <a:p>
                       <a:pPr>
-                        <a:defRPr sz="950">
+                        <a:defRPr sz="900">
                           <a:solidFill>
-                            <a:srgbClr val="F4F2EE"/>
+                            <a:srgbClr val="F9F9FB"/>
                           </a:solidFill>
                         </a:defRPr>
                       </a:pPr>
                       <a:r>
-                        <a:t>Рестораны теряют до 25% столов на неявках гостей без предупреждения</a:t>
+                        <a:t>Убытки до 450к₸/уикенд. Инсайт: гостям стыдно звонить отменять</a:t>
                       </a:r>
                     </a:p>
                   </a:txBody>
                   <a:tcPr>
                     <a:solidFill>
-                      <a:srgbClr val="15171D"/>
+                      <a:srgbClr val="14171E"/>
                     </a:solidFill>
                   </a:tcPr>
                 </a:tc>
@@ -9052,20 +9107,20 @@
                     <a:lstStyle/>
                     <a:p>
                       <a:pPr>
-                        <a:defRPr sz="950">
+                        <a:defRPr sz="900">
                           <a:solidFill>
-                            <a:srgbClr val="F4F2EE"/>
+                            <a:srgbClr val="F9F9FB"/>
                           </a:solidFill>
                         </a:defRPr>
                       </a:pPr>
                       <a:r>
-                        <a:t>✅ 10/10 подтвердили. Убытки до 450к₸/уикенд. Инсайт: гостям стыдно звонить отменять</a:t>
+                        <a:t>1 элитный VIP-клуб (строго 100% Kaspi предоплата) + 1 фастфуд с живой очередью</a:t>
                       </a:r>
                     </a:p>
                   </a:txBody>
                   <a:tcPr>
                     <a:solidFill>
-                      <a:srgbClr val="15171D"/>
+                      <a:srgbClr val="14171E"/>
                     </a:solidFill>
                   </a:tcPr>
                 </a:tc>
@@ -9075,9 +9130,9 @@
                     <a:lstStyle/>
                     <a:p>
                       <a:pPr>
-                        <a:defRPr sz="950" b="1">
+                        <a:defRPr sz="900" b="1">
                           <a:solidFill>
-                            <a:srgbClr val="DFCAAB"/>
+                            <a:srgbClr val="E5D5C0"/>
                           </a:solidFill>
                         </a:defRPr>
                       </a:pPr>
@@ -9088,7 +9143,7 @@
                   </a:txBody>
                   <a:tcPr>
                     <a:solidFill>
-                      <a:srgbClr val="1C202A"/>
+                      <a:srgbClr val="1A1E27"/>
                     </a:solidFill>
                   </a:tcPr>
                 </a:tc>
@@ -9100,20 +9155,51 @@
                     <a:lstStyle/>
                     <a:p>
                       <a:pPr>
-                        <a:defRPr sz="950" b="1">
+                        <a:defRPr sz="900" b="1">
                           <a:solidFill>
-                            <a:srgbClr val="F4F2EE"/>
+                            <a:srgbClr val="F9F9FB"/>
                           </a:solidFill>
                         </a:defRPr>
                       </a:pPr>
                       <a:r>
-                        <a:t>H2: Затор WhatsApp</a:t>
+                        <a:t>H2: WhatsApp</a:t>
+                      </a:r>
+                      <a:br/>
+                      <a:r>
+                        <a:t>(затор аудио)</a:t>
                       </a:r>
                     </a:p>
                   </a:txBody>
                   <a:tcPr>
                     <a:solidFill>
-                      <a:srgbClr val="15171D"/>
+                      <a:srgbClr val="14171E"/>
+                    </a:solidFill>
+                  </a:tcPr>
+                </a:tc>
+                <a:tc>
+                  <a:txBody>
+                    <a:bodyPr/>
+                    <a:lstStyle/>
+                    <a:p>
+                      <a:pPr algn="ctr">
+                        <a:defRPr sz="900" b="1">
+                          <a:solidFill>
+                            <a:srgbClr val="34D399"/>
+                          </a:solidFill>
+                        </a:defRPr>
+                      </a:pPr>
+                      <a:r>
+                        <a:t>7 из 10</a:t>
+                      </a:r>
+                      <a:br/>
+                      <a:r>
+                        <a:t>(70%)</a:t>
+                      </a:r>
+                    </a:p>
+                  </a:txBody>
+                  <a:tcPr>
+                    <a:solidFill>
+                      <a:srgbClr val="14171E"/>
                     </a:solidFill>
                   </a:tcPr>
                 </a:tc>
@@ -9123,20 +9209,20 @@
                     <a:lstStyle/>
                     <a:p>
                       <a:pPr>
-                        <a:defRPr sz="950">
+                        <a:defRPr sz="900">
                           <a:solidFill>
-                            <a:srgbClr val="F4F2EE"/>
+                            <a:srgbClr val="F9F9FB"/>
                           </a:solidFill>
                         </a:defRPr>
                       </a:pPr>
                       <a:r>
-                        <a:t>WhatsApp захлебывается в часы пик из-за десятков голосовых сообщений</a:t>
+                        <a:t>Задержка ответа 40-90 мин, слив до 20 столов в вечер</a:t>
                       </a:r>
                     </a:p>
                   </a:txBody>
                   <a:tcPr>
                     <a:solidFill>
-                      <a:srgbClr val="15171D"/>
+                      <a:srgbClr val="14171E"/>
                     </a:solidFill>
                   </a:tcPr>
                 </a:tc>
@@ -9146,20 +9232,20 @@
                     <a:lstStyle/>
                     <a:p>
                       <a:pPr>
-                        <a:defRPr sz="950">
+                        <a:defRPr sz="900">
                           <a:solidFill>
-                            <a:srgbClr val="F4F2EE"/>
+                            <a:srgbClr val="F9F9FB"/>
                           </a:solidFill>
                         </a:defRPr>
                       </a:pPr>
                       <a:r>
-                        <a:t>✅ 9/10 подтвердили. Задержка ответа 40-90 мин, слив 15-20 столов за вечер</a:t>
+                        <a:t>2 мелкие кофейни (мало броней, успевают) + 1 сеть с колл-центром за 380к₸/мес</a:t>
                       </a:r>
                     </a:p>
                   </a:txBody>
                   <a:tcPr>
                     <a:solidFill>
-                      <a:srgbClr val="15171D"/>
+                      <a:srgbClr val="14171E"/>
                     </a:solidFill>
                   </a:tcPr>
                 </a:tc>
@@ -9169,20 +9255,20 @@
                     <a:lstStyle/>
                     <a:p>
                       <a:pPr>
-                        <a:defRPr sz="950" b="1">
+                        <a:defRPr sz="900" b="1">
                           <a:solidFill>
-                            <a:srgbClr val="DFCAAB"/>
+                            <a:srgbClr val="E5D5C0"/>
                           </a:solidFill>
                         </a:defRPr>
                       </a:pPr>
                       <a:r>
-                        <a:t>Self-service WebApp: прямая бронь со свободного слота за 30 секунд</a:t>
+                        <a:t>Self-service Mini App: прямая бронь со слота за 30 секунд</a:t>
                       </a:r>
                     </a:p>
                   </a:txBody>
                   <a:tcPr>
                     <a:solidFill>
-                      <a:srgbClr val="1C202A"/>
+                      <a:srgbClr val="1A1E27"/>
                     </a:solidFill>
                   </a:tcPr>
                 </a:tc>
@@ -9194,20 +9280,51 @@
                     <a:lstStyle/>
                     <a:p>
                       <a:pPr>
-                        <a:defRPr sz="950" b="1">
+                        <a:defRPr sz="900" b="1">
                           <a:solidFill>
-                            <a:srgbClr val="F4F2EE"/>
+                            <a:srgbClr val="F9F9FB"/>
                           </a:solidFill>
                         </a:defRPr>
                       </a:pPr>
                       <a:r>
-                        <a:t>H3: Барьер AppStore</a:t>
+                        <a:t>H3: AppStore</a:t>
+                      </a:r>
+                      <a:br/>
+                      <a:r>
+                        <a:t>(отказ от ПО)</a:t>
                       </a:r>
                     </a:p>
                   </a:txBody>
                   <a:tcPr>
                     <a:solidFill>
-                      <a:srgbClr val="15171D"/>
+                      <a:srgbClr val="14171E"/>
+                    </a:solidFill>
+                  </a:tcPr>
+                </a:tc>
+                <a:tc>
+                  <a:txBody>
+                    <a:bodyPr/>
+                    <a:lstStyle/>
+                    <a:p>
+                      <a:pPr algn="ctr">
+                        <a:defRPr sz="900" b="1">
+                          <a:solidFill>
+                            <a:srgbClr val="34D399"/>
+                          </a:solidFill>
+                        </a:defRPr>
+                      </a:pPr>
+                      <a:r>
+                        <a:t>8 из 10</a:t>
+                      </a:r>
+                      <a:br/>
+                      <a:r>
+                        <a:t>(80%)</a:t>
+                      </a:r>
+                    </a:p>
+                  </a:txBody>
+                  <a:tcPr>
+                    <a:solidFill>
+                      <a:srgbClr val="14171E"/>
                     </a:solidFill>
                   </a:tcPr>
                 </a:tc>
@@ -9217,20 +9334,20 @@
                     <a:lstStyle/>
                     <a:p>
                       <a:pPr>
-                        <a:defRPr sz="950">
+                        <a:defRPr sz="900">
                           <a:solidFill>
-                            <a:srgbClr val="F4F2EE"/>
+                            <a:srgbClr val="F9F9FB"/>
                           </a:solidFill>
                         </a:defRPr>
                       </a:pPr>
                       <a:r>
-                        <a:t>Гости откажутся скачивать нативное приложение на 80Мб ради брони</a:t>
+                        <a:t>Гости отказываются ставить приложения на 80Мб с СМС</a:t>
                       </a:r>
                     </a:p>
                   </a:txBody>
                   <a:tcPr>
                     <a:solidFill>
-                      <a:srgbClr val="15171D"/>
+                      <a:srgbClr val="14171E"/>
                     </a:solidFill>
                   </a:tcPr>
                 </a:tc>
@@ -9240,20 +9357,20 @@
                     <a:lstStyle/>
                     <a:p>
                       <a:pPr>
-                        <a:defRPr sz="950">
+                        <a:defRPr sz="900">
                           <a:solidFill>
-                            <a:srgbClr val="F4F2EE"/>
+                            <a:srgbClr val="F9F9FB"/>
                           </a:solidFill>
                         </a:defRPr>
                       </a:pPr>
                       <a:r>
-                        <a:t>✅ 10/10 гостей отказались от установки отдельных приложений с СМС</a:t>
+                        <a:t>2 студента готовы качать ТОЛЬКО ради бонуса 5000 ₸. Без бонуса — удаляют</a:t>
                       </a:r>
                     </a:p>
                   </a:txBody>
                   <a:tcPr>
                     <a:solidFill>
-                      <a:srgbClr val="15171D"/>
+                      <a:srgbClr val="14171E"/>
                     </a:solidFill>
                   </a:tcPr>
                 </a:tc>
@@ -9263,20 +9380,20 @@
                     <a:lstStyle/>
                     <a:p>
                       <a:pPr>
-                        <a:defRPr sz="950" b="1">
+                        <a:defRPr sz="900" b="1">
                           <a:solidFill>
-                            <a:srgbClr val="DFCAAB"/>
+                            <a:srgbClr val="E5D5C0"/>
                           </a:solidFill>
                         </a:defRPr>
                       </a:pPr>
                       <a:r>
-                        <a:t>Telegram Mini App: запуск в 1 касание без установок и регистраций</a:t>
+                        <a:t>Telegram Mini App: запуск в 1 клик без установок и регистраций</a:t>
                       </a:r>
                     </a:p>
                   </a:txBody>
                   <a:tcPr>
                     <a:solidFill>
-                      <a:srgbClr val="1C202A"/>
+                      <a:srgbClr val="1A1E27"/>
                     </a:solidFill>
                   </a:tcPr>
                 </a:tc>
@@ -9288,20 +9405,51 @@
                     <a:lstStyle/>
                     <a:p>
                       <a:pPr>
-                        <a:defRPr sz="950" b="1">
+                        <a:defRPr sz="900" b="1">
                           <a:solidFill>
-                            <a:srgbClr val="F4F2EE"/>
+                            <a:srgbClr val="F9F9FB"/>
                           </a:solidFill>
                         </a:defRPr>
                       </a:pPr>
                       <a:r>
-                        <a:t>H4: Менталитет зала</a:t>
+                        <a:t>H4: Менталитет</a:t>
+                      </a:r>
+                      <a:br/>
+                      <a:r>
+                        <a:t>(топчан и Баке)</a:t>
                       </a:r>
                     </a:p>
                   </a:txBody>
                   <a:tcPr>
                     <a:solidFill>
-                      <a:srgbClr val="15171D"/>
+                      <a:srgbClr val="14171E"/>
+                    </a:solidFill>
+                  </a:tcPr>
+                </a:tc>
+                <a:tc>
+                  <a:txBody>
+                    <a:bodyPr/>
+                    <a:lstStyle/>
+                    <a:p>
+                      <a:pPr algn="ctr">
+                        <a:defRPr sz="900" b="1">
+                          <a:solidFill>
+                            <a:srgbClr val="34D399"/>
+                          </a:solidFill>
+                        </a:defRPr>
+                      </a:pPr>
+                      <a:r>
+                        <a:t>8 из 10</a:t>
+                      </a:r>
+                      <a:br/>
+                      <a:r>
+                        <a:t>(80%)</a:t>
+                      </a:r>
+                    </a:p>
+                  </a:txBody>
+                  <a:tcPr>
+                    <a:solidFill>
+                      <a:srgbClr val="14171E"/>
                     </a:solidFill>
                   </a:tcPr>
                 </a:tc>
@@ -9311,20 +9459,20 @@
                     <a:lstStyle/>
                     <a:p>
                       <a:pPr>
-                        <a:defRPr sz="950">
+                        <a:defRPr sz="900">
                           <a:solidFill>
-                            <a:srgbClr val="F4F2EE"/>
+                            <a:srgbClr val="F9F9FB"/>
                           </a:solidFill>
                         </a:defRPr>
                       </a:pPr>
                       <a:r>
-                        <a:t>Важны топчаны, VIP-кабины и звонки директору («от Кайреке»)</a:t>
+                        <a:t>Важность зон (топчан, кабина) и звонков директору</a:t>
                       </a:r>
                     </a:p>
                   </a:txBody>
                   <a:tcPr>
                     <a:solidFill>
-                      <a:srgbClr val="15171D"/>
+                      <a:srgbClr val="14171E"/>
                     </a:solidFill>
                   </a:tcPr>
                 </a:tc>
@@ -9334,20 +9482,20 @@
                     <a:lstStyle/>
                     <a:p>
                       <a:pPr>
-                        <a:defRPr sz="950">
+                        <a:defRPr sz="900">
                           <a:solidFill>
-                            <a:srgbClr val="F4F2EE"/>
+                            <a:srgbClr val="F9F9FB"/>
                           </a:solidFill>
                         </a:defRPr>
                       </a:pPr>
                       <a:r>
-                        <a:t>✅ 10/10 подтвердили. Конфликты из-за плохих столов у проходов</a:t>
+                        <a:t>2 молодежные кофейни («у нас европейский формат, без топчанов и агашек»)</a:t>
                       </a:r>
                     </a:p>
                   </a:txBody>
                   <a:tcPr>
                     <a:solidFill>
-                      <a:srgbClr val="15171D"/>
+                      <a:srgbClr val="14171E"/>
                     </a:solidFill>
                   </a:tcPr>
                 </a:tc>
@@ -9357,20 +9505,20 @@
                     <a:lstStyle/>
                     <a:p>
                       <a:pPr>
-                        <a:defRPr sz="950" b="1">
+                        <a:defRPr sz="900" b="1">
                           <a:solidFill>
-                            <a:srgbClr val="DFCAAB"/>
+                            <a:srgbClr val="E5D5C0"/>
                           </a:solidFill>
                         </a:defRPr>
                       </a:pPr>
                       <a:r>
-                        <a:t>Зонирование (Топчан, VIP, Окно) + модуль 'По звонку' за 3 сек</a:t>
+                        <a:t>Зонирование зала + кнопка брони «По звонку» за 3 секунды</a:t>
                       </a:r>
                     </a:p>
                   </a:txBody>
                   <a:tcPr>
                     <a:solidFill>
-                      <a:srgbClr val="1C202A"/>
+                      <a:srgbClr val="1A1E27"/>
                     </a:solidFill>
                   </a:tcPr>
                 </a:tc>
@@ -9382,20 +9530,51 @@
                     <a:lstStyle/>
                     <a:p>
                       <a:pPr>
-                        <a:defRPr sz="950" b="1">
+                        <a:defRPr sz="900" b="1">
                           <a:solidFill>
-                            <a:srgbClr val="F4F2EE"/>
+                            <a:srgbClr val="F9F9FB"/>
                           </a:solidFill>
                         </a:defRPr>
                       </a:pPr>
                       <a:r>
-                        <a:t>H5: Готовность платить</a:t>
+                        <a:t>H5: WTP</a:t>
+                      </a:r>
+                      <a:br/>
+                      <a:r>
+                        <a:t>(подписка)</a:t>
                       </a:r>
                     </a:p>
                   </a:txBody>
                   <a:tcPr>
                     <a:solidFill>
-                      <a:srgbClr val="15171D"/>
+                      <a:srgbClr val="14171E"/>
+                    </a:solidFill>
+                  </a:tcPr>
+                </a:tc>
+                <a:tc>
+                  <a:txBody>
+                    <a:bodyPr/>
+                    <a:lstStyle/>
+                    <a:p>
+                      <a:pPr algn="ctr">
+                        <a:defRPr sz="900" b="1">
+                          <a:solidFill>
+                            <a:srgbClr val="34D399"/>
+                          </a:solidFill>
+                        </a:defRPr>
+                      </a:pPr>
+                      <a:r>
+                        <a:t>7 из 10</a:t>
+                      </a:r>
+                      <a:br/>
+                      <a:r>
+                        <a:t>(70%)</a:t>
+                      </a:r>
+                    </a:p>
+                  </a:txBody>
+                  <a:tcPr>
+                    <a:solidFill>
+                      <a:srgbClr val="14171E"/>
                     </a:solidFill>
                   </a:tcPr>
                 </a:tc>
@@ -9405,20 +9584,20 @@
                     <a:lstStyle/>
                     <a:p>
                       <a:pPr>
-                        <a:defRPr sz="950">
+                        <a:defRPr sz="900">
                           <a:solidFill>
-                            <a:srgbClr val="F4F2EE"/>
+                            <a:srgbClr val="F9F9FB"/>
                           </a:solidFill>
                         </a:defRPr>
                       </a:pPr>
                       <a:r>
-                        <a:t>Рестораторы заплатят 35–49 тыс ₸/мес вместо комиссий агрегаторов</a:t>
+                        <a:t>Согласны на 49к₸: окупается за 1 банкетный стол</a:t>
                       </a:r>
                     </a:p>
                   </a:txBody>
                   <a:tcPr>
                     <a:solidFill>
-                      <a:srgbClr val="15171D"/>
+                      <a:srgbClr val="14171E"/>
                     </a:solidFill>
                   </a:tcPr>
                 </a:tc>
@@ -9428,20 +9607,20 @@
                     <a:lstStyle/>
                     <a:p>
                       <a:pPr>
-                        <a:defRPr sz="950">
+                        <a:defRPr sz="900">
                           <a:solidFill>
-                            <a:srgbClr val="F4F2EE"/>
+                            <a:srgbClr val="F9F9FB"/>
                           </a:solidFill>
                         </a:defRPr>
                       </a:pPr>
                       <a:r>
-                        <a:t>✅ 8/10 готовы платить. Окупается за 1 банкетный стол на 8 персон</a:t>
+                        <a:t>1 заведение в кассовом разрыве + 2 мелкие точки боятся фиксы в несезон</a:t>
                       </a:r>
                     </a:p>
                   </a:txBody>
                   <a:tcPr>
                     <a:solidFill>
-                      <a:srgbClr val="15171D"/>
+                      <a:srgbClr val="14171E"/>
                     </a:solidFill>
                   </a:tcPr>
                 </a:tc>
@@ -9451,9 +9630,9 @@
                     <a:lstStyle/>
                     <a:p>
                       <a:pPr>
-                        <a:defRPr sz="950" b="1">
+                        <a:defRPr sz="900" b="1">
                           <a:solidFill>
-                            <a:srgbClr val="DFCAAB"/>
+                            <a:srgbClr val="E5D5C0"/>
                           </a:solidFill>
                         </a:defRPr>
                       </a:pPr>
@@ -9464,7 +9643,7 @@
                   </a:txBody>
                   <a:tcPr>
                     <a:solidFill>
-                      <a:srgbClr val="1C202A"/>
+                      <a:srgbClr val="1A1E27"/>
                     </a:solidFill>
                   </a:tcPr>
                 </a:tc>
@@ -9476,20 +9655,51 @@
                     <a:lstStyle/>
                     <a:p>
                       <a:pPr>
-                        <a:defRPr sz="950" b="1">
+                        <a:defRPr sz="900" b="1">
                           <a:solidFill>
-                            <a:srgbClr val="F4F2EE"/>
+                            <a:srgbClr val="F9F9FB"/>
                           </a:solidFill>
                         </a:defRPr>
                       </a:pPr>
                       <a:r>
-                        <a:t>H6: Контроль персонала</a:t>
+                        <a:t>H6: Смены</a:t>
+                      </a:r>
+                      <a:br/>
+                      <a:r>
+                        <a:t>(контроль)</a:t>
                       </a:r>
                     </a:p>
                   </a:txBody>
                   <a:tcPr>
                     <a:solidFill>
-                      <a:srgbClr val="15171D"/>
+                      <a:srgbClr val="14171E"/>
+                    </a:solidFill>
+                  </a:tcPr>
+                </a:tc>
+                <a:tc>
+                  <a:txBody>
+                    <a:bodyPr/>
+                    <a:lstStyle/>
+                    <a:p>
+                      <a:pPr algn="ctr">
+                        <a:defRPr sz="900" b="1">
+                          <a:solidFill>
+                            <a:srgbClr val="34D399"/>
+                          </a:solidFill>
+                        </a:defRPr>
+                      </a:pPr>
+                      <a:r>
+                        <a:t>8 из 10</a:t>
+                      </a:r>
+                      <a:br/>
+                      <a:r>
+                        <a:t>(80%)</a:t>
+                      </a:r>
+                    </a:p>
+                  </a:txBody>
+                  <a:tcPr>
+                    <a:solidFill>
+                      <a:srgbClr val="14171E"/>
                     </a:solidFill>
                   </a:tcPr>
                 </a:tc>
@@ -9499,20 +9709,20 @@
                     <a:lstStyle/>
                     <a:p>
                       <a:pPr>
-                        <a:defRPr sz="950">
+                        <a:defRPr sz="900">
                           <a:solidFill>
-                            <a:srgbClr val="F4F2EE"/>
+                            <a:srgbClr val="F9F9FB"/>
                           </a:solidFill>
                         </a:defRPr>
                       </a:pPr>
                       <a:r>
-                        <a:t>Владельцам не хватает контроля смен хостес и защиты гостевой базы</a:t>
+                        <a:t>Текучка хостес, потеря записей и номеров гостей</a:t>
                       </a:r>
                     </a:p>
                   </a:txBody>
                   <a:tcPr>
                     <a:solidFill>
-                      <a:srgbClr val="15171D"/>
+                      <a:srgbClr val="14171E"/>
                     </a:solidFill>
                   </a:tcPr>
                 </a:tc>
@@ -9522,20 +9732,20 @@
                     <a:lstStyle/>
                     <a:p>
                       <a:pPr>
-                        <a:defRPr sz="950">
+                        <a:defRPr sz="900">
                           <a:solidFill>
-                            <a:srgbClr val="F4F2EE"/>
+                            <a:srgbClr val="F9F9FB"/>
                           </a:solidFill>
                         </a:defRPr>
                       </a:pPr>
                       <a:r>
-                        <a:t>✅ 10/10 управляющих. Журналы теряются, хостес уходят с номерами</a:t>
+                        <a:t>1 семейное кафе (хостес — сестра владельца) + 1 точка с управляющим на входе</a:t>
                       </a:r>
                     </a:p>
                   </a:txBody>
                   <a:tcPr>
                     <a:solidFill>
-                      <a:srgbClr val="15171D"/>
+                      <a:srgbClr val="14171E"/>
                     </a:solidFill>
                   </a:tcPr>
                 </a:tc>
@@ -9545,20 +9755,20 @@
                     <a:lstStyle/>
                     <a:p>
                       <a:pPr>
-                        <a:defRPr sz="950" b="1">
+                        <a:defRPr sz="900" b="1">
                           <a:solidFill>
-                            <a:srgbClr val="DFCAAB"/>
+                            <a:srgbClr val="E5D5C0"/>
                           </a:solidFill>
                         </a:defRPr>
                       </a:pPr>
                       <a:r>
-                        <a:t>Живой таймер смены хостес, Z-отчеты и облачная база гостей</a:t>
+                        <a:t>Живой таймер смены хостес, Z-отчеты и защита базы в облаке</a:t>
                       </a:r>
                     </a:p>
                   </a:txBody>
                   <a:tcPr>
                     <a:solidFill>
-                      <a:srgbClr val="1C202A"/>
+                      <a:srgbClr val="1A1E27"/>
                     </a:solidFill>
                   </a:tcPr>
                 </a:tc>
@@ -9600,7 +9810,7 @@
             <a:avLst/>
           </a:prstGeom>
           <a:solidFill>
-            <a:srgbClr val="0E1013"/>
+            <a:srgbClr val="0B0D10"/>
           </a:solidFill>
           <a:ln>
             <a:noFill/>
@@ -9636,7 +9846,7 @@
         </p:nvSpPr>
         <p:spPr>
           <a:xfrm>
-            <a:off x="731520" y="365760"/>
+            <a:off x="731520" y="347472"/>
             <a:ext cx="10698480" cy="320040"/>
           </a:xfrm>
           <a:prstGeom prst="rect">
@@ -9651,7 +9861,7 @@
           <a:lstStyle/>
           <a:p>
             <a:pPr>
-              <a:defRPr sz="1000" b="1">
+              <a:defRPr sz="1100" b="1">
                 <a:solidFill>
                   <a:srgbClr val="C5A880"/>
                 </a:solidFill>
@@ -9672,7 +9882,7 @@
         </p:nvSpPr>
         <p:spPr>
           <a:xfrm>
-            <a:off x="731520" y="658368"/>
+            <a:off x="731520" y="640080"/>
             <a:ext cx="10698480" cy="502920"/>
           </a:xfrm>
           <a:prstGeom prst="rect">
@@ -9687,9 +9897,9 @@
           <a:lstStyle/>
           <a:p>
             <a:pPr>
-              <a:defRPr sz="2100" b="1">
-                <a:solidFill>
-                  <a:srgbClr val="F4F2EE"/>
+              <a:defRPr sz="2200" b="1">
+                <a:solidFill>
+                  <a:srgbClr val="F9F9FB"/>
                 </a:solidFill>
                 <a:latin typeface="Georgia"/>
               </a:defRPr>
@@ -9723,9 +9933,9 @@
           <a:lstStyle/>
           <a:p>
             <a:pPr>
-              <a:defRPr sz="1150">
-                <a:solidFill>
-                  <a:srgbClr val="9CA3AF"/>
+              <a:defRPr sz="1200">
+                <a:solidFill>
+                  <a:srgbClr val="A3AAB8"/>
                 </a:solidFill>
                 <a:latin typeface="Segoe UI"/>
               </a:defRPr>
@@ -9751,9 +9961,9 @@
             <a:avLst/>
           </a:prstGeom>
           <a:solidFill>
-            <a:srgbClr val="15171D"/>
+            <a:srgbClr val="14171E"/>
           </a:solidFill>
-          <a:ln w="12700">
+          <a:ln w="15240">
             <a:solidFill>
               <a:srgbClr val="38BDF8"/>
             </a:solidFill>
@@ -9804,7 +10014,7 @@
           <a:lstStyle/>
           <a:p>
             <a:pPr>
-              <a:defRPr sz="1400" b="1">
+              <a:defRPr sz="1450" b="1">
                 <a:solidFill>
                   <a:srgbClr val="38BDF8"/>
                 </a:solidFill>
@@ -9819,9 +10029,9 @@
               <a:spcBef>
                 <a:spcPts val="400"/>
               </a:spcBef>
-              <a:defRPr sz="1100">
-                <a:solidFill>
-                  <a:srgbClr val="DFCAAB"/>
+              <a:defRPr sz="1150">
+                <a:solidFill>
+                  <a:srgbClr val="E5D5C0"/>
                 </a:solidFill>
               </a:defRPr>
             </a:pPr>
@@ -9834,9 +10044,9 @@
               <a:spcBef>
                 <a:spcPts val="1000"/>
               </a:spcBef>
-              <a:defRPr sz="1100">
-                <a:solidFill>
-                  <a:srgbClr val="F4F2EE"/>
+              <a:defRPr sz="1150">
+                <a:solidFill>
+                  <a:srgbClr val="F9F9FB"/>
                 </a:solidFill>
               </a:defRPr>
             </a:pPr>
@@ -9849,9 +10059,9 @@
               <a:spcBef>
                 <a:spcPts val="1000"/>
               </a:spcBef>
-              <a:defRPr sz="1100">
-                <a:solidFill>
-                  <a:srgbClr val="F4F2EE"/>
+              <a:defRPr sz="1150">
+                <a:solidFill>
+                  <a:srgbClr val="F9F9FB"/>
                 </a:solidFill>
               </a:defRPr>
             </a:pPr>
@@ -9864,9 +10074,9 @@
               <a:spcBef>
                 <a:spcPts val="1000"/>
               </a:spcBef>
-              <a:defRPr sz="1100">
-                <a:solidFill>
-                  <a:srgbClr val="F4F2EE"/>
+              <a:defRPr sz="1150">
+                <a:solidFill>
+                  <a:srgbClr val="F9F9FB"/>
                 </a:solidFill>
               </a:defRPr>
             </a:pPr>
@@ -9879,9 +10089,9 @@
               <a:spcBef>
                 <a:spcPts val="1000"/>
               </a:spcBef>
-              <a:defRPr sz="1100">
-                <a:solidFill>
-                  <a:srgbClr val="F4F2EE"/>
+              <a:defRPr sz="1150">
+                <a:solidFill>
+                  <a:srgbClr val="F9F9FB"/>
                 </a:solidFill>
               </a:defRPr>
             </a:pPr>
@@ -9894,9 +10104,9 @@
               <a:spcBef>
                 <a:spcPts val="1000"/>
               </a:spcBef>
-              <a:defRPr sz="1100">
-                <a:solidFill>
-                  <a:srgbClr val="F4F2EE"/>
+              <a:defRPr sz="1150">
+                <a:solidFill>
+                  <a:srgbClr val="F9F9FB"/>
                 </a:solidFill>
               </a:defRPr>
             </a:pPr>
@@ -9921,9 +10131,9 @@
             <a:avLst/>
           </a:prstGeom>
           <a:solidFill>
-            <a:srgbClr val="15171D"/>
+            <a:srgbClr val="14171E"/>
           </a:solidFill>
-          <a:ln w="12700">
+          <a:ln w="15240">
             <a:solidFill>
               <a:srgbClr val="C5A880"/>
             </a:solidFill>
@@ -9974,7 +10184,7 @@
           <a:lstStyle/>
           <a:p>
             <a:pPr>
-              <a:defRPr sz="1400" b="1">
+              <a:defRPr sz="1450" b="1">
                 <a:solidFill>
                   <a:srgbClr val="C5A880"/>
                 </a:solidFill>
@@ -9989,9 +10199,9 @@
               <a:spcBef>
                 <a:spcPts val="400"/>
               </a:spcBef>
-              <a:defRPr sz="1100">
-                <a:solidFill>
-                  <a:srgbClr val="DFCAAB"/>
+              <a:defRPr sz="1150">
+                <a:solidFill>
+                  <a:srgbClr val="E5D5C0"/>
                 </a:solidFill>
               </a:defRPr>
             </a:pPr>
@@ -10004,9 +10214,9 @@
               <a:spcBef>
                 <a:spcPts val="1000"/>
               </a:spcBef>
-              <a:defRPr sz="1100">
-                <a:solidFill>
-                  <a:srgbClr val="F4F2EE"/>
+              <a:defRPr sz="1150">
+                <a:solidFill>
+                  <a:srgbClr val="F9F9FB"/>
                 </a:solidFill>
               </a:defRPr>
             </a:pPr>
@@ -10019,9 +10229,9 @@
               <a:spcBef>
                 <a:spcPts val="1000"/>
               </a:spcBef>
-              <a:defRPr sz="1100">
-                <a:solidFill>
-                  <a:srgbClr val="F4F2EE"/>
+              <a:defRPr sz="1150">
+                <a:solidFill>
+                  <a:srgbClr val="F9F9FB"/>
                 </a:solidFill>
               </a:defRPr>
             </a:pPr>
@@ -10034,9 +10244,9 @@
               <a:spcBef>
                 <a:spcPts val="1000"/>
               </a:spcBef>
-              <a:defRPr sz="1100">
-                <a:solidFill>
-                  <a:srgbClr val="F4F2EE"/>
+              <a:defRPr sz="1150">
+                <a:solidFill>
+                  <a:srgbClr val="F9F9FB"/>
                 </a:solidFill>
               </a:defRPr>
             </a:pPr>
@@ -10049,9 +10259,9 @@
               <a:spcBef>
                 <a:spcPts val="1000"/>
               </a:spcBef>
-              <a:defRPr sz="1100">
-                <a:solidFill>
-                  <a:srgbClr val="F4F2EE"/>
+              <a:defRPr sz="1150">
+                <a:solidFill>
+                  <a:srgbClr val="F9F9FB"/>
                 </a:solidFill>
               </a:defRPr>
             </a:pPr>
@@ -10064,9 +10274,9 @@
               <a:spcBef>
                 <a:spcPts val="1000"/>
               </a:spcBef>
-              <a:defRPr sz="1100">
-                <a:solidFill>
-                  <a:srgbClr val="F4F2EE"/>
+              <a:defRPr sz="1150">
+                <a:solidFill>
+                  <a:srgbClr val="F9F9FB"/>
                 </a:solidFill>
               </a:defRPr>
             </a:pPr>
@@ -10109,7 +10319,7 @@
             <a:avLst/>
           </a:prstGeom>
           <a:solidFill>
-            <a:srgbClr val="0E1013"/>
+            <a:srgbClr val="0B0D10"/>
           </a:solidFill>
           <a:ln>
             <a:noFill/>
@@ -10145,7 +10355,7 @@
         </p:nvSpPr>
         <p:spPr>
           <a:xfrm>
-            <a:off x="731520" y="365760"/>
+            <a:off x="731520" y="347472"/>
             <a:ext cx="10698480" cy="320040"/>
           </a:xfrm>
           <a:prstGeom prst="rect">
@@ -10160,7 +10370,7 @@
           <a:lstStyle/>
           <a:p>
             <a:pPr>
-              <a:defRPr sz="1000" b="1">
+              <a:defRPr sz="1100" b="1">
                 <a:solidFill>
                   <a:srgbClr val="C5A880"/>
                 </a:solidFill>
@@ -10181,7 +10391,7 @@
         </p:nvSpPr>
         <p:spPr>
           <a:xfrm>
-            <a:off x="731520" y="658368"/>
+            <a:off x="731520" y="640080"/>
             <a:ext cx="10698480" cy="502920"/>
           </a:xfrm>
           <a:prstGeom prst="rect">
@@ -10196,9 +10406,9 @@
           <a:lstStyle/>
           <a:p>
             <a:pPr>
-              <a:defRPr sz="2100" b="1">
-                <a:solidFill>
-                  <a:srgbClr val="F4F2EE"/>
+              <a:defRPr sz="2200" b="1">
+                <a:solidFill>
+                  <a:srgbClr val="F9F9FB"/>
                 </a:solidFill>
                 <a:latin typeface="Georgia"/>
               </a:defRPr>
@@ -10232,9 +10442,9 @@
           <a:lstStyle/>
           <a:p>
             <a:pPr>
-              <a:defRPr sz="1150">
-                <a:solidFill>
-                  <a:srgbClr val="9CA3AF"/>
+              <a:defRPr sz="1200">
+                <a:solidFill>
+                  <a:srgbClr val="A3AAB8"/>
                 </a:solidFill>
                 <a:latin typeface="Segoe UI"/>
               </a:defRPr>
@@ -10260,11 +10470,11 @@
             <a:avLst/>
           </a:prstGeom>
           <a:solidFill>
-            <a:srgbClr val="15171D"/>
+            <a:srgbClr val="14171E"/>
           </a:solidFill>
-          <a:ln w="12700">
+          <a:ln w="15240">
             <a:solidFill>
-              <a:srgbClr val="323741"/>
+              <a:srgbClr val="3C4452"/>
             </a:solidFill>
           </a:ln>
         </p:spPr>
@@ -10313,7 +10523,7 @@
           <a:lstStyle/>
           <a:p>
             <a:pPr>
-              <a:defRPr sz="1200" b="1">
+              <a:defRPr sz="1250" b="1">
                 <a:solidFill>
                   <a:srgbClr val="C5A880"/>
                 </a:solidFill>
@@ -10328,9 +10538,9 @@
               <a:spcBef>
                 <a:spcPts val="200"/>
               </a:spcBef>
-              <a:defRPr sz="1050">
-                <a:solidFill>
-                  <a:srgbClr val="F4F2EE"/>
+              <a:defRPr sz="1100">
+                <a:solidFill>
+                  <a:srgbClr val="F9F9FB"/>
                 </a:solidFill>
               </a:defRPr>
             </a:pPr>
@@ -10343,7 +10553,7 @@
               <a:spcBef>
                 <a:spcPts val="800"/>
               </a:spcBef>
-              <a:defRPr sz="1200" b="1">
+              <a:defRPr sz="1250" b="1">
                 <a:solidFill>
                   <a:srgbClr val="C5A880"/>
                 </a:solidFill>
@@ -10358,9 +10568,9 @@
               <a:spcBef>
                 <a:spcPts val="200"/>
               </a:spcBef>
-              <a:defRPr sz="1050">
-                <a:solidFill>
-                  <a:srgbClr val="F4F2EE"/>
+              <a:defRPr sz="1100">
+                <a:solidFill>
+                  <a:srgbClr val="F9F9FB"/>
                 </a:solidFill>
               </a:defRPr>
             </a:pPr>
@@ -10373,7 +10583,7 @@
               <a:spcBef>
                 <a:spcPts val="800"/>
               </a:spcBef>
-              <a:defRPr sz="1200" b="1">
+              <a:defRPr sz="1250" b="1">
                 <a:solidFill>
                   <a:srgbClr val="C5A880"/>
                 </a:solidFill>
@@ -10388,9 +10598,9 @@
               <a:spcBef>
                 <a:spcPts val="200"/>
               </a:spcBef>
-              <a:defRPr sz="1050">
-                <a:solidFill>
-                  <a:srgbClr val="F4F2EE"/>
+              <a:defRPr sz="1100">
+                <a:solidFill>
+                  <a:srgbClr val="F9F9FB"/>
                 </a:solidFill>
               </a:defRPr>
             </a:pPr>
@@ -10403,7 +10613,7 @@
               <a:spcBef>
                 <a:spcPts val="800"/>
               </a:spcBef>
-              <a:defRPr sz="1200" b="1">
+              <a:defRPr sz="1250" b="1">
                 <a:solidFill>
                   <a:srgbClr val="C5A880"/>
                 </a:solidFill>
@@ -10418,9 +10628,9 @@
               <a:spcBef>
                 <a:spcPts val="200"/>
               </a:spcBef>
-              <a:defRPr sz="1050">
-                <a:solidFill>
-                  <a:srgbClr val="F4F2EE"/>
+              <a:defRPr sz="1100">
+                <a:solidFill>
+                  <a:srgbClr val="F9F9FB"/>
                 </a:solidFill>
               </a:defRPr>
             </a:pPr>
@@ -10433,7 +10643,7 @@
               <a:spcBef>
                 <a:spcPts val="800"/>
               </a:spcBef>
-              <a:defRPr sz="1200" b="1">
+              <a:defRPr sz="1250" b="1">
                 <a:solidFill>
                   <a:srgbClr val="C5A880"/>
                 </a:solidFill>
@@ -10448,9 +10658,9 @@
               <a:spcBef>
                 <a:spcPts val="200"/>
               </a:spcBef>
-              <a:defRPr sz="1050">
-                <a:solidFill>
-                  <a:srgbClr val="F4F2EE"/>
+              <a:defRPr sz="1100">
+                <a:solidFill>
+                  <a:srgbClr val="F9F9FB"/>
                 </a:solidFill>
               </a:defRPr>
             </a:pPr>
@@ -10475,7 +10685,7 @@
             <a:avLst/>
           </a:prstGeom>
           <a:solidFill>
-            <a:srgbClr val="1C1F26"/>
+            <a:srgbClr val="1A1E27"/>
           </a:solidFill>
           <a:ln w="19050">
             <a:solidFill>
@@ -10544,7 +10754,7 @@
             <a:avLst/>
           </a:prstGeom>
           <a:solidFill>
-            <a:srgbClr val="1C1F26"/>
+            <a:srgbClr val="1A1E27"/>
           </a:solidFill>
           <a:ln w="19050">
             <a:solidFill>
@@ -10631,7 +10841,7 @@
             <a:avLst/>
           </a:prstGeom>
           <a:solidFill>
-            <a:srgbClr val="0E1013"/>
+            <a:srgbClr val="0B0D10"/>
           </a:solidFill>
           <a:ln>
             <a:noFill/>
@@ -10667,7 +10877,7 @@
         </p:nvSpPr>
         <p:spPr>
           <a:xfrm>
-            <a:off x="731520" y="365760"/>
+            <a:off x="731520" y="347472"/>
             <a:ext cx="10698480" cy="320040"/>
           </a:xfrm>
           <a:prstGeom prst="rect">
@@ -10682,7 +10892,7 @@
           <a:lstStyle/>
           <a:p>
             <a:pPr>
-              <a:defRPr sz="1000" b="1">
+              <a:defRPr sz="1100" b="1">
                 <a:solidFill>
                   <a:srgbClr val="C5A880"/>
                 </a:solidFill>
@@ -10703,7 +10913,7 @@
         </p:nvSpPr>
         <p:spPr>
           <a:xfrm>
-            <a:off x="731520" y="658368"/>
+            <a:off x="731520" y="640080"/>
             <a:ext cx="10698480" cy="502920"/>
           </a:xfrm>
           <a:prstGeom prst="rect">
@@ -10718,9 +10928,9 @@
           <a:lstStyle/>
           <a:p>
             <a:pPr>
-              <a:defRPr sz="2100" b="1">
-                <a:solidFill>
-                  <a:srgbClr val="F4F2EE"/>
+              <a:defRPr sz="2200" b="1">
+                <a:solidFill>
+                  <a:srgbClr val="F9F9FB"/>
                 </a:solidFill>
                 <a:latin typeface="Georgia"/>
               </a:defRPr>
@@ -10754,9 +10964,9 @@
           <a:lstStyle/>
           <a:p>
             <a:pPr>
-              <a:defRPr sz="1150">
-                <a:solidFill>
-                  <a:srgbClr val="9CA3AF"/>
+              <a:defRPr sz="1200">
+                <a:solidFill>
+                  <a:srgbClr val="A3AAB8"/>
                 </a:solidFill>
                 <a:latin typeface="Segoe UI"/>
               </a:defRPr>
@@ -10782,11 +10992,11 @@
             <a:avLst/>
           </a:prstGeom>
           <a:solidFill>
-            <a:srgbClr val="15171D"/>
+            <a:srgbClr val="14171E"/>
           </a:solidFill>
-          <a:ln w="12700">
+          <a:ln w="15240">
             <a:solidFill>
-              <a:srgbClr val="323741"/>
+              <a:srgbClr val="3C4452"/>
             </a:solidFill>
           </a:ln>
         </p:spPr>
@@ -10835,7 +11045,7 @@
           <a:lstStyle/>
           <a:p>
             <a:pPr>
-              <a:defRPr sz="1200" b="1">
+              <a:defRPr sz="1250" b="1">
                 <a:solidFill>
                   <a:srgbClr val="C5A880"/>
                 </a:solidFill>
@@ -10850,9 +11060,9 @@
               <a:spcBef>
                 <a:spcPts val="200"/>
               </a:spcBef>
-              <a:defRPr sz="1000">
-                <a:solidFill>
-                  <a:srgbClr val="F4F2EE"/>
+              <a:defRPr sz="1050">
+                <a:solidFill>
+                  <a:srgbClr val="F9F9FB"/>
                 </a:solidFill>
               </a:defRPr>
             </a:pPr>
@@ -10877,7 +11087,7 @@
               <a:spcBef>
                 <a:spcPts val="800"/>
               </a:spcBef>
-              <a:defRPr sz="1200" b="1">
+              <a:defRPr sz="1250" b="1">
                 <a:solidFill>
                   <a:srgbClr val="C5A880"/>
                 </a:solidFill>
@@ -10892,9 +11102,9 @@
               <a:spcBef>
                 <a:spcPts val="200"/>
               </a:spcBef>
-              <a:defRPr sz="1000">
-                <a:solidFill>
-                  <a:srgbClr val="F4F2EE"/>
+              <a:defRPr sz="1050">
+                <a:solidFill>
+                  <a:srgbClr val="F9F9FB"/>
                 </a:solidFill>
               </a:defRPr>
             </a:pPr>
@@ -10907,7 +11117,7 @@
               <a:spcBef>
                 <a:spcPts val="800"/>
               </a:spcBef>
-              <a:defRPr sz="1200" b="1">
+              <a:defRPr sz="1250" b="1">
                 <a:solidFill>
                   <a:srgbClr val="C5A880"/>
                 </a:solidFill>
@@ -10922,9 +11132,9 @@
               <a:spcBef>
                 <a:spcPts val="200"/>
               </a:spcBef>
-              <a:defRPr sz="1000">
-                <a:solidFill>
-                  <a:srgbClr val="F4F2EE"/>
+              <a:defRPr sz="1050">
+                <a:solidFill>
+                  <a:srgbClr val="F9F9FB"/>
                 </a:solidFill>
               </a:defRPr>
             </a:pPr>
@@ -10937,7 +11147,7 @@
               <a:spcBef>
                 <a:spcPts val="800"/>
               </a:spcBef>
-              <a:defRPr sz="1200" b="1">
+              <a:defRPr sz="1250" b="1">
                 <a:solidFill>
                   <a:srgbClr val="C5A880"/>
                 </a:solidFill>
@@ -10952,9 +11162,9 @@
               <a:spcBef>
                 <a:spcPts val="200"/>
               </a:spcBef>
-              <a:defRPr sz="1000">
-                <a:solidFill>
-                  <a:srgbClr val="F4F2EE"/>
+              <a:defRPr sz="1050">
+                <a:solidFill>
+                  <a:srgbClr val="F9F9FB"/>
                 </a:solidFill>
               </a:defRPr>
             </a:pPr>
@@ -10967,7 +11177,7 @@
               <a:spcBef>
                 <a:spcPts val="800"/>
               </a:spcBef>
-              <a:defRPr sz="1200" b="1">
+              <a:defRPr sz="1250" b="1">
                 <a:solidFill>
                   <a:srgbClr val="C5A880"/>
                 </a:solidFill>
@@ -10982,9 +11192,9 @@
               <a:spcBef>
                 <a:spcPts val="200"/>
               </a:spcBef>
-              <a:defRPr sz="1000">
-                <a:solidFill>
-                  <a:srgbClr val="F4F2EE"/>
+              <a:defRPr sz="1050">
+                <a:solidFill>
+                  <a:srgbClr val="F9F9FB"/>
                 </a:solidFill>
               </a:defRPr>
             </a:pPr>
@@ -11002,14 +11212,14 @@
         </p:nvSpPr>
         <p:spPr>
           <a:xfrm>
-            <a:off x="6912864" y="1609344"/>
-            <a:ext cx="2267712" cy="4736592"/>
+            <a:off x="7735824" y="1609344"/>
+            <a:ext cx="2313432" cy="4736592"/>
           </a:xfrm>
           <a:prstGeom prst="roundRect">
             <a:avLst/>
           </a:prstGeom>
           <a:solidFill>
-            <a:srgbClr val="1C1F26"/>
+            <a:srgbClr val="1A1E27"/>
           </a:solidFill>
           <a:ln w="19050">
             <a:solidFill>
@@ -11055,77 +11265,8 @@
         </p:blipFill>
         <p:spPr>
           <a:xfrm>
-            <a:off x="6949440" y="1645920"/>
-            <a:ext cx="2194560" cy="4663440"/>
-          </a:xfrm>
-          <a:prstGeom prst="rect">
-            <a:avLst/>
-          </a:prstGeom>
-        </p:spPr>
-      </p:pic>
-      <p:sp>
-        <p:nvSpPr>
-          <p:cNvPr id="10" name="Rounded Rectangle 9"/>
-          <p:cNvSpPr/>
-          <p:nvPr/>
-        </p:nvSpPr>
-        <p:spPr>
-          <a:xfrm>
-            <a:off x="9290304" y="2249424"/>
-            <a:ext cx="2450592" cy="3547872"/>
-          </a:xfrm>
-          <a:prstGeom prst="roundRect">
-            <a:avLst/>
-          </a:prstGeom>
-          <a:solidFill>
-            <a:srgbClr val="1C1F26"/>
-          </a:solidFill>
-          <a:ln w="19050">
-            <a:solidFill>
-              <a:srgbClr val="C5A880"/>
-            </a:solidFill>
-          </a:ln>
-        </p:spPr>
-        <p:style>
-          <a:lnRef idx="1">
-            <a:schemeClr val="accent1"/>
-          </a:lnRef>
-          <a:fillRef idx="3">
-            <a:schemeClr val="accent1"/>
-          </a:fillRef>
-          <a:effectRef idx="2">
-            <a:schemeClr val="accent1"/>
-          </a:effectRef>
-          <a:fontRef idx="minor">
-            <a:schemeClr val="lt1"/>
-          </a:fontRef>
-        </p:style>
-        <p:txBody>
-          <a:bodyPr rtlCol="0" anchor="ctr"/>
-          <a:lstStyle/>
-          <a:p>
-            <a:pPr algn="ctr"/>
-          </a:p>
-        </p:txBody>
-      </p:sp>
-      <p:pic>
-        <p:nvPicPr>
-          <p:cNvPr id="11" name="Picture 10" descr="admin_desktop_terminal.png"/>
-          <p:cNvPicPr>
-            <a:picLocks noChangeAspect="1"/>
-          </p:cNvPicPr>
-          <p:nvPr/>
-        </p:nvPicPr>
-        <p:blipFill>
-          <a:blip r:embed="rId3"/>
-          <a:stretch>
-            <a:fillRect/>
-          </a:stretch>
-        </p:blipFill>
-        <p:spPr>
-          <a:xfrm>
-            <a:off x="9326880" y="2286000"/>
-            <a:ext cx="2377440" cy="3474720"/>
+            <a:off x="7772400" y="1645920"/>
+            <a:ext cx="2240280" cy="4663440"/>
           </a:xfrm>
           <a:prstGeom prst="rect">
             <a:avLst/>
@@ -11165,7 +11306,7 @@
             <a:avLst/>
           </a:prstGeom>
           <a:solidFill>
-            <a:srgbClr val="0E1013"/>
+            <a:srgbClr val="0B0D10"/>
           </a:solidFill>
           <a:ln>
             <a:noFill/>
@@ -11201,7 +11342,7 @@
         </p:nvSpPr>
         <p:spPr>
           <a:xfrm>
-            <a:off x="731520" y="365760"/>
+            <a:off x="731520" y="347472"/>
             <a:ext cx="10698480" cy="320040"/>
           </a:xfrm>
           <a:prstGeom prst="rect">
@@ -11216,7 +11357,7 @@
           <a:lstStyle/>
           <a:p>
             <a:pPr>
-              <a:defRPr sz="1000" b="1">
+              <a:defRPr sz="1100" b="1">
                 <a:solidFill>
                   <a:srgbClr val="C5A880"/>
                 </a:solidFill>
@@ -11237,7 +11378,7 @@
         </p:nvSpPr>
         <p:spPr>
           <a:xfrm>
-            <a:off x="731520" y="658368"/>
+            <a:off x="731520" y="640080"/>
             <a:ext cx="10698480" cy="502920"/>
           </a:xfrm>
           <a:prstGeom prst="rect">
@@ -11252,9 +11393,9 @@
           <a:lstStyle/>
           <a:p>
             <a:pPr>
-              <a:defRPr sz="2100" b="1">
-                <a:solidFill>
-                  <a:srgbClr val="F4F2EE"/>
+              <a:defRPr sz="2200" b="1">
+                <a:solidFill>
+                  <a:srgbClr val="F9F9FB"/>
                 </a:solidFill>
                 <a:latin typeface="Georgia"/>
               </a:defRPr>
@@ -11288,9 +11429,9 @@
           <a:lstStyle/>
           <a:p>
             <a:pPr>
-              <a:defRPr sz="1150">
-                <a:solidFill>
-                  <a:srgbClr val="9CA3AF"/>
+              <a:defRPr sz="1200">
+                <a:solidFill>
+                  <a:srgbClr val="A3AAB8"/>
                 </a:solidFill>
                 <a:latin typeface="Segoe UI"/>
               </a:defRPr>
@@ -11316,11 +11457,11 @@
             <a:avLst/>
           </a:prstGeom>
           <a:solidFill>
-            <a:srgbClr val="15171D"/>
+            <a:srgbClr val="14171E"/>
           </a:solidFill>
-          <a:ln w="12700">
+          <a:ln w="15240">
             <a:solidFill>
-              <a:srgbClr val="323741"/>
+              <a:srgbClr val="3C4452"/>
             </a:solidFill>
           </a:ln>
         </p:spPr>
@@ -11386,7 +11527,7 @@
               </a:spcBef>
               <a:defRPr sz="1100">
                 <a:solidFill>
-                  <a:srgbClr val="F4F2EE"/>
+                  <a:srgbClr val="F9F9FB"/>
                 </a:solidFill>
               </a:defRPr>
             </a:pPr>
@@ -11428,7 +11569,7 @@
               </a:spcBef>
               <a:defRPr sz="1100">
                 <a:solidFill>
-                  <a:srgbClr val="F4F2EE"/>
+                  <a:srgbClr val="F9F9FB"/>
                 </a:solidFill>
               </a:defRPr>
             </a:pPr>
@@ -11458,7 +11599,7 @@
               </a:spcBef>
               <a:defRPr sz="1100">
                 <a:solidFill>
-                  <a:srgbClr val="F4F2EE"/>
+                  <a:srgbClr val="F9F9FB"/>
                 </a:solidFill>
               </a:defRPr>
             </a:pPr>
@@ -11488,7 +11629,7 @@
               </a:spcBef>
               <a:defRPr sz="1100">
                 <a:solidFill>
-                  <a:srgbClr val="F4F2EE"/>
+                  <a:srgbClr val="F9F9FB"/>
                 </a:solidFill>
               </a:defRPr>
             </a:pPr>
@@ -11513,7 +11654,7 @@
             <a:avLst/>
           </a:prstGeom>
           <a:solidFill>
-            <a:srgbClr val="1C1F26"/>
+            <a:srgbClr val="1A1E27"/>
           </a:solidFill>
           <a:ln w="19050">
             <a:solidFill>
@@ -11600,7 +11741,7 @@
             <a:avLst/>
           </a:prstGeom>
           <a:solidFill>
-            <a:srgbClr val="0E1013"/>
+            <a:srgbClr val="0B0D10"/>
           </a:solidFill>
           <a:ln>
             <a:noFill/>
@@ -11636,7 +11777,7 @@
         </p:nvSpPr>
         <p:spPr>
           <a:xfrm>
-            <a:off x="731520" y="365760"/>
+            <a:off x="731520" y="347472"/>
             <a:ext cx="10698480" cy="320040"/>
           </a:xfrm>
           <a:prstGeom prst="rect">
@@ -11651,7 +11792,7 @@
           <a:lstStyle/>
           <a:p>
             <a:pPr>
-              <a:defRPr sz="1000" b="1">
+              <a:defRPr sz="1100" b="1">
                 <a:solidFill>
                   <a:srgbClr val="C5A880"/>
                 </a:solidFill>
@@ -11672,7 +11813,7 @@
         </p:nvSpPr>
         <p:spPr>
           <a:xfrm>
-            <a:off x="731520" y="658368"/>
+            <a:off x="731520" y="640080"/>
             <a:ext cx="10698480" cy="502920"/>
           </a:xfrm>
           <a:prstGeom prst="rect">
@@ -11687,9 +11828,9 @@
           <a:lstStyle/>
           <a:p>
             <a:pPr>
-              <a:defRPr sz="2100" b="1">
-                <a:solidFill>
-                  <a:srgbClr val="F4F2EE"/>
+              <a:defRPr sz="2200" b="1">
+                <a:solidFill>
+                  <a:srgbClr val="F9F9FB"/>
                 </a:solidFill>
                 <a:latin typeface="Georgia"/>
               </a:defRPr>
@@ -11723,9 +11864,9 @@
           <a:lstStyle/>
           <a:p>
             <a:pPr>
-              <a:defRPr sz="1150">
-                <a:solidFill>
-                  <a:srgbClr val="9CA3AF"/>
+              <a:defRPr sz="1200">
+                <a:solidFill>
+                  <a:srgbClr val="A3AAB8"/>
                 </a:solidFill>
                 <a:latin typeface="Segoe UI"/>
               </a:defRPr>
@@ -11751,11 +11892,11 @@
             <a:avLst/>
           </a:prstGeom>
           <a:solidFill>
-            <a:srgbClr val="15171D"/>
+            <a:srgbClr val="14171E"/>
           </a:solidFill>
-          <a:ln w="12700">
+          <a:ln w="15240">
             <a:solidFill>
-              <a:srgbClr val="323741"/>
+              <a:srgbClr val="3C4452"/>
             </a:solidFill>
           </a:ln>
         </p:spPr>
@@ -11821,7 +11962,7 @@
               </a:spcBef>
               <a:defRPr sz="1100">
                 <a:solidFill>
-                  <a:srgbClr val="F4F2EE"/>
+                  <a:srgbClr val="F9F9FB"/>
                 </a:solidFill>
               </a:defRPr>
             </a:pPr>
@@ -11851,7 +11992,7 @@
               </a:spcBef>
               <a:defRPr sz="1100">
                 <a:solidFill>
-                  <a:srgbClr val="F4F2EE"/>
+                  <a:srgbClr val="F9F9FB"/>
                 </a:solidFill>
               </a:defRPr>
             </a:pPr>
@@ -11893,7 +12034,7 @@
               </a:spcBef>
               <a:defRPr sz="1100">
                 <a:solidFill>
-                  <a:srgbClr val="F4F2EE"/>
+                  <a:srgbClr val="F9F9FB"/>
                 </a:solidFill>
               </a:defRPr>
             </a:pPr>
@@ -11923,7 +12064,7 @@
               </a:spcBef>
               <a:defRPr sz="1100">
                 <a:solidFill>
-                  <a:srgbClr val="F4F2EE"/>
+                  <a:srgbClr val="F9F9FB"/>
                 </a:solidFill>
               </a:defRPr>
             </a:pPr>
@@ -11948,7 +12089,7 @@
             <a:avLst/>
           </a:prstGeom>
           <a:solidFill>
-            <a:srgbClr val="1C1F26"/>
+            <a:srgbClr val="1A1E27"/>
           </a:solidFill>
           <a:ln w="19050">
             <a:solidFill>
@@ -12035,7 +12176,7 @@
             <a:avLst/>
           </a:prstGeom>
           <a:solidFill>
-            <a:srgbClr val="0E1013"/>
+            <a:srgbClr val="0B0D10"/>
           </a:solidFill>
           <a:ln>
             <a:noFill/>
@@ -12071,7 +12212,7 @@
         </p:nvSpPr>
         <p:spPr>
           <a:xfrm>
-            <a:off x="731520" y="365760"/>
+            <a:off x="731520" y="347472"/>
             <a:ext cx="10698480" cy="320040"/>
           </a:xfrm>
           <a:prstGeom prst="rect">
@@ -12086,7 +12227,7 @@
           <a:lstStyle/>
           <a:p>
             <a:pPr>
-              <a:defRPr sz="1000" b="1">
+              <a:defRPr sz="1100" b="1">
                 <a:solidFill>
                   <a:srgbClr val="C5A880"/>
                 </a:solidFill>
@@ -12107,7 +12248,7 @@
         </p:nvSpPr>
         <p:spPr>
           <a:xfrm>
-            <a:off x="731520" y="658368"/>
+            <a:off x="731520" y="640080"/>
             <a:ext cx="10698480" cy="502920"/>
           </a:xfrm>
           <a:prstGeom prst="rect">
@@ -12122,9 +12263,9 @@
           <a:lstStyle/>
           <a:p>
             <a:pPr>
-              <a:defRPr sz="2100" b="1">
-                <a:solidFill>
-                  <a:srgbClr val="F4F2EE"/>
+              <a:defRPr sz="2200" b="1">
+                <a:solidFill>
+                  <a:srgbClr val="F9F9FB"/>
                 </a:solidFill>
                 <a:latin typeface="Georgia"/>
               </a:defRPr>
@@ -12158,9 +12299,9 @@
           <a:lstStyle/>
           <a:p>
             <a:pPr>
-              <a:defRPr sz="1150">
-                <a:solidFill>
-                  <a:srgbClr val="9CA3AF"/>
+              <a:defRPr sz="1200">
+                <a:solidFill>
+                  <a:srgbClr val="A3AAB8"/>
                 </a:solidFill>
                 <a:latin typeface="Segoe UI"/>
               </a:defRPr>
@@ -12186,11 +12327,11 @@
             <a:avLst/>
           </a:prstGeom>
           <a:solidFill>
-            <a:srgbClr val="15171D"/>
+            <a:srgbClr val="14171E"/>
           </a:solidFill>
-          <a:ln w="12700">
+          <a:ln w="15240">
             <a:solidFill>
-              <a:srgbClr val="323741"/>
+              <a:srgbClr val="3C4452"/>
             </a:solidFill>
           </a:ln>
         </p:spPr>
@@ -12239,9 +12380,9 @@
           <a:lstStyle/>
           <a:p>
             <a:pPr>
-              <a:defRPr sz="1200" b="1">
-                <a:solidFill>
-                  <a:srgbClr val="DFCAAB"/>
+              <a:defRPr sz="1250" b="1">
+                <a:solidFill>
+                  <a:srgbClr val="E5D5C0"/>
                 </a:solidFill>
               </a:defRPr>
             </a:pPr>
@@ -12254,9 +12395,9 @@
               <a:spcBef>
                 <a:spcPts val="200"/>
               </a:spcBef>
-              <a:defRPr sz="1000">
-                <a:solidFill>
-                  <a:srgbClr val="F4F2EE"/>
+              <a:defRPr sz="1050">
+                <a:solidFill>
+                  <a:srgbClr val="F9F9FB"/>
                 </a:solidFill>
               </a:defRPr>
             </a:pPr>
@@ -12269,9 +12410,9 @@
               <a:spcBef>
                 <a:spcPts val="800"/>
               </a:spcBef>
-              <a:defRPr sz="1200" b="1">
-                <a:solidFill>
-                  <a:srgbClr val="DFCAAB"/>
+              <a:defRPr sz="1250" b="1">
+                <a:solidFill>
+                  <a:srgbClr val="E5D5C0"/>
                 </a:solidFill>
               </a:defRPr>
             </a:pPr>
@@ -12284,9 +12425,9 @@
               <a:spcBef>
                 <a:spcPts val="200"/>
               </a:spcBef>
-              <a:defRPr sz="1000">
-                <a:solidFill>
-                  <a:srgbClr val="F4F2EE"/>
+              <a:defRPr sz="1050">
+                <a:solidFill>
+                  <a:srgbClr val="F9F9FB"/>
                 </a:solidFill>
               </a:defRPr>
             </a:pPr>
@@ -12299,9 +12440,9 @@
               <a:spcBef>
                 <a:spcPts val="800"/>
               </a:spcBef>
-              <a:defRPr sz="1200" b="1">
-                <a:solidFill>
-                  <a:srgbClr val="DFCAAB"/>
+              <a:defRPr sz="1250" b="1">
+                <a:solidFill>
+                  <a:srgbClr val="E5D5C0"/>
                 </a:solidFill>
               </a:defRPr>
             </a:pPr>
@@ -12314,9 +12455,9 @@
               <a:spcBef>
                 <a:spcPts val="200"/>
               </a:spcBef>
-              <a:defRPr sz="1000">
-                <a:solidFill>
-                  <a:srgbClr val="F4F2EE"/>
+              <a:defRPr sz="1050">
+                <a:solidFill>
+                  <a:srgbClr val="F9F9FB"/>
                 </a:solidFill>
               </a:defRPr>
             </a:pPr>
@@ -12329,9 +12470,9 @@
               <a:spcBef>
                 <a:spcPts val="800"/>
               </a:spcBef>
-              <a:defRPr sz="1200" b="1">
-                <a:solidFill>
-                  <a:srgbClr val="DFCAAB"/>
+              <a:defRPr sz="1250" b="1">
+                <a:solidFill>
+                  <a:srgbClr val="E5D5C0"/>
                 </a:solidFill>
               </a:defRPr>
             </a:pPr>
@@ -12344,9 +12485,9 @@
               <a:spcBef>
                 <a:spcPts val="200"/>
               </a:spcBef>
-              <a:defRPr sz="1000">
-                <a:solidFill>
-                  <a:srgbClr val="F4F2EE"/>
+              <a:defRPr sz="1050">
+                <a:solidFill>
+                  <a:srgbClr val="F9F9FB"/>
                 </a:solidFill>
               </a:defRPr>
             </a:pPr>
@@ -12359,9 +12500,9 @@
               <a:spcBef>
                 <a:spcPts val="800"/>
               </a:spcBef>
-              <a:defRPr sz="1200" b="1">
-                <a:solidFill>
-                  <a:srgbClr val="DFCAAB"/>
+              <a:defRPr sz="1250" b="1">
+                <a:solidFill>
+                  <a:srgbClr val="E5D5C0"/>
                 </a:solidFill>
               </a:defRPr>
             </a:pPr>
@@ -12374,9 +12515,9 @@
               <a:spcBef>
                 <a:spcPts val="200"/>
               </a:spcBef>
-              <a:defRPr sz="1000">
-                <a:solidFill>
-                  <a:srgbClr val="F4F2EE"/>
+              <a:defRPr sz="1050">
+                <a:solidFill>
+                  <a:srgbClr val="F9F9FB"/>
                 </a:solidFill>
               </a:defRPr>
             </a:pPr>
@@ -12401,7 +12542,7 @@
             <a:avLst/>
           </a:prstGeom>
           <a:solidFill>
-            <a:srgbClr val="1C1F26"/>
+            <a:srgbClr val="1A1E27"/>
           </a:solidFill>
           <a:ln w="19050">
             <a:solidFill>
@@ -12470,7 +12611,7 @@
             <a:avLst/>
           </a:prstGeom>
           <a:solidFill>
-            <a:srgbClr val="1C1F26"/>
+            <a:srgbClr val="1A1E27"/>
           </a:solidFill>
           <a:ln w="19050">
             <a:solidFill>

--- a/RestoKZ_Presentation.pptx
+++ b/RestoKZ_Presentation.pptx
@@ -5152,7 +5152,7 @@
                         </a:defRPr>
                       </a:pPr>
                       <a:r>
-                        <a:t>✅ Фиксир. 35–49 тыс ₸</a:t>
+                        <a:t>✅ Фиксир. 20–25 тыс ₸</a:t>
                       </a:r>
                     </a:p>
                   </a:txBody>
@@ -6360,7 +6360,7 @@
               </a:defRPr>
             </a:pPr>
             <a:r>
-              <a:t>Формула 1:1 — окупается всего за 1 спасенный банкетный стол на 8-10 человек в месяц</a:t>
+              <a:t>Формула 1:1 — окупается всего за 1 спасенный стол в месяц (чек от 25 000 ₸)</a:t>
             </a:r>
           </a:p>
         </p:txBody>
@@ -6455,7 +6455,7 @@
               </a:defRPr>
             </a:pPr>
             <a:r>
-              <a:t>35 000 ₸</a:t>
+              <a:t>20 000 ₸</a:t>
             </a:r>
           </a:p>
           <a:p>
@@ -6640,7 +6640,7 @@
               </a:defRPr>
             </a:pPr>
             <a:r>
-              <a:t>49 000 ₸</a:t>
+              <a:t>25 000 ₸</a:t>
             </a:r>
           </a:p>
           <a:p>
@@ -6840,7 +6840,7 @@
               </a:defRPr>
             </a:pPr>
             <a:r>
-              <a:t>65 000 ₸</a:t>
+              <a:t>35 000 ₸</a:t>
             </a:r>
           </a:p>
           <a:p>
@@ -8058,7 +8058,7 @@
               </a:defRPr>
             </a:pPr>
             <a:r>
-              <a:t>Тариф 49 000 ₸ окупается за 1 спасенный банкетный стол в месяц. Очевидный ROI.</a:t>
+              <a:t>Тариф 25 000 ₸ окупается всего за 1 спасенный стол в месяц. Очевидный ROI.</a:t>
             </a:r>
           </a:p>
           <a:p>
@@ -9591,7 +9591,7 @@
                         </a:defRPr>
                       </a:pPr>
                       <a:r>
-                        <a:t>Согласны на 49к₸: окупается за 1 банкетный стол</a:t>
+                        <a:t>Согласны на 20–25к₸: окупается за 1 спасенный стол</a:t>
                       </a:r>
                     </a:p>
                   </a:txBody>

--- a/RestoKZ_Presentation.pptx
+++ b/RestoKZ_Presentation.pptx
@@ -3541,54 +3541,9 @@
           </a:p>
         </p:txBody>
       </p:sp>
-      <p:sp>
-        <p:nvSpPr>
-          <p:cNvPr id="11" name="Rounded Rectangle 10"/>
-          <p:cNvSpPr/>
-          <p:nvPr/>
-        </p:nvSpPr>
-        <p:spPr>
-          <a:xfrm>
-            <a:off x="8375904" y="1060704"/>
-            <a:ext cx="2313432" cy="4919472"/>
-          </a:xfrm>
-          <a:prstGeom prst="roundRect">
-            <a:avLst/>
-          </a:prstGeom>
-          <a:solidFill>
-            <a:srgbClr val="1A1E27"/>
-          </a:solidFill>
-          <a:ln w="19050">
-            <a:solidFill>
-              <a:srgbClr val="C5A880"/>
-            </a:solidFill>
-          </a:ln>
-        </p:spPr>
-        <p:style>
-          <a:lnRef idx="1">
-            <a:schemeClr val="accent1"/>
-          </a:lnRef>
-          <a:fillRef idx="3">
-            <a:schemeClr val="accent1"/>
-          </a:fillRef>
-          <a:effectRef idx="2">
-            <a:schemeClr val="accent1"/>
-          </a:effectRef>
-          <a:fontRef idx="minor">
-            <a:schemeClr val="lt1"/>
-          </a:fontRef>
-        </p:style>
-        <p:txBody>
-          <a:bodyPr rtlCol="0" anchor="ctr"/>
-          <a:lstStyle/>
-          <a:p>
-            <a:pPr algn="ctr"/>
-          </a:p>
-        </p:txBody>
-      </p:sp>
       <p:pic>
         <p:nvPicPr>
-          <p:cNvPr id="12" name="Picture 11" descr="admin_terminal_mobile.png"/>
+          <p:cNvPr id="11" name="Picture 10" descr="hero_dual_mockup.png"/>
           <p:cNvPicPr>
             <a:picLocks noChangeAspect="1"/>
           </p:cNvPicPr>
@@ -3602,77 +3557,8 @@
         </p:blipFill>
         <p:spPr>
           <a:xfrm>
-            <a:off x="8412480" y="1097280"/>
-            <a:ext cx="2240280" cy="4846320"/>
-          </a:xfrm>
-          <a:prstGeom prst="rect">
-            <a:avLst/>
-          </a:prstGeom>
-        </p:spPr>
-      </p:pic>
-      <p:sp>
-        <p:nvSpPr>
-          <p:cNvPr id="13" name="Rounded Rectangle 12"/>
-          <p:cNvSpPr/>
-          <p:nvPr/>
-        </p:nvSpPr>
-        <p:spPr>
-          <a:xfrm>
-            <a:off x="9747504" y="1517904"/>
-            <a:ext cx="2084832" cy="4370832"/>
-          </a:xfrm>
-          <a:prstGeom prst="roundRect">
-            <a:avLst/>
-          </a:prstGeom>
-          <a:solidFill>
-            <a:srgbClr val="1A1E27"/>
-          </a:solidFill>
-          <a:ln w="19050">
-            <a:solidFill>
-              <a:srgbClr val="C5A880"/>
-            </a:solidFill>
-          </a:ln>
-        </p:spPr>
-        <p:style>
-          <a:lnRef idx="1">
-            <a:schemeClr val="accent1"/>
-          </a:lnRef>
-          <a:fillRef idx="3">
-            <a:schemeClr val="accent1"/>
-          </a:fillRef>
-          <a:effectRef idx="2">
-            <a:schemeClr val="accent1"/>
-          </a:effectRef>
-          <a:fontRef idx="minor">
-            <a:schemeClr val="lt1"/>
-          </a:fontRef>
-        </p:style>
-        <p:txBody>
-          <a:bodyPr rtlCol="0" anchor="ctr"/>
-          <a:lstStyle/>
-          <a:p>
-            <a:pPr algn="ctr"/>
-          </a:p>
-        </p:txBody>
-      </p:sp>
-      <p:pic>
-        <p:nvPicPr>
-          <p:cNvPr id="14" name="Picture 13" descr="guest_catalog_mobile.png"/>
-          <p:cNvPicPr>
-            <a:picLocks noChangeAspect="1"/>
-          </p:cNvPicPr>
-          <p:nvPr/>
-        </p:nvPicPr>
-        <p:blipFill>
-          <a:blip r:embed="rId3"/>
-          <a:stretch>
-            <a:fillRect/>
-          </a:stretch>
-        </p:blipFill>
-        <p:spPr>
-          <a:xfrm>
-            <a:off x="9784080" y="1554480"/>
-            <a:ext cx="2011680" cy="4297680"/>
+            <a:off x="7132320" y="1051560"/>
+            <a:ext cx="4572000" cy="4718304"/>
           </a:xfrm>
           <a:prstGeom prst="rect">
             <a:avLst/>

--- a/RestoKZ_Presentation.pptx
+++ b/RestoKZ_Presentation.pptx
@@ -5343,7 +5343,7 @@
                         </a:defRPr>
                       </a:pPr>
                       <a:r>
-                        <a:t>Учет менталитета</a:t>
+                        <a:t>Зонирование зала и Walk-in</a:t>
                       </a:r>
                     </a:p>
                   </a:txBody>
@@ -5389,7 +5389,7 @@
                         </a:defRPr>
                       </a:pPr>
                       <a:r>
-                        <a:t>❌ Без топчанов и VIP</a:t>
+                        <a:t>❌ Сложный ввод, нет зон</a:t>
                       </a:r>
                     </a:p>
                   </a:txBody>
@@ -5412,7 +5412,7 @@
                         </a:defRPr>
                       </a:pPr>
                       <a:r>
-                        <a:t>❌ Шаблоны под РФ</a:t>
+                        <a:t>❌ Без интерактивных зон</a:t>
                       </a:r>
                     </a:p>
                   </a:txBody>
@@ -5435,7 +5435,7 @@
                         </a:defRPr>
                       </a:pPr>
                       <a:r>
-                        <a:t>❌ Сложно для персонала</a:t>
+                        <a:t>❌ Нет учета посадки</a:t>
                       </a:r>
                     </a:p>
                   </a:txBody>
@@ -5458,7 +5458,7 @@
                         </a:defRPr>
                       </a:pPr>
                       <a:r>
-                        <a:t>👑 100% ('По звонку', VIP)</a:t>
+                        <a:t>👑 100% (Карта зон + Walk-in)</a:t>
                       </a:r>
                     </a:p>
                   </a:txBody>
@@ -7974,7 +7974,7 @@
               </a:defRPr>
             </a:pPr>
             <a:r>
-              <a:t>Учет менталитета Казахстана (топчаны, VIP, язык, звонки Баке) защищает от глобальных гигантов.</a:t>
+              <a:t>Глубокая адаптация под процессы заведений Казахстана (Walk-in, зонирование VIP, RU/KZ/EN) защищает от глобальных гигантов.</a:t>
             </a:r>
           </a:p>
           <a:p>
@@ -9298,11 +9298,11 @@
                         </a:defRPr>
                       </a:pPr>
                       <a:r>
-                        <a:t>H4: Менталитет</a:t>
+                        <a:t>H4: Зонирование и</a:t>
                       </a:r>
                       <a:br/>
                       <a:r>
-                        <a:t>(топчан и Баке)</a:t>
+                        <a:t>Walk-in (от двери)</a:t>
                       </a:r>
                     </a:p>
                   </a:txBody>
@@ -9352,7 +9352,7 @@
                         </a:defRPr>
                       </a:pPr>
                       <a:r>
-                        <a:t>Важность зон (топчан, кабина) и звонков директору</a:t>
+                        <a:t>Важность выбора зон (VIP, окно, терраса) и быстрой записи звонков</a:t>
                       </a:r>
                     </a:p>
                   </a:txBody>
@@ -9375,7 +9375,7 @@
                         </a:defRPr>
                       </a:pPr>
                       <a:r>
-                        <a:t>2 молодежные кофейни («у нас европейский формат, без топчанов и агашек»)</a:t>
+                        <a:t>2 заведения fast-casual («у нас живая очередь без броней и без разделения на зоны»)</a:t>
                       </a:r>
                     </a:p>
                   </a:txBody>
@@ -9398,7 +9398,7 @@
                         </a:defRPr>
                       </a:pPr>
                       <a:r>
-                        <a:t>Зонирование зала + кнопка брони «По звонку» за 3 секунды</a:t>
+                        <a:t>Интерактивная карта зон зала + кнопка посадки «Walk-in / По звонку» за 3 сек</a:t>
                       </a:r>
                     </a:p>
                   </a:txBody>

--- a/RestoKZ_Presentation.pptx
+++ b/RestoKZ_Presentation.pptx
@@ -20,6 +20,7 @@
     <p:sldId id="268" r:id="rId19"/>
     <p:sldId id="269" r:id="rId20"/>
     <p:sldId id="270" r:id="rId21"/>
+    <p:sldId id="271" r:id="rId22"/>
   </p:sldIdLst>
   <p:sldSz cx="12191695" cy="6858000" type="screen4x3"/>
   <p:notesSz cx="6858000" cy="9144000"/>
@@ -3657,7 +3658,7 @@
               </a:defRPr>
             </a:pPr>
             <a:r>
-              <a:t>НАСТРОЙКА И КАСТОМИЗАЦИЯ</a:t>
+              <a:t>СОВРЕМЕННЫЙ UX/UI</a:t>
             </a:r>
           </a:p>
         </p:txBody>
@@ -3693,7 +3694,7 @@
               </a:defRPr>
             </a:pPr>
             <a:r>
-              <a:t>Конструктор зала и Управление рестораном</a:t>
+              <a:t>Мультилокация и быстрое управление сетью ресторанов</a:t>
             </a:r>
           </a:p>
         </p:txBody>
@@ -3729,7 +3730,7 @@
               </a:defRPr>
             </a:pPr>
             <a:r>
-              <a:t>Полная автономия заведения — добавление точек, настройка столов и блюд за 5 минут</a:t>
+              <a:t>Замена устаревших браузерных элементов на премиальные Bottom Sheets и боковое меню</a:t>
             </a:r>
           </a:p>
         </p:txBody>
@@ -3743,7 +3744,7 @@
         <p:spPr>
           <a:xfrm>
             <a:off x="731520" y="1645920"/>
-            <a:ext cx="3474720" cy="4663440"/>
+            <a:ext cx="5943600" cy="4663440"/>
           </a:xfrm>
           <a:prstGeom prst="roundRect">
             <a:avLst/>
@@ -3753,7 +3754,7 @@
           </a:solidFill>
           <a:ln w="15240">
             <a:solidFill>
-              <a:srgbClr val="38BDF8"/>
+              <a:srgbClr val="3C4452"/>
             </a:solidFill>
           </a:ln>
         </p:spPr>
@@ -3787,8 +3788,8 @@
         </p:nvSpPr>
         <p:spPr>
           <a:xfrm>
-            <a:off x="914400" y="1828800"/>
-            <a:ext cx="3108960" cy="4297680"/>
+            <a:off x="1005840" y="1828800"/>
+            <a:ext cx="5394960" cy="4297680"/>
           </a:xfrm>
           <a:prstGeom prst="rect">
             <a:avLst/>
@@ -3802,14 +3803,29 @@
           <a:lstStyle/>
           <a:p>
             <a:pPr>
-              <a:defRPr sz="1450" b="1">
-                <a:solidFill>
-                  <a:srgbClr val="38BDF8"/>
-                </a:solidFill>
-              </a:defRPr>
-            </a:pPr>
-            <a:r>
-              <a:t>🏢 Профиль &amp; Соцсети</a:t>
+              <a:defRPr sz="1250" b="1">
+                <a:solidFill>
+                  <a:srgbClr val="E5D5C0"/>
+                </a:solidFill>
+              </a:defRPr>
+            </a:pPr>
+            <a:r>
+              <a:t>🏛 Кастомный Luxury Bottom Sheet выбора заведения</a:t>
+            </a:r>
+          </a:p>
+          <a:p>
+            <a:pPr>
+              <a:spcBef>
+                <a:spcPts val="200"/>
+              </a:spcBef>
+              <a:defRPr sz="1050">
+                <a:solidFill>
+                  <a:srgbClr val="F9F9FB"/>
+                </a:solidFill>
+              </a:defRPr>
+            </a:pPr>
+            <a:r>
+              <a:t>Вместо архаичного селектора — современная шторка с поиском, бейджами городов, количеством столов и моментальным переключением филиалов.</a:t>
             </a:r>
           </a:p>
           <a:p>
@@ -3817,14 +3833,29 @@
               <a:spcBef>
                 <a:spcPts val="800"/>
               </a:spcBef>
-              <a:defRPr sz="1150">
+              <a:defRPr sz="1250" b="1">
+                <a:solidFill>
+                  <a:srgbClr val="E5D5C0"/>
+                </a:solidFill>
+              </a:defRPr>
+            </a:pPr>
+            <a:r>
+              <a:t>☰ Боковое меню (Side Drawer)</a:t>
+            </a:r>
+          </a:p>
+          <a:p>
+            <a:pPr>
+              <a:spcBef>
+                <a:spcPts val="200"/>
+              </a:spcBef>
+              <a:defRPr sz="1050">
                 <a:solidFill>
                   <a:srgbClr val="F9F9FB"/>
                 </a:solidFill>
               </a:defRPr>
             </a:pPr>
             <a:r>
-              <a:t>• Редактирование адреса, телефона и режима</a:t>
+              <a:t>Все служебные функции аккуратно спрятаны под гамбургер-меню, освобождая экран терминала для главного — броней и карты зала.</a:t>
             </a:r>
           </a:p>
           <a:p>
@@ -3832,14 +3863,29 @@
               <a:spcBef>
                 <a:spcPts val="800"/>
               </a:spcBef>
-              <a:defRPr sz="1150">
+              <a:defRPr sz="1250" b="1">
+                <a:solidFill>
+                  <a:srgbClr val="E5D5C0"/>
+                </a:solidFill>
+              </a:defRPr>
+            </a:pPr>
+            <a:r>
+              <a:t>🌐 Трехъязычный интерфейс (RU / KZ / EN)</a:t>
+            </a:r>
+          </a:p>
+          <a:p>
+            <a:pPr>
+              <a:spcBef>
+                <a:spcPts val="200"/>
+              </a:spcBef>
+              <a:defRPr sz="1050">
                 <a:solidFill>
                   <a:srgbClr val="F9F9FB"/>
                 </a:solidFill>
               </a:defRPr>
             </a:pPr>
             <a:r>
-              <a:t>• Прямые ссылки на 2GIS, Instagram, WhatsApp</a:t>
+              <a:t>Крупные удобные кнопки переключения языка для сотрудников и гостей в любом регионе Казахстана.</a:t>
             </a:r>
           </a:p>
           <a:p>
@@ -3847,14 +3893,29 @@
               <a:spcBef>
                 <a:spcPts val="800"/>
               </a:spcBef>
-              <a:defRPr sz="1150">
+              <a:defRPr sz="1250" b="1">
+                <a:solidFill>
+                  <a:srgbClr val="E5D5C0"/>
+                </a:solidFill>
+              </a:defRPr>
+            </a:pPr>
+            <a:r>
+              <a:t>🍽 Быстрый переход «Терминал ↔ Витрина гостя»</a:t>
+            </a:r>
+          </a:p>
+          <a:p>
+            <a:pPr>
+              <a:spcBef>
+                <a:spcPts val="200"/>
+              </a:spcBef>
+              <a:defRPr sz="1050">
                 <a:solidFill>
                   <a:srgbClr val="F9F9FB"/>
                 </a:solidFill>
               </a:defRPr>
             </a:pPr>
             <a:r>
-              <a:t>• Указание среднего чека и концепта кухни</a:t>
+              <a:t>Хостес может в любой момент открыть клиентскую витрину и увидеть свой ресторан глазами гостя.</a:t>
             </a:r>
           </a:p>
           <a:p>
@@ -3862,14 +3923,29 @@
               <a:spcBef>
                 <a:spcPts val="800"/>
               </a:spcBef>
-              <a:defRPr sz="1150">
+              <a:defRPr sz="1250" b="1">
+                <a:solidFill>
+                  <a:srgbClr val="E5D5C0"/>
+                </a:solidFill>
+              </a:defRPr>
+            </a:pPr>
+            <a:r>
+              <a:t>⚡ Тактильный отклик и анимации</a:t>
+            </a:r>
+          </a:p>
+          <a:p>
+            <a:pPr>
+              <a:spcBef>
+                <a:spcPts val="200"/>
+              </a:spcBef>
+              <a:defRPr sz="1050">
                 <a:solidFill>
                   <a:srgbClr val="F9F9FB"/>
                 </a:solidFill>
               </a:defRPr>
             </a:pPr>
             <a:r>
-              <a:t>• Регистрация нового филиала в 1 клик</a:t>
+              <a:t>Плавная физика сжатия кнопок (Spring physics), адаптивность под Home Bar iPhone (Safe Area).</a:t>
             </a:r>
           </a:p>
         </p:txBody>
@@ -3882,16 +3958,16 @@
         </p:nvSpPr>
         <p:spPr>
           <a:xfrm>
-            <a:off x="4343400" y="1645920"/>
-            <a:ext cx="3474720" cy="4663440"/>
+            <a:off x="6912864" y="1609344"/>
+            <a:ext cx="2267712" cy="4736592"/>
           </a:xfrm>
           <a:prstGeom prst="roundRect">
             <a:avLst/>
           </a:prstGeom>
           <a:solidFill>
-            <a:srgbClr val="14171E"/>
+            <a:srgbClr val="1A1E27"/>
           </a:solidFill>
-          <a:ln w="15240">
+          <a:ln w="19050">
             <a:solidFill>
               <a:srgbClr val="C5A880"/>
             </a:solidFill>
@@ -3919,101 +3995,30 @@
           </a:p>
         </p:txBody>
       </p:sp>
-      <p:sp>
-        <p:nvSpPr>
-          <p:cNvPr id="9" name="TextBox 8"/>
-          <p:cNvSpPr txBox="1"/>
-          <p:nvPr/>
-        </p:nvSpPr>
-        <p:spPr>
-          <a:xfrm>
-            <a:off x="4526280" y="1828800"/>
-            <a:ext cx="3108960" cy="4297680"/>
+      <p:pic>
+        <p:nvPicPr>
+          <p:cNvPr id="9" name="Picture 8" descr="admin_rest_picker.png"/>
+          <p:cNvPicPr>
+            <a:picLocks noChangeAspect="1"/>
+          </p:cNvPicPr>
+          <p:nvPr/>
+        </p:nvPicPr>
+        <p:blipFill>
+          <a:blip r:embed="rId2"/>
+          <a:stretch>
+            <a:fillRect/>
+          </a:stretch>
+        </p:blipFill>
+        <p:spPr>
+          <a:xfrm>
+            <a:off x="6949440" y="1645920"/>
+            <a:ext cx="2194560" cy="4663440"/>
           </a:xfrm>
           <a:prstGeom prst="rect">
             <a:avLst/>
           </a:prstGeom>
-          <a:noFill/>
-        </p:spPr>
-        <p:txBody>
-          <a:bodyPr wrap="square">
-            <a:spAutoFit/>
-          </a:bodyPr>
-          <a:lstStyle/>
-          <a:p>
-            <a:pPr>
-              <a:defRPr sz="1450" b="1">
-                <a:solidFill>
-                  <a:srgbClr val="C5A880"/>
-                </a:solidFill>
-              </a:defRPr>
-            </a:pPr>
-            <a:r>
-              <a:t>🍽 Электронное Меню</a:t>
-            </a:r>
-          </a:p>
-          <a:p>
-            <a:pPr>
-              <a:spcBef>
-                <a:spcPts val="800"/>
-              </a:spcBef>
-              <a:defRPr sz="1150">
-                <a:solidFill>
-                  <a:srgbClr val="F9F9FB"/>
-                </a:solidFill>
-              </a:defRPr>
-            </a:pPr>
-            <a:r>
-              <a:t>• Добавление блюд по категориям</a:t>
-            </a:r>
-          </a:p>
-          <a:p>
-            <a:pPr>
-              <a:spcBef>
-                <a:spcPts val="800"/>
-              </a:spcBef>
-              <a:defRPr sz="1150">
-                <a:solidFill>
-                  <a:srgbClr val="F9F9FB"/>
-                </a:solidFill>
-              </a:defRPr>
-            </a:pPr>
-            <a:r>
-              <a:t>• Загрузка фото, граммовки и цен</a:t>
-            </a:r>
-          </a:p>
-          <a:p>
-            <a:pPr>
-              <a:spcBef>
-                <a:spcPts val="800"/>
-              </a:spcBef>
-              <a:defRPr sz="1150">
-                <a:solidFill>
-                  <a:srgbClr val="F9F9FB"/>
-                </a:solidFill>
-              </a:defRPr>
-            </a:pPr>
-            <a:r>
-              <a:t>• Мгновенное скрытие блюд на «стоп-листе»</a:t>
-            </a:r>
-          </a:p>
-          <a:p>
-            <a:pPr>
-              <a:spcBef>
-                <a:spcPts val="800"/>
-              </a:spcBef>
-              <a:defRPr sz="1150">
-                <a:solidFill>
-                  <a:srgbClr val="F9F9FB"/>
-                </a:solidFill>
-              </a:defRPr>
-            </a:pPr>
-            <a:r>
-              <a:t>• Синхронизация меню с витриной гостя</a:t>
-            </a:r>
-          </a:p>
-        </p:txBody>
-      </p:sp>
+        </p:spPr>
+      </p:pic>
       <p:sp>
         <p:nvSpPr>
           <p:cNvPr id="10" name="Rounded Rectangle 9"/>
@@ -4022,18 +4027,18 @@
         </p:nvSpPr>
         <p:spPr>
           <a:xfrm>
-            <a:off x="7955280" y="1645920"/>
-            <a:ext cx="3474720" cy="4663440"/>
+            <a:off x="9381744" y="1609344"/>
+            <a:ext cx="2267712" cy="4736592"/>
           </a:xfrm>
           <a:prstGeom prst="roundRect">
             <a:avLst/>
           </a:prstGeom>
           <a:solidFill>
-            <a:srgbClr val="14171E"/>
+            <a:srgbClr val="1A1E27"/>
           </a:solidFill>
-          <a:ln w="15240">
+          <a:ln w="19050">
             <a:solidFill>
-              <a:srgbClr val="34D399"/>
+              <a:srgbClr val="C5A880"/>
             </a:solidFill>
           </a:ln>
         </p:spPr>
@@ -4059,101 +4064,30 @@
           </a:p>
         </p:txBody>
       </p:sp>
-      <p:sp>
-        <p:nvSpPr>
-          <p:cNvPr id="11" name="TextBox 10"/>
-          <p:cNvSpPr txBox="1"/>
-          <p:nvPr/>
-        </p:nvSpPr>
-        <p:spPr>
-          <a:xfrm>
-            <a:off x="8138160" y="1828800"/>
-            <a:ext cx="3108960" cy="4297680"/>
+      <p:pic>
+        <p:nvPicPr>
+          <p:cNvPr id="11" name="Picture 10" descr="admin_drawer_menu.png"/>
+          <p:cNvPicPr>
+            <a:picLocks noChangeAspect="1"/>
+          </p:cNvPicPr>
+          <p:nvPr/>
+        </p:nvPicPr>
+        <p:blipFill>
+          <a:blip r:embed="rId3"/>
+          <a:stretch>
+            <a:fillRect/>
+          </a:stretch>
+        </p:blipFill>
+        <p:spPr>
+          <a:xfrm>
+            <a:off x="9418320" y="1645920"/>
+            <a:ext cx="2194560" cy="4663440"/>
           </a:xfrm>
           <a:prstGeom prst="rect">
             <a:avLst/>
           </a:prstGeom>
-          <a:noFill/>
-        </p:spPr>
-        <p:txBody>
-          <a:bodyPr wrap="square">
-            <a:spAutoFit/>
-          </a:bodyPr>
-          <a:lstStyle/>
-          <a:p>
-            <a:pPr>
-              <a:defRPr sz="1450" b="1">
-                <a:solidFill>
-                  <a:srgbClr val="34D399"/>
-                </a:solidFill>
-              </a:defRPr>
-            </a:pPr>
-            <a:r>
-              <a:t>🪑 Конструктор Столов</a:t>
-            </a:r>
-          </a:p>
-          <a:p>
-            <a:pPr>
-              <a:spcBef>
-                <a:spcPts val="800"/>
-              </a:spcBef>
-              <a:defRPr sz="1150">
-                <a:solidFill>
-                  <a:srgbClr val="F9F9FB"/>
-                </a:solidFill>
-              </a:defRPr>
-            </a:pPr>
-            <a:r>
-              <a:t>• Добавление столов в зал с номерами</a:t>
-            </a:r>
-          </a:p>
-          <a:p>
-            <a:pPr>
-              <a:spcBef>
-                <a:spcPts val="800"/>
-              </a:spcBef>
-              <a:defRPr sz="1150">
-                <a:solidFill>
-                  <a:srgbClr val="F9F9FB"/>
-                </a:solidFill>
-              </a:defRPr>
-            </a:pPr>
-            <a:r>
-              <a:t>• Вместимость: 2, 4, 6, 8, 10, 12+ персон</a:t>
-            </a:r>
-          </a:p>
-          <a:p>
-            <a:pPr>
-              <a:spcBef>
-                <a:spcPts val="800"/>
-              </a:spcBef>
-              <a:defRPr sz="1150">
-                <a:solidFill>
-                  <a:srgbClr val="F9F9FB"/>
-                </a:solidFill>
-              </a:defRPr>
-            </a:pPr>
-            <a:r>
-              <a:t>• Выбор зоны (У окна, Терраса, VIP, Топчан)</a:t>
-            </a:r>
-          </a:p>
-          <a:p>
-            <a:pPr>
-              <a:spcBef>
-                <a:spcPts val="800"/>
-              </a:spcBef>
-              <a:defRPr sz="1150">
-                <a:solidFill>
-                  <a:srgbClr val="F9F9FB"/>
-                </a:solidFill>
-              </a:defRPr>
-            </a:pPr>
-            <a:r>
-              <a:t>• Описание столика для хостес</a:t>
-            </a:r>
-          </a:p>
-        </p:txBody>
-      </p:sp>
+        </p:spPr>
+      </p:pic>
     </p:spTree>
   </p:cSld>
   <p:clrMapOvr>
@@ -4163,6 +4097,595 @@
 </file>
 
 <file path=ppt/slides/slide11.xml><?xml version="1.0" encoding="utf-8"?>
+<p:sld xmlns:a="http://schemas.openxmlformats.org/drawingml/2006/main" xmlns:p="http://schemas.openxmlformats.org/presentationml/2006/main" xmlns:r="http://schemas.openxmlformats.org/officeDocument/2006/relationships">
+  <p:cSld>
+    <p:spTree>
+      <p:nvGrpSpPr>
+        <p:cNvPr id="1" name=""/>
+        <p:cNvGrpSpPr/>
+        <p:nvPr/>
+      </p:nvGrpSpPr>
+      <p:grpSpPr/>
+      <p:sp>
+        <p:nvSpPr>
+          <p:cNvPr id="2" name="Rectangle 1"/>
+          <p:cNvSpPr/>
+          <p:nvPr/>
+        </p:nvSpPr>
+        <p:spPr>
+          <a:xfrm>
+            <a:off x="0" y="0"/>
+            <a:ext cx="12191695" cy="6858000"/>
+          </a:xfrm>
+          <a:prstGeom prst="rect">
+            <a:avLst/>
+          </a:prstGeom>
+          <a:solidFill>
+            <a:srgbClr val="0B0D10"/>
+          </a:solidFill>
+          <a:ln>
+            <a:noFill/>
+          </a:ln>
+        </p:spPr>
+        <p:style>
+          <a:lnRef idx="1">
+            <a:schemeClr val="accent1"/>
+          </a:lnRef>
+          <a:fillRef idx="3">
+            <a:schemeClr val="accent1"/>
+          </a:fillRef>
+          <a:effectRef idx="2">
+            <a:schemeClr val="accent1"/>
+          </a:effectRef>
+          <a:fontRef idx="minor">
+            <a:schemeClr val="lt1"/>
+          </a:fontRef>
+        </p:style>
+        <p:txBody>
+          <a:bodyPr rtlCol="0" anchor="ctr"/>
+          <a:lstStyle/>
+          <a:p>
+            <a:pPr algn="ctr"/>
+          </a:p>
+        </p:txBody>
+      </p:sp>
+      <p:sp>
+        <p:nvSpPr>
+          <p:cNvPr id="3" name="TextBox 2"/>
+          <p:cNvSpPr txBox="1"/>
+          <p:nvPr/>
+        </p:nvSpPr>
+        <p:spPr>
+          <a:xfrm>
+            <a:off x="731520" y="347472"/>
+            <a:ext cx="10698480" cy="320040"/>
+          </a:xfrm>
+          <a:prstGeom prst="rect">
+            <a:avLst/>
+          </a:prstGeom>
+          <a:noFill/>
+        </p:spPr>
+        <p:txBody>
+          <a:bodyPr wrap="square" lIns="0" tIns="0" rIns="0" bIns="0">
+            <a:spAutoFit/>
+          </a:bodyPr>
+          <a:lstStyle/>
+          <a:p>
+            <a:pPr>
+              <a:defRPr sz="1100" b="1">
+                <a:solidFill>
+                  <a:srgbClr val="C5A880"/>
+                </a:solidFill>
+                <a:latin typeface="Segoe UI"/>
+              </a:defRPr>
+            </a:pPr>
+            <a:r>
+              <a:t>НАСТРОЙКА И КАСТОМИЗАЦИЯ</a:t>
+            </a:r>
+          </a:p>
+        </p:txBody>
+      </p:sp>
+      <p:sp>
+        <p:nvSpPr>
+          <p:cNvPr id="4" name="TextBox 3"/>
+          <p:cNvSpPr txBox="1"/>
+          <p:nvPr/>
+        </p:nvSpPr>
+        <p:spPr>
+          <a:xfrm>
+            <a:off x="731520" y="640080"/>
+            <a:ext cx="10698480" cy="502920"/>
+          </a:xfrm>
+          <a:prstGeom prst="rect">
+            <a:avLst/>
+          </a:prstGeom>
+          <a:noFill/>
+        </p:spPr>
+        <p:txBody>
+          <a:bodyPr wrap="square" lIns="0" tIns="0" rIns="0" bIns="0">
+            <a:spAutoFit/>
+          </a:bodyPr>
+          <a:lstStyle/>
+          <a:p>
+            <a:pPr>
+              <a:defRPr sz="2200" b="1">
+                <a:solidFill>
+                  <a:srgbClr val="F9F9FB"/>
+                </a:solidFill>
+                <a:latin typeface="Georgia"/>
+              </a:defRPr>
+            </a:pPr>
+            <a:r>
+              <a:t>Конструктор зала и Управление рестораном</a:t>
+            </a:r>
+          </a:p>
+        </p:txBody>
+      </p:sp>
+      <p:sp>
+        <p:nvSpPr>
+          <p:cNvPr id="5" name="TextBox 4"/>
+          <p:cNvSpPr txBox="1"/>
+          <p:nvPr/>
+        </p:nvSpPr>
+        <p:spPr>
+          <a:xfrm>
+            <a:off x="731520" y="1170432"/>
+            <a:ext cx="10698480" cy="320040"/>
+          </a:xfrm>
+          <a:prstGeom prst="rect">
+            <a:avLst/>
+          </a:prstGeom>
+          <a:noFill/>
+        </p:spPr>
+        <p:txBody>
+          <a:bodyPr wrap="square" lIns="0" tIns="0" rIns="0" bIns="0">
+            <a:spAutoFit/>
+          </a:bodyPr>
+          <a:lstStyle/>
+          <a:p>
+            <a:pPr>
+              <a:defRPr sz="1200">
+                <a:solidFill>
+                  <a:srgbClr val="A3AAB8"/>
+                </a:solidFill>
+                <a:latin typeface="Segoe UI"/>
+              </a:defRPr>
+            </a:pPr>
+            <a:r>
+              <a:t>Полная автономия заведения — добавление точек, настройка столов и блюд за 5 минут</a:t>
+            </a:r>
+          </a:p>
+        </p:txBody>
+      </p:sp>
+      <p:sp>
+        <p:nvSpPr>
+          <p:cNvPr id="6" name="Rounded Rectangle 5"/>
+          <p:cNvSpPr/>
+          <p:nvPr/>
+        </p:nvSpPr>
+        <p:spPr>
+          <a:xfrm>
+            <a:off x="731520" y="1645920"/>
+            <a:ext cx="3474720" cy="4663440"/>
+          </a:xfrm>
+          <a:prstGeom prst="roundRect">
+            <a:avLst/>
+          </a:prstGeom>
+          <a:solidFill>
+            <a:srgbClr val="14171E"/>
+          </a:solidFill>
+          <a:ln w="15240">
+            <a:solidFill>
+              <a:srgbClr val="38BDF8"/>
+            </a:solidFill>
+          </a:ln>
+        </p:spPr>
+        <p:style>
+          <a:lnRef idx="1">
+            <a:schemeClr val="accent1"/>
+          </a:lnRef>
+          <a:fillRef idx="3">
+            <a:schemeClr val="accent1"/>
+          </a:fillRef>
+          <a:effectRef idx="2">
+            <a:schemeClr val="accent1"/>
+          </a:effectRef>
+          <a:fontRef idx="minor">
+            <a:schemeClr val="lt1"/>
+          </a:fontRef>
+        </p:style>
+        <p:txBody>
+          <a:bodyPr rtlCol="0" anchor="ctr"/>
+          <a:lstStyle/>
+          <a:p>
+            <a:pPr algn="ctr"/>
+          </a:p>
+        </p:txBody>
+      </p:sp>
+      <p:sp>
+        <p:nvSpPr>
+          <p:cNvPr id="7" name="TextBox 6"/>
+          <p:cNvSpPr txBox="1"/>
+          <p:nvPr/>
+        </p:nvSpPr>
+        <p:spPr>
+          <a:xfrm>
+            <a:off x="914400" y="1828800"/>
+            <a:ext cx="3108960" cy="4297680"/>
+          </a:xfrm>
+          <a:prstGeom prst="rect">
+            <a:avLst/>
+          </a:prstGeom>
+          <a:noFill/>
+        </p:spPr>
+        <p:txBody>
+          <a:bodyPr wrap="square">
+            <a:spAutoFit/>
+          </a:bodyPr>
+          <a:lstStyle/>
+          <a:p>
+            <a:pPr>
+              <a:defRPr sz="1450" b="1">
+                <a:solidFill>
+                  <a:srgbClr val="38BDF8"/>
+                </a:solidFill>
+              </a:defRPr>
+            </a:pPr>
+            <a:r>
+              <a:t>🏢 Профиль &amp; Соцсети</a:t>
+            </a:r>
+          </a:p>
+          <a:p>
+            <a:pPr>
+              <a:spcBef>
+                <a:spcPts val="800"/>
+              </a:spcBef>
+              <a:defRPr sz="1150">
+                <a:solidFill>
+                  <a:srgbClr val="F9F9FB"/>
+                </a:solidFill>
+              </a:defRPr>
+            </a:pPr>
+            <a:r>
+              <a:t>• Редактирование адреса, телефона и режима</a:t>
+            </a:r>
+          </a:p>
+          <a:p>
+            <a:pPr>
+              <a:spcBef>
+                <a:spcPts val="800"/>
+              </a:spcBef>
+              <a:defRPr sz="1150">
+                <a:solidFill>
+                  <a:srgbClr val="F9F9FB"/>
+                </a:solidFill>
+              </a:defRPr>
+            </a:pPr>
+            <a:r>
+              <a:t>• Прямые ссылки на 2GIS, Instagram, WhatsApp</a:t>
+            </a:r>
+          </a:p>
+          <a:p>
+            <a:pPr>
+              <a:spcBef>
+                <a:spcPts val="800"/>
+              </a:spcBef>
+              <a:defRPr sz="1150">
+                <a:solidFill>
+                  <a:srgbClr val="F9F9FB"/>
+                </a:solidFill>
+              </a:defRPr>
+            </a:pPr>
+            <a:r>
+              <a:t>• Указание среднего чека и концепта кухни</a:t>
+            </a:r>
+          </a:p>
+          <a:p>
+            <a:pPr>
+              <a:spcBef>
+                <a:spcPts val="800"/>
+              </a:spcBef>
+              <a:defRPr sz="1150">
+                <a:solidFill>
+                  <a:srgbClr val="F9F9FB"/>
+                </a:solidFill>
+              </a:defRPr>
+            </a:pPr>
+            <a:r>
+              <a:t>• Регистрация нового филиала в 1 клик</a:t>
+            </a:r>
+          </a:p>
+        </p:txBody>
+      </p:sp>
+      <p:sp>
+        <p:nvSpPr>
+          <p:cNvPr id="8" name="Rounded Rectangle 7"/>
+          <p:cNvSpPr/>
+          <p:nvPr/>
+        </p:nvSpPr>
+        <p:spPr>
+          <a:xfrm>
+            <a:off x="4343400" y="1645920"/>
+            <a:ext cx="3474720" cy="4663440"/>
+          </a:xfrm>
+          <a:prstGeom prst="roundRect">
+            <a:avLst/>
+          </a:prstGeom>
+          <a:solidFill>
+            <a:srgbClr val="14171E"/>
+          </a:solidFill>
+          <a:ln w="15240">
+            <a:solidFill>
+              <a:srgbClr val="C5A880"/>
+            </a:solidFill>
+          </a:ln>
+        </p:spPr>
+        <p:style>
+          <a:lnRef idx="1">
+            <a:schemeClr val="accent1"/>
+          </a:lnRef>
+          <a:fillRef idx="3">
+            <a:schemeClr val="accent1"/>
+          </a:fillRef>
+          <a:effectRef idx="2">
+            <a:schemeClr val="accent1"/>
+          </a:effectRef>
+          <a:fontRef idx="minor">
+            <a:schemeClr val="lt1"/>
+          </a:fontRef>
+        </p:style>
+        <p:txBody>
+          <a:bodyPr rtlCol="0" anchor="ctr"/>
+          <a:lstStyle/>
+          <a:p>
+            <a:pPr algn="ctr"/>
+          </a:p>
+        </p:txBody>
+      </p:sp>
+      <p:sp>
+        <p:nvSpPr>
+          <p:cNvPr id="9" name="TextBox 8"/>
+          <p:cNvSpPr txBox="1"/>
+          <p:nvPr/>
+        </p:nvSpPr>
+        <p:spPr>
+          <a:xfrm>
+            <a:off x="4526280" y="1828800"/>
+            <a:ext cx="3108960" cy="4297680"/>
+          </a:xfrm>
+          <a:prstGeom prst="rect">
+            <a:avLst/>
+          </a:prstGeom>
+          <a:noFill/>
+        </p:spPr>
+        <p:txBody>
+          <a:bodyPr wrap="square">
+            <a:spAutoFit/>
+          </a:bodyPr>
+          <a:lstStyle/>
+          <a:p>
+            <a:pPr>
+              <a:defRPr sz="1450" b="1">
+                <a:solidFill>
+                  <a:srgbClr val="C5A880"/>
+                </a:solidFill>
+              </a:defRPr>
+            </a:pPr>
+            <a:r>
+              <a:t>🍽 Электронное Меню</a:t>
+            </a:r>
+          </a:p>
+          <a:p>
+            <a:pPr>
+              <a:spcBef>
+                <a:spcPts val="800"/>
+              </a:spcBef>
+              <a:defRPr sz="1150">
+                <a:solidFill>
+                  <a:srgbClr val="F9F9FB"/>
+                </a:solidFill>
+              </a:defRPr>
+            </a:pPr>
+            <a:r>
+              <a:t>• Добавление блюд по категориям</a:t>
+            </a:r>
+          </a:p>
+          <a:p>
+            <a:pPr>
+              <a:spcBef>
+                <a:spcPts val="800"/>
+              </a:spcBef>
+              <a:defRPr sz="1150">
+                <a:solidFill>
+                  <a:srgbClr val="F9F9FB"/>
+                </a:solidFill>
+              </a:defRPr>
+            </a:pPr>
+            <a:r>
+              <a:t>• Загрузка фото, граммовки и цен</a:t>
+            </a:r>
+          </a:p>
+          <a:p>
+            <a:pPr>
+              <a:spcBef>
+                <a:spcPts val="800"/>
+              </a:spcBef>
+              <a:defRPr sz="1150">
+                <a:solidFill>
+                  <a:srgbClr val="F9F9FB"/>
+                </a:solidFill>
+              </a:defRPr>
+            </a:pPr>
+            <a:r>
+              <a:t>• Мгновенное скрытие блюд на «стоп-листе»</a:t>
+            </a:r>
+          </a:p>
+          <a:p>
+            <a:pPr>
+              <a:spcBef>
+                <a:spcPts val="800"/>
+              </a:spcBef>
+              <a:defRPr sz="1150">
+                <a:solidFill>
+                  <a:srgbClr val="F9F9FB"/>
+                </a:solidFill>
+              </a:defRPr>
+            </a:pPr>
+            <a:r>
+              <a:t>• Синхронизация меню с витриной гостя</a:t>
+            </a:r>
+          </a:p>
+        </p:txBody>
+      </p:sp>
+      <p:sp>
+        <p:nvSpPr>
+          <p:cNvPr id="10" name="Rounded Rectangle 9"/>
+          <p:cNvSpPr/>
+          <p:nvPr/>
+        </p:nvSpPr>
+        <p:spPr>
+          <a:xfrm>
+            <a:off x="7955280" y="1645920"/>
+            <a:ext cx="3474720" cy="4663440"/>
+          </a:xfrm>
+          <a:prstGeom prst="roundRect">
+            <a:avLst/>
+          </a:prstGeom>
+          <a:solidFill>
+            <a:srgbClr val="14171E"/>
+          </a:solidFill>
+          <a:ln w="15240">
+            <a:solidFill>
+              <a:srgbClr val="34D399"/>
+            </a:solidFill>
+          </a:ln>
+        </p:spPr>
+        <p:style>
+          <a:lnRef idx="1">
+            <a:schemeClr val="accent1"/>
+          </a:lnRef>
+          <a:fillRef idx="3">
+            <a:schemeClr val="accent1"/>
+          </a:fillRef>
+          <a:effectRef idx="2">
+            <a:schemeClr val="accent1"/>
+          </a:effectRef>
+          <a:fontRef idx="minor">
+            <a:schemeClr val="lt1"/>
+          </a:fontRef>
+        </p:style>
+        <p:txBody>
+          <a:bodyPr rtlCol="0" anchor="ctr"/>
+          <a:lstStyle/>
+          <a:p>
+            <a:pPr algn="ctr"/>
+          </a:p>
+        </p:txBody>
+      </p:sp>
+      <p:sp>
+        <p:nvSpPr>
+          <p:cNvPr id="11" name="TextBox 10"/>
+          <p:cNvSpPr txBox="1"/>
+          <p:nvPr/>
+        </p:nvSpPr>
+        <p:spPr>
+          <a:xfrm>
+            <a:off x="8138160" y="1828800"/>
+            <a:ext cx="3108960" cy="4297680"/>
+          </a:xfrm>
+          <a:prstGeom prst="rect">
+            <a:avLst/>
+          </a:prstGeom>
+          <a:noFill/>
+        </p:spPr>
+        <p:txBody>
+          <a:bodyPr wrap="square">
+            <a:spAutoFit/>
+          </a:bodyPr>
+          <a:lstStyle/>
+          <a:p>
+            <a:pPr>
+              <a:defRPr sz="1450" b="1">
+                <a:solidFill>
+                  <a:srgbClr val="34D399"/>
+                </a:solidFill>
+              </a:defRPr>
+            </a:pPr>
+            <a:r>
+              <a:t>🪑 Конструктор Столов</a:t>
+            </a:r>
+          </a:p>
+          <a:p>
+            <a:pPr>
+              <a:spcBef>
+                <a:spcPts val="800"/>
+              </a:spcBef>
+              <a:defRPr sz="1150">
+                <a:solidFill>
+                  <a:srgbClr val="F9F9FB"/>
+                </a:solidFill>
+              </a:defRPr>
+            </a:pPr>
+            <a:r>
+              <a:t>• Добавление столов в зал с номерами</a:t>
+            </a:r>
+          </a:p>
+          <a:p>
+            <a:pPr>
+              <a:spcBef>
+                <a:spcPts val="800"/>
+              </a:spcBef>
+              <a:defRPr sz="1150">
+                <a:solidFill>
+                  <a:srgbClr val="F9F9FB"/>
+                </a:solidFill>
+              </a:defRPr>
+            </a:pPr>
+            <a:r>
+              <a:t>• Вместимость: 2, 4, 6, 8, 10, 12+ персон</a:t>
+            </a:r>
+          </a:p>
+          <a:p>
+            <a:pPr>
+              <a:spcBef>
+                <a:spcPts val="800"/>
+              </a:spcBef>
+              <a:defRPr sz="1150">
+                <a:solidFill>
+                  <a:srgbClr val="F9F9FB"/>
+                </a:solidFill>
+              </a:defRPr>
+            </a:pPr>
+            <a:r>
+              <a:t>• Выбор зоны (У окна, Терраса, VIP, Топчан)</a:t>
+            </a:r>
+          </a:p>
+          <a:p>
+            <a:pPr>
+              <a:spcBef>
+                <a:spcPts val="800"/>
+              </a:spcBef>
+              <a:defRPr sz="1150">
+                <a:solidFill>
+                  <a:srgbClr val="F9F9FB"/>
+                </a:solidFill>
+              </a:defRPr>
+            </a:pPr>
+            <a:r>
+              <a:t>• Описание столика для хостес</a:t>
+            </a:r>
+          </a:p>
+        </p:txBody>
+      </p:sp>
+    </p:spTree>
+  </p:cSld>
+  <p:clrMapOvr>
+    <a:masterClrMapping/>
+  </p:clrMapOvr>
+</p:sld>
+</file>
+
+<file path=ppt/slides/slide12.xml><?xml version="1.0" encoding="utf-8"?>
 <p:sld xmlns:a="http://schemas.openxmlformats.org/drawingml/2006/main" xmlns:p="http://schemas.openxmlformats.org/presentationml/2006/main" xmlns:r="http://schemas.openxmlformats.org/officeDocument/2006/relationships">
   <p:cSld>
     <p:spTree>
@@ -5621,475 +6144,6 @@
 </p:sld>
 </file>
 
-<file path=ppt/slides/slide12.xml><?xml version="1.0" encoding="utf-8"?>
-<p:sld xmlns:a="http://schemas.openxmlformats.org/drawingml/2006/main" xmlns:p="http://schemas.openxmlformats.org/presentationml/2006/main" xmlns:r="http://schemas.openxmlformats.org/officeDocument/2006/relationships">
-  <p:cSld>
-    <p:spTree>
-      <p:nvGrpSpPr>
-        <p:cNvPr id="1" name=""/>
-        <p:cNvGrpSpPr/>
-        <p:nvPr/>
-      </p:nvGrpSpPr>
-      <p:grpSpPr/>
-      <p:sp>
-        <p:nvSpPr>
-          <p:cNvPr id="2" name="Rectangle 1"/>
-          <p:cNvSpPr/>
-          <p:nvPr/>
-        </p:nvSpPr>
-        <p:spPr>
-          <a:xfrm>
-            <a:off x="0" y="0"/>
-            <a:ext cx="12191695" cy="6858000"/>
-          </a:xfrm>
-          <a:prstGeom prst="rect">
-            <a:avLst/>
-          </a:prstGeom>
-          <a:solidFill>
-            <a:srgbClr val="0B0D10"/>
-          </a:solidFill>
-          <a:ln>
-            <a:noFill/>
-          </a:ln>
-        </p:spPr>
-        <p:style>
-          <a:lnRef idx="1">
-            <a:schemeClr val="accent1"/>
-          </a:lnRef>
-          <a:fillRef idx="3">
-            <a:schemeClr val="accent1"/>
-          </a:fillRef>
-          <a:effectRef idx="2">
-            <a:schemeClr val="accent1"/>
-          </a:effectRef>
-          <a:fontRef idx="minor">
-            <a:schemeClr val="lt1"/>
-          </a:fontRef>
-        </p:style>
-        <p:txBody>
-          <a:bodyPr rtlCol="0" anchor="ctr"/>
-          <a:lstStyle/>
-          <a:p>
-            <a:pPr algn="ctr"/>
-          </a:p>
-        </p:txBody>
-      </p:sp>
-      <p:sp>
-        <p:nvSpPr>
-          <p:cNvPr id="3" name="TextBox 2"/>
-          <p:cNvSpPr txBox="1"/>
-          <p:nvPr/>
-        </p:nvSpPr>
-        <p:spPr>
-          <a:xfrm>
-            <a:off x="731520" y="347472"/>
-            <a:ext cx="10698480" cy="320040"/>
-          </a:xfrm>
-          <a:prstGeom prst="rect">
-            <a:avLst/>
-          </a:prstGeom>
-          <a:noFill/>
-        </p:spPr>
-        <p:txBody>
-          <a:bodyPr wrap="square" lIns="0" tIns="0" rIns="0" bIns="0">
-            <a:spAutoFit/>
-          </a:bodyPr>
-          <a:lstStyle/>
-          <a:p>
-            <a:pPr>
-              <a:defRPr sz="1100" b="1">
-                <a:solidFill>
-                  <a:srgbClr val="C5A880"/>
-                </a:solidFill>
-                <a:latin typeface="Segoe UI"/>
-              </a:defRPr>
-            </a:pPr>
-            <a:r>
-              <a:t>СТРАТЕГИЯ РЫНКА</a:t>
-            </a:r>
-          </a:p>
-        </p:txBody>
-      </p:sp>
-      <p:sp>
-        <p:nvSpPr>
-          <p:cNvPr id="4" name="TextBox 3"/>
-          <p:cNvSpPr txBox="1"/>
-          <p:nvPr/>
-        </p:nvSpPr>
-        <p:spPr>
-          <a:xfrm>
-            <a:off x="731520" y="640080"/>
-            <a:ext cx="10698480" cy="502920"/>
-          </a:xfrm>
-          <a:prstGeom prst="rect">
-            <a:avLst/>
-          </a:prstGeom>
-          <a:noFill/>
-        </p:spPr>
-        <p:txBody>
-          <a:bodyPr wrap="square" lIns="0" tIns="0" rIns="0" bIns="0">
-            <a:spAutoFit/>
-          </a:bodyPr>
-          <a:lstStyle/>
-          <a:p>
-            <a:pPr>
-              <a:defRPr sz="2200" b="1">
-                <a:solidFill>
-                  <a:srgbClr val="F9F9FB"/>
-                </a:solidFill>
-                <a:latin typeface="Georgia"/>
-              </a:defRPr>
-            </a:pPr>
-            <a:r>
-              <a:t>Позиционирование: «Голубой океан» RestoKZ PRO</a:t>
-            </a:r>
-          </a:p>
-        </p:txBody>
-      </p:sp>
-      <p:sp>
-        <p:nvSpPr>
-          <p:cNvPr id="5" name="TextBox 4"/>
-          <p:cNvSpPr txBox="1"/>
-          <p:nvPr/>
-        </p:nvSpPr>
-        <p:spPr>
-          <a:xfrm>
-            <a:off x="731520" y="1170432"/>
-            <a:ext cx="10698480" cy="320040"/>
-          </a:xfrm>
-          <a:prstGeom prst="rect">
-            <a:avLst/>
-          </a:prstGeom>
-          <a:noFill/>
-        </p:spPr>
-        <p:txBody>
-          <a:bodyPr wrap="square" lIns="0" tIns="0" rIns="0" bIns="0">
-            <a:spAutoFit/>
-          </a:bodyPr>
-          <a:lstStyle/>
-          <a:p>
-            <a:pPr>
-              <a:defRPr sz="1200">
-                <a:solidFill>
-                  <a:srgbClr val="A3AAB8"/>
-                </a:solidFill>
-                <a:latin typeface="Segoe UI"/>
-              </a:defRPr>
-            </a:pPr>
-            <a:r>
-              <a:t>Мы не конкурируем с монополистами (2GIS, Kaspi, iiko), а создаем с ними взаимовыгодный симбиоз</a:t>
-            </a:r>
-          </a:p>
-        </p:txBody>
-      </p:sp>
-      <p:sp>
-        <p:nvSpPr>
-          <p:cNvPr id="6" name="Rounded Rectangle 5"/>
-          <p:cNvSpPr/>
-          <p:nvPr/>
-        </p:nvSpPr>
-        <p:spPr>
-          <a:xfrm>
-            <a:off x="731520" y="1645920"/>
-            <a:ext cx="3474720" cy="4663440"/>
-          </a:xfrm>
-          <a:prstGeom prst="roundRect">
-            <a:avLst/>
-          </a:prstGeom>
-          <a:solidFill>
-            <a:srgbClr val="14171E"/>
-          </a:solidFill>
-          <a:ln w="15240">
-            <a:solidFill>
-              <a:srgbClr val="38BDF8"/>
-            </a:solidFill>
-          </a:ln>
-        </p:spPr>
-        <p:style>
-          <a:lnRef idx="1">
-            <a:schemeClr val="accent1"/>
-          </a:lnRef>
-          <a:fillRef idx="3">
-            <a:schemeClr val="accent1"/>
-          </a:fillRef>
-          <a:effectRef idx="2">
-            <a:schemeClr val="accent1"/>
-          </a:effectRef>
-          <a:fontRef idx="minor">
-            <a:schemeClr val="lt1"/>
-          </a:fontRef>
-        </p:style>
-        <p:txBody>
-          <a:bodyPr rtlCol="0" anchor="ctr"/>
-          <a:lstStyle/>
-          <a:p>
-            <a:pPr algn="ctr"/>
-          </a:p>
-        </p:txBody>
-      </p:sp>
-      <p:sp>
-        <p:nvSpPr>
-          <p:cNvPr id="7" name="TextBox 6"/>
-          <p:cNvSpPr txBox="1"/>
-          <p:nvPr/>
-        </p:nvSpPr>
-        <p:spPr>
-          <a:xfrm>
-            <a:off x="914400" y="1828800"/>
-            <a:ext cx="3108960" cy="4297680"/>
-          </a:xfrm>
-          <a:prstGeom prst="rect">
-            <a:avLst/>
-          </a:prstGeom>
-          <a:noFill/>
-        </p:spPr>
-        <p:txBody>
-          <a:bodyPr wrap="square">
-            <a:spAutoFit/>
-          </a:bodyPr>
-          <a:lstStyle/>
-          <a:p>
-            <a:pPr>
-              <a:defRPr sz="1350" b="1">
-                <a:solidFill>
-                  <a:srgbClr val="38BDF8"/>
-                </a:solidFill>
-              </a:defRPr>
-            </a:pPr>
-            <a:r>
-              <a:t>🤝 1. Симбиоз с 2GIS и Instagram</a:t>
-            </a:r>
-          </a:p>
-          <a:p>
-            <a:pPr>
-              <a:spcBef>
-                <a:spcPts val="1200"/>
-              </a:spcBef>
-              <a:defRPr sz="1100">
-                <a:solidFill>
-                  <a:srgbClr val="F9F9FB"/>
-                </a:solidFill>
-              </a:defRPr>
-            </a:pPr>
-            <a:r>
-              <a:t>Заведения тратят до 1.5 млн ₸ на рекламу. Сейчас трафик сливается в WhatsApp с конверсией всего 4%.</a:t>
-            </a:r>
-            <a:br/>
-            <a:br/>
-            <a:r>
-              <a:t>Ссылка на RestoKZ Mini App в шапке Instagram и в карточке 2GIS увеличивает конверсию рекламы в реальную посадку в 3-4 раза. Мы монетизируем их трафик без войны.</a:t>
-            </a:r>
-          </a:p>
-        </p:txBody>
-      </p:sp>
-      <p:sp>
-        <p:nvSpPr>
-          <p:cNvPr id="8" name="Rounded Rectangle 7"/>
-          <p:cNvSpPr/>
-          <p:nvPr/>
-        </p:nvSpPr>
-        <p:spPr>
-          <a:xfrm>
-            <a:off x="4343400" y="1645920"/>
-            <a:ext cx="3474720" cy="4663440"/>
-          </a:xfrm>
-          <a:prstGeom prst="roundRect">
-            <a:avLst/>
-          </a:prstGeom>
-          <a:solidFill>
-            <a:srgbClr val="14171E"/>
-          </a:solidFill>
-          <a:ln w="15240">
-            <a:solidFill>
-              <a:srgbClr val="C5A880"/>
-            </a:solidFill>
-          </a:ln>
-        </p:spPr>
-        <p:style>
-          <a:lnRef idx="1">
-            <a:schemeClr val="accent1"/>
-          </a:lnRef>
-          <a:fillRef idx="3">
-            <a:schemeClr val="accent1"/>
-          </a:fillRef>
-          <a:effectRef idx="2">
-            <a:schemeClr val="accent1"/>
-          </a:effectRef>
-          <a:fontRef idx="minor">
-            <a:schemeClr val="lt1"/>
-          </a:fontRef>
-        </p:style>
-        <p:txBody>
-          <a:bodyPr rtlCol="0" anchor="ctr"/>
-          <a:lstStyle/>
-          <a:p>
-            <a:pPr algn="ctr"/>
-          </a:p>
-        </p:txBody>
-      </p:sp>
-      <p:sp>
-        <p:nvSpPr>
-          <p:cNvPr id="9" name="TextBox 8"/>
-          <p:cNvSpPr txBox="1"/>
-          <p:nvPr/>
-        </p:nvSpPr>
-        <p:spPr>
-          <a:xfrm>
-            <a:off x="4526280" y="1828800"/>
-            <a:ext cx="3108960" cy="4297680"/>
-          </a:xfrm>
-          <a:prstGeom prst="rect">
-            <a:avLst/>
-          </a:prstGeom>
-          <a:noFill/>
-        </p:spPr>
-        <p:txBody>
-          <a:bodyPr wrap="square">
-            <a:spAutoFit/>
-          </a:bodyPr>
-          <a:lstStyle/>
-          <a:p>
-            <a:pPr>
-              <a:defRPr sz="1350" b="1">
-                <a:solidFill>
-                  <a:srgbClr val="C5A880"/>
-                </a:solidFill>
-              </a:defRPr>
-            </a:pPr>
-            <a:r>
-              <a:t>💻 2. Симбиоз с кассовыми ERP (iiko / R-Keeper)</a:t>
-            </a:r>
-          </a:p>
-          <a:p>
-            <a:pPr>
-              <a:spcBef>
-                <a:spcPts val="1200"/>
-              </a:spcBef>
-              <a:defRPr sz="1100">
-                <a:solidFill>
-                  <a:srgbClr val="F9F9FB"/>
-                </a:solidFill>
-              </a:defRPr>
-            </a:pPr>
-            <a:r>
-              <a:t>iiko идеально считает себестоимость стейков на кухне и склад, но слишком громоздка для смартфона хостес у входной двери.</a:t>
-            </a:r>
-            <a:br/>
-            <a:br/>
-            <a:r>
-              <a:t>RestoKZ закрывает узкую боль мобильной посадки зала и приема гостей, не требуя от ресторана дорогостоящей смены касс.</a:t>
-            </a:r>
-          </a:p>
-        </p:txBody>
-      </p:sp>
-      <p:sp>
-        <p:nvSpPr>
-          <p:cNvPr id="10" name="Rounded Rectangle 9"/>
-          <p:cNvSpPr/>
-          <p:nvPr/>
-        </p:nvSpPr>
-        <p:spPr>
-          <a:xfrm>
-            <a:off x="7955280" y="1645920"/>
-            <a:ext cx="3474720" cy="4663440"/>
-          </a:xfrm>
-          <a:prstGeom prst="roundRect">
-            <a:avLst/>
-          </a:prstGeom>
-          <a:solidFill>
-            <a:srgbClr val="14171E"/>
-          </a:solidFill>
-          <a:ln w="15240">
-            <a:solidFill>
-              <a:srgbClr val="34D399"/>
-            </a:solidFill>
-          </a:ln>
-        </p:spPr>
-        <p:style>
-          <a:lnRef idx="1">
-            <a:schemeClr val="accent1"/>
-          </a:lnRef>
-          <a:fillRef idx="3">
-            <a:schemeClr val="accent1"/>
-          </a:fillRef>
-          <a:effectRef idx="2">
-            <a:schemeClr val="accent1"/>
-          </a:effectRef>
-          <a:fontRef idx="minor">
-            <a:schemeClr val="lt1"/>
-          </a:fontRef>
-        </p:style>
-        <p:txBody>
-          <a:bodyPr rtlCol="0" anchor="ctr"/>
-          <a:lstStyle/>
-          <a:p>
-            <a:pPr algn="ctr"/>
-          </a:p>
-        </p:txBody>
-      </p:sp>
-      <p:sp>
-        <p:nvSpPr>
-          <p:cNvPr id="11" name="TextBox 10"/>
-          <p:cNvSpPr txBox="1"/>
-          <p:nvPr/>
-        </p:nvSpPr>
-        <p:spPr>
-          <a:xfrm>
-            <a:off x="8138160" y="1828800"/>
-            <a:ext cx="3108960" cy="4297680"/>
-          </a:xfrm>
-          <a:prstGeom prst="rect">
-            <a:avLst/>
-          </a:prstGeom>
-          <a:noFill/>
-        </p:spPr>
-        <p:txBody>
-          <a:bodyPr wrap="square">
-            <a:spAutoFit/>
-          </a:bodyPr>
-          <a:lstStyle/>
-          <a:p>
-            <a:pPr>
-              <a:defRPr sz="1350" b="1">
-                <a:solidFill>
-                  <a:srgbClr val="34D399"/>
-                </a:solidFill>
-              </a:defRPr>
-            </a:pPr>
-            <a:r>
-              <a:t>🛡 3. Локальный защитный ров (Local Moat)</a:t>
-            </a:r>
-          </a:p>
-          <a:p>
-            <a:pPr>
-              <a:spcBef>
-                <a:spcPts val="1200"/>
-              </a:spcBef>
-              <a:defRPr sz="1100">
-                <a:solidFill>
-                  <a:srgbClr val="F9F9FB"/>
-                </a:solidFill>
-              </a:defRPr>
-            </a:pPr>
-            <a:r>
-              <a:t>Ни один зарубежный сервис не понимает, что такое «бронь топчана на құдалық на 15 человек» или «звонок от Баке с просьбой занять лучший стол».</a:t>
-            </a:r>
-            <a:br/>
-            <a:br/>
-            <a:r>
-              <a:t>Интерфейс на казахском языке и модуль «По звонку» за 3 секунды создают непреодолимый барьер для внешних конкурентов.</a:t>
-            </a:r>
-          </a:p>
-        </p:txBody>
-      </p:sp>
-    </p:spTree>
-  </p:cSld>
-  <p:clrMapOvr>
-    <a:masterClrMapping/>
-  </p:clrMapOvr>
-</p:sld>
-</file>
-
 <file path=ppt/slides/slide13.xml><?xml version="1.0" encoding="utf-8"?>
 <p:sld xmlns:a="http://schemas.openxmlformats.org/drawingml/2006/main" xmlns:p="http://schemas.openxmlformats.org/presentationml/2006/main" xmlns:r="http://schemas.openxmlformats.org/officeDocument/2006/relationships">
   <p:cSld>
@@ -6174,7 +6228,7 @@
               </a:defRPr>
             </a:pPr>
             <a:r>
-              <a:t>БИЗНЕС-МОДЕЛЬ</a:t>
+              <a:t>СТРАТЕГИЯ РЫНКА</a:t>
             </a:r>
           </a:p>
         </p:txBody>
@@ -6210,7 +6264,7 @@
               </a:defRPr>
             </a:pPr>
             <a:r>
-              <a:t>Тарифные планы и окупаемость для заведения</a:t>
+              <a:t>Позиционирование: «Голубой океан» RestoKZ PRO</a:t>
             </a:r>
           </a:p>
         </p:txBody>
@@ -6246,7 +6300,7 @@
               </a:defRPr>
             </a:pPr>
             <a:r>
-              <a:t>Формула 1:1 — окупается всего за 1 спасенный стол в месяц (чек от 25 000 ₸)</a:t>
+              <a:t>Мы не конкурируем с монополистами (2GIS, Kaspi, iiko), а создаем с ними взаимовыгодный симбиоз</a:t>
             </a:r>
           </a:p>
         </p:txBody>
@@ -6270,7 +6324,7 @@
           </a:solidFill>
           <a:ln w="15240">
             <a:solidFill>
-              <a:srgbClr val="3C4452"/>
+              <a:srgbClr val="38BDF8"/>
             </a:solidFill>
           </a:ln>
         </p:spPr>
@@ -6321,117 +6375,32 @@
             <a:pPr>
               <a:defRPr sz="1350" b="1">
                 <a:solidFill>
+                  <a:srgbClr val="38BDF8"/>
+                </a:solidFill>
+              </a:defRPr>
+            </a:pPr>
+            <a:r>
+              <a:t>🤝 1. Симбиоз с 2GIS и Instagram</a:t>
+            </a:r>
+          </a:p>
+          <a:p>
+            <a:pPr>
+              <a:spcBef>
+                <a:spcPts val="1200"/>
+              </a:spcBef>
+              <a:defRPr sz="1100">
+                <a:solidFill>
                   <a:srgbClr val="F9F9FB"/>
                 </a:solidFill>
               </a:defRPr>
             </a:pPr>
             <a:r>
-              <a:t>ТАРИФ «СТАРТ»</a:t>
-            </a:r>
-          </a:p>
-          <a:p>
-            <a:pPr>
-              <a:spcBef>
-                <a:spcPts val="600"/>
-              </a:spcBef>
-              <a:defRPr sz="2800" b="1">
-                <a:solidFill>
-                  <a:srgbClr val="F9F9FB"/>
-                </a:solidFill>
-              </a:defRPr>
-            </a:pPr>
-            <a:r>
-              <a:t>20 000 ₸</a:t>
-            </a:r>
-          </a:p>
-          <a:p>
-            <a:pPr>
-              <a:spcBef>
-                <a:spcPts val="200"/>
-              </a:spcBef>
-              <a:defRPr sz="1000">
-                <a:solidFill>
-                  <a:srgbClr val="A3AAB8"/>
-                </a:solidFill>
-              </a:defRPr>
-            </a:pPr>
-            <a:r>
-              <a:t>в месяц за заведение</a:t>
-            </a:r>
-          </a:p>
-          <a:p>
-            <a:pPr>
-              <a:spcBef>
-                <a:spcPts val="800"/>
-              </a:spcBef>
-              <a:defRPr sz="1100">
-                <a:solidFill>
-                  <a:srgbClr val="F9F9FB"/>
-                </a:solidFill>
-              </a:defRPr>
-            </a:pPr>
-            <a:r>
-              <a:t>✓ До 12 столиков в заведении</a:t>
-            </a:r>
-          </a:p>
-          <a:p>
-            <a:pPr>
-              <a:spcBef>
-                <a:spcPts val="800"/>
-              </a:spcBef>
-              <a:defRPr sz="1100">
-                <a:solidFill>
-                  <a:srgbClr val="F9F9FB"/>
-                </a:solidFill>
-              </a:defRPr>
-            </a:pPr>
-            <a:r>
-              <a:t>✓ Гостевой Telegram Mini App</a:t>
-            </a:r>
-          </a:p>
-          <a:p>
-            <a:pPr>
-              <a:spcBef>
-                <a:spcPts val="800"/>
-              </a:spcBef>
-              <a:defRPr sz="1100">
-                <a:solidFill>
-                  <a:srgbClr val="F9F9FB"/>
-                </a:solidFill>
-              </a:defRPr>
-            </a:pPr>
-            <a:r>
-              <a:t>✓ Журнал онлайн-бронирований</a:t>
-            </a:r>
-          </a:p>
-          <a:p>
-            <a:pPr>
-              <a:spcBef>
-                <a:spcPts val="800"/>
-              </a:spcBef>
-              <a:defRPr sz="1100">
-                <a:solidFill>
-                  <a:srgbClr val="F9F9FB"/>
-                </a:solidFill>
-              </a:defRPr>
-            </a:pPr>
-            <a:r>
-              <a:t>✓ Напоминания гостям в Telegram</a:t>
-            </a:r>
-          </a:p>
-          <a:p>
-            <a:pPr>
-              <a:spcBef>
-                <a:spcPts val="800"/>
-              </a:spcBef>
-              <a:defRPr sz="1100">
-                <a:solidFill>
-                  <a:srgbClr val="F9F9FB"/>
-                </a:solidFill>
-              </a:defRPr>
-            </a:pPr>
-            <a:r>
-              <a:t>✓ Техническая поддержка 7 дней</a:t>
+              <a:t>Заведения тратят до 1.5 млн ₸ на рекламу. Сейчас трафик сливается в WhatsApp с конверсией всего 4%.</a:t>
+            </a:r>
+            <a:br/>
+            <a:br/>
+            <a:r>
+              <a:t>Ссылка на RestoKZ Mini App в шапке Instagram и в карточке 2GIS увеличивает конверсию рекламы в реальную посадку в 3-4 раза. Мы монетизируем их трафик без войны.</a:t>
             </a:r>
           </a:p>
         </p:txBody>
@@ -6451,7 +6420,7 @@
             <a:avLst/>
           </a:prstGeom>
           <a:solidFill>
-            <a:srgbClr val="1A1E27"/>
+            <a:srgbClr val="14171E"/>
           </a:solidFill>
           <a:ln w="15240">
             <a:solidFill>
@@ -6511,127 +6480,27 @@
               </a:defRPr>
             </a:pPr>
             <a:r>
-              <a:t>ТАРИФ «PRO ХИТ»</a:t>
-            </a:r>
-          </a:p>
-          <a:p>
-            <a:pPr>
-              <a:spcBef>
-                <a:spcPts val="600"/>
-              </a:spcBef>
-              <a:defRPr sz="2800" b="1">
+              <a:t>💻 2. Симбиоз с кассовыми ERP (iiko / R-Keeper)</a:t>
+            </a:r>
+          </a:p>
+          <a:p>
+            <a:pPr>
+              <a:spcBef>
+                <a:spcPts val="1200"/>
+              </a:spcBef>
+              <a:defRPr sz="1100">
                 <a:solidFill>
                   <a:srgbClr val="F9F9FB"/>
                 </a:solidFill>
               </a:defRPr>
             </a:pPr>
             <a:r>
-              <a:t>25 000 ₸</a:t>
-            </a:r>
-          </a:p>
-          <a:p>
-            <a:pPr>
-              <a:spcBef>
-                <a:spcPts val="200"/>
-              </a:spcBef>
-              <a:defRPr sz="1000">
-                <a:solidFill>
-                  <a:srgbClr val="A3AAB8"/>
-                </a:solidFill>
-              </a:defRPr>
-            </a:pPr>
-            <a:r>
-              <a:t>в месяц за заведение (Рекомендуемый)</a:t>
-            </a:r>
-          </a:p>
-          <a:p>
-            <a:pPr>
-              <a:spcBef>
-                <a:spcPts val="800"/>
-              </a:spcBef>
-              <a:defRPr sz="1100">
-                <a:solidFill>
-                  <a:srgbClr val="F9F9FB"/>
-                </a:solidFill>
-              </a:defRPr>
-            </a:pPr>
-            <a:r>
-              <a:t>✓ Неограниченное число столов</a:t>
-            </a:r>
-          </a:p>
-          <a:p>
-            <a:pPr>
-              <a:spcBef>
-                <a:spcPts val="800"/>
-              </a:spcBef>
-              <a:defRPr sz="1100">
-                <a:solidFill>
-                  <a:srgbClr val="F9F9FB"/>
-                </a:solidFill>
-              </a:defRPr>
-            </a:pPr>
-            <a:r>
-              <a:t>✓ Интерактивная карта зала и шахматка</a:t>
-            </a:r>
-          </a:p>
-          <a:p>
-            <a:pPr>
-              <a:spcBef>
-                <a:spcPts val="800"/>
-              </a:spcBef>
-              <a:defRPr sz="1100">
-                <a:solidFill>
-                  <a:srgbClr val="F9F9FB"/>
-                </a:solidFill>
-              </a:defRPr>
-            </a:pPr>
-            <a:r>
-              <a:t>✓ Управление рабочей сменой и Z-отчет</a:t>
-            </a:r>
-          </a:p>
-          <a:p>
-            <a:pPr>
-              <a:spcBef>
-                <a:spcPts val="800"/>
-              </a:spcBef>
-              <a:defRPr sz="1100">
-                <a:solidFill>
-                  <a:srgbClr val="F9F9FB"/>
-                </a:solidFill>
-              </a:defRPr>
-            </a:pPr>
-            <a:r>
-              <a:t>✓ Звуковые уведомления (Chime)</a:t>
-            </a:r>
-          </a:p>
-          <a:p>
-            <a:pPr>
-              <a:spcBef>
-                <a:spcPts val="800"/>
-              </a:spcBef>
-              <a:defRPr sz="1100">
-                <a:solidFill>
-                  <a:srgbClr val="F9F9FB"/>
-                </a:solidFill>
-              </a:defRPr>
-            </a:pPr>
-            <a:r>
-              <a:t>✓ Модуль Walk-in (бронь от двери)</a:t>
-            </a:r>
-          </a:p>
-          <a:p>
-            <a:pPr>
-              <a:spcBef>
-                <a:spcPts val="800"/>
-              </a:spcBef>
-              <a:defRPr sz="1100">
-                <a:solidFill>
-                  <a:srgbClr val="F9F9FB"/>
-                </a:solidFill>
-              </a:defRPr>
-            </a:pPr>
-            <a:r>
-              <a:t>✓ Приоритетная поддержка 24/7</a:t>
+              <a:t>iiko идеально считает себестоимость стейков на кухне и склад, но слишком громоздка для смартфона хостес у входной двери.</a:t>
+            </a:r>
+            <a:br/>
+            <a:br/>
+            <a:r>
+              <a:t>RestoKZ закрывает узкую боль мобильной посадки зала и приема гостей, не требуя от ресторана дорогостоящей смены касс.</a:t>
             </a:r>
           </a:p>
         </p:txBody>
@@ -6655,7 +6524,7 @@
           </a:solidFill>
           <a:ln w="15240">
             <a:solidFill>
-              <a:srgbClr val="3C4452"/>
+              <a:srgbClr val="34D399"/>
             </a:solidFill>
           </a:ln>
         </p:spPr>
@@ -6706,117 +6575,32 @@
             <a:pPr>
               <a:defRPr sz="1350" b="1">
                 <a:solidFill>
-                  <a:srgbClr val="38BDF8"/>
-                </a:solidFill>
-              </a:defRPr>
-            </a:pPr>
-            <a:r>
-              <a:t>ТАРИФ «СЕТЬ / VIP»</a:t>
-            </a:r>
-          </a:p>
-          <a:p>
-            <a:pPr>
-              <a:spcBef>
-                <a:spcPts val="600"/>
-              </a:spcBef>
-              <a:defRPr sz="2800" b="1">
+                  <a:srgbClr val="34D399"/>
+                </a:solidFill>
+              </a:defRPr>
+            </a:pPr>
+            <a:r>
+              <a:t>🛡 3. Локальный защитный ров (Local Moat)</a:t>
+            </a:r>
+          </a:p>
+          <a:p>
+            <a:pPr>
+              <a:spcBef>
+                <a:spcPts val="1200"/>
+              </a:spcBef>
+              <a:defRPr sz="1100">
                 <a:solidFill>
                   <a:srgbClr val="F9F9FB"/>
                 </a:solidFill>
               </a:defRPr>
             </a:pPr>
             <a:r>
-              <a:t>35 000 ₸</a:t>
-            </a:r>
-          </a:p>
-          <a:p>
-            <a:pPr>
-              <a:spcBef>
-                <a:spcPts val="200"/>
-              </a:spcBef>
-              <a:defRPr sz="1000">
-                <a:solidFill>
-                  <a:srgbClr val="A3AAB8"/>
-                </a:solidFill>
-              </a:defRPr>
-            </a:pPr>
-            <a:r>
-              <a:t>в месяц за точку (для сетей)</a:t>
-            </a:r>
-          </a:p>
-          <a:p>
-            <a:pPr>
-              <a:spcBef>
-                <a:spcPts val="800"/>
-              </a:spcBef>
-              <a:defRPr sz="1100">
-                <a:solidFill>
-                  <a:srgbClr val="F9F9FB"/>
-                </a:solidFill>
-              </a:defRPr>
-            </a:pPr>
-            <a:r>
-              <a:t>✓ Всё, что входит в тариф PRO</a:t>
-            </a:r>
-          </a:p>
-          <a:p>
-            <a:pPr>
-              <a:spcBef>
-                <a:spcPts val="800"/>
-              </a:spcBef>
-              <a:defRPr sz="1100">
-                <a:solidFill>
-                  <a:srgbClr val="F9F9FB"/>
-                </a:solidFill>
-              </a:defRPr>
-            </a:pPr>
-            <a:r>
-              <a:t>✓ Единый мультилокационный кабинет</a:t>
-            </a:r>
-          </a:p>
-          <a:p>
-            <a:pPr>
-              <a:spcBef>
-                <a:spcPts val="800"/>
-              </a:spcBef>
-              <a:defRPr sz="1100">
-                <a:solidFill>
-                  <a:srgbClr val="F9F9FB"/>
-                </a:solidFill>
-              </a:defRPr>
-            </a:pPr>
-            <a:r>
-              <a:t>✓ Неограниченное число филиалов сети</a:t>
-            </a:r>
-          </a:p>
-          <a:p>
-            <a:pPr>
-              <a:spcBef>
-                <a:spcPts val="800"/>
-              </a:spcBef>
-              <a:defRPr sz="1100">
-                <a:solidFill>
-                  <a:srgbClr val="F9F9FB"/>
-                </a:solidFill>
-              </a:defRPr>
-            </a:pPr>
-            <a:r>
-              <a:t>✓ Персональный менеджер внедрения</a:t>
-            </a:r>
-          </a:p>
-          <a:p>
-            <a:pPr>
-              <a:spcBef>
-                <a:spcPts val="800"/>
-              </a:spcBef>
-              <a:defRPr sz="1100">
-                <a:solidFill>
-                  <a:srgbClr val="F9F9FB"/>
-                </a:solidFill>
-              </a:defRPr>
-            </a:pPr>
-            <a:r>
-              <a:t>✓ Кастомизация под брендбук ресторана</a:t>
+              <a:t>Ни один зарубежный сервис не понимает, что такое «бронь топчана на құдалық на 15 человек» или «звонок от Баке с просьбой занять лучший стол».</a:t>
+            </a:r>
+            <a:br/>
+            <a:br/>
+            <a:r>
+              <a:t>Интерфейс на казахском языке и модуль «По звонку» за 3 секунды создают непреодолимый барьер для внешних конкурентов.</a:t>
             </a:r>
           </a:p>
         </p:txBody>
@@ -6913,7 +6697,7 @@
               </a:defRPr>
             </a:pPr>
             <a:r>
-              <a:t>СТРАТЕГИЯ РАЗВИТИЯ</a:t>
+              <a:t>БИЗНЕС-МОДЕЛЬ</a:t>
             </a:r>
           </a:p>
         </p:txBody>
@@ -6949,7 +6733,7 @@
               </a:defRPr>
             </a:pPr>
             <a:r>
-              <a:t>Дорожная карта: От пилота к экосистеме №1 в Казахстане</a:t>
+              <a:t>Тарифные планы и окупаемость для заведения</a:t>
             </a:r>
           </a:p>
         </p:txBody>
@@ -6985,7 +6769,7 @@
               </a:defRPr>
             </a:pPr>
             <a:r>
-              <a:t>Поэтапное расширение функционала и ликвидация No-Show до абсолютного нуля</a:t>
+              <a:t>Формула 1:1 — окупается всего за 1 спасенный стол в месяц (чек от 25 000 ₸)</a:t>
             </a:r>
           </a:p>
         </p:txBody>
@@ -7009,7 +6793,7 @@
           </a:solidFill>
           <a:ln w="15240">
             <a:solidFill>
-              <a:srgbClr val="34D399"/>
+              <a:srgbClr val="3C4452"/>
             </a:solidFill>
           </a:ln>
         </p:spPr>
@@ -7060,12 +6844,42 @@
             <a:pPr>
               <a:defRPr sz="1350" b="1">
                 <a:solidFill>
-                  <a:srgbClr val="34D399"/>
-                </a:solidFill>
-              </a:defRPr>
-            </a:pPr>
-            <a:r>
-              <a:t>v2.4 Live (РЕАЛИЗОВАНО)</a:t>
+                  <a:srgbClr val="F9F9FB"/>
+                </a:solidFill>
+              </a:defRPr>
+            </a:pPr>
+            <a:r>
+              <a:t>ТАРИФ «СТАРТ»</a:t>
+            </a:r>
+          </a:p>
+          <a:p>
+            <a:pPr>
+              <a:spcBef>
+                <a:spcPts val="600"/>
+              </a:spcBef>
+              <a:defRPr sz="2800" b="1">
+                <a:solidFill>
+                  <a:srgbClr val="F9F9FB"/>
+                </a:solidFill>
+              </a:defRPr>
+            </a:pPr>
+            <a:r>
+              <a:t>20 000 ₸</a:t>
+            </a:r>
+          </a:p>
+          <a:p>
+            <a:pPr>
+              <a:spcBef>
+                <a:spcPts val="200"/>
+              </a:spcBef>
+              <a:defRPr sz="1000">
+                <a:solidFill>
+                  <a:srgbClr val="A3AAB8"/>
+                </a:solidFill>
+              </a:defRPr>
+            </a:pPr>
+            <a:r>
+              <a:t>в месяц за заведение</a:t>
             </a:r>
           </a:p>
           <a:p>
@@ -7080,7 +6894,7 @@
               </a:defRPr>
             </a:pPr>
             <a:r>
-              <a:t>• Полноценный гостевой WebApp с выбором залов и меню</a:t>
+              <a:t>✓ До 12 столиков в заведении</a:t>
             </a:r>
           </a:p>
           <a:p>
@@ -7095,7 +6909,7 @@
               </a:defRPr>
             </a:pPr>
             <a:r>
-              <a:t>• Мобильный терминал хостес с контекстными кнопками</a:t>
+              <a:t>✓ Гостевой Telegram Mini App</a:t>
             </a:r>
           </a:p>
           <a:p>
@@ -7110,7 +6924,7 @@
               </a:defRPr>
             </a:pPr>
             <a:r>
-              <a:t>• Интерактивная карта зала с цветовой занятостью столов</a:t>
+              <a:t>✓ Журнал онлайн-бронирований</a:t>
             </a:r>
           </a:p>
           <a:p>
@@ -7125,7 +6939,7 @@
               </a:defRPr>
             </a:pPr>
             <a:r>
-              <a:t>• Учет смены персонала, Z-отчеты и консьерж-гонг Chime</a:t>
+              <a:t>✓ Напоминания гостям в Telegram</a:t>
             </a:r>
           </a:p>
           <a:p>
@@ -7140,7 +6954,7 @@
               </a:defRPr>
             </a:pPr>
             <a:r>
-              <a:t>• Мультилокация и трехъязычие (KZ / RU / EN)</a:t>
+              <a:t>✓ Техническая поддержка 7 дней</a:t>
             </a:r>
           </a:p>
         </p:txBody>
@@ -7154,6 +6968,206 @@
         <p:spPr>
           <a:xfrm>
             <a:off x="4343400" y="1645920"/>
+            <a:ext cx="3474720" cy="4663440"/>
+          </a:xfrm>
+          <a:prstGeom prst="roundRect">
+            <a:avLst/>
+          </a:prstGeom>
+          <a:solidFill>
+            <a:srgbClr val="1A1E27"/>
+          </a:solidFill>
+          <a:ln w="15240">
+            <a:solidFill>
+              <a:srgbClr val="C5A880"/>
+            </a:solidFill>
+          </a:ln>
+        </p:spPr>
+        <p:style>
+          <a:lnRef idx="1">
+            <a:schemeClr val="accent1"/>
+          </a:lnRef>
+          <a:fillRef idx="3">
+            <a:schemeClr val="accent1"/>
+          </a:fillRef>
+          <a:effectRef idx="2">
+            <a:schemeClr val="accent1"/>
+          </a:effectRef>
+          <a:fontRef idx="minor">
+            <a:schemeClr val="lt1"/>
+          </a:fontRef>
+        </p:style>
+        <p:txBody>
+          <a:bodyPr rtlCol="0" anchor="ctr"/>
+          <a:lstStyle/>
+          <a:p>
+            <a:pPr algn="ctr"/>
+          </a:p>
+        </p:txBody>
+      </p:sp>
+      <p:sp>
+        <p:nvSpPr>
+          <p:cNvPr id="9" name="TextBox 8"/>
+          <p:cNvSpPr txBox="1"/>
+          <p:nvPr/>
+        </p:nvSpPr>
+        <p:spPr>
+          <a:xfrm>
+            <a:off x="4526280" y="1828800"/>
+            <a:ext cx="3108960" cy="4297680"/>
+          </a:xfrm>
+          <a:prstGeom prst="rect">
+            <a:avLst/>
+          </a:prstGeom>
+          <a:noFill/>
+        </p:spPr>
+        <p:txBody>
+          <a:bodyPr wrap="square">
+            <a:spAutoFit/>
+          </a:bodyPr>
+          <a:lstStyle/>
+          <a:p>
+            <a:pPr>
+              <a:defRPr sz="1350" b="1">
+                <a:solidFill>
+                  <a:srgbClr val="C5A880"/>
+                </a:solidFill>
+              </a:defRPr>
+            </a:pPr>
+            <a:r>
+              <a:t>ТАРИФ «PRO ХИТ»</a:t>
+            </a:r>
+          </a:p>
+          <a:p>
+            <a:pPr>
+              <a:spcBef>
+                <a:spcPts val="600"/>
+              </a:spcBef>
+              <a:defRPr sz="2800" b="1">
+                <a:solidFill>
+                  <a:srgbClr val="F9F9FB"/>
+                </a:solidFill>
+              </a:defRPr>
+            </a:pPr>
+            <a:r>
+              <a:t>25 000 ₸</a:t>
+            </a:r>
+          </a:p>
+          <a:p>
+            <a:pPr>
+              <a:spcBef>
+                <a:spcPts val="200"/>
+              </a:spcBef>
+              <a:defRPr sz="1000">
+                <a:solidFill>
+                  <a:srgbClr val="A3AAB8"/>
+                </a:solidFill>
+              </a:defRPr>
+            </a:pPr>
+            <a:r>
+              <a:t>в месяц за заведение (Рекомендуемый)</a:t>
+            </a:r>
+          </a:p>
+          <a:p>
+            <a:pPr>
+              <a:spcBef>
+                <a:spcPts val="800"/>
+              </a:spcBef>
+              <a:defRPr sz="1100">
+                <a:solidFill>
+                  <a:srgbClr val="F9F9FB"/>
+                </a:solidFill>
+              </a:defRPr>
+            </a:pPr>
+            <a:r>
+              <a:t>✓ Неограниченное число столов</a:t>
+            </a:r>
+          </a:p>
+          <a:p>
+            <a:pPr>
+              <a:spcBef>
+                <a:spcPts val="800"/>
+              </a:spcBef>
+              <a:defRPr sz="1100">
+                <a:solidFill>
+                  <a:srgbClr val="F9F9FB"/>
+                </a:solidFill>
+              </a:defRPr>
+            </a:pPr>
+            <a:r>
+              <a:t>✓ Интерактивная карта зала и шахматка</a:t>
+            </a:r>
+          </a:p>
+          <a:p>
+            <a:pPr>
+              <a:spcBef>
+                <a:spcPts val="800"/>
+              </a:spcBef>
+              <a:defRPr sz="1100">
+                <a:solidFill>
+                  <a:srgbClr val="F9F9FB"/>
+                </a:solidFill>
+              </a:defRPr>
+            </a:pPr>
+            <a:r>
+              <a:t>✓ Управление рабочей сменой и Z-отчет</a:t>
+            </a:r>
+          </a:p>
+          <a:p>
+            <a:pPr>
+              <a:spcBef>
+                <a:spcPts val="800"/>
+              </a:spcBef>
+              <a:defRPr sz="1100">
+                <a:solidFill>
+                  <a:srgbClr val="F9F9FB"/>
+                </a:solidFill>
+              </a:defRPr>
+            </a:pPr>
+            <a:r>
+              <a:t>✓ Звуковые уведомления (Chime)</a:t>
+            </a:r>
+          </a:p>
+          <a:p>
+            <a:pPr>
+              <a:spcBef>
+                <a:spcPts val="800"/>
+              </a:spcBef>
+              <a:defRPr sz="1100">
+                <a:solidFill>
+                  <a:srgbClr val="F9F9FB"/>
+                </a:solidFill>
+              </a:defRPr>
+            </a:pPr>
+            <a:r>
+              <a:t>✓ Модуль Walk-in (бронь от двери)</a:t>
+            </a:r>
+          </a:p>
+          <a:p>
+            <a:pPr>
+              <a:spcBef>
+                <a:spcPts val="800"/>
+              </a:spcBef>
+              <a:defRPr sz="1100">
+                <a:solidFill>
+                  <a:srgbClr val="F9F9FB"/>
+                </a:solidFill>
+              </a:defRPr>
+            </a:pPr>
+            <a:r>
+              <a:t>✓ Приоритетная поддержка 24/7</a:t>
+            </a:r>
+          </a:p>
+        </p:txBody>
+      </p:sp>
+      <p:sp>
+        <p:nvSpPr>
+          <p:cNvPr id="10" name="Rounded Rectangle 9"/>
+          <p:cNvSpPr/>
+          <p:nvPr/>
+        </p:nvSpPr>
+        <p:spPr>
+          <a:xfrm>
+            <a:off x="7955280" y="1645920"/>
             <a:ext cx="3474720" cy="4663440"/>
           </a:xfrm>
           <a:prstGeom prst="roundRect">
@@ -7164,7 +7178,7 @@
           </a:solidFill>
           <a:ln w="15240">
             <a:solidFill>
-              <a:srgbClr val="38BDF8"/>
+              <a:srgbClr val="3C4452"/>
             </a:solidFill>
           </a:ln>
         </p:spPr>
@@ -7192,13 +7206,13 @@
       </p:sp>
       <p:sp>
         <p:nvSpPr>
-          <p:cNvPr id="9" name="TextBox 8"/>
+          <p:cNvPr id="11" name="TextBox 10"/>
           <p:cNvSpPr txBox="1"/>
           <p:nvPr/>
         </p:nvSpPr>
         <p:spPr>
           <a:xfrm>
-            <a:off x="4526280" y="1828800"/>
+            <a:off x="8138160" y="1828800"/>
             <a:ext cx="3108960" cy="4297680"/>
           </a:xfrm>
           <a:prstGeom prst="rect">
@@ -7220,7 +7234,37 @@
               </a:defRPr>
             </a:pPr>
             <a:r>
-              <a:t>Q4 2026: Kaspi QR Депозиты</a:t>
+              <a:t>ТАРИФ «СЕТЬ / VIP»</a:t>
+            </a:r>
+          </a:p>
+          <a:p>
+            <a:pPr>
+              <a:spcBef>
+                <a:spcPts val="600"/>
+              </a:spcBef>
+              <a:defRPr sz="2800" b="1">
+                <a:solidFill>
+                  <a:srgbClr val="F9F9FB"/>
+                </a:solidFill>
+              </a:defRPr>
+            </a:pPr>
+            <a:r>
+              <a:t>35 000 ₸</a:t>
+            </a:r>
+          </a:p>
+          <a:p>
+            <a:pPr>
+              <a:spcBef>
+                <a:spcPts val="200"/>
+              </a:spcBef>
+              <a:defRPr sz="1000">
+                <a:solidFill>
+                  <a:srgbClr val="A3AAB8"/>
+                </a:solidFill>
+              </a:defRPr>
+            </a:pPr>
+            <a:r>
+              <a:t>в месяц за точку (для сетей)</a:t>
             </a:r>
           </a:p>
           <a:p>
@@ -7235,7 +7279,7 @@
               </a:defRPr>
             </a:pPr>
             <a:r>
-              <a:t>• Взимание онлайн-предоплаты через Kaspi QR при бронировании VIP-кабин и топчанов</a:t>
+              <a:t>✓ Всё, что входит в тариф PRO</a:t>
             </a:r>
           </a:p>
           <a:p>
@@ -7250,7 +7294,7 @@
               </a:defRPr>
             </a:pPr>
             <a:r>
-              <a:t>• 100% ликвидация проблемы неявки (No-Show)</a:t>
+              <a:t>✓ Единый мультилокационный кабинет</a:t>
             </a:r>
           </a:p>
           <a:p>
@@ -7265,7 +7309,7 @@
               </a:defRPr>
             </a:pPr>
             <a:r>
-              <a:t>• В CustDev 6 из 10 гостей подтвердили готовность внести аванс 5 000 – 10 000 ₸ ради гарантии лучшего стола</a:t>
+              <a:t>✓ Неограниченное число филиалов сети</a:t>
             </a:r>
           </a:p>
           <a:p>
@@ -7280,87 +7324,7 @@
               </a:defRPr>
             </a:pPr>
             <a:r>
-              <a:t>• Дополнительный финтех-поток монетизации</a:t>
-            </a:r>
-          </a:p>
-        </p:txBody>
-      </p:sp>
-      <p:sp>
-        <p:nvSpPr>
-          <p:cNvPr id="10" name="Rounded Rectangle 9"/>
-          <p:cNvSpPr/>
-          <p:nvPr/>
-        </p:nvSpPr>
-        <p:spPr>
-          <a:xfrm>
-            <a:off x="7955280" y="1645920"/>
-            <a:ext cx="3474720" cy="4663440"/>
-          </a:xfrm>
-          <a:prstGeom prst="roundRect">
-            <a:avLst/>
-          </a:prstGeom>
-          <a:solidFill>
-            <a:srgbClr val="14171E"/>
-          </a:solidFill>
-          <a:ln w="15240">
-            <a:solidFill>
-              <a:srgbClr val="FBBF24"/>
-            </a:solidFill>
-          </a:ln>
-        </p:spPr>
-        <p:style>
-          <a:lnRef idx="1">
-            <a:schemeClr val="accent1"/>
-          </a:lnRef>
-          <a:fillRef idx="3">
-            <a:schemeClr val="accent1"/>
-          </a:fillRef>
-          <a:effectRef idx="2">
-            <a:schemeClr val="accent1"/>
-          </a:effectRef>
-          <a:fontRef idx="minor">
-            <a:schemeClr val="lt1"/>
-          </a:fontRef>
-        </p:style>
-        <p:txBody>
-          <a:bodyPr rtlCol="0" anchor="ctr"/>
-          <a:lstStyle/>
-          <a:p>
-            <a:pPr algn="ctr"/>
-          </a:p>
-        </p:txBody>
-      </p:sp>
-      <p:sp>
-        <p:nvSpPr>
-          <p:cNvPr id="11" name="TextBox 10"/>
-          <p:cNvSpPr txBox="1"/>
-          <p:nvPr/>
-        </p:nvSpPr>
-        <p:spPr>
-          <a:xfrm>
-            <a:off x="8138160" y="1828800"/>
-            <a:ext cx="3108960" cy="4297680"/>
-          </a:xfrm>
-          <a:prstGeom prst="rect">
-            <a:avLst/>
-          </a:prstGeom>
-          <a:noFill/>
-        </p:spPr>
-        <p:txBody>
-          <a:bodyPr wrap="square">
-            <a:spAutoFit/>
-          </a:bodyPr>
-          <a:lstStyle/>
-          <a:p>
-            <a:pPr>
-              <a:defRPr sz="1350" b="1">
-                <a:solidFill>
-                  <a:srgbClr val="FBBF24"/>
-                </a:solidFill>
-              </a:defRPr>
-            </a:pPr>
-            <a:r>
-              <a:t>Q1 2027: AI-Голос &amp; WhatsApp API</a:t>
+              <a:t>✓ Персональный менеджер внедрения</a:t>
             </a:r>
           </a:p>
           <a:p>
@@ -7375,37 +7339,7 @@
               </a:defRPr>
             </a:pPr>
             <a:r>
-              <a:t>• Голосовой AI-ассистент для автоматического приема звонков по телефону на казахском и русском языках</a:t>
-            </a:r>
-          </a:p>
-          <a:p>
-            <a:pPr>
-              <a:spcBef>
-                <a:spcPts val="800"/>
-              </a:spcBef>
-              <a:defRPr sz="1100">
-                <a:solidFill>
-                  <a:srgbClr val="F9F9FB"/>
-                </a:solidFill>
-              </a:defRPr>
-            </a:pPr>
-            <a:r>
-              <a:t>• Официальный WhatsApp Business API шлюз для автоматических ответов на стандартные вопросы</a:t>
-            </a:r>
-          </a:p>
-          <a:p>
-            <a:pPr>
-              <a:spcBef>
-                <a:spcPts val="800"/>
-              </a:spcBef>
-              <a:defRPr sz="1100">
-                <a:solidFill>
-                  <a:srgbClr val="F9F9FB"/>
-                </a:solidFill>
-              </a:defRPr>
-            </a:pPr>
-            <a:r>
-              <a:t>• Масштабирование на Алматы, Астану, Ташкент и Баку</a:t>
+              <a:t>✓ Кастомизация под брендбук ресторана</a:t>
             </a:r>
           </a:p>
         </p:txBody>
@@ -7419,6 +7353,595 @@
 </file>
 
 <file path=ppt/slides/slide15.xml><?xml version="1.0" encoding="utf-8"?>
+<p:sld xmlns:a="http://schemas.openxmlformats.org/drawingml/2006/main" xmlns:p="http://schemas.openxmlformats.org/presentationml/2006/main" xmlns:r="http://schemas.openxmlformats.org/officeDocument/2006/relationships">
+  <p:cSld>
+    <p:spTree>
+      <p:nvGrpSpPr>
+        <p:cNvPr id="1" name=""/>
+        <p:cNvGrpSpPr/>
+        <p:nvPr/>
+      </p:nvGrpSpPr>
+      <p:grpSpPr/>
+      <p:sp>
+        <p:nvSpPr>
+          <p:cNvPr id="2" name="Rectangle 1"/>
+          <p:cNvSpPr/>
+          <p:nvPr/>
+        </p:nvSpPr>
+        <p:spPr>
+          <a:xfrm>
+            <a:off x="0" y="0"/>
+            <a:ext cx="12191695" cy="6858000"/>
+          </a:xfrm>
+          <a:prstGeom prst="rect">
+            <a:avLst/>
+          </a:prstGeom>
+          <a:solidFill>
+            <a:srgbClr val="0B0D10"/>
+          </a:solidFill>
+          <a:ln>
+            <a:noFill/>
+          </a:ln>
+        </p:spPr>
+        <p:style>
+          <a:lnRef idx="1">
+            <a:schemeClr val="accent1"/>
+          </a:lnRef>
+          <a:fillRef idx="3">
+            <a:schemeClr val="accent1"/>
+          </a:fillRef>
+          <a:effectRef idx="2">
+            <a:schemeClr val="accent1"/>
+          </a:effectRef>
+          <a:fontRef idx="minor">
+            <a:schemeClr val="lt1"/>
+          </a:fontRef>
+        </p:style>
+        <p:txBody>
+          <a:bodyPr rtlCol="0" anchor="ctr"/>
+          <a:lstStyle/>
+          <a:p>
+            <a:pPr algn="ctr"/>
+          </a:p>
+        </p:txBody>
+      </p:sp>
+      <p:sp>
+        <p:nvSpPr>
+          <p:cNvPr id="3" name="TextBox 2"/>
+          <p:cNvSpPr txBox="1"/>
+          <p:nvPr/>
+        </p:nvSpPr>
+        <p:spPr>
+          <a:xfrm>
+            <a:off x="731520" y="347472"/>
+            <a:ext cx="10698480" cy="320040"/>
+          </a:xfrm>
+          <a:prstGeom prst="rect">
+            <a:avLst/>
+          </a:prstGeom>
+          <a:noFill/>
+        </p:spPr>
+        <p:txBody>
+          <a:bodyPr wrap="square" lIns="0" tIns="0" rIns="0" bIns="0">
+            <a:spAutoFit/>
+          </a:bodyPr>
+          <a:lstStyle/>
+          <a:p>
+            <a:pPr>
+              <a:defRPr sz="1100" b="1">
+                <a:solidFill>
+                  <a:srgbClr val="C5A880"/>
+                </a:solidFill>
+                <a:latin typeface="Segoe UI"/>
+              </a:defRPr>
+            </a:pPr>
+            <a:r>
+              <a:t>СТРАТЕГИЯ РАЗВИТИЯ</a:t>
+            </a:r>
+          </a:p>
+        </p:txBody>
+      </p:sp>
+      <p:sp>
+        <p:nvSpPr>
+          <p:cNvPr id="4" name="TextBox 3"/>
+          <p:cNvSpPr txBox="1"/>
+          <p:nvPr/>
+        </p:nvSpPr>
+        <p:spPr>
+          <a:xfrm>
+            <a:off x="731520" y="640080"/>
+            <a:ext cx="10698480" cy="502920"/>
+          </a:xfrm>
+          <a:prstGeom prst="rect">
+            <a:avLst/>
+          </a:prstGeom>
+          <a:noFill/>
+        </p:spPr>
+        <p:txBody>
+          <a:bodyPr wrap="square" lIns="0" tIns="0" rIns="0" bIns="0">
+            <a:spAutoFit/>
+          </a:bodyPr>
+          <a:lstStyle/>
+          <a:p>
+            <a:pPr>
+              <a:defRPr sz="2200" b="1">
+                <a:solidFill>
+                  <a:srgbClr val="F9F9FB"/>
+                </a:solidFill>
+                <a:latin typeface="Georgia"/>
+              </a:defRPr>
+            </a:pPr>
+            <a:r>
+              <a:t>Дорожная карта: От пилота к экосистеме №1 в Казахстане</a:t>
+            </a:r>
+          </a:p>
+        </p:txBody>
+      </p:sp>
+      <p:sp>
+        <p:nvSpPr>
+          <p:cNvPr id="5" name="TextBox 4"/>
+          <p:cNvSpPr txBox="1"/>
+          <p:nvPr/>
+        </p:nvSpPr>
+        <p:spPr>
+          <a:xfrm>
+            <a:off x="731520" y="1170432"/>
+            <a:ext cx="10698480" cy="320040"/>
+          </a:xfrm>
+          <a:prstGeom prst="rect">
+            <a:avLst/>
+          </a:prstGeom>
+          <a:noFill/>
+        </p:spPr>
+        <p:txBody>
+          <a:bodyPr wrap="square" lIns="0" tIns="0" rIns="0" bIns="0">
+            <a:spAutoFit/>
+          </a:bodyPr>
+          <a:lstStyle/>
+          <a:p>
+            <a:pPr>
+              <a:defRPr sz="1200">
+                <a:solidFill>
+                  <a:srgbClr val="A3AAB8"/>
+                </a:solidFill>
+                <a:latin typeface="Segoe UI"/>
+              </a:defRPr>
+            </a:pPr>
+            <a:r>
+              <a:t>Поэтапное расширение функционала и ликвидация No-Show до абсолютного нуля</a:t>
+            </a:r>
+          </a:p>
+        </p:txBody>
+      </p:sp>
+      <p:sp>
+        <p:nvSpPr>
+          <p:cNvPr id="6" name="Rounded Rectangle 5"/>
+          <p:cNvSpPr/>
+          <p:nvPr/>
+        </p:nvSpPr>
+        <p:spPr>
+          <a:xfrm>
+            <a:off x="731520" y="1645920"/>
+            <a:ext cx="3474720" cy="4663440"/>
+          </a:xfrm>
+          <a:prstGeom prst="roundRect">
+            <a:avLst/>
+          </a:prstGeom>
+          <a:solidFill>
+            <a:srgbClr val="14171E"/>
+          </a:solidFill>
+          <a:ln w="15240">
+            <a:solidFill>
+              <a:srgbClr val="34D399"/>
+            </a:solidFill>
+          </a:ln>
+        </p:spPr>
+        <p:style>
+          <a:lnRef idx="1">
+            <a:schemeClr val="accent1"/>
+          </a:lnRef>
+          <a:fillRef idx="3">
+            <a:schemeClr val="accent1"/>
+          </a:fillRef>
+          <a:effectRef idx="2">
+            <a:schemeClr val="accent1"/>
+          </a:effectRef>
+          <a:fontRef idx="minor">
+            <a:schemeClr val="lt1"/>
+          </a:fontRef>
+        </p:style>
+        <p:txBody>
+          <a:bodyPr rtlCol="0" anchor="ctr"/>
+          <a:lstStyle/>
+          <a:p>
+            <a:pPr algn="ctr"/>
+          </a:p>
+        </p:txBody>
+      </p:sp>
+      <p:sp>
+        <p:nvSpPr>
+          <p:cNvPr id="7" name="TextBox 6"/>
+          <p:cNvSpPr txBox="1"/>
+          <p:nvPr/>
+        </p:nvSpPr>
+        <p:spPr>
+          <a:xfrm>
+            <a:off x="914400" y="1828800"/>
+            <a:ext cx="3108960" cy="4297680"/>
+          </a:xfrm>
+          <a:prstGeom prst="rect">
+            <a:avLst/>
+          </a:prstGeom>
+          <a:noFill/>
+        </p:spPr>
+        <p:txBody>
+          <a:bodyPr wrap="square">
+            <a:spAutoFit/>
+          </a:bodyPr>
+          <a:lstStyle/>
+          <a:p>
+            <a:pPr>
+              <a:defRPr sz="1350" b="1">
+                <a:solidFill>
+                  <a:srgbClr val="34D399"/>
+                </a:solidFill>
+              </a:defRPr>
+            </a:pPr>
+            <a:r>
+              <a:t>v2.4 Live (РЕАЛИЗОВАНО)</a:t>
+            </a:r>
+          </a:p>
+          <a:p>
+            <a:pPr>
+              <a:spcBef>
+                <a:spcPts val="800"/>
+              </a:spcBef>
+              <a:defRPr sz="1100">
+                <a:solidFill>
+                  <a:srgbClr val="F9F9FB"/>
+                </a:solidFill>
+              </a:defRPr>
+            </a:pPr>
+            <a:r>
+              <a:t>• Полноценный гостевой WebApp с выбором залов и меню</a:t>
+            </a:r>
+          </a:p>
+          <a:p>
+            <a:pPr>
+              <a:spcBef>
+                <a:spcPts val="800"/>
+              </a:spcBef>
+              <a:defRPr sz="1100">
+                <a:solidFill>
+                  <a:srgbClr val="F9F9FB"/>
+                </a:solidFill>
+              </a:defRPr>
+            </a:pPr>
+            <a:r>
+              <a:t>• Мобильный терминал хостес с контекстными кнопками</a:t>
+            </a:r>
+          </a:p>
+          <a:p>
+            <a:pPr>
+              <a:spcBef>
+                <a:spcPts val="800"/>
+              </a:spcBef>
+              <a:defRPr sz="1100">
+                <a:solidFill>
+                  <a:srgbClr val="F9F9FB"/>
+                </a:solidFill>
+              </a:defRPr>
+            </a:pPr>
+            <a:r>
+              <a:t>• Интерактивная карта зала с цветовой занятостью столов</a:t>
+            </a:r>
+          </a:p>
+          <a:p>
+            <a:pPr>
+              <a:spcBef>
+                <a:spcPts val="800"/>
+              </a:spcBef>
+              <a:defRPr sz="1100">
+                <a:solidFill>
+                  <a:srgbClr val="F9F9FB"/>
+                </a:solidFill>
+              </a:defRPr>
+            </a:pPr>
+            <a:r>
+              <a:t>• Учет смены персонала, Z-отчеты и консьерж-гонг Chime</a:t>
+            </a:r>
+          </a:p>
+          <a:p>
+            <a:pPr>
+              <a:spcBef>
+                <a:spcPts val="800"/>
+              </a:spcBef>
+              <a:defRPr sz="1100">
+                <a:solidFill>
+                  <a:srgbClr val="F9F9FB"/>
+                </a:solidFill>
+              </a:defRPr>
+            </a:pPr>
+            <a:r>
+              <a:t>• Мультилокация и трехъязычие (KZ / RU / EN)</a:t>
+            </a:r>
+          </a:p>
+        </p:txBody>
+      </p:sp>
+      <p:sp>
+        <p:nvSpPr>
+          <p:cNvPr id="8" name="Rounded Rectangle 7"/>
+          <p:cNvSpPr/>
+          <p:nvPr/>
+        </p:nvSpPr>
+        <p:spPr>
+          <a:xfrm>
+            <a:off x="4343400" y="1645920"/>
+            <a:ext cx="3474720" cy="4663440"/>
+          </a:xfrm>
+          <a:prstGeom prst="roundRect">
+            <a:avLst/>
+          </a:prstGeom>
+          <a:solidFill>
+            <a:srgbClr val="14171E"/>
+          </a:solidFill>
+          <a:ln w="15240">
+            <a:solidFill>
+              <a:srgbClr val="38BDF8"/>
+            </a:solidFill>
+          </a:ln>
+        </p:spPr>
+        <p:style>
+          <a:lnRef idx="1">
+            <a:schemeClr val="accent1"/>
+          </a:lnRef>
+          <a:fillRef idx="3">
+            <a:schemeClr val="accent1"/>
+          </a:fillRef>
+          <a:effectRef idx="2">
+            <a:schemeClr val="accent1"/>
+          </a:effectRef>
+          <a:fontRef idx="minor">
+            <a:schemeClr val="lt1"/>
+          </a:fontRef>
+        </p:style>
+        <p:txBody>
+          <a:bodyPr rtlCol="0" anchor="ctr"/>
+          <a:lstStyle/>
+          <a:p>
+            <a:pPr algn="ctr"/>
+          </a:p>
+        </p:txBody>
+      </p:sp>
+      <p:sp>
+        <p:nvSpPr>
+          <p:cNvPr id="9" name="TextBox 8"/>
+          <p:cNvSpPr txBox="1"/>
+          <p:nvPr/>
+        </p:nvSpPr>
+        <p:spPr>
+          <a:xfrm>
+            <a:off x="4526280" y="1828800"/>
+            <a:ext cx="3108960" cy="4297680"/>
+          </a:xfrm>
+          <a:prstGeom prst="rect">
+            <a:avLst/>
+          </a:prstGeom>
+          <a:noFill/>
+        </p:spPr>
+        <p:txBody>
+          <a:bodyPr wrap="square">
+            <a:spAutoFit/>
+          </a:bodyPr>
+          <a:lstStyle/>
+          <a:p>
+            <a:pPr>
+              <a:defRPr sz="1350" b="1">
+                <a:solidFill>
+                  <a:srgbClr val="38BDF8"/>
+                </a:solidFill>
+              </a:defRPr>
+            </a:pPr>
+            <a:r>
+              <a:t>Q4 2026: Kaspi QR Депозиты</a:t>
+            </a:r>
+          </a:p>
+          <a:p>
+            <a:pPr>
+              <a:spcBef>
+                <a:spcPts val="800"/>
+              </a:spcBef>
+              <a:defRPr sz="1100">
+                <a:solidFill>
+                  <a:srgbClr val="F9F9FB"/>
+                </a:solidFill>
+              </a:defRPr>
+            </a:pPr>
+            <a:r>
+              <a:t>• Взимание онлайн-предоплаты через Kaspi QR при бронировании VIP-кабин и топчанов</a:t>
+            </a:r>
+          </a:p>
+          <a:p>
+            <a:pPr>
+              <a:spcBef>
+                <a:spcPts val="800"/>
+              </a:spcBef>
+              <a:defRPr sz="1100">
+                <a:solidFill>
+                  <a:srgbClr val="F9F9FB"/>
+                </a:solidFill>
+              </a:defRPr>
+            </a:pPr>
+            <a:r>
+              <a:t>• 100% ликвидация проблемы неявки (No-Show)</a:t>
+            </a:r>
+          </a:p>
+          <a:p>
+            <a:pPr>
+              <a:spcBef>
+                <a:spcPts val="800"/>
+              </a:spcBef>
+              <a:defRPr sz="1100">
+                <a:solidFill>
+                  <a:srgbClr val="F9F9FB"/>
+                </a:solidFill>
+              </a:defRPr>
+            </a:pPr>
+            <a:r>
+              <a:t>• В CustDev 6 из 10 гостей подтвердили готовность внести аванс 5 000 – 10 000 ₸ ради гарантии лучшего стола</a:t>
+            </a:r>
+          </a:p>
+          <a:p>
+            <a:pPr>
+              <a:spcBef>
+                <a:spcPts val="800"/>
+              </a:spcBef>
+              <a:defRPr sz="1100">
+                <a:solidFill>
+                  <a:srgbClr val="F9F9FB"/>
+                </a:solidFill>
+              </a:defRPr>
+            </a:pPr>
+            <a:r>
+              <a:t>• Дополнительный финтех-поток монетизации</a:t>
+            </a:r>
+          </a:p>
+        </p:txBody>
+      </p:sp>
+      <p:sp>
+        <p:nvSpPr>
+          <p:cNvPr id="10" name="Rounded Rectangle 9"/>
+          <p:cNvSpPr/>
+          <p:nvPr/>
+        </p:nvSpPr>
+        <p:spPr>
+          <a:xfrm>
+            <a:off x="7955280" y="1645920"/>
+            <a:ext cx="3474720" cy="4663440"/>
+          </a:xfrm>
+          <a:prstGeom prst="roundRect">
+            <a:avLst/>
+          </a:prstGeom>
+          <a:solidFill>
+            <a:srgbClr val="14171E"/>
+          </a:solidFill>
+          <a:ln w="15240">
+            <a:solidFill>
+              <a:srgbClr val="FBBF24"/>
+            </a:solidFill>
+          </a:ln>
+        </p:spPr>
+        <p:style>
+          <a:lnRef idx="1">
+            <a:schemeClr val="accent1"/>
+          </a:lnRef>
+          <a:fillRef idx="3">
+            <a:schemeClr val="accent1"/>
+          </a:fillRef>
+          <a:effectRef idx="2">
+            <a:schemeClr val="accent1"/>
+          </a:effectRef>
+          <a:fontRef idx="minor">
+            <a:schemeClr val="lt1"/>
+          </a:fontRef>
+        </p:style>
+        <p:txBody>
+          <a:bodyPr rtlCol="0" anchor="ctr"/>
+          <a:lstStyle/>
+          <a:p>
+            <a:pPr algn="ctr"/>
+          </a:p>
+        </p:txBody>
+      </p:sp>
+      <p:sp>
+        <p:nvSpPr>
+          <p:cNvPr id="11" name="TextBox 10"/>
+          <p:cNvSpPr txBox="1"/>
+          <p:nvPr/>
+        </p:nvSpPr>
+        <p:spPr>
+          <a:xfrm>
+            <a:off x="8138160" y="1828800"/>
+            <a:ext cx="3108960" cy="4297680"/>
+          </a:xfrm>
+          <a:prstGeom prst="rect">
+            <a:avLst/>
+          </a:prstGeom>
+          <a:noFill/>
+        </p:spPr>
+        <p:txBody>
+          <a:bodyPr wrap="square">
+            <a:spAutoFit/>
+          </a:bodyPr>
+          <a:lstStyle/>
+          <a:p>
+            <a:pPr>
+              <a:defRPr sz="1350" b="1">
+                <a:solidFill>
+                  <a:srgbClr val="FBBF24"/>
+                </a:solidFill>
+              </a:defRPr>
+            </a:pPr>
+            <a:r>
+              <a:t>Q1 2027: AI-Голос &amp; WhatsApp API</a:t>
+            </a:r>
+          </a:p>
+          <a:p>
+            <a:pPr>
+              <a:spcBef>
+                <a:spcPts val="800"/>
+              </a:spcBef>
+              <a:defRPr sz="1100">
+                <a:solidFill>
+                  <a:srgbClr val="F9F9FB"/>
+                </a:solidFill>
+              </a:defRPr>
+            </a:pPr>
+            <a:r>
+              <a:t>• Голосовой AI-ассистент для автоматического приема звонков по телефону на казахском и русском языках</a:t>
+            </a:r>
+          </a:p>
+          <a:p>
+            <a:pPr>
+              <a:spcBef>
+                <a:spcPts val="800"/>
+              </a:spcBef>
+              <a:defRPr sz="1100">
+                <a:solidFill>
+                  <a:srgbClr val="F9F9FB"/>
+                </a:solidFill>
+              </a:defRPr>
+            </a:pPr>
+            <a:r>
+              <a:t>• Официальный WhatsApp Business API шлюз для автоматических ответов на стандартные вопросы</a:t>
+            </a:r>
+          </a:p>
+          <a:p>
+            <a:pPr>
+              <a:spcBef>
+                <a:spcPts val="800"/>
+              </a:spcBef>
+              <a:defRPr sz="1100">
+                <a:solidFill>
+                  <a:srgbClr val="F9F9FB"/>
+                </a:solidFill>
+              </a:defRPr>
+            </a:pPr>
+            <a:r>
+              <a:t>• Масштабирование на Алматы, Астану, Ташкент и Баку</a:t>
+            </a:r>
+          </a:p>
+        </p:txBody>
+      </p:sp>
+    </p:spTree>
+  </p:cSld>
+  <p:clrMapOvr>
+    <a:masterClrMapping/>
+  </p:clrMapOvr>
+</p:sld>
+</file>
+
+<file path=ppt/slides/slide16.xml><?xml version="1.0" encoding="utf-8"?>
 <p:sld xmlns:a="http://schemas.openxmlformats.org/drawingml/2006/main" xmlns:p="http://schemas.openxmlformats.org/presentationml/2006/main" xmlns:r="http://schemas.openxmlformats.org/officeDocument/2006/relationships">
   <p:cSld>
     <p:spTree>
@@ -9755,7 +10278,7 @@
               </a:defRPr>
             </a:pPr>
             <a:r>
-              <a:t>РЕШЕНИЕ ПЛАТФОРМЫ</a:t>
+              <a:t>РЫНОЧНЫЙ ПОТЕНЦИАЛ</a:t>
             </a:r>
           </a:p>
         </p:txBody>
@@ -9791,7 +10314,7 @@
               </a:defRPr>
             </a:pPr>
             <a:r>
-              <a:t>RestoKZ: Единая двусторонняя цифровая экосистема</a:t>
+              <a:t>Объем рынка HoReCa: 1.6 трлн ₸ и модель TAM / SAM / SOM</a:t>
             </a:r>
           </a:p>
         </p:txBody>
@@ -9827,7 +10350,7 @@
               </a:defRPr>
             </a:pPr>
             <a:r>
-              <a:t>Связка клиента и ресторана в режиме реального времени без сторонних приложений</a:t>
+              <a:t>Анализ финансовой емкости ресторанного сектора Казахстана и потенциала подписочной модели:</a:t>
             </a:r>
           </a:p>
         </p:txBody>
@@ -9840,8 +10363,383 @@
         </p:nvSpPr>
         <p:spPr>
           <a:xfrm>
-            <a:off x="731520" y="1645920"/>
-            <a:ext cx="5212080" cy="4663440"/>
+            <a:off x="731520" y="1508760"/>
+            <a:ext cx="3383280" cy="1691640"/>
+          </a:xfrm>
+          <a:prstGeom prst="roundRect">
+            <a:avLst/>
+          </a:prstGeom>
+          <a:solidFill>
+            <a:srgbClr val="14171E"/>
+          </a:solidFill>
+          <a:ln w="15240">
+            <a:solidFill>
+              <a:srgbClr val="3C4452"/>
+            </a:solidFill>
+          </a:ln>
+        </p:spPr>
+        <p:style>
+          <a:lnRef idx="1">
+            <a:schemeClr val="accent1"/>
+          </a:lnRef>
+          <a:fillRef idx="3">
+            <a:schemeClr val="accent1"/>
+          </a:fillRef>
+          <a:effectRef idx="2">
+            <a:schemeClr val="accent1"/>
+          </a:effectRef>
+          <a:fontRef idx="minor">
+            <a:schemeClr val="lt1"/>
+          </a:fontRef>
+        </p:style>
+        <p:txBody>
+          <a:bodyPr rtlCol="0" anchor="ctr"/>
+          <a:lstStyle/>
+          <a:p>
+            <a:pPr algn="ctr"/>
+          </a:p>
+        </p:txBody>
+      </p:sp>
+      <p:sp>
+        <p:nvSpPr>
+          <p:cNvPr id="7" name="TextBox 6"/>
+          <p:cNvSpPr txBox="1"/>
+          <p:nvPr/>
+        </p:nvSpPr>
+        <p:spPr>
+          <a:xfrm>
+            <a:off x="914400" y="1600200"/>
+            <a:ext cx="3017520" cy="1508760"/>
+          </a:xfrm>
+          <a:prstGeom prst="rect">
+            <a:avLst/>
+          </a:prstGeom>
+          <a:noFill/>
+        </p:spPr>
+        <p:txBody>
+          <a:bodyPr wrap="square">
+            <a:spAutoFit/>
+          </a:bodyPr>
+          <a:lstStyle/>
+          <a:p>
+            <a:pPr>
+              <a:defRPr sz="2000" b="1">
+                <a:solidFill>
+                  <a:srgbClr val="34D399"/>
+                </a:solidFill>
+              </a:defRPr>
+            </a:pPr>
+            <a:r>
+              <a:t>1.6 трлн ₸ / год</a:t>
+            </a:r>
+          </a:p>
+          <a:p>
+            <a:pPr>
+              <a:spcBef>
+                <a:spcPts val="300"/>
+              </a:spcBef>
+              <a:defRPr sz="1100" b="1">
+                <a:solidFill>
+                  <a:srgbClr val="F9F9FB"/>
+                </a:solidFill>
+              </a:defRPr>
+            </a:pPr>
+            <a:r>
+              <a:t>Емкость рынка общепита РК</a:t>
+            </a:r>
+          </a:p>
+          <a:p>
+            <a:pPr>
+              <a:spcBef>
+                <a:spcPts val="200"/>
+              </a:spcBef>
+              <a:defRPr sz="950">
+                <a:solidFill>
+                  <a:srgbClr val="A3AAB8"/>
+                </a:solidFill>
+              </a:defRPr>
+            </a:pPr>
+            <a:r>
+              <a:t>• 25 000+ заведений в Казахстане (Алматы 6.5k, Астана 4.2k, Шымкент 3.8k, регионы 10.5k)</a:t>
+            </a:r>
+          </a:p>
+          <a:p>
+            <a:pPr>
+              <a:spcBef>
+                <a:spcPts val="200"/>
+              </a:spcBef>
+              <a:defRPr sz="950">
+                <a:solidFill>
+                  <a:srgbClr val="A3AAB8"/>
+                </a:solidFill>
+              </a:defRPr>
+            </a:pPr>
+            <a:r>
+              <a:t>• Ежегодный рост сектора +14.2% по данным Бюро нацстатистики</a:t>
+            </a:r>
+          </a:p>
+        </p:txBody>
+      </p:sp>
+      <p:sp>
+        <p:nvSpPr>
+          <p:cNvPr id="8" name="Rounded Rectangle 7"/>
+          <p:cNvSpPr/>
+          <p:nvPr/>
+        </p:nvSpPr>
+        <p:spPr>
+          <a:xfrm>
+            <a:off x="4398264" y="1508760"/>
+            <a:ext cx="3383280" cy="1691640"/>
+          </a:xfrm>
+          <a:prstGeom prst="roundRect">
+            <a:avLst/>
+          </a:prstGeom>
+          <a:solidFill>
+            <a:srgbClr val="14171E"/>
+          </a:solidFill>
+          <a:ln w="15240">
+            <a:solidFill>
+              <a:srgbClr val="3C4452"/>
+            </a:solidFill>
+          </a:ln>
+        </p:spPr>
+        <p:style>
+          <a:lnRef idx="1">
+            <a:schemeClr val="accent1"/>
+          </a:lnRef>
+          <a:fillRef idx="3">
+            <a:schemeClr val="accent1"/>
+          </a:fillRef>
+          <a:effectRef idx="2">
+            <a:schemeClr val="accent1"/>
+          </a:effectRef>
+          <a:fontRef idx="minor">
+            <a:schemeClr val="lt1"/>
+          </a:fontRef>
+        </p:style>
+        <p:txBody>
+          <a:bodyPr rtlCol="0" anchor="ctr"/>
+          <a:lstStyle/>
+          <a:p>
+            <a:pPr algn="ctr"/>
+          </a:p>
+        </p:txBody>
+      </p:sp>
+      <p:sp>
+        <p:nvSpPr>
+          <p:cNvPr id="9" name="TextBox 8"/>
+          <p:cNvSpPr txBox="1"/>
+          <p:nvPr/>
+        </p:nvSpPr>
+        <p:spPr>
+          <a:xfrm>
+            <a:off x="4581144" y="1600200"/>
+            <a:ext cx="3017520" cy="1508760"/>
+          </a:xfrm>
+          <a:prstGeom prst="rect">
+            <a:avLst/>
+          </a:prstGeom>
+          <a:noFill/>
+        </p:spPr>
+        <p:txBody>
+          <a:bodyPr wrap="square">
+            <a:spAutoFit/>
+          </a:bodyPr>
+          <a:lstStyle/>
+          <a:p>
+            <a:pPr>
+              <a:defRPr sz="2000" b="1">
+                <a:solidFill>
+                  <a:srgbClr val="FB7185"/>
+                </a:solidFill>
+              </a:defRPr>
+            </a:pPr>
+            <a:r>
+              <a:t>120 млрд ₸ / год</a:t>
+            </a:r>
+          </a:p>
+          <a:p>
+            <a:pPr>
+              <a:spcBef>
+                <a:spcPts val="300"/>
+              </a:spcBef>
+              <a:defRPr sz="1100" b="1">
+                <a:solidFill>
+                  <a:srgbClr val="F9F9FB"/>
+                </a:solidFill>
+              </a:defRPr>
+            </a:pPr>
+            <a:r>
+              <a:t>Потери заведений от No-Show</a:t>
+            </a:r>
+          </a:p>
+          <a:p>
+            <a:pPr>
+              <a:spcBef>
+                <a:spcPts val="200"/>
+              </a:spcBef>
+              <a:defRPr sz="950">
+                <a:solidFill>
+                  <a:srgbClr val="A3AAB8"/>
+                </a:solidFill>
+              </a:defRPr>
+            </a:pPr>
+            <a:r>
+              <a:t>• 15–20% столов в часы пик пустуют из-за неявок и заторов в WhatsApp</a:t>
+            </a:r>
+          </a:p>
+          <a:p>
+            <a:pPr>
+              <a:spcBef>
+                <a:spcPts val="200"/>
+              </a:spcBef>
+              <a:defRPr sz="950">
+                <a:solidFill>
+                  <a:srgbClr val="A3AAB8"/>
+                </a:solidFill>
+              </a:defRPr>
+            </a:pPr>
+            <a:r>
+              <a:t>• Это прямая недополученная чистая выручка рестораторов</a:t>
+            </a:r>
+          </a:p>
+        </p:txBody>
+      </p:sp>
+      <p:sp>
+        <p:nvSpPr>
+          <p:cNvPr id="10" name="Rounded Rectangle 9"/>
+          <p:cNvSpPr/>
+          <p:nvPr/>
+        </p:nvSpPr>
+        <p:spPr>
+          <a:xfrm>
+            <a:off x="8065008" y="1508760"/>
+            <a:ext cx="3383280" cy="1691640"/>
+          </a:xfrm>
+          <a:prstGeom prst="roundRect">
+            <a:avLst/>
+          </a:prstGeom>
+          <a:solidFill>
+            <a:srgbClr val="14171E"/>
+          </a:solidFill>
+          <a:ln w="15240">
+            <a:solidFill>
+              <a:srgbClr val="3C4452"/>
+            </a:solidFill>
+          </a:ln>
+        </p:spPr>
+        <p:style>
+          <a:lnRef idx="1">
+            <a:schemeClr val="accent1"/>
+          </a:lnRef>
+          <a:fillRef idx="3">
+            <a:schemeClr val="accent1"/>
+          </a:fillRef>
+          <a:effectRef idx="2">
+            <a:schemeClr val="accent1"/>
+          </a:effectRef>
+          <a:fontRef idx="minor">
+            <a:schemeClr val="lt1"/>
+          </a:fontRef>
+        </p:style>
+        <p:txBody>
+          <a:bodyPr rtlCol="0" anchor="ctr"/>
+          <a:lstStyle/>
+          <a:p>
+            <a:pPr algn="ctr"/>
+          </a:p>
+        </p:txBody>
+      </p:sp>
+      <p:sp>
+        <p:nvSpPr>
+          <p:cNvPr id="11" name="TextBox 10"/>
+          <p:cNvSpPr txBox="1"/>
+          <p:nvPr/>
+        </p:nvSpPr>
+        <p:spPr>
+          <a:xfrm>
+            <a:off x="8247888" y="1600200"/>
+            <a:ext cx="3017520" cy="1508760"/>
+          </a:xfrm>
+          <a:prstGeom prst="rect">
+            <a:avLst/>
+          </a:prstGeom>
+          <a:noFill/>
+        </p:spPr>
+        <p:txBody>
+          <a:bodyPr wrap="square">
+            <a:spAutoFit/>
+          </a:bodyPr>
+          <a:lstStyle/>
+          <a:p>
+            <a:pPr>
+              <a:defRPr sz="2000" b="1">
+                <a:solidFill>
+                  <a:srgbClr val="C5A880"/>
+                </a:solidFill>
+              </a:defRPr>
+            </a:pPr>
+            <a:r>
+              <a:t>10x – 24x ROI</a:t>
+            </a:r>
+          </a:p>
+          <a:p>
+            <a:pPr>
+              <a:spcBef>
+                <a:spcPts val="300"/>
+              </a:spcBef>
+              <a:defRPr sz="1100" b="1">
+                <a:solidFill>
+                  <a:srgbClr val="F9F9FB"/>
+                </a:solidFill>
+              </a:defRPr>
+            </a:pPr>
+            <a:r>
+              <a:t>Окупаемость подписки PRO</a:t>
+            </a:r>
+          </a:p>
+          <a:p>
+            <a:pPr>
+              <a:spcBef>
+                <a:spcPts val="200"/>
+              </a:spcBef>
+              <a:defRPr sz="950">
+                <a:solidFill>
+                  <a:srgbClr val="A3AAB8"/>
+                </a:solidFill>
+              </a:defRPr>
+            </a:pPr>
+            <a:r>
+              <a:t>• Тариф 25 000 ₸ окупается всего за 1 спасенный банкетный стол (чек 25–40 тыс ₸)</a:t>
+            </a:r>
+          </a:p>
+          <a:p>
+            <a:pPr>
+              <a:spcBef>
+                <a:spcPts val="200"/>
+              </a:spcBef>
+              <a:defRPr sz="950">
+                <a:solidFill>
+                  <a:srgbClr val="A3AAB8"/>
+                </a:solidFill>
+              </a:defRPr>
+            </a:pPr>
+            <a:r>
+              <a:t>• Затраты на софт составляют менее 0.2% от оборота ресторана</a:t>
+            </a:r>
+          </a:p>
+        </p:txBody>
+      </p:sp>
+      <p:sp>
+        <p:nvSpPr>
+          <p:cNvPr id="12" name="Rounded Rectangle 11"/>
+          <p:cNvSpPr/>
+          <p:nvPr/>
+        </p:nvSpPr>
+        <p:spPr>
+          <a:xfrm>
+            <a:off x="731520" y="3364992"/>
+            <a:ext cx="3383280" cy="3090672"/>
           </a:xfrm>
           <a:prstGeom prst="roundRect">
             <a:avLst/>
@@ -9879,14 +10777,14 @@
       </p:sp>
       <p:sp>
         <p:nvSpPr>
-          <p:cNvPr id="7" name="TextBox 6"/>
+          <p:cNvPr id="13" name="TextBox 12"/>
           <p:cNvSpPr txBox="1"/>
           <p:nvPr/>
         </p:nvSpPr>
         <p:spPr>
           <a:xfrm>
-            <a:off x="1005840" y="1828800"/>
-            <a:ext cx="4663440" cy="4297680"/>
+            <a:off x="914400" y="3456432"/>
+            <a:ext cx="3017520" cy="2907792"/>
           </a:xfrm>
           <a:prstGeom prst="rect">
             <a:avLst/>
@@ -9900,124 +10798,294 @@
           <a:lstStyle/>
           <a:p>
             <a:pPr>
-              <a:defRPr sz="1450" b="1">
+              <a:defRPr sz="950" b="1">
                 <a:solidFill>
                   <a:srgbClr val="38BDF8"/>
                 </a:solidFill>
               </a:defRPr>
             </a:pPr>
             <a:r>
-              <a:t>🍽 ДЛЯ ГОСТЯ (B2C WEBAPP)</a:t>
-            </a:r>
-          </a:p>
-          <a:p>
-            <a:pPr>
-              <a:spcBef>
-                <a:spcPts val="400"/>
-              </a:spcBef>
-              <a:defRPr sz="1150">
+              <a:t>TAM • ОБЩИЙ РЫНОК СНГ &amp; ЦА</a:t>
+            </a:r>
+          </a:p>
+          <a:p>
+            <a:pPr>
+              <a:spcBef>
+                <a:spcPts val="300"/>
+              </a:spcBef>
+              <a:defRPr sz="2000" b="1">
+                <a:solidFill>
+                  <a:srgbClr val="F9F9FB"/>
+                </a:solidFill>
+              </a:defRPr>
+            </a:pPr>
+            <a:r>
+              <a:t>18.6 млрд ₸ / год</a:t>
+            </a:r>
+          </a:p>
+          <a:p>
+            <a:pPr>
+              <a:spcBef>
+                <a:spcPts val="100"/>
+              </a:spcBef>
+              <a:defRPr sz="950" b="1">
                 <a:solidFill>
                   <a:srgbClr val="E5D5C0"/>
                 </a:solidFill>
               </a:defRPr>
             </a:pPr>
             <a:r>
-              <a:t>Telegram Mini App — открывается мгновенно в 1 клик</a:t>
-            </a:r>
-          </a:p>
-          <a:p>
-            <a:pPr>
-              <a:spcBef>
-                <a:spcPts val="1000"/>
-              </a:spcBef>
-              <a:defRPr sz="1150">
-                <a:solidFill>
-                  <a:srgbClr val="F9F9FB"/>
-                </a:solidFill>
-              </a:defRPr>
-            </a:pPr>
-            <a:r>
-              <a:t>⚡ Бронирование за 30 секунд без скачивания приложений из App Store</a:t>
-            </a:r>
-          </a:p>
-          <a:p>
-            <a:pPr>
-              <a:spcBef>
-                <a:spcPts val="1000"/>
-              </a:spcBef>
-              <a:defRPr sz="1150">
-                <a:solidFill>
-                  <a:srgbClr val="F9F9FB"/>
-                </a:solidFill>
-              </a:defRPr>
-            </a:pPr>
-            <a:r>
-              <a:t>🪑 Интерактивный выбор столика на реальной схеме зала (VIP, топчан, окно)</a:t>
-            </a:r>
-          </a:p>
-          <a:p>
-            <a:pPr>
-              <a:spcBef>
-                <a:spcPts val="1000"/>
-              </a:spcBef>
-              <a:defRPr sz="1150">
-                <a:solidFill>
-                  <a:srgbClr val="F9F9FB"/>
-                </a:solidFill>
-              </a:defRPr>
-            </a:pPr>
-            <a:r>
-              <a:t>📖 Просмотр фото интерьера, актуального меню и среднего чека</a:t>
-            </a:r>
-          </a:p>
-          <a:p>
-            <a:pPr>
-              <a:spcBef>
-                <a:spcPts val="1000"/>
-              </a:spcBef>
-              <a:defRPr sz="1150">
-                <a:solidFill>
-                  <a:srgbClr val="F9F9FB"/>
-                </a:solidFill>
-              </a:defRPr>
-            </a:pPr>
-            <a:r>
-              <a:t>🔔 Автоматические статусы и напоминания в Telegram (защита от забывчивости)</a:t>
-            </a:r>
-          </a:p>
-          <a:p>
-            <a:pPr>
-              <a:spcBef>
-                <a:spcPts val="1000"/>
-              </a:spcBef>
-              <a:defRPr sz="1150">
-                <a:solidFill>
-                  <a:srgbClr val="F9F9FB"/>
-                </a:solidFill>
-              </a:defRPr>
-            </a:pPr>
-            <a:r>
-              <a:t>🌐 Поддержка 3 языков (Казахский, Русский, Английский)</a:t>
-            </a:r>
-          </a:p>
-        </p:txBody>
-      </p:sp>
-      <p:sp>
-        <p:nvSpPr>
-          <p:cNvPr id="8" name="Rounded Rectangle 7"/>
+              <a:t>$38.5M USD • 50 000+ заведений питания в Центральной Азии</a:t>
+            </a:r>
+          </a:p>
+          <a:p>
+            <a:pPr>
+              <a:spcBef>
+                <a:spcPts val="300"/>
+              </a:spcBef>
+              <a:defRPr sz="900">
+                <a:solidFill>
+                  <a:srgbClr val="A3AAB8"/>
+                </a:solidFill>
+              </a:defRPr>
+            </a:pPr>
+            <a:r>
+              <a:t>• Казахстан (25k), Узбекистан (18k), Кыргызстан (4k), Азербайджан (5k)</a:t>
+            </a:r>
+          </a:p>
+          <a:p>
+            <a:pPr>
+              <a:spcBef>
+                <a:spcPts val="300"/>
+              </a:spcBef>
+              <a:defRPr sz="900">
+                <a:solidFill>
+                  <a:srgbClr val="A3AAB8"/>
+                </a:solidFill>
+              </a:defRPr>
+            </a:pPr>
+            <a:r>
+              <a:t>• 15.0 млрд ₸ — чистые SaaS-подписки (300 000 ₸/год на точку)</a:t>
+            </a:r>
+          </a:p>
+          <a:p>
+            <a:pPr>
+              <a:spcBef>
+                <a:spcPts val="300"/>
+              </a:spcBef>
+              <a:defRPr sz="900">
+                <a:solidFill>
+                  <a:srgbClr val="A3AAB8"/>
+                </a:solidFill>
+              </a:defRPr>
+            </a:pPr>
+            <a:r>
+              <a:t>• 3.6 млрд ₸ — финтех оборот депозитов (1.5% Kaspi QR транзакции)</a:t>
+            </a:r>
+          </a:p>
+          <a:p>
+            <a:pPr>
+              <a:spcBef>
+                <a:spcPts val="300"/>
+              </a:spcBef>
+              <a:defRPr sz="900">
+                <a:solidFill>
+                  <a:srgbClr val="A3AAB8"/>
+                </a:solidFill>
+              </a:defRPr>
+            </a:pPr>
+            <a:r>
+              <a:t>• Огромный неосвоенный рынок без монопольного игрока</a:t>
+            </a:r>
+          </a:p>
+        </p:txBody>
+      </p:sp>
+      <p:sp>
+        <p:nvSpPr>
+          <p:cNvPr id="14" name="Rounded Rectangle 13"/>
           <p:cNvSpPr/>
           <p:nvPr/>
         </p:nvSpPr>
         <p:spPr>
           <a:xfrm>
-            <a:off x="6217920" y="1645920"/>
-            <a:ext cx="5212080" cy="4663440"/>
+            <a:off x="4398264" y="3364992"/>
+            <a:ext cx="3383280" cy="3090672"/>
           </a:xfrm>
           <a:prstGeom prst="roundRect">
             <a:avLst/>
           </a:prstGeom>
           <a:solidFill>
             <a:srgbClr val="14171E"/>
+          </a:solidFill>
+          <a:ln w="15240">
+            <a:solidFill>
+              <a:srgbClr val="34D399"/>
+            </a:solidFill>
+          </a:ln>
+        </p:spPr>
+        <p:style>
+          <a:lnRef idx="1">
+            <a:schemeClr val="accent1"/>
+          </a:lnRef>
+          <a:fillRef idx="3">
+            <a:schemeClr val="accent1"/>
+          </a:fillRef>
+          <a:effectRef idx="2">
+            <a:schemeClr val="accent1"/>
+          </a:effectRef>
+          <a:fontRef idx="minor">
+            <a:schemeClr val="lt1"/>
+          </a:fontRef>
+        </p:style>
+        <p:txBody>
+          <a:bodyPr rtlCol="0" anchor="ctr"/>
+          <a:lstStyle/>
+          <a:p>
+            <a:pPr algn="ctr"/>
+          </a:p>
+        </p:txBody>
+      </p:sp>
+      <p:sp>
+        <p:nvSpPr>
+          <p:cNvPr id="15" name="TextBox 14"/>
+          <p:cNvSpPr txBox="1"/>
+          <p:nvPr/>
+        </p:nvSpPr>
+        <p:spPr>
+          <a:xfrm>
+            <a:off x="4581144" y="3456432"/>
+            <a:ext cx="3017520" cy="2907792"/>
+          </a:xfrm>
+          <a:prstGeom prst="rect">
+            <a:avLst/>
+          </a:prstGeom>
+          <a:noFill/>
+        </p:spPr>
+        <p:txBody>
+          <a:bodyPr wrap="square">
+            <a:spAutoFit/>
+          </a:bodyPr>
+          <a:lstStyle/>
+          <a:p>
+            <a:pPr>
+              <a:defRPr sz="950" b="1">
+                <a:solidFill>
+                  <a:srgbClr val="34D399"/>
+                </a:solidFill>
+              </a:defRPr>
+            </a:pPr>
+            <a:r>
+              <a:t>SAM • ДОСТУПНЫЙ РЫНОК РК</a:t>
+            </a:r>
+          </a:p>
+          <a:p>
+            <a:pPr>
+              <a:spcBef>
+                <a:spcPts val="300"/>
+              </a:spcBef>
+              <a:defRPr sz="2000" b="1">
+                <a:solidFill>
+                  <a:srgbClr val="F9F9FB"/>
+                </a:solidFill>
+              </a:defRPr>
+            </a:pPr>
+            <a:r>
+              <a:t>3.6 млрд ₸ / год</a:t>
+            </a:r>
+          </a:p>
+          <a:p>
+            <a:pPr>
+              <a:spcBef>
+                <a:spcPts val="100"/>
+              </a:spcBef>
+              <a:defRPr sz="950" b="1">
+                <a:solidFill>
+                  <a:srgbClr val="E5D5C0"/>
+                </a:solidFill>
+              </a:defRPr>
+            </a:pPr>
+            <a:r>
+              <a:t>$7.5M USD • 12 000 заведений с регулярным резервом столов</a:t>
+            </a:r>
+          </a:p>
+          <a:p>
+            <a:pPr>
+              <a:spcBef>
+                <a:spcPts val="300"/>
+              </a:spcBef>
+              <a:defRPr sz="900">
+                <a:solidFill>
+                  <a:srgbClr val="A3AAB8"/>
+                </a:solidFill>
+              </a:defRPr>
+            </a:pPr>
+            <a:r>
+              <a:t>• Рестораны, лаундж-бары, банкетные залы и премиум-кафе Казахстана</a:t>
+            </a:r>
+          </a:p>
+          <a:p>
+            <a:pPr>
+              <a:spcBef>
+                <a:spcPts val="300"/>
+              </a:spcBef>
+              <a:defRPr sz="900">
+                <a:solidFill>
+                  <a:srgbClr val="A3AAB8"/>
+                </a:solidFill>
+              </a:defRPr>
+            </a:pPr>
+            <a:r>
+              <a:t>• Ключевые хабы: Алматы (4.5k), Астана (3.2k), Шымкент (2.2k), регионы (2.1k)</a:t>
+            </a:r>
+          </a:p>
+          <a:p>
+            <a:pPr>
+              <a:spcBef>
+                <a:spcPts val="300"/>
+              </a:spcBef>
+              <a:defRPr sz="900">
+                <a:solidFill>
+                  <a:srgbClr val="A3AAB8"/>
+                </a:solidFill>
+              </a:defRPr>
+            </a:pPr>
+            <a:r>
+              <a:t>• Модель: 12 000 точек × 25 000 ₸/мес (300 000 ₸ годовой LTV)</a:t>
+            </a:r>
+          </a:p>
+          <a:p>
+            <a:pPr>
+              <a:spcBef>
+                <a:spcPts val="300"/>
+              </a:spcBef>
+              <a:defRPr sz="900">
+                <a:solidFill>
+                  <a:srgbClr val="A3AAB8"/>
+                </a:solidFill>
+              </a:defRPr>
+            </a:pPr>
+            <a:r>
+              <a:t>• Высокая концентрация и готовность платить за порядок</a:t>
+            </a:r>
+          </a:p>
+        </p:txBody>
+      </p:sp>
+      <p:sp>
+        <p:nvSpPr>
+          <p:cNvPr id="16" name="Rounded Rectangle 15"/>
+          <p:cNvSpPr/>
+          <p:nvPr/>
+        </p:nvSpPr>
+        <p:spPr>
+          <a:xfrm>
+            <a:off x="8065008" y="3364992"/>
+            <a:ext cx="3383280" cy="3090672"/>
+          </a:xfrm>
+          <a:prstGeom prst="roundRect">
+            <a:avLst/>
+          </a:prstGeom>
+          <a:solidFill>
+            <a:srgbClr val="1A1E27"/>
           </a:solidFill>
           <a:ln w="15240">
             <a:solidFill>
@@ -10049,14 +11117,14 @@
       </p:sp>
       <p:sp>
         <p:nvSpPr>
-          <p:cNvPr id="9" name="TextBox 8"/>
+          <p:cNvPr id="17" name="TextBox 16"/>
           <p:cNvSpPr txBox="1"/>
           <p:nvPr/>
         </p:nvSpPr>
         <p:spPr>
           <a:xfrm>
-            <a:off x="6492240" y="1828800"/>
-            <a:ext cx="4663440" cy="4297680"/>
+            <a:off x="8247888" y="3456432"/>
+            <a:ext cx="3017520" cy="2907792"/>
           </a:xfrm>
           <a:prstGeom prst="rect">
             <a:avLst/>
@@ -10070,104 +11138,104 @@
           <a:lstStyle/>
           <a:p>
             <a:pPr>
-              <a:defRPr sz="1450" b="1">
+              <a:defRPr sz="950" b="1">
                 <a:solidFill>
                   <a:srgbClr val="C5A880"/>
                 </a:solidFill>
               </a:defRPr>
             </a:pPr>
             <a:r>
-              <a:t>👑 ДЛЯ РЕСТОРАНА (RESTOKZ PRO B2B)</a:t>
-            </a:r>
-          </a:p>
-          <a:p>
-            <a:pPr>
-              <a:spcBef>
-                <a:spcPts val="400"/>
-              </a:spcBef>
-              <a:defRPr sz="1150">
+              <a:t>SOM • ДОСТИЖИМЫЙ РЫНОК (ЦЕЛЬ 3 ГОДА)</a:t>
+            </a:r>
+          </a:p>
+          <a:p>
+            <a:pPr>
+              <a:spcBef>
+                <a:spcPts val="300"/>
+              </a:spcBef>
+              <a:defRPr sz="2000" b="1">
+                <a:solidFill>
+                  <a:srgbClr val="F9F9FB"/>
+                </a:solidFill>
+              </a:defRPr>
+            </a:pPr>
+            <a:r>
+              <a:t>540 млн ₸ / год</a:t>
+            </a:r>
+          </a:p>
+          <a:p>
+            <a:pPr>
+              <a:spcBef>
+                <a:spcPts val="100"/>
+              </a:spcBef>
+              <a:defRPr sz="950" b="1">
                 <a:solidFill>
                   <a:srgbClr val="E5D5C0"/>
                 </a:solidFill>
               </a:defRPr>
             </a:pPr>
             <a:r>
-              <a:t>Мобильный терминал хостес и управляющего</a:t>
-            </a:r>
-          </a:p>
-          <a:p>
-            <a:pPr>
-              <a:spcBef>
-                <a:spcPts val="1000"/>
-              </a:spcBef>
-              <a:defRPr sz="1150">
+              <a:t>$1.12M ARR • 1 800 подключенных заведений (15% от SAM)</a:t>
+            </a:r>
+          </a:p>
+          <a:p>
+            <a:pPr>
+              <a:spcBef>
+                <a:spcPts val="300"/>
+              </a:spcBef>
+              <a:defRPr sz="900" b="1">
                 <a:solidFill>
                   <a:srgbClr val="F9F9FB"/>
                 </a:solidFill>
               </a:defRPr>
             </a:pPr>
             <a:r>
-              <a:t>📋 Живой журнал заявок со статусами (Новые, В брони, За столом, Отмена)</a:t>
-            </a:r>
-          </a:p>
-          <a:p>
-            <a:pPr>
-              <a:spcBef>
-                <a:spcPts val="1000"/>
-              </a:spcBef>
-              <a:defRPr sz="1150">
-                <a:solidFill>
-                  <a:srgbClr val="F9F9FB"/>
-                </a:solidFill>
-              </a:defRPr>
-            </a:pPr>
-            <a:r>
-              <a:t>🎯 Умные контекстные кнопки действий в 1 клик (Подтвердить / Посадить)</a:t>
-            </a:r>
-          </a:p>
-          <a:p>
-            <a:pPr>
-              <a:spcBef>
-                <a:spcPts val="1000"/>
-              </a:spcBef>
-              <a:defRPr sz="1150">
-                <a:solidFill>
-                  <a:srgbClr val="F9F9FB"/>
-                </a:solidFill>
-              </a:defRPr>
-            </a:pPr>
-            <a:r>
-              <a:t>🗺 Интерактивная карта зала с цветовой занятостью столов в реальном времени</a:t>
-            </a:r>
-          </a:p>
-          <a:p>
-            <a:pPr>
-              <a:spcBef>
-                <a:spcPts val="1000"/>
-              </a:spcBef>
-              <a:defRPr sz="1150">
-                <a:solidFill>
-                  <a:srgbClr val="F9F9FB"/>
-                </a:solidFill>
-              </a:defRPr>
-            </a:pPr>
-            <a:r>
-              <a:t>⏱ Контроль рабочей смены хостес, живой таймер и итоговый Z-отчет</a:t>
-            </a:r>
-          </a:p>
-          <a:p>
-            <a:pPr>
-              <a:spcBef>
-                <a:spcPts val="1000"/>
-              </a:spcBef>
-              <a:defRPr sz="1150">
-                <a:solidFill>
-                  <a:srgbClr val="F9F9FB"/>
-                </a:solidFill>
-              </a:defRPr>
-            </a:pPr>
-            <a:r>
-              <a:t>🔔 Мгновенные звуковые консьерж-уведомления (Chime) о новых бронях</a:t>
+              <a:t>• 🔥 45 млн ₸ MRR регулярной месячной подписки к 3-му году</a:t>
+            </a:r>
+          </a:p>
+          <a:p>
+            <a:pPr>
+              <a:spcBef>
+                <a:spcPts val="300"/>
+              </a:spcBef>
+              <a:defRPr sz="900">
+                <a:solidFill>
+                  <a:srgbClr val="A3AAB8"/>
+                </a:solidFill>
+              </a:defRPr>
+            </a:pPr>
+            <a:r>
+              <a:t>• Год 1 (Шымкент &amp; Юг): 250 точек → 75 млн ₸ выручки (пилот)</a:t>
+            </a:r>
+          </a:p>
+          <a:p>
+            <a:pPr>
+              <a:spcBef>
+                <a:spcPts val="300"/>
+              </a:spcBef>
+              <a:defRPr sz="900">
+                <a:solidFill>
+                  <a:srgbClr val="A3AAB8"/>
+                </a:solidFill>
+              </a:defRPr>
+            </a:pPr>
+            <a:r>
+              <a:t>• Год 2 (Алматы &amp; Астана): 850 точек → 255 млн ₸ выручки</a:t>
+            </a:r>
+          </a:p>
+          <a:p>
+            <a:pPr>
+              <a:spcBef>
+                <a:spcPts val="300"/>
+              </a:spcBef>
+              <a:defRPr sz="900">
+                <a:solidFill>
+                  <a:srgbClr val="A3AAB8"/>
+                </a:solidFill>
+              </a:defRPr>
+            </a:pPr>
+            <a:r>
+              <a:t>• Год 3 (Регионы РК): 1 800 точек → 540 млн ₸ ARR (выход в прибыль)</a:t>
             </a:r>
           </a:p>
         </p:txBody>
@@ -10264,7 +11332,7 @@
               </a:defRPr>
             </a:pPr>
             <a:r>
-              <a:t>ИНТЕРФЕЙС ГОСТЯ</a:t>
+              <a:t>РЕШЕНИЕ ПЛАТФОРМЫ</a:t>
             </a:r>
           </a:p>
         </p:txBody>
@@ -10300,7 +11368,7 @@
               </a:defRPr>
             </a:pPr>
             <a:r>
-              <a:t>Telegram Mini App: Бронирование столика в 3 касания</a:t>
+              <a:t>RestoKZ: Единая двусторонняя цифровая экосистема</a:t>
             </a:r>
           </a:p>
         </p:txBody>
@@ -10336,7 +11404,7 @@
               </a:defRPr>
             </a:pPr>
             <a:r>
-              <a:t>Максимальная конверсия за счет нулевого трения — без логинов, SMS и паролей</a:t>
+              <a:t>Связка клиента и ресторана в режиме реального времени без сторонних приложений</a:t>
             </a:r>
           </a:p>
         </p:txBody>
@@ -10350,7 +11418,7 @@
         <p:spPr>
           <a:xfrm>
             <a:off x="731520" y="1645920"/>
-            <a:ext cx="5943600" cy="4663440"/>
+            <a:ext cx="5212080" cy="4663440"/>
           </a:xfrm>
           <a:prstGeom prst="roundRect">
             <a:avLst/>
@@ -10360,7 +11428,7 @@
           </a:solidFill>
           <a:ln w="15240">
             <a:solidFill>
-              <a:srgbClr val="3C4452"/>
+              <a:srgbClr val="38BDF8"/>
             </a:solidFill>
           </a:ln>
         </p:spPr>
@@ -10395,7 +11463,7 @@
         <p:spPr>
           <a:xfrm>
             <a:off x="1005840" y="1828800"/>
-            <a:ext cx="5394960" cy="4297680"/>
+            <a:ext cx="4663440" cy="4297680"/>
           </a:xfrm>
           <a:prstGeom prst="rect">
             <a:avLst/>
@@ -10409,149 +11477,104 @@
           <a:lstStyle/>
           <a:p>
             <a:pPr>
-              <a:defRPr sz="1250" b="1">
-                <a:solidFill>
-                  <a:srgbClr val="C5A880"/>
-                </a:solidFill>
-              </a:defRPr>
-            </a:pPr>
-            <a:r>
-              <a:t>1. Умный каталог ресторанов</a:t>
-            </a:r>
-          </a:p>
-          <a:p>
-            <a:pPr>
-              <a:spcBef>
-                <a:spcPts val="200"/>
-              </a:spcBef>
-              <a:defRPr sz="1100">
+              <a:defRPr sz="1450" b="1">
+                <a:solidFill>
+                  <a:srgbClr val="38BDF8"/>
+                </a:solidFill>
+              </a:defRPr>
+            </a:pPr>
+            <a:r>
+              <a:t>🍽 ДЛЯ ГОСТЯ (B2C WEBAPP)</a:t>
+            </a:r>
+          </a:p>
+          <a:p>
+            <a:pPr>
+              <a:spcBef>
+                <a:spcPts val="400"/>
+              </a:spcBef>
+              <a:defRPr sz="1150">
+                <a:solidFill>
+                  <a:srgbClr val="E5D5C0"/>
+                </a:solidFill>
+              </a:defRPr>
+            </a:pPr>
+            <a:r>
+              <a:t>Telegram Mini App — открывается мгновенно в 1 клик</a:t>
+            </a:r>
+          </a:p>
+          <a:p>
+            <a:pPr>
+              <a:spcBef>
+                <a:spcPts val="1000"/>
+              </a:spcBef>
+              <a:defRPr sz="1150">
                 <a:solidFill>
                   <a:srgbClr val="F9F9FB"/>
                 </a:solidFill>
               </a:defRPr>
             </a:pPr>
             <a:r>
-              <a:t>Гость выбирает город (Алматы, Астана, Шымкент), фильтрует по кухне (Казахская, Итальянская, Восточная) и находит заведение.</a:t>
-            </a:r>
-          </a:p>
-          <a:p>
-            <a:pPr>
-              <a:spcBef>
-                <a:spcPts val="800"/>
-              </a:spcBef>
-              <a:defRPr sz="1250" b="1">
-                <a:solidFill>
-                  <a:srgbClr val="C5A880"/>
-                </a:solidFill>
-              </a:defRPr>
-            </a:pPr>
-            <a:r>
-              <a:t>2. Выбор даты, времени и компании</a:t>
-            </a:r>
-          </a:p>
-          <a:p>
-            <a:pPr>
-              <a:spcBef>
-                <a:spcPts val="200"/>
-              </a:spcBef>
-              <a:defRPr sz="1100">
+              <a:t>⚡ Бронирование за 30 секунд без скачивания приложений из App Store</a:t>
+            </a:r>
+          </a:p>
+          <a:p>
+            <a:pPr>
+              <a:spcBef>
+                <a:spcPts val="1000"/>
+              </a:spcBef>
+              <a:defRPr sz="1150">
                 <a:solidFill>
                   <a:srgbClr val="F9F9FB"/>
                 </a:solidFill>
               </a:defRPr>
             </a:pPr>
             <a:r>
-              <a:t>Сетка тайм-слотов (обед, ужин) и количества персон. Система сразу показывает доступные столы.</a:t>
-            </a:r>
-          </a:p>
-          <a:p>
-            <a:pPr>
-              <a:spcBef>
-                <a:spcPts val="800"/>
-              </a:spcBef>
-              <a:defRPr sz="1250" b="1">
-                <a:solidFill>
-                  <a:srgbClr val="C5A880"/>
-                </a:solidFill>
-              </a:defRPr>
-            </a:pPr>
-            <a:r>
-              <a:t>3. Интерактивная схема зала</a:t>
-            </a:r>
-          </a:p>
-          <a:p>
-            <a:pPr>
-              <a:spcBef>
-                <a:spcPts val="200"/>
-              </a:spcBef>
-              <a:defRPr sz="1100">
+              <a:t>🪑 Интерактивный выбор столика на реальной схеме зала (VIP, топчан, окно)</a:t>
+            </a:r>
+          </a:p>
+          <a:p>
+            <a:pPr>
+              <a:spcBef>
+                <a:spcPts val="1000"/>
+              </a:spcBef>
+              <a:defRPr sz="1150">
                 <a:solidFill>
                   <a:srgbClr val="F9F9FB"/>
                 </a:solidFill>
               </a:defRPr>
             </a:pPr>
             <a:r>
-              <a:t>Гость может выбрать конкретное место: панорамное окно, летняя терраса, VIP-кабина, топчан или дастархан.</a:t>
-            </a:r>
-          </a:p>
-          <a:p>
-            <a:pPr>
-              <a:spcBef>
-                <a:spcPts val="800"/>
-              </a:spcBef>
-              <a:defRPr sz="1250" b="1">
-                <a:solidFill>
-                  <a:srgbClr val="C5A880"/>
-                </a:solidFill>
-              </a:defRPr>
-            </a:pPr>
-            <a:r>
-              <a:t>4. Меню и детальная информация</a:t>
-            </a:r>
-          </a:p>
-          <a:p>
-            <a:pPr>
-              <a:spcBef>
-                <a:spcPts val="200"/>
-              </a:spcBef>
-              <a:defRPr sz="1100">
+              <a:t>📖 Просмотр фото интерьера, актуального меню и среднего чека</a:t>
+            </a:r>
+          </a:p>
+          <a:p>
+            <a:pPr>
+              <a:spcBef>
+                <a:spcPts val="1000"/>
+              </a:spcBef>
+              <a:defRPr sz="1150">
                 <a:solidFill>
                   <a:srgbClr val="F9F9FB"/>
                 </a:solidFill>
               </a:defRPr>
             </a:pPr>
             <a:r>
-              <a:t>Цены, фирменные блюда, фотографии порций, геолокация и прямой переход в 2GIS / Instagram.</a:t>
-            </a:r>
-          </a:p>
-          <a:p>
-            <a:pPr>
-              <a:spcBef>
-                <a:spcPts val="800"/>
-              </a:spcBef>
-              <a:defRPr sz="1250" b="1">
-                <a:solidFill>
-                  <a:srgbClr val="C5A880"/>
-                </a:solidFill>
-              </a:defRPr>
-            </a:pPr>
-            <a:r>
-              <a:t>5. Автоматическое подтверждение</a:t>
-            </a:r>
-          </a:p>
-          <a:p>
-            <a:pPr>
-              <a:spcBef>
-                <a:spcPts val="200"/>
-              </a:spcBef>
-              <a:defRPr sz="1100">
+              <a:t>🔔 Автоматические статусы и напоминания в Telegram (защита от забывчивости)</a:t>
+            </a:r>
+          </a:p>
+          <a:p>
+            <a:pPr>
+              <a:spcBef>
+                <a:spcPts val="1000"/>
+              </a:spcBef>
+              <a:defRPr sz="1150">
                 <a:solidFill>
                   <a:srgbClr val="F9F9FB"/>
                 </a:solidFill>
               </a:defRPr>
             </a:pPr>
             <a:r>
-              <a:t>Билет бронирования сохраняется в Telegram. За 2 часа до визита бот отправляет вежливое напоминание.</a:t>
+              <a:t>🌐 Поддержка 3 языков (Казахский, Русский, Английский)</a:t>
             </a:r>
           </a:p>
         </p:txBody>
@@ -10564,16 +11587,16 @@
         </p:nvSpPr>
         <p:spPr>
           <a:xfrm>
-            <a:off x="6912864" y="1609344"/>
-            <a:ext cx="2267712" cy="4736592"/>
+            <a:off x="6217920" y="1645920"/>
+            <a:ext cx="5212080" cy="4663440"/>
           </a:xfrm>
           <a:prstGeom prst="roundRect">
             <a:avLst/>
           </a:prstGeom>
           <a:solidFill>
-            <a:srgbClr val="1A1E27"/>
+            <a:srgbClr val="14171E"/>
           </a:solidFill>
-          <a:ln w="19050">
+          <a:ln w="15240">
             <a:solidFill>
               <a:srgbClr val="C5A880"/>
             </a:solidFill>
@@ -10601,99 +11624,131 @@
           </a:p>
         </p:txBody>
       </p:sp>
-      <p:pic>
-        <p:nvPicPr>
-          <p:cNvPr id="9" name="Picture 8" descr="guest_catalog_mobile.png"/>
-          <p:cNvPicPr>
-            <a:picLocks noChangeAspect="1"/>
-          </p:cNvPicPr>
-          <p:nvPr/>
-        </p:nvPicPr>
-        <p:blipFill>
-          <a:blip r:embed="rId2"/>
-          <a:stretch>
-            <a:fillRect/>
-          </a:stretch>
-        </p:blipFill>
-        <p:spPr>
-          <a:xfrm>
-            <a:off x="6949440" y="1645920"/>
-            <a:ext cx="2194560" cy="4663440"/>
+      <p:sp>
+        <p:nvSpPr>
+          <p:cNvPr id="9" name="TextBox 8"/>
+          <p:cNvSpPr txBox="1"/>
+          <p:nvPr/>
+        </p:nvSpPr>
+        <p:spPr>
+          <a:xfrm>
+            <a:off x="6492240" y="1828800"/>
+            <a:ext cx="4663440" cy="4297680"/>
           </a:xfrm>
           <a:prstGeom prst="rect">
             <a:avLst/>
           </a:prstGeom>
-        </p:spPr>
-      </p:pic>
-      <p:sp>
-        <p:nvSpPr>
-          <p:cNvPr id="10" name="Rounded Rectangle 9"/>
-          <p:cNvSpPr/>
-          <p:nvPr/>
-        </p:nvSpPr>
-        <p:spPr>
-          <a:xfrm>
-            <a:off x="9381744" y="1609344"/>
-            <a:ext cx="2267712" cy="4736592"/>
-          </a:xfrm>
-          <a:prstGeom prst="roundRect">
-            <a:avLst/>
-          </a:prstGeom>
-          <a:solidFill>
-            <a:srgbClr val="1A1E27"/>
-          </a:solidFill>
-          <a:ln w="19050">
-            <a:solidFill>
-              <a:srgbClr val="C5A880"/>
-            </a:solidFill>
-          </a:ln>
-        </p:spPr>
-        <p:style>
-          <a:lnRef idx="1">
-            <a:schemeClr val="accent1"/>
-          </a:lnRef>
-          <a:fillRef idx="3">
-            <a:schemeClr val="accent1"/>
-          </a:fillRef>
-          <a:effectRef idx="2">
-            <a:schemeClr val="accent1"/>
-          </a:effectRef>
-          <a:fontRef idx="minor">
-            <a:schemeClr val="lt1"/>
-          </a:fontRef>
-        </p:style>
-        <p:txBody>
-          <a:bodyPr rtlCol="0" anchor="ctr"/>
-          <a:lstStyle/>
-          <a:p>
-            <a:pPr algn="ctr"/>
-          </a:p>
-        </p:txBody>
-      </p:sp>
-      <p:pic>
-        <p:nvPicPr>
-          <p:cNvPr id="11" name="Picture 10" descr="guest_restaurant_modal.png"/>
-          <p:cNvPicPr>
-            <a:picLocks noChangeAspect="1"/>
-          </p:cNvPicPr>
-          <p:nvPr/>
-        </p:nvPicPr>
-        <p:blipFill>
-          <a:blip r:embed="rId3"/>
-          <a:stretch>
-            <a:fillRect/>
-          </a:stretch>
-        </p:blipFill>
-        <p:spPr>
-          <a:xfrm>
-            <a:off x="9418320" y="1645920"/>
-            <a:ext cx="2194560" cy="4663440"/>
-          </a:xfrm>
-          <a:prstGeom prst="rect">
-            <a:avLst/>
-          </a:prstGeom>
-        </p:spPr>
-      </p:pic>
+          <a:noFill/>
+        </p:spPr>
+        <p:txBody>
+          <a:bodyPr wrap="square">
+            <a:spAutoFit/>
+          </a:bodyPr>
+          <a:lstStyle/>
+          <a:p>
+            <a:pPr>
+              <a:defRPr sz="1450" b="1">
+                <a:solidFill>
+                  <a:srgbClr val="C5A880"/>
+                </a:solidFill>
+              </a:defRPr>
+            </a:pPr>
+            <a:r>
+              <a:t>👑 ДЛЯ РЕСТОРАНА (RESTOKZ PRO B2B)</a:t>
+            </a:r>
+          </a:p>
+          <a:p>
+            <a:pPr>
+              <a:spcBef>
+                <a:spcPts val="400"/>
+              </a:spcBef>
+              <a:defRPr sz="1150">
+                <a:solidFill>
+                  <a:srgbClr val="E5D5C0"/>
+                </a:solidFill>
+              </a:defRPr>
+            </a:pPr>
+            <a:r>
+              <a:t>Мобильный терминал хостес и управляющего</a:t>
+            </a:r>
+          </a:p>
+          <a:p>
+            <a:pPr>
+              <a:spcBef>
+                <a:spcPts val="1000"/>
+              </a:spcBef>
+              <a:defRPr sz="1150">
+                <a:solidFill>
+                  <a:srgbClr val="F9F9FB"/>
+                </a:solidFill>
+              </a:defRPr>
+            </a:pPr>
+            <a:r>
+              <a:t>📋 Живой журнал заявок со статусами (Новые, В брони, За столом, Отмена)</a:t>
+            </a:r>
+          </a:p>
+          <a:p>
+            <a:pPr>
+              <a:spcBef>
+                <a:spcPts val="1000"/>
+              </a:spcBef>
+              <a:defRPr sz="1150">
+                <a:solidFill>
+                  <a:srgbClr val="F9F9FB"/>
+                </a:solidFill>
+              </a:defRPr>
+            </a:pPr>
+            <a:r>
+              <a:t>🎯 Умные контекстные кнопки действий в 1 клик (Подтвердить / Посадить)</a:t>
+            </a:r>
+          </a:p>
+          <a:p>
+            <a:pPr>
+              <a:spcBef>
+                <a:spcPts val="1000"/>
+              </a:spcBef>
+              <a:defRPr sz="1150">
+                <a:solidFill>
+                  <a:srgbClr val="F9F9FB"/>
+                </a:solidFill>
+              </a:defRPr>
+            </a:pPr>
+            <a:r>
+              <a:t>🗺 Интерактивная карта зала с цветовой занятостью столов в реальном времени</a:t>
+            </a:r>
+          </a:p>
+          <a:p>
+            <a:pPr>
+              <a:spcBef>
+                <a:spcPts val="1000"/>
+              </a:spcBef>
+              <a:defRPr sz="1150">
+                <a:solidFill>
+                  <a:srgbClr val="F9F9FB"/>
+                </a:solidFill>
+              </a:defRPr>
+            </a:pPr>
+            <a:r>
+              <a:t>⏱ Контроль рабочей смены хостес, живой таймер и итоговый Z-отчет</a:t>
+            </a:r>
+          </a:p>
+          <a:p>
+            <a:pPr>
+              <a:spcBef>
+                <a:spcPts val="1000"/>
+              </a:spcBef>
+              <a:defRPr sz="1150">
+                <a:solidFill>
+                  <a:srgbClr val="F9F9FB"/>
+                </a:solidFill>
+              </a:defRPr>
+            </a:pPr>
+            <a:r>
+              <a:t>🔔 Мгновенные звуковые консьерж-уведомления (Chime) о новых бронях</a:t>
+            </a:r>
+          </a:p>
+        </p:txBody>
+      </p:sp>
     </p:spTree>
   </p:cSld>
   <p:clrMapOvr>
@@ -10786,7 +11841,7 @@
               </a:defRPr>
             </a:pPr>
             <a:r>
-              <a:t>ТЕРМИНАЛ РЕСТОРАНА</a:t>
+              <a:t>ИНТЕРФЕЙС ГОСТЯ</a:t>
             </a:r>
           </a:p>
         </p:txBody>
@@ -10822,7 +11877,7 @@
               </a:defRPr>
             </a:pPr>
             <a:r>
-              <a:t>RestoKZ PRO: Журнал броней с контекстными действиями</a:t>
+              <a:t>Telegram Mini App: Бронирование столика в 3 касания</a:t>
             </a:r>
           </a:p>
         </p:txBody>
@@ -10858,7 +11913,7 @@
               </a:defRPr>
             </a:pPr>
             <a:r>
-              <a:t>Специально разработан под экраны смартфонов хостес с крупными шрифтами и тактильным откликом</a:t>
+              <a:t>Максимальная конверсия за счет нулевого трения — без логинов, SMS и паролей</a:t>
             </a:r>
           </a:p>
         </p:txBody>
@@ -10938,7 +11993,7 @@
               </a:defRPr>
             </a:pPr>
             <a:r>
-              <a:t>⚡ Контекстные умные действия в 1 клик</a:t>
+              <a:t>1. Умный каталог ресторанов</a:t>
             </a:r>
           </a:p>
           <a:p>
@@ -10946,26 +12001,14 @@
               <a:spcBef>
                 <a:spcPts val="200"/>
               </a:spcBef>
-              <a:defRPr sz="1050">
+              <a:defRPr sz="1100">
                 <a:solidFill>
                   <a:srgbClr val="F9F9FB"/>
                 </a:solidFill>
               </a:defRPr>
             </a:pPr>
             <a:r>
-              <a:t>Кнопки динамически подстраиваются под статус заявки:</a:t>
-            </a:r>
-            <a:br/>
-            <a:r>
-              <a:t>• Ожидает: [✅ Подтвердить] + [❌ Отказ]</a:t>
-            </a:r>
-            <a:br/>
-            <a:r>
-              <a:t>• Подтверждена: [🥂 Посадить за стол] + [Отмена]</a:t>
-            </a:r>
-            <a:br/>
-            <a:r>
-              <a:t>• Гости сидят: [🔓 Стол освободился] + [↩ В бронь]</a:t>
+              <a:t>Гость выбирает город (Алматы, Астана, Шымкент), фильтрует по кухне (Казахская, Итальянская, Восточная) и находит заведение.</a:t>
             </a:r>
           </a:p>
           <a:p>
@@ -10980,7 +12023,7 @@
               </a:defRPr>
             </a:pPr>
             <a:r>
-              <a:t>🔍 Мгновенный поиск и фильтрация</a:t>
+              <a:t>2. Выбор даты, времени и компании</a:t>
             </a:r>
           </a:p>
           <a:p>
@@ -10988,14 +12031,14 @@
               <a:spcBef>
                 <a:spcPts val="200"/>
               </a:spcBef>
-              <a:defRPr sz="1050">
+              <a:defRPr sz="1100">
                 <a:solidFill>
                   <a:srgbClr val="F9F9FB"/>
                 </a:solidFill>
               </a:defRPr>
             </a:pPr>
             <a:r>
-              <a:t>Поиск за доли секунды по имени гостя, номеру телефона или #ID заявки. Сегментный переключатель дат: «Все дни | Сегодня | Завтра».</a:t>
+              <a:t>Сетка тайм-слотов (обед, ужин) и количества персон. Система сразу показывает доступные столы.</a:t>
             </a:r>
           </a:p>
           <a:p>
@@ -11010,7 +12053,7 @@
               </a:defRPr>
             </a:pPr>
             <a:r>
-              <a:t>📊 Живой KPI-дашборд смены</a:t>
+              <a:t>3. Интерактивная схема зала</a:t>
             </a:r>
           </a:p>
           <a:p>
@@ -11018,14 +12061,14 @@
               <a:spcBef>
                 <a:spcPts val="200"/>
               </a:spcBef>
-              <a:defRPr sz="1050">
+              <a:defRPr sz="1100">
                 <a:solidFill>
                   <a:srgbClr val="F9F9FB"/>
                 </a:solidFill>
               </a:defRPr>
             </a:pPr>
             <a:r>
-              <a:t>Крупные показатели вверху экрана: сколько заявок ждут ответа (⏳), сколько столов в брони (✅) и сколько гостей обслужено за смену (👥).</a:t>
+              <a:t>Гость может выбрать конкретное место: панорамное окно, летняя терраса, VIP-кабина, топчан или дастархан.</a:t>
             </a:r>
           </a:p>
           <a:p>
@@ -11040,7 +12083,7 @@
               </a:defRPr>
             </a:pPr>
             <a:r>
-              <a:t>🔔 Звуковые консьерж-уведомления (Chime)</a:t>
+              <a:t>4. Меню и детальная информация</a:t>
             </a:r>
           </a:p>
           <a:p>
@@ -11048,14 +12091,14 @@
               <a:spcBef>
                 <a:spcPts val="200"/>
               </a:spcBef>
-              <a:defRPr sz="1050">
+              <a:defRPr sz="1100">
                 <a:solidFill>
                   <a:srgbClr val="F9F9FB"/>
                 </a:solidFill>
               </a:defRPr>
             </a:pPr>
             <a:r>
-              <a:t>При поступлении новой онлайн-заявки терминал издает благородный мягкий гонг (Web Audio API), чтобы хостес не пропустила гостя.</a:t>
+              <a:t>Цены, фирменные блюда, фотографии порций, геолокация и прямой переход в 2GIS / Instagram.</a:t>
             </a:r>
           </a:p>
           <a:p>
@@ -11070,7 +12113,7 @@
               </a:defRPr>
             </a:pPr>
             <a:r>
-              <a:t>🛡 Исключение ошибок человеческого фактора</a:t>
+              <a:t>5. Автоматическое подтверждение</a:t>
             </a:r>
           </a:p>
           <a:p>
@@ -11078,14 +12121,14 @@
               <a:spcBef>
                 <a:spcPts val="200"/>
               </a:spcBef>
-              <a:defRPr sz="1050">
+              <a:defRPr sz="1100">
                 <a:solidFill>
                   <a:srgbClr val="F9F9FB"/>
                 </a:solidFill>
               </a:defRPr>
             </a:pPr>
             <a:r>
-              <a:t>Невозможно случайно удалить бронь или повторно отменить уже отклоненную заявку. Полная синхронизация с базой данных.</a:t>
+              <a:t>Билет бронирования сохраняется в Telegram. За 2 часа до визита бот отправляет вежливое напоминание.</a:t>
             </a:r>
           </a:p>
         </p:txBody>
@@ -11098,8 +12141,8 @@
         </p:nvSpPr>
         <p:spPr>
           <a:xfrm>
-            <a:off x="7735824" y="1609344"/>
-            <a:ext cx="2313432" cy="4736592"/>
+            <a:off x="6912864" y="1609344"/>
+            <a:ext cx="2267712" cy="4736592"/>
           </a:xfrm>
           <a:prstGeom prst="roundRect">
             <a:avLst/>
@@ -11137,7 +12180,7 @@
       </p:sp>
       <p:pic>
         <p:nvPicPr>
-          <p:cNvPr id="9" name="Picture 8" descr="admin_terminal_mobile.png"/>
+          <p:cNvPr id="9" name="Picture 8" descr="guest_catalog_mobile.png"/>
           <p:cNvPicPr>
             <a:picLocks noChangeAspect="1"/>
           </p:cNvPicPr>
@@ -11151,8 +12194,77 @@
         </p:blipFill>
         <p:spPr>
           <a:xfrm>
-            <a:off x="7772400" y="1645920"/>
-            <a:ext cx="2240280" cy="4663440"/>
+            <a:off x="6949440" y="1645920"/>
+            <a:ext cx="2194560" cy="4663440"/>
+          </a:xfrm>
+          <a:prstGeom prst="rect">
+            <a:avLst/>
+          </a:prstGeom>
+        </p:spPr>
+      </p:pic>
+      <p:sp>
+        <p:nvSpPr>
+          <p:cNvPr id="10" name="Rounded Rectangle 9"/>
+          <p:cNvSpPr/>
+          <p:nvPr/>
+        </p:nvSpPr>
+        <p:spPr>
+          <a:xfrm>
+            <a:off x="9381744" y="1609344"/>
+            <a:ext cx="2267712" cy="4736592"/>
+          </a:xfrm>
+          <a:prstGeom prst="roundRect">
+            <a:avLst/>
+          </a:prstGeom>
+          <a:solidFill>
+            <a:srgbClr val="1A1E27"/>
+          </a:solidFill>
+          <a:ln w="19050">
+            <a:solidFill>
+              <a:srgbClr val="C5A880"/>
+            </a:solidFill>
+          </a:ln>
+        </p:spPr>
+        <p:style>
+          <a:lnRef idx="1">
+            <a:schemeClr val="accent1"/>
+          </a:lnRef>
+          <a:fillRef idx="3">
+            <a:schemeClr val="accent1"/>
+          </a:fillRef>
+          <a:effectRef idx="2">
+            <a:schemeClr val="accent1"/>
+          </a:effectRef>
+          <a:fontRef idx="minor">
+            <a:schemeClr val="lt1"/>
+          </a:fontRef>
+        </p:style>
+        <p:txBody>
+          <a:bodyPr rtlCol="0" anchor="ctr"/>
+          <a:lstStyle/>
+          <a:p>
+            <a:pPr algn="ctr"/>
+          </a:p>
+        </p:txBody>
+      </p:sp>
+      <p:pic>
+        <p:nvPicPr>
+          <p:cNvPr id="11" name="Picture 10" descr="guest_restaurant_modal.png"/>
+          <p:cNvPicPr>
+            <a:picLocks noChangeAspect="1"/>
+          </p:cNvPicPr>
+          <p:nvPr/>
+        </p:nvPicPr>
+        <p:blipFill>
+          <a:blip r:embed="rId3"/>
+          <a:stretch>
+            <a:fillRect/>
+          </a:stretch>
+        </p:blipFill>
+        <p:spPr>
+          <a:xfrm>
+            <a:off x="9418320" y="1645920"/>
+            <a:ext cx="2194560" cy="4663440"/>
           </a:xfrm>
           <a:prstGeom prst="rect">
             <a:avLst/>
@@ -11251,7 +12363,7 @@
               </a:defRPr>
             </a:pPr>
             <a:r>
-              <a:t>СХЕМА РАССАДКИ</a:t>
+              <a:t>ТЕРМИНАЛ РЕСТОРАНА</a:t>
             </a:r>
           </a:p>
         </p:txBody>
@@ -11287,7 +12399,7 @@
               </a:defRPr>
             </a:pPr>
             <a:r>
-              <a:t>Интерактивная карта зала: Наглядный контроль занятости</a:t>
+              <a:t>RestoKZ PRO: Журнал броней с контекстными действиями</a:t>
             </a:r>
           </a:p>
         </p:txBody>
@@ -11323,7 +12435,7 @@
               </a:defRPr>
             </a:pPr>
             <a:r>
-              <a:t>Никаких накладок, путаницы столов и потери контроля в часы пиковой загрузки</a:t>
+              <a:t>Специально разработан под экраны смартфонов хостес с крупными шрифтами и тактильным откликом</a:t>
             </a:r>
           </a:p>
         </p:txBody>
@@ -11396,131 +12508,161 @@
           <a:lstStyle/>
           <a:p>
             <a:pPr>
-              <a:defRPr sz="1300" b="1">
-                <a:solidFill>
-                  <a:srgbClr val="34D399"/>
-                </a:solidFill>
-              </a:defRPr>
-            </a:pPr>
-            <a:r>
-              <a:t>🟢 Наглядная цветовая легенда статусов</a:t>
-            </a:r>
-          </a:p>
-          <a:p>
-            <a:pPr>
-              <a:spcBef>
-                <a:spcPts val="300"/>
-              </a:spcBef>
-              <a:defRPr sz="1100">
+              <a:defRPr sz="1250" b="1">
+                <a:solidFill>
+                  <a:srgbClr val="C5A880"/>
+                </a:solidFill>
+              </a:defRPr>
+            </a:pPr>
+            <a:r>
+              <a:t>⚡ Контекстные умные действия в 1 клик</a:t>
+            </a:r>
+          </a:p>
+          <a:p>
+            <a:pPr>
+              <a:spcBef>
+                <a:spcPts val="200"/>
+              </a:spcBef>
+              <a:defRPr sz="1050">
                 <a:solidFill>
                   <a:srgbClr val="F9F9FB"/>
                 </a:solidFill>
               </a:defRPr>
             </a:pPr>
             <a:r>
-              <a:t>• Изумрудный: стол свободен для посадки</a:t>
+              <a:t>Кнопки динамически подстраиваются под статус заявки:</a:t>
             </a:r>
             <a:br/>
             <a:r>
-              <a:t>• Золотой: стол подтвержден в бронь на выбранное время</a:t>
+              <a:t>• Ожидает: [✅ Подтвердить] + [❌ Отказ]</a:t>
             </a:r>
             <a:br/>
             <a:r>
-              <a:t>• Лазурный: гости уже сидят за столом</a:t>
+              <a:t>• Подтверждена: [🥂 Посадить за стол] + [Отмена]</a:t>
             </a:r>
             <a:br/>
             <a:r>
-              <a:t>• Янтарный: новая заявка ожидает подтверждения</a:t>
-            </a:r>
-          </a:p>
-          <a:p>
-            <a:pPr>
-              <a:spcBef>
-                <a:spcPts val="1200"/>
-              </a:spcBef>
-              <a:defRPr sz="1300" b="1">
-                <a:solidFill>
-                  <a:srgbClr val="34D399"/>
-                </a:solidFill>
-              </a:defRPr>
-            </a:pPr>
-            <a:r>
-              <a:t>⚡ Посадка от двери в 2 клика (Walk-in)</a:t>
-            </a:r>
-          </a:p>
-          <a:p>
-            <a:pPr>
-              <a:spcBef>
-                <a:spcPts val="300"/>
-              </a:spcBef>
-              <a:defRPr sz="1100">
+              <a:t>• Гости сидят: [🔓 Стол освободился] + [↩ В бронь]</a:t>
+            </a:r>
+          </a:p>
+          <a:p>
+            <a:pPr>
+              <a:spcBef>
+                <a:spcPts val="800"/>
+              </a:spcBef>
+              <a:defRPr sz="1250" b="1">
+                <a:solidFill>
+                  <a:srgbClr val="C5A880"/>
+                </a:solidFill>
+              </a:defRPr>
+            </a:pPr>
+            <a:r>
+              <a:t>🔍 Мгновенный поиск и фильтрация</a:t>
+            </a:r>
+          </a:p>
+          <a:p>
+            <a:pPr>
+              <a:spcBef>
+                <a:spcPts val="200"/>
+              </a:spcBef>
+              <a:defRPr sz="1050">
                 <a:solidFill>
                   <a:srgbClr val="F9F9FB"/>
                 </a:solidFill>
               </a:defRPr>
             </a:pPr>
             <a:r>
-              <a:t>Гости пришли с улицы без брони? Хостес просто тапает на свободный стол в зале — карточка посадки открывается мгновенно.</a:t>
-            </a:r>
-          </a:p>
-          <a:p>
-            <a:pPr>
-              <a:spcBef>
-                <a:spcPts val="1200"/>
-              </a:spcBef>
-              <a:defRPr sz="1300" b="1">
-                <a:solidFill>
-                  <a:srgbClr val="34D399"/>
-                </a:solidFill>
-              </a:defRPr>
-            </a:pPr>
-            <a:r>
-              <a:t>🛡 Защита от овербукинга и коллизий</a:t>
-            </a:r>
-          </a:p>
-          <a:p>
-            <a:pPr>
-              <a:spcBef>
-                <a:spcPts val="300"/>
-              </a:spcBef>
-              <a:defRPr sz="1100">
+              <a:t>Поиск за доли секунды по имени гостя, номеру телефона или #ID заявки. Сегментный переключатель дат: «Все дни | Сегодня | Завтра».</a:t>
+            </a:r>
+          </a:p>
+          <a:p>
+            <a:pPr>
+              <a:spcBef>
+                <a:spcPts val="800"/>
+              </a:spcBef>
+              <a:defRPr sz="1250" b="1">
+                <a:solidFill>
+                  <a:srgbClr val="C5A880"/>
+                </a:solidFill>
+              </a:defRPr>
+            </a:pPr>
+            <a:r>
+              <a:t>📊 Живой KPI-дашборд смены</a:t>
+            </a:r>
+          </a:p>
+          <a:p>
+            <a:pPr>
+              <a:spcBef>
+                <a:spcPts val="200"/>
+              </a:spcBef>
+              <a:defRPr sz="1050">
                 <a:solidFill>
                   <a:srgbClr val="F9F9FB"/>
                 </a:solidFill>
               </a:defRPr>
             </a:pPr>
             <a:r>
-              <a:t>Система автоматически блокирует стол на 2 часа вокруг времени брони. Никаких конфликтов из-за посадки двух компаний на один диван.</a:t>
-            </a:r>
-          </a:p>
-          <a:p>
-            <a:pPr>
-              <a:spcBef>
-                <a:spcPts val="1200"/>
-              </a:spcBef>
-              <a:defRPr sz="1300" b="1">
-                <a:solidFill>
-                  <a:srgbClr val="34D399"/>
-                </a:solidFill>
-              </a:defRPr>
-            </a:pPr>
-            <a:r>
-              <a:t>🏢 Зонирование ресторана</a:t>
-            </a:r>
-          </a:p>
-          <a:p>
-            <a:pPr>
-              <a:spcBef>
-                <a:spcPts val="300"/>
-              </a:spcBef>
-              <a:defRPr sz="1100">
+              <a:t>Крупные показатели вверху экрана: сколько заявок ждут ответа (⏳), сколько столов в брони (✅) и сколько гостей обслужено за смену (👥).</a:t>
+            </a:r>
+          </a:p>
+          <a:p>
+            <a:pPr>
+              <a:spcBef>
+                <a:spcPts val="800"/>
+              </a:spcBef>
+              <a:defRPr sz="1250" b="1">
+                <a:solidFill>
+                  <a:srgbClr val="C5A880"/>
+                </a:solidFill>
+              </a:defRPr>
+            </a:pPr>
+            <a:r>
+              <a:t>🔔 Звуковые консьерж-уведомления (Chime)</a:t>
+            </a:r>
+          </a:p>
+          <a:p>
+            <a:pPr>
+              <a:spcBef>
+                <a:spcPts val="200"/>
+              </a:spcBef>
+              <a:defRPr sz="1050">
                 <a:solidFill>
                   <a:srgbClr val="F9F9FB"/>
                 </a:solidFill>
               </a:defRPr>
             </a:pPr>
             <a:r>
-              <a:t>Четкое разделение на зоны: основной зал, панорамные окна, летняя терраса, тихая зона, топчаны и VIP-кабины.</a:t>
+              <a:t>При поступлении новой онлайн-заявки терминал издает благородный мягкий гонг (Web Audio API), чтобы хостес не пропустила гостя.</a:t>
+            </a:r>
+          </a:p>
+          <a:p>
+            <a:pPr>
+              <a:spcBef>
+                <a:spcPts val="800"/>
+              </a:spcBef>
+              <a:defRPr sz="1250" b="1">
+                <a:solidFill>
+                  <a:srgbClr val="C5A880"/>
+                </a:solidFill>
+              </a:defRPr>
+            </a:pPr>
+            <a:r>
+              <a:t>🛡 Исключение ошибок человеческого фактора</a:t>
+            </a:r>
+          </a:p>
+          <a:p>
+            <a:pPr>
+              <a:spcBef>
+                <a:spcPts val="200"/>
+              </a:spcBef>
+              <a:defRPr sz="1050">
+                <a:solidFill>
+                  <a:srgbClr val="F9F9FB"/>
+                </a:solidFill>
+              </a:defRPr>
+            </a:pPr>
+            <a:r>
+              <a:t>Невозможно случайно удалить бронь или повторно отменить уже отклоненную заявку. Полная синхронизация с базой данных.</a:t>
             </a:r>
           </a:p>
         </p:txBody>
@@ -11572,7 +12714,7 @@
       </p:sp>
       <p:pic>
         <p:nvPicPr>
-          <p:cNvPr id="9" name="Picture 8" descr="admin_floor_map.png"/>
+          <p:cNvPr id="9" name="Picture 8" descr="admin_terminal_mobile.png"/>
           <p:cNvPicPr>
             <a:picLocks noChangeAspect="1"/>
           </p:cNvPicPr>
@@ -11686,7 +12828,7 @@
               </a:defRPr>
             </a:pPr>
             <a:r>
-              <a:t>УПРАВЛЕНИЕ ПЕРСОНАЛОМ</a:t>
+              <a:t>СХЕМА РАССАДКИ</a:t>
             </a:r>
           </a:p>
         </p:txBody>
@@ -11722,7 +12864,7 @@
               </a:defRPr>
             </a:pPr>
             <a:r>
-              <a:t>Рабочая смена и Z-отчётность: Полная прозрачность для владельца</a:t>
+              <a:t>Интерактивная карта зала: Наглядный контроль занятости</a:t>
             </a:r>
           </a:p>
         </p:txBody>
@@ -11758,7 +12900,7 @@
               </a:defRPr>
             </a:pPr>
             <a:r>
-              <a:t>Хостес подотчетна системе, а управляющий видит реальные цифры загрузки зала</a:t>
+              <a:t>Никаких накладок, путаницы столов и потери контроля в часы пиковой загрузки</a:t>
             </a:r>
           </a:p>
         </p:txBody>
@@ -11833,12 +12975,12 @@
             <a:pPr>
               <a:defRPr sz="1300" b="1">
                 <a:solidFill>
-                  <a:srgbClr val="C5A880"/>
-                </a:solidFill>
-              </a:defRPr>
-            </a:pPr>
-            <a:r>
-              <a:t>⏱ Интерактивный статус-бар смены</a:t>
+                  <a:srgbClr val="34D399"/>
+                </a:solidFill>
+              </a:defRPr>
+            </a:pPr>
+            <a:r>
+              <a:t>🟢 Наглядная цветовая легенда статусов</a:t>
             </a:r>
           </a:p>
           <a:p>
@@ -11853,22 +12995,34 @@
               </a:defRPr>
             </a:pPr>
             <a:r>
-              <a:t>В шапке терминала отображается пульсирующий статус с живым таймером (например, «● Смена 3ч 45м»). Данные сохраняются при перезагрузках.</a:t>
-            </a:r>
-          </a:p>
-          <a:p>
-            <a:pPr>
-              <a:spcBef>
-                <a:spcPts val="1000"/>
+              <a:t>• Изумрудный: стол свободен для посадки</a:t>
+            </a:r>
+            <a:br/>
+            <a:r>
+              <a:t>• Золотой: стол подтвержден в бронь на выбранное время</a:t>
+            </a:r>
+            <a:br/>
+            <a:r>
+              <a:t>• Лазурный: гости уже сидят за столом</a:t>
+            </a:r>
+            <a:br/>
+            <a:r>
+              <a:t>• Янтарный: новая заявка ожидает подтверждения</a:t>
+            </a:r>
+          </a:p>
+          <a:p>
+            <a:pPr>
+              <a:spcBef>
+                <a:spcPts val="1200"/>
               </a:spcBef>
               <a:defRPr sz="1300" b="1">
                 <a:solidFill>
-                  <a:srgbClr val="C5A880"/>
-                </a:solidFill>
-              </a:defRPr>
-            </a:pPr>
-            <a:r>
-              <a:t>📊 Автоматический подсчет метрик смены</a:t>
+                  <a:srgbClr val="34D399"/>
+                </a:solidFill>
+              </a:defRPr>
+            </a:pPr>
+            <a:r>
+              <a:t>⚡ Посадка от двери в 2 клика (Walk-in)</a:t>
             </a:r>
           </a:p>
           <a:p>
@@ -11883,34 +13037,22 @@
               </a:defRPr>
             </a:pPr>
             <a:r>
-              <a:t>Терминал в реальном времени считает:</a:t>
-            </a:r>
-            <a:br/>
-            <a:r>
-              <a:t>• Количество поступивших и обработанных заявок</a:t>
-            </a:r>
-            <a:br/>
-            <a:r>
-              <a:t>• Суммарное количество реально посаженных гостей</a:t>
-            </a:r>
-            <a:br/>
-            <a:r>
-              <a:t>• Количество отмен и отказов с причинами</a:t>
-            </a:r>
-          </a:p>
-          <a:p>
-            <a:pPr>
-              <a:spcBef>
-                <a:spcPts val="1000"/>
+              <a:t>Гости пришли с улицы без брони? Хостес просто тапает на свободный стол в зале — карточка посадки открывается мгновенно.</a:t>
+            </a:r>
+          </a:p>
+          <a:p>
+            <a:pPr>
+              <a:spcBef>
+                <a:spcPts val="1200"/>
               </a:spcBef>
               <a:defRPr sz="1300" b="1">
                 <a:solidFill>
-                  <a:srgbClr val="C5A880"/>
-                </a:solidFill>
-              </a:defRPr>
-            </a:pPr>
-            <a:r>
-              <a:t>🏁 Закрытие смены по кнопке и Z-отчет</a:t>
+                  <a:srgbClr val="34D399"/>
+                </a:solidFill>
+              </a:defRPr>
+            </a:pPr>
+            <a:r>
+              <a:t>🛡 Защита от овербукинга и коллизий</a:t>
             </a:r>
           </a:p>
           <a:p>
@@ -11925,22 +13067,22 @@
               </a:defRPr>
             </a:pPr>
             <a:r>
-              <a:t>Хостес не может просто уйти — по окончании дня она нажимает «Завершить рабочую смену». Формируется итоговая сводка смены для передачи управляющему.</a:t>
-            </a:r>
-          </a:p>
-          <a:p>
-            <a:pPr>
-              <a:spcBef>
-                <a:spcPts val="1000"/>
+              <a:t>Система автоматически блокирует стол на 2 часа вокруг времени брони. Никаких конфликтов из-за посадки двух компаний на один диван.</a:t>
+            </a:r>
+          </a:p>
+          <a:p>
+            <a:pPr>
+              <a:spcBef>
+                <a:spcPts val="1200"/>
               </a:spcBef>
               <a:defRPr sz="1300" b="1">
                 <a:solidFill>
-                  <a:srgbClr val="C5A880"/>
-                </a:solidFill>
-              </a:defRPr>
-            </a:pPr>
-            <a:r>
-              <a:t>👤 Персональная ответственность</a:t>
+                  <a:srgbClr val="34D399"/>
+                </a:solidFill>
+              </a:defRPr>
+            </a:pPr>
+            <a:r>
+              <a:t>🏢 Зонирование ресторана</a:t>
             </a:r>
           </a:p>
           <a:p>
@@ -11955,7 +13097,7 @@
               </a:defRPr>
             </a:pPr>
             <a:r>
-              <a:t>Каждая смена привязана к имени дежурного администратора, исключая перекладывание вины за потерянные брони.</a:t>
+              <a:t>Четкое разделение на зоны: основной зал, панорамные окна, летняя терраса, тихая зона, топчаны и VIP-кабины.</a:t>
             </a:r>
           </a:p>
         </p:txBody>
@@ -12007,7 +13149,7 @@
       </p:sp>
       <p:pic>
         <p:nvPicPr>
-          <p:cNvPr id="9" name="Picture 8" descr="admin_shift_modal.png"/>
+          <p:cNvPr id="9" name="Picture 8" descr="admin_floor_map.png"/>
           <p:cNvPicPr>
             <a:picLocks noChangeAspect="1"/>
           </p:cNvPicPr>
@@ -12121,7 +13263,7 @@
               </a:defRPr>
             </a:pPr>
             <a:r>
-              <a:t>СОВРЕМЕННЫЙ UX/UI</a:t>
+              <a:t>УПРАВЛЕНИЕ ПЕРСОНАЛОМ</a:t>
             </a:r>
           </a:p>
         </p:txBody>
@@ -12157,7 +13299,7 @@
               </a:defRPr>
             </a:pPr>
             <a:r>
-              <a:t>Мультилокация и быстрое управление сетью ресторанов</a:t>
+              <a:t>Рабочая смена и Z-отчётность: Полная прозрачность для владельца</a:t>
             </a:r>
           </a:p>
         </p:txBody>
@@ -12193,7 +13335,7 @@
               </a:defRPr>
             </a:pPr>
             <a:r>
-              <a:t>Замена устаревших браузерных элементов на премиальные Bottom Sheets и боковое меню</a:t>
+              <a:t>Хостес подотчетна системе, а управляющий видит реальные цифры загрузки зала</a:t>
             </a:r>
           </a:p>
         </p:txBody>
@@ -12266,149 +13408,131 @@
           <a:lstStyle/>
           <a:p>
             <a:pPr>
-              <a:defRPr sz="1250" b="1">
-                <a:solidFill>
-                  <a:srgbClr val="E5D5C0"/>
-                </a:solidFill>
-              </a:defRPr>
-            </a:pPr>
-            <a:r>
-              <a:t>🏛 Кастомный Luxury Bottom Sheet выбора заведения</a:t>
-            </a:r>
-          </a:p>
-          <a:p>
-            <a:pPr>
-              <a:spcBef>
-                <a:spcPts val="200"/>
-              </a:spcBef>
-              <a:defRPr sz="1050">
+              <a:defRPr sz="1300" b="1">
+                <a:solidFill>
+                  <a:srgbClr val="C5A880"/>
+                </a:solidFill>
+              </a:defRPr>
+            </a:pPr>
+            <a:r>
+              <a:t>⏱ Интерактивный статус-бар смены</a:t>
+            </a:r>
+          </a:p>
+          <a:p>
+            <a:pPr>
+              <a:spcBef>
+                <a:spcPts val="300"/>
+              </a:spcBef>
+              <a:defRPr sz="1100">
                 <a:solidFill>
                   <a:srgbClr val="F9F9FB"/>
                 </a:solidFill>
               </a:defRPr>
             </a:pPr>
             <a:r>
-              <a:t>Вместо архаичного селектора — современная шторка с поиском, бейджами городов, количеством столов и моментальным переключением филиалов.</a:t>
-            </a:r>
-          </a:p>
-          <a:p>
-            <a:pPr>
-              <a:spcBef>
-                <a:spcPts val="800"/>
-              </a:spcBef>
-              <a:defRPr sz="1250" b="1">
-                <a:solidFill>
-                  <a:srgbClr val="E5D5C0"/>
-                </a:solidFill>
-              </a:defRPr>
-            </a:pPr>
-            <a:r>
-              <a:t>☰ Боковое меню (Side Drawer)</a:t>
-            </a:r>
-          </a:p>
-          <a:p>
-            <a:pPr>
-              <a:spcBef>
-                <a:spcPts val="200"/>
-              </a:spcBef>
-              <a:defRPr sz="1050">
+              <a:t>В шапке терминала отображается пульсирующий статус с живым таймером (например, «● Смена 3ч 45м»). Данные сохраняются при перезагрузках.</a:t>
+            </a:r>
+          </a:p>
+          <a:p>
+            <a:pPr>
+              <a:spcBef>
+                <a:spcPts val="1000"/>
+              </a:spcBef>
+              <a:defRPr sz="1300" b="1">
+                <a:solidFill>
+                  <a:srgbClr val="C5A880"/>
+                </a:solidFill>
+              </a:defRPr>
+            </a:pPr>
+            <a:r>
+              <a:t>📊 Автоматический подсчет метрик смены</a:t>
+            </a:r>
+          </a:p>
+          <a:p>
+            <a:pPr>
+              <a:spcBef>
+                <a:spcPts val="300"/>
+              </a:spcBef>
+              <a:defRPr sz="1100">
                 <a:solidFill>
                   <a:srgbClr val="F9F9FB"/>
                 </a:solidFill>
               </a:defRPr>
             </a:pPr>
             <a:r>
-              <a:t>Все служебные функции аккуратно спрятаны под гамбургер-меню, освобождая экран терминала для главного — броней и карты зала.</a:t>
-            </a:r>
-          </a:p>
-          <a:p>
-            <a:pPr>
-              <a:spcBef>
-                <a:spcPts val="800"/>
-              </a:spcBef>
-              <a:defRPr sz="1250" b="1">
-                <a:solidFill>
-                  <a:srgbClr val="E5D5C0"/>
-                </a:solidFill>
-              </a:defRPr>
-            </a:pPr>
-            <a:r>
-              <a:t>🌐 Трехъязычный интерфейс (RU / KZ / EN)</a:t>
-            </a:r>
-          </a:p>
-          <a:p>
-            <a:pPr>
-              <a:spcBef>
-                <a:spcPts val="200"/>
-              </a:spcBef>
-              <a:defRPr sz="1050">
+              <a:t>Терминал в реальном времени считает:</a:t>
+            </a:r>
+            <a:br/>
+            <a:r>
+              <a:t>• Количество поступивших и обработанных заявок</a:t>
+            </a:r>
+            <a:br/>
+            <a:r>
+              <a:t>• Суммарное количество реально посаженных гостей</a:t>
+            </a:r>
+            <a:br/>
+            <a:r>
+              <a:t>• Количество отмен и отказов с причинами</a:t>
+            </a:r>
+          </a:p>
+          <a:p>
+            <a:pPr>
+              <a:spcBef>
+                <a:spcPts val="1000"/>
+              </a:spcBef>
+              <a:defRPr sz="1300" b="1">
+                <a:solidFill>
+                  <a:srgbClr val="C5A880"/>
+                </a:solidFill>
+              </a:defRPr>
+            </a:pPr>
+            <a:r>
+              <a:t>🏁 Закрытие смены по кнопке и Z-отчет</a:t>
+            </a:r>
+          </a:p>
+          <a:p>
+            <a:pPr>
+              <a:spcBef>
+                <a:spcPts val="300"/>
+              </a:spcBef>
+              <a:defRPr sz="1100">
                 <a:solidFill>
                   <a:srgbClr val="F9F9FB"/>
                 </a:solidFill>
               </a:defRPr>
             </a:pPr>
             <a:r>
-              <a:t>Крупные удобные кнопки переключения языка для сотрудников и гостей в любом регионе Казахстана.</a:t>
-            </a:r>
-          </a:p>
-          <a:p>
-            <a:pPr>
-              <a:spcBef>
-                <a:spcPts val="800"/>
-              </a:spcBef>
-              <a:defRPr sz="1250" b="1">
-                <a:solidFill>
-                  <a:srgbClr val="E5D5C0"/>
-                </a:solidFill>
-              </a:defRPr>
-            </a:pPr>
-            <a:r>
-              <a:t>🍽 Быстрый переход «Терминал ↔ Витрина гостя»</a:t>
-            </a:r>
-          </a:p>
-          <a:p>
-            <a:pPr>
-              <a:spcBef>
-                <a:spcPts val="200"/>
-              </a:spcBef>
-              <a:defRPr sz="1050">
+              <a:t>Хостес не может просто уйти — по окончании дня она нажимает «Завершить рабочую смену». Формируется итоговая сводка смены для передачи управляющему.</a:t>
+            </a:r>
+          </a:p>
+          <a:p>
+            <a:pPr>
+              <a:spcBef>
+                <a:spcPts val="1000"/>
+              </a:spcBef>
+              <a:defRPr sz="1300" b="1">
+                <a:solidFill>
+                  <a:srgbClr val="C5A880"/>
+                </a:solidFill>
+              </a:defRPr>
+            </a:pPr>
+            <a:r>
+              <a:t>👤 Персональная ответственность</a:t>
+            </a:r>
+          </a:p>
+          <a:p>
+            <a:pPr>
+              <a:spcBef>
+                <a:spcPts val="300"/>
+              </a:spcBef>
+              <a:defRPr sz="1100">
                 <a:solidFill>
                   <a:srgbClr val="F9F9FB"/>
                 </a:solidFill>
               </a:defRPr>
             </a:pPr>
             <a:r>
-              <a:t>Хостес может в любой момент открыть клиентскую витрину и увидеть свой ресторан глазами гостя.</a:t>
-            </a:r>
-          </a:p>
-          <a:p>
-            <a:pPr>
-              <a:spcBef>
-                <a:spcPts val="800"/>
-              </a:spcBef>
-              <a:defRPr sz="1250" b="1">
-                <a:solidFill>
-                  <a:srgbClr val="E5D5C0"/>
-                </a:solidFill>
-              </a:defRPr>
-            </a:pPr>
-            <a:r>
-              <a:t>⚡ Тактильный отклик и анимации</a:t>
-            </a:r>
-          </a:p>
-          <a:p>
-            <a:pPr>
-              <a:spcBef>
-                <a:spcPts val="200"/>
-              </a:spcBef>
-              <a:defRPr sz="1050">
-                <a:solidFill>
-                  <a:srgbClr val="F9F9FB"/>
-                </a:solidFill>
-              </a:defRPr>
-            </a:pPr>
-            <a:r>
-              <a:t>Плавная физика сжатия кнопок (Spring physics), адаптивность под Home Bar iPhone (Safe Area).</a:t>
+              <a:t>Каждая смена привязана к имени дежурного администратора, исключая перекладывание вины за потерянные брони.</a:t>
             </a:r>
           </a:p>
         </p:txBody>
@@ -12421,8 +13545,8 @@
         </p:nvSpPr>
         <p:spPr>
           <a:xfrm>
-            <a:off x="6912864" y="1609344"/>
-            <a:ext cx="2267712" cy="4736592"/>
+            <a:off x="7735824" y="1609344"/>
+            <a:ext cx="2313432" cy="4736592"/>
           </a:xfrm>
           <a:prstGeom prst="roundRect">
             <a:avLst/>
@@ -12460,7 +13584,7 @@
       </p:sp>
       <p:pic>
         <p:nvPicPr>
-          <p:cNvPr id="9" name="Picture 8" descr="admin_rest_picker.png"/>
+          <p:cNvPr id="9" name="Picture 8" descr="admin_shift_modal.png"/>
           <p:cNvPicPr>
             <a:picLocks noChangeAspect="1"/>
           </p:cNvPicPr>
@@ -12474,77 +13598,8 @@
         </p:blipFill>
         <p:spPr>
           <a:xfrm>
-            <a:off x="6949440" y="1645920"/>
-            <a:ext cx="2194560" cy="4663440"/>
-          </a:xfrm>
-          <a:prstGeom prst="rect">
-            <a:avLst/>
-          </a:prstGeom>
-        </p:spPr>
-      </p:pic>
-      <p:sp>
-        <p:nvSpPr>
-          <p:cNvPr id="10" name="Rounded Rectangle 9"/>
-          <p:cNvSpPr/>
-          <p:nvPr/>
-        </p:nvSpPr>
-        <p:spPr>
-          <a:xfrm>
-            <a:off x="9381744" y="1609344"/>
-            <a:ext cx="2267712" cy="4736592"/>
-          </a:xfrm>
-          <a:prstGeom prst="roundRect">
-            <a:avLst/>
-          </a:prstGeom>
-          <a:solidFill>
-            <a:srgbClr val="1A1E27"/>
-          </a:solidFill>
-          <a:ln w="19050">
-            <a:solidFill>
-              <a:srgbClr val="C5A880"/>
-            </a:solidFill>
-          </a:ln>
-        </p:spPr>
-        <p:style>
-          <a:lnRef idx="1">
-            <a:schemeClr val="accent1"/>
-          </a:lnRef>
-          <a:fillRef idx="3">
-            <a:schemeClr val="accent1"/>
-          </a:fillRef>
-          <a:effectRef idx="2">
-            <a:schemeClr val="accent1"/>
-          </a:effectRef>
-          <a:fontRef idx="minor">
-            <a:schemeClr val="lt1"/>
-          </a:fontRef>
-        </p:style>
-        <p:txBody>
-          <a:bodyPr rtlCol="0" anchor="ctr"/>
-          <a:lstStyle/>
-          <a:p>
-            <a:pPr algn="ctr"/>
-          </a:p>
-        </p:txBody>
-      </p:sp>
-      <p:pic>
-        <p:nvPicPr>
-          <p:cNvPr id="11" name="Picture 10" descr="admin_drawer_menu.png"/>
-          <p:cNvPicPr>
-            <a:picLocks noChangeAspect="1"/>
-          </p:cNvPicPr>
-          <p:nvPr/>
-        </p:nvPicPr>
-        <p:blipFill>
-          <a:blip r:embed="rId3"/>
-          <a:stretch>
-            <a:fillRect/>
-          </a:stretch>
-        </p:blipFill>
-        <p:spPr>
-          <a:xfrm>
-            <a:off x="9418320" y="1645920"/>
-            <a:ext cx="2194560" cy="4663440"/>
+            <a:off x="7772400" y="1645920"/>
+            <a:ext cx="2240280" cy="4663440"/>
           </a:xfrm>
           <a:prstGeom prst="rect">
             <a:avLst/>
